--- a/deliverables/final/GreenLoop_아이디어제안서.pptx
+++ b/deliverables/final/GreenLoop_아이디어제안서.pptx
@@ -2,25 +2,25 @@
 <file path=ppt/presentation.xml><?xml version="1.0" encoding="utf-8"?>
 <p:presentation xmlns:p="http://schemas.openxmlformats.org/presentationml/2006/main">
   <p:sldMasterIdLst>
-    <p:sldMasterId xmlns:r="http://schemas.openxmlformats.org/officeDocument/2006/relationships" id="2147483648" r:id="R4e9eef81216f4f8c"/>
+    <p:sldMasterId xmlns:r="http://schemas.openxmlformats.org/officeDocument/2006/relationships" id="2147483648" r:id="Rd32d663eabf74dcd"/>
   </p:sldMasterIdLst>
   <p:notesMasterIdLst>
-    <p:notesMasterId xmlns:r="http://schemas.openxmlformats.org/officeDocument/2006/relationships" r:id="R653fd9df201042ba"/>
+    <p:notesMasterId xmlns:r="http://schemas.openxmlformats.org/officeDocument/2006/relationships" r:id="R03a5e416b5d74973"/>
   </p:notesMasterIdLst>
   <p:sldIdLst>
-    <p:sldId xmlns:r="http://schemas.openxmlformats.org/officeDocument/2006/relationships" id="256" r:id="Reafecd5b70bd40ef"/>
-    <p:sldId xmlns:r="http://schemas.openxmlformats.org/officeDocument/2006/relationships" id="257" r:id="Rbbc2bb549d134970"/>
-    <p:sldId xmlns:r="http://schemas.openxmlformats.org/officeDocument/2006/relationships" id="258" r:id="Rb0b804d830674b00"/>
-    <p:sldId xmlns:r="http://schemas.openxmlformats.org/officeDocument/2006/relationships" id="259" r:id="R1643ce522ae6459a"/>
-    <p:sldId xmlns:r="http://schemas.openxmlformats.org/officeDocument/2006/relationships" id="260" r:id="R2924bcd6e3a64432"/>
-    <p:sldId xmlns:r="http://schemas.openxmlformats.org/officeDocument/2006/relationships" id="261" r:id="Rd0032c68bcad42fb"/>
-    <p:sldId xmlns:r="http://schemas.openxmlformats.org/officeDocument/2006/relationships" id="262" r:id="R715dc6b9bcf04ee0"/>
-    <p:sldId xmlns:r="http://schemas.openxmlformats.org/officeDocument/2006/relationships" id="263" r:id="R48d78f7fa7ed4c22"/>
-    <p:sldId xmlns:r="http://schemas.openxmlformats.org/officeDocument/2006/relationships" id="264" r:id="Rc80f8c5f17aa4ea4"/>
-    <p:sldId xmlns:r="http://schemas.openxmlformats.org/officeDocument/2006/relationships" id="265" r:id="R389f88b90d7441c6"/>
-    <p:sldId xmlns:r="http://schemas.openxmlformats.org/officeDocument/2006/relationships" id="266" r:id="R50d15fe8104e4367"/>
-    <p:sldId xmlns:r="http://schemas.openxmlformats.org/officeDocument/2006/relationships" id="267" r:id="Rc07ca3d20bd24196"/>
-    <p:sldId xmlns:r="http://schemas.openxmlformats.org/officeDocument/2006/relationships" id="268" r:id="Ra15c759311ee4d6c"/>
+    <p:sldId xmlns:r="http://schemas.openxmlformats.org/officeDocument/2006/relationships" id="256" r:id="R6c2a12478c20434c"/>
+    <p:sldId xmlns:r="http://schemas.openxmlformats.org/officeDocument/2006/relationships" id="257" r:id="Re408d02696da4a30"/>
+    <p:sldId xmlns:r="http://schemas.openxmlformats.org/officeDocument/2006/relationships" id="258" r:id="Rcd76a634668a41e4"/>
+    <p:sldId xmlns:r="http://schemas.openxmlformats.org/officeDocument/2006/relationships" id="259" r:id="R423cb06a853f466a"/>
+    <p:sldId xmlns:r="http://schemas.openxmlformats.org/officeDocument/2006/relationships" id="260" r:id="Rc8318ad5a45d474d"/>
+    <p:sldId xmlns:r="http://schemas.openxmlformats.org/officeDocument/2006/relationships" id="261" r:id="Reb9bd4fb805b4486"/>
+    <p:sldId xmlns:r="http://schemas.openxmlformats.org/officeDocument/2006/relationships" id="262" r:id="R9daefedf93174bdb"/>
+    <p:sldId xmlns:r="http://schemas.openxmlformats.org/officeDocument/2006/relationships" id="263" r:id="Rc17ac66fcc084925"/>
+    <p:sldId xmlns:r="http://schemas.openxmlformats.org/officeDocument/2006/relationships" id="264" r:id="Ra9ac42c64a5a43ab"/>
+    <p:sldId xmlns:r="http://schemas.openxmlformats.org/officeDocument/2006/relationships" id="265" r:id="Rdcc88287e8854704"/>
+    <p:sldId xmlns:r="http://schemas.openxmlformats.org/officeDocument/2006/relationships" id="266" r:id="R1f3aa1e4588a46b7"/>
+    <p:sldId xmlns:r="http://schemas.openxmlformats.org/officeDocument/2006/relationships" id="267" r:id="Rf6062a4b46a44d10"/>
+    <p:sldId xmlns:r="http://schemas.openxmlformats.org/officeDocument/2006/relationships" id="268" r:id="R2c011a2391ca4a7e"/>
   </p:sldIdLst>
   <p:sldSz cx="12192000" cy="6858000"/>
   <p:notesSz cx="6858000" cy="9144000"/>
@@ -454,7 +454,7 @@
           <a:lstStyle xmlns:a="http://schemas.openxmlformats.org/drawingml/2006/main"/>
           <a:p xmlns:a="http://schemas.openxmlformats.org/drawingml/2006/main">
             <a:r>
-              <a:t>아이디어 제안 단계. 제품·회귀 모델·LLM 문진은 본선 진출 확인 후 구현 계획. 에너지 절감 실측값·예측 절감률은 제시하지 않는다.</a:t>
+              <a:t>아이디어 제안. 건물 에너지 비교와 이용자 불편을 연결해 사전 조사 준비를 돕는 서비스 설계.</a:t>
             </a:r>
           </a:p>
         </p:txBody>
@@ -590,7 +590,7 @@
           <a:lstStyle xmlns:a="http://schemas.openxmlformats.org/drawingml/2006/main"/>
           <a:p xmlns:a="http://schemas.openxmlformats.org/drawingml/2006/main">
             <a:r>
-              <a:t>4인 팀의 구체 개발 숙련도·가용시간은 미확인. 담당자명은 블라인드 준수를 위해 제외. 본선 진출 확인 전 제품 구현하지 않는다.</a:t>
+              <a:t>심사자료 블라인드 기준에 따라 개인 이름을 제외했다. 각 기술 책임의 배정은 신청서와 팀 현황 기록에 반영한다.</a:t>
             </a:r>
           </a:p>
         </p:txBody>
@@ -668,11 +668,6 @@
               <a:t>https://cbe.berkeley.edu/research/occupant-survey-and-building-benchmarking/</a:t>
             </a:r>
           </a:p>
-          <a:p xmlns:a="http://schemas.openxmlformats.org/drawingml/2006/main">
-            <a:r>
-              <a:t>기존 서비스와의 차이는 제안 가설. 신규 알고리즘 발명 또는 유일한 서비스라는 주장 없음.</a:t>
-            </a:r>
-          </a:p>
         </p:txBody>
       </p:sp>
       <p:sp>
@@ -755,12 +750,7 @@
           </a:p>
           <a:p xmlns:a="http://schemas.openxmlformats.org/drawingml/2006/main">
             <a:r>
-              <a:t>https://www.data.go.kr/data/15135963/openapi.do</a:t>
-            </a:r>
-          </a:p>
-          <a:p xmlns:a="http://schemas.openxmlformats.org/drawingml/2006/main">
-            <a:r>
-              <a:t>OpenAI Codex로 문안·네이티브 화면 도형·제출 자료 작성. PPTX는 @oai/artifact-tool, PDF는 PowerPoint·Hancom 공식 문서 렌더링 사용. 제품 모델 성능·사용자 효용은 본선 검증 계획.</a:t>
+              <a:t>데이터를 분석 수치로 가공하지 않고 출처·필드·건수와 활용 설계를 명시했다. 생성형 AI 도구와 활용 범위를 공개했다.</a:t>
             </a:r>
           </a:p>
         </p:txBody>
@@ -838,11 +828,6 @@
               <a:t>https://cbe.berkeley.edu/research/occupant-survey-and-building-benchmarking/</a:t>
             </a:r>
           </a:p>
-          <a:p xmlns:a="http://schemas.openxmlformats.org/drawingml/2006/main">
-            <a:r>
-              <a:t>아래 업무 문제는 제안 가설이며 국내 시설 담당자 인터뷰로 검증하지 않았다.</a:t>
-            </a:r>
-          </a:p>
         </p:txBody>
       </p:sp>
       <p:sp>
@@ -908,7 +893,11 @@
         <p:txBody>
           <a:bodyPr xmlns:a="http://schemas.openxmlformats.org/drawingml/2006/main"/>
           <a:lstStyle xmlns:a="http://schemas.openxmlformats.org/drawingml/2006/main"/>
-          <a:p xmlns:a="http://schemas.openxmlformats.org/drawingml/2006/main"/>
+          <a:p xmlns:a="http://schemas.openxmlformats.org/drawingml/2006/main">
+            <a:r>
+              <a:t>OpenAI 이미지 생성으로 제작한 서비스 흐름도. 서비스 설계: 건물 선택, 에너지 비교, AI 불편 문진, 개선 후보 비교, 조사 요청서.</a:t>
+            </a:r>
+          </a:p>
         </p:txBody>
       </p:sp>
       <p:sp>
@@ -981,12 +970,7 @@
           </a:p>
           <a:p xmlns:a="http://schemas.openxmlformats.org/drawingml/2006/main">
             <a:r>
-              <a:t>CSV SHA-256: 1a049b33df564410508ebbf1164d401d660eae75fcaa8f2de3c27367ac9c883a</a:t>
-            </a:r>
-          </a:p>
-          <a:p xmlns:a="http://schemas.openxmlformats.org/drawingml/2006/main">
-            <a:r>
-              <a:t>전체 4347행 15열. 보고누락0, 양의 원단위, 유효면적·연도 기본조건 3681행. 모델 학습용 최종 표본 아님.</a:t>
+              <a:t>2026.9.30 원본 CSV 확보. 4347행, 15열. 3개년 평균 에너지 원단위 자료.</a:t>
             </a:r>
           </a:p>
         </p:txBody>
@@ -1120,11 +1104,7 @@
         <p:txBody>
           <a:bodyPr xmlns:a="http://schemas.openxmlformats.org/drawingml/2006/main"/>
           <a:lstStyle xmlns:a="http://schemas.openxmlformats.org/drawingml/2006/main"/>
-          <a:p xmlns:a="http://schemas.openxmlformats.org/drawingml/2006/main">
-            <a:r>
-              <a:t>표형 모델은 실제 데이터가 확보된 계획, 학습 성능 미측정. LLM API 키·비용·로컬 하드웨어 미확인으로 조건부 확장. 고정 입력폼은 LLM 실행 결과로 표시하지 않는다.</a:t>
-            </a:r>
-          </a:p>
+          <a:p xmlns:a="http://schemas.openxmlformats.org/drawingml/2006/main"/>
         </p:txBody>
       </p:sp>
       <p:sp>
@@ -1192,7 +1172,7 @@
           <a:lstStyle xmlns:a="http://schemas.openxmlformats.org/drawingml/2006/main"/>
           <a:p xmlns:a="http://schemas.openxmlformats.org/drawingml/2006/main">
             <a:r>
-              <a:t>예선용 네이티브 도형 와이어프레임. 특정 시설 이용자의 실응답이나 실제 LLM 출력이 아니다. 방별 에너지를 계산하지 않는다.</a:t>
+              <a:t>OpenAI 이미지 생성으로 제작한 가상 공공도서관 서비스 화면 구성안. 설계를 설명하는 예시이며 실존 도서관 관측값을 사용하지 않았다.</a:t>
             </a:r>
           </a:p>
         </p:txBody>
@@ -1392,7 +1372,7 @@
   </p:cSld>
   <p:clrMap bg1="lt1" tx1="dk1" bg2="lt2" tx2="dk2" accent1="accent1" accent2="accent2" accent3="accent3" accent4="accent4" accent5="accent5" accent6="accent6" hlink="hlink" folHlink="folHlink"/>
   <p:sldLayoutIdLst>
-    <p:sldLayoutId xmlns:r="http://schemas.openxmlformats.org/officeDocument/2006/relationships" id="2147483649" r:id="Red5892dfd1b24153"/>
+    <p:sldLayoutId xmlns:r="http://schemas.openxmlformats.org/officeDocument/2006/relationships" id="2147483649" r:id="R44a48b0cda094c74"/>
   </p:sldLayoutIdLst>
   <p:txStyles>
     <p:titleStyle>
@@ -1943,7 +1923,7 @@
           <p:cNvPr id="6" name="">
             <a:extLst xmlns:a="http://schemas.openxmlformats.org/drawingml/2006/main">
               <a:ext uri="{FF2B5EF4-FFF2-40B4-BE49-F238E27FC236}">
-                <a16:creationId xmlns:a16="http://schemas.microsoft.com/office/drawing/2014/main" id="{B3E0C199-F289-426E-A873-5C6E12353FD9}"/>
+                <a16:creationId xmlns:a16="http://schemas.microsoft.com/office/drawing/2014/main" id="{DD8F9A89-A8D9-4C3C-9995-55FF820CA627}"/>
               </a:ext>
             </a:extLst>
           </p:cNvPr>
@@ -1973,7 +1953,7 @@
           <p:cNvPr id="2" name="">
             <a:extLst xmlns:a="http://schemas.openxmlformats.org/drawingml/2006/main">
               <a:ext uri="{FF2B5EF4-FFF2-40B4-BE49-F238E27FC236}">
-                <a16:creationId xmlns:a16="http://schemas.microsoft.com/office/drawing/2014/main" id="{C5236D48-DA3D-4E00-B2BF-3D8D1173DDA5}"/>
+                <a16:creationId xmlns:a16="http://schemas.microsoft.com/office/drawing/2014/main" id="{2E2E2329-279C-4FEB-B408-FA74B3B2ED5E}"/>
               </a:ext>
             </a:extLst>
           </p:cNvPr>
@@ -2030,7 +2010,7 @@
           <p:cNvPr id="3" name="">
             <a:extLst xmlns:a="http://schemas.openxmlformats.org/drawingml/2006/main">
               <a:ext uri="{FF2B5EF4-FFF2-40B4-BE49-F238E27FC236}">
-                <a16:creationId xmlns:a16="http://schemas.microsoft.com/office/drawing/2014/main" id="{CD600E88-BA04-4D78-9DD7-CC8498D98F08}"/>
+                <a16:creationId xmlns:a16="http://schemas.microsoft.com/office/drawing/2014/main" id="{E110DD87-360A-4D73-9B70-213545CCEEE2}"/>
               </a:ext>
             </a:extLst>
           </p:cNvPr>
@@ -2110,7 +2090,7 @@
           <p:cNvPr id="4" name="">
             <a:extLst xmlns:a="http://schemas.openxmlformats.org/drawingml/2006/main">
               <a:ext uri="{FF2B5EF4-FFF2-40B4-BE49-F238E27FC236}">
-                <a16:creationId xmlns:a16="http://schemas.microsoft.com/office/drawing/2014/main" id="{A8F67572-7045-4CE9-A0F8-B4CA516B08B3}"/>
+                <a16:creationId xmlns:a16="http://schemas.microsoft.com/office/drawing/2014/main" id="{37684A1A-66E8-4F3D-88DF-4AAA52DF8B95}"/>
               </a:ext>
             </a:extLst>
           </p:cNvPr>
@@ -2167,7 +2147,7 @@
           <p:cNvPr id="5" name="">
             <a:extLst xmlns:a="http://schemas.openxmlformats.org/drawingml/2006/main">
               <a:ext uri="{FF2B5EF4-FFF2-40B4-BE49-F238E27FC236}">
-                <a16:creationId xmlns:a16="http://schemas.microsoft.com/office/drawing/2014/main" id="{49AAF6DA-B7F6-4FDF-9ABE-B8255D201F87}"/>
+                <a16:creationId xmlns:a16="http://schemas.microsoft.com/office/drawing/2014/main" id="{D0079A8D-1A39-4C99-82E5-74AA41F9DF56}"/>
               </a:ext>
             </a:extLst>
           </p:cNvPr>
@@ -2222,7 +2202,7 @@
     </p:spTree>
     <p:extLst>
       <p:ext uri="{BB962C8B-B14F-4D97-AF65-F5344CB8AC3E}">
-        <p14:creationId xmlns:p14="http://schemas.microsoft.com/office/powerpoint/2010/main" val="1018461677"/>
+        <p14:creationId xmlns:p14="http://schemas.microsoft.com/office/powerpoint/2010/main" val="1933099357"/>
       </p:ext>
     </p:extLst>
   </p:cSld>
@@ -2253,7 +2233,7 @@
           <p:cNvPr id="15" name="">
             <a:extLst xmlns:a="http://schemas.openxmlformats.org/drawingml/2006/main">
               <a:ext uri="{FF2B5EF4-FFF2-40B4-BE49-F238E27FC236}">
-                <a16:creationId xmlns:a16="http://schemas.microsoft.com/office/drawing/2014/main" id="{D9255E12-460E-4317-A5B7-FE75B4F2B696}"/>
+                <a16:creationId xmlns:a16="http://schemas.microsoft.com/office/drawing/2014/main" id="{D44EF894-2DFC-4980-B88A-72EBAB0C9E12}"/>
               </a:ext>
             </a:extLst>
           </p:cNvPr>
@@ -2283,7 +2263,7 @@
           <p:cNvPr id="2" name="">
             <a:extLst xmlns:a="http://schemas.openxmlformats.org/drawingml/2006/main">
               <a:ext uri="{FF2B5EF4-FFF2-40B4-BE49-F238E27FC236}">
-                <a16:creationId xmlns:a16="http://schemas.microsoft.com/office/drawing/2014/main" id="{BB3288DA-7D8B-420E-987C-CDFD6A29255A}"/>
+                <a16:creationId xmlns:a16="http://schemas.microsoft.com/office/drawing/2014/main" id="{3A08D663-8A81-4197-ABF5-005605D0F728}"/>
               </a:ext>
             </a:extLst>
           </p:cNvPr>
@@ -2330,7 +2310,7 @@
                 <a:ea typeface="Malgun Gothic"/>
                 <a:cs typeface="Malgun Gothic"/>
               </a:rPr>
-              <a:t>본선에서 성능과 조사 준비의 가치를 따로 검증한다</a:t>
+              <a:t>자료·응답·결과물을 연결하는 품질 관리 설계</a:t>
             </a:r>
           </a:p>
         </p:txBody>
@@ -2340,7 +2320,7 @@
           <p:cNvPr id="3" name="">
             <a:extLst xmlns:a="http://schemas.openxmlformats.org/drawingml/2006/main">
               <a:ext uri="{FF2B5EF4-FFF2-40B4-BE49-F238E27FC236}">
-                <a16:creationId xmlns:a16="http://schemas.microsoft.com/office/drawing/2014/main" id="{E8274590-3964-44E1-844E-6847E07B77C1}"/>
+                <a16:creationId xmlns:a16="http://schemas.microsoft.com/office/drawing/2014/main" id="{56DFB7BB-44FC-42F9-8C52-EA5CA38F81E6}"/>
               </a:ext>
             </a:extLst>
           </p:cNvPr>
@@ -2370,7 +2350,7 @@
           <p:cNvPr id="4" name="">
             <a:extLst xmlns:a="http://schemas.openxmlformats.org/drawingml/2006/main">
               <a:ext uri="{FF2B5EF4-FFF2-40B4-BE49-F238E27FC236}">
-                <a16:creationId xmlns:a16="http://schemas.microsoft.com/office/drawing/2014/main" id="{B9191D0A-08A7-47EB-8BC2-BAC09F31B375}"/>
+                <a16:creationId xmlns:a16="http://schemas.microsoft.com/office/drawing/2014/main" id="{0240264E-3CC7-4FD5-94BD-88969F38D782}"/>
               </a:ext>
             </a:extLst>
           </p:cNvPr>
@@ -2427,7 +2407,7 @@
           <p:cNvPr id="5" name="">
             <a:extLst xmlns:a="http://schemas.openxmlformats.org/drawingml/2006/main">
               <a:ext uri="{FF2B5EF4-FFF2-40B4-BE49-F238E27FC236}">
-                <a16:creationId xmlns:a16="http://schemas.microsoft.com/office/drawing/2014/main" id="{83DF7126-C160-4229-B0D5-8D247F6E1916}"/>
+                <a16:creationId xmlns:a16="http://schemas.microsoft.com/office/drawing/2014/main" id="{93013E6A-5521-4E1D-9E6C-B754B1C95426}"/>
               </a:ext>
             </a:extLst>
           </p:cNvPr>
@@ -2484,7 +2464,7 @@
           <p:cNvPr id="6" name="">
             <a:extLst xmlns:a="http://schemas.openxmlformats.org/drawingml/2006/main">
               <a:ext uri="{FF2B5EF4-FFF2-40B4-BE49-F238E27FC236}">
-                <a16:creationId xmlns:a16="http://schemas.microsoft.com/office/drawing/2014/main" id="{797D9F31-76B9-45CA-BF7F-D8FCC4356906}"/>
+                <a16:creationId xmlns:a16="http://schemas.microsoft.com/office/drawing/2014/main" id="{DA14B5EA-AA42-4A3B-A468-02EC8A11F4B9}"/>
               </a:ext>
             </a:extLst>
           </p:cNvPr>
@@ -2531,7 +2511,7 @@
                 <a:ea typeface="Malgun Gothic"/>
                 <a:cs typeface="Malgun Gothic"/>
               </a:rPr>
-              <a:t>01 · 에너지 비교</a:t>
+              <a:t>데이터와 분석</a:t>
             </a:r>
           </a:p>
         </p:txBody>
@@ -2541,7 +2521,7 @@
           <p:cNvPr id="7" name="">
             <a:extLst xmlns:a="http://schemas.openxmlformats.org/drawingml/2006/main">
               <a:ext uri="{FF2B5EF4-FFF2-40B4-BE49-F238E27FC236}">
-                <a16:creationId xmlns:a16="http://schemas.microsoft.com/office/drawing/2014/main" id="{0913128D-FB48-4A63-AE4F-514BA5556389}"/>
+                <a16:creationId xmlns:a16="http://schemas.microsoft.com/office/drawing/2014/main" id="{231DDC06-D9A1-4A81-93C7-62BD068AB225}"/>
               </a:ext>
             </a:extLst>
           </p:cNvPr>
@@ -2588,7 +2568,7 @@
                 <a:ea typeface="Malgun Gothic"/>
                 <a:cs typeface="Malgun Gothic"/>
               </a:rPr>
-              <a:t>동일 주소·기관을 묶어 학습/평가 분리.</a:t>
+              <a:t>CSV 필드·단위·보고 누락 검사</a:t>
             </a:r>
           </a:p>
           <a:p xmlns:a="http://schemas.openxmlformats.org/drawingml/2006/main">
@@ -2611,7 +2591,7 @@
                 <a:ea typeface="Malgun Gothic"/>
                 <a:cs typeface="Malgun Gothic"/>
               </a:rPr>
-              <a:t>중앙값 기준선 대비 MAE·구간 커버리지.</a:t>
+              <a:t>건물 그룹을 분리한 회귀 평가</a:t>
             </a:r>
           </a:p>
           <a:p xmlns:a="http://schemas.openxmlformats.org/drawingml/2006/main">
@@ -2634,7 +2614,7 @@
                 <a:ea typeface="Malgun Gothic"/>
                 <a:cs typeface="Malgun Gothic"/>
               </a:rPr>
-              <a:t>주소·기관명·공개 중간값은 학습에서 제외.</a:t>
+              <a:t>비교군 집계와 모델 결과 대조</a:t>
             </a:r>
           </a:p>
         </p:txBody>
@@ -2644,7 +2624,7 @@
           <p:cNvPr id="8" name="">
             <a:extLst xmlns:a="http://schemas.openxmlformats.org/drawingml/2006/main">
               <a:ext uri="{FF2B5EF4-FFF2-40B4-BE49-F238E27FC236}">
-                <a16:creationId xmlns:a16="http://schemas.microsoft.com/office/drawing/2014/main" id="{1DD992B4-DBC5-409B-B306-930D0A822DBF}"/>
+                <a16:creationId xmlns:a16="http://schemas.microsoft.com/office/drawing/2014/main" id="{D791B9CF-D495-472F-9CF3-7D459EE27C66}"/>
               </a:ext>
             </a:extLst>
           </p:cNvPr>
@@ -2691,7 +2671,7 @@
                 <a:ea typeface="Malgun Gothic"/>
                 <a:cs typeface="Malgun Gothic"/>
               </a:rPr>
-              <a:t>02 · 문진과 근거</a:t>
+              <a:t>문진과 근거</a:t>
             </a:r>
           </a:p>
         </p:txBody>
@@ -2701,7 +2681,7 @@
           <p:cNvPr id="9" name="">
             <a:extLst xmlns:a="http://schemas.openxmlformats.org/drawingml/2006/main">
               <a:ext uri="{FF2B5EF4-FFF2-40B4-BE49-F238E27FC236}">
-                <a16:creationId xmlns:a16="http://schemas.microsoft.com/office/drawing/2014/main" id="{C5240A8E-A19C-4F1A-AC98-8B786AE06CB4}"/>
+                <a16:creationId xmlns:a16="http://schemas.microsoft.com/office/drawing/2014/main" id="{253D4954-DF5D-407B-A310-1DC1823F6807}"/>
               </a:ext>
             </a:extLst>
           </p:cNvPr>
@@ -2748,7 +2728,7 @@
                 <a:ea typeface="Malgun Gothic"/>
                 <a:cs typeface="Malgun Gothic"/>
               </a:rPr>
-              <a:t>동의받은 응답 또는 가상 평가 사례 사용.</a:t>
+              <a:t>장소·시간·증상 필드 구조화</a:t>
             </a:r>
           </a:p>
           <a:p xmlns:a="http://schemas.openxmlformats.org/drawingml/2006/main">
@@ -2771,7 +2751,7 @@
                 <a:ea typeface="Malgun Gothic"/>
                 <a:cs typeface="Malgun Gothic"/>
               </a:rPr>
-              <a:t>필드 추출·누락 질문·모순 처리 검토.</a:t>
+              <a:t>정리된 응답의 사용자 확인·수정</a:t>
             </a:r>
           </a:p>
           <a:p xmlns:a="http://schemas.openxmlformats.org/drawingml/2006/main">
@@ -2794,7 +2774,7 @@
                 <a:ea typeface="Malgun Gothic"/>
                 <a:cs typeface="Malgun Gothic"/>
               </a:rPr>
-              <a:t>생성 문장의 원문 근거와 사용자 확인 검사.</a:t>
+              <a:t>후보 설명과 원문 응답 연결</a:t>
             </a:r>
           </a:p>
         </p:txBody>
@@ -2804,7 +2784,7 @@
           <p:cNvPr id="10" name="">
             <a:extLst xmlns:a="http://schemas.openxmlformats.org/drawingml/2006/main">
               <a:ext uri="{FF2B5EF4-FFF2-40B4-BE49-F238E27FC236}">
-                <a16:creationId xmlns:a16="http://schemas.microsoft.com/office/drawing/2014/main" id="{FB5EC388-7D76-48DC-A8C1-1D38D94D7115}"/>
+                <a16:creationId xmlns:a16="http://schemas.microsoft.com/office/drawing/2014/main" id="{B6A85C42-2DD8-4BA3-AB25-4EAF52DF8299}"/>
               </a:ext>
             </a:extLst>
           </p:cNvPr>
@@ -2851,7 +2831,7 @@
                 <a:ea typeface="Malgun Gothic"/>
                 <a:cs typeface="Malgun Gothic"/>
               </a:rPr>
-              <a:t>03 · 실패 경로</a:t>
+              <a:t>처리 흐름</a:t>
             </a:r>
           </a:p>
         </p:txBody>
@@ -2861,7 +2841,7 @@
           <p:cNvPr id="11" name="">
             <a:extLst xmlns:a="http://schemas.openxmlformats.org/drawingml/2006/main">
               <a:ext uri="{FF2B5EF4-FFF2-40B4-BE49-F238E27FC236}">
-                <a16:creationId xmlns:a16="http://schemas.microsoft.com/office/drawing/2014/main" id="{2ACD26AC-8A60-4939-B824-51C08051C9B2}"/>
+                <a16:creationId xmlns:a16="http://schemas.microsoft.com/office/drawing/2014/main" id="{67660925-9554-48F1-9911-4F28F820938D}"/>
               </a:ext>
             </a:extLst>
           </p:cNvPr>
@@ -2908,7 +2888,7 @@
                 <a:ea typeface="Malgun Gothic"/>
                 <a:cs typeface="Malgun Gothic"/>
               </a:rPr>
-              <a:t>미보고·0값·비교군 부족은 판단 보류.</a:t>
+              <a:t>필수 항목 검사와 중복 입력 관리</a:t>
             </a:r>
           </a:p>
           <a:p xmlns:a="http://schemas.openxmlformats.org/drawingml/2006/main">
@@ -2931,7 +2911,7 @@
                 <a:ea typeface="Malgun Gothic"/>
                 <a:cs typeface="Malgun Gothic"/>
               </a:rPr>
-              <a:t>LLM 장애는 구조화 입력폼으로 전환.</a:t>
+              <a:t>자유문·구조화 입력을 함께 지원</a:t>
             </a:r>
           </a:p>
           <a:p xmlns:a="http://schemas.openxmlformats.org/drawingml/2006/main">
@@ -2954,7 +2934,7 @@
                 <a:ea typeface="Malgun Gothic"/>
                 <a:cs typeface="Malgun Gothic"/>
               </a:rPr>
-              <a:t>근거 없는 절감률·원인 단정은 차단.</a:t>
+              <a:t>건물별 기록의 저장·수정 이력 관리</a:t>
             </a:r>
           </a:p>
         </p:txBody>
@@ -2964,7 +2944,7 @@
           <p:cNvPr id="12" name="">
             <a:extLst xmlns:a="http://schemas.openxmlformats.org/drawingml/2006/main">
               <a:ext uri="{FF2B5EF4-FFF2-40B4-BE49-F238E27FC236}">
-                <a16:creationId xmlns:a16="http://schemas.microsoft.com/office/drawing/2014/main" id="{8934232F-94B7-436D-861C-FDA95F47A6B7}"/>
+                <a16:creationId xmlns:a16="http://schemas.microsoft.com/office/drawing/2014/main" id="{C0453B0C-0ED2-4F8A-8429-29E2B3ADF66E}"/>
               </a:ext>
             </a:extLst>
           </p:cNvPr>
@@ -3011,7 +2991,7 @@
                 <a:ea typeface="Malgun Gothic"/>
                 <a:cs typeface="Malgun Gothic"/>
               </a:rPr>
-              <a:t>04 · 실제 활용</a:t>
+              <a:t>조사 요청서</a:t>
             </a:r>
           </a:p>
         </p:txBody>
@@ -3021,7 +3001,7 @@
           <p:cNvPr id="13" name="">
             <a:extLst xmlns:a="http://schemas.openxmlformats.org/drawingml/2006/main">
               <a:ext uri="{FF2B5EF4-FFF2-40B4-BE49-F238E27FC236}">
-                <a16:creationId xmlns:a16="http://schemas.microsoft.com/office/drawing/2014/main" id="{65793693-031C-432B-8FD2-4D5EA110D240}"/>
+                <a16:creationId xmlns:a16="http://schemas.microsoft.com/office/drawing/2014/main" id="{E8F975AC-E63A-4642-BDC2-00EFFAAF8DC5}"/>
               </a:ext>
             </a:extLst>
           </p:cNvPr>
@@ -3068,7 +3048,7 @@
                 <a:ea typeface="Malgun Gothic"/>
                 <a:cs typeface="Malgun Gothic"/>
               </a:rPr>
-              <a:t>시설 담당자가 요청서 완성 과정을 검토.</a:t>
+              <a:t>건물·비교·문진·후보의 연결 확인</a:t>
             </a:r>
           </a:p>
           <a:p xmlns:a="http://schemas.openxmlformats.org/drawingml/2006/main">
@@ -3091,7 +3071,7 @@
                 <a:ea typeface="Malgun Gothic"/>
                 <a:cs typeface="Malgun Gothic"/>
               </a:rPr>
-              <a:t>고정 설문·범용 LLM과 누락·소요시간 비교.</a:t>
+              <a:t>누락된 정보는 필요한 자료로 표시</a:t>
             </a:r>
           </a:p>
           <a:p xmlns:a="http://schemas.openxmlformats.org/drawingml/2006/main">
@@ -3114,7 +3094,7 @@
                 <a:ea typeface="Malgun Gothic"/>
                 <a:cs typeface="Malgun Gothic"/>
               </a:rPr>
-              <a:t>아직 사용자 실험·현장 효과 측정은 미실시.</a:t>
+              <a:t>화면 내용과 PDF 결과물 일치 검사</a:t>
             </a:r>
           </a:p>
         </p:txBody>
@@ -3124,7 +3104,7 @@
           <p:cNvPr id="14" name="">
             <a:extLst xmlns:a="http://schemas.openxmlformats.org/drawingml/2006/main">
               <a:ext uri="{FF2B5EF4-FFF2-40B4-BE49-F238E27FC236}">
-                <a16:creationId xmlns:a16="http://schemas.microsoft.com/office/drawing/2014/main" id="{71CAD3D9-A3E7-4129-9D0A-99D5C6341DA2}"/>
+                <a16:creationId xmlns:a16="http://schemas.microsoft.com/office/drawing/2014/main" id="{35EBE3D0-5B85-4DCA-ADA4-C4668CB7B0ED}"/>
               </a:ext>
             </a:extLst>
           </p:cNvPr>
@@ -3136,42 +3116,42 @@
         <p:spPr>
           <a:xfrm xmlns:a="http://schemas.openxmlformats.org/drawingml/2006/main">
             <a:off x="742950" y="5476875"/>
-            <a:ext cx="10477500" cy="400050"/>
-          </a:xfrm>
-          <a:prstGeom xmlns:a="http://schemas.openxmlformats.org/drawingml/2006/main" prst="rect">
-            <a:avLst/>
-          </a:prstGeom>
-          <a:noFill xmlns:a="http://schemas.openxmlformats.org/drawingml/2006/main"/>
-          <a:ln xmlns:a="http://schemas.openxmlformats.org/drawingml/2006/main" w="0">
-            <a:noFill/>
-          </a:ln>
-        </p:spPr>
-        <p:txBody>
-          <a:bodyPr xmlns:a="http://schemas.openxmlformats.org/drawingml/2006/main">
-            <a:noAutofit/>
-          </a:bodyPr>
-          <a:lstStyle xmlns:a="http://schemas.openxmlformats.org/drawingml/2006/main"/>
-          <a:p xmlns:a="http://schemas.openxmlformats.org/drawingml/2006/main">
-            <a:pPr>
-              <a:defRPr sz="1425" b="1">
-                <a:solidFill>
-                  <a:srgbClr val="9A4C25"/>
-                </a:solidFill>
-                <a:latin typeface="Malgun Gothic"/>
-                <a:ea typeface="Malgun Gothic"/>
-                <a:cs typeface="Malgun Gothic"/>
-              </a:defRPr>
-            </a:pPr>
-            <a:r>
-              <a:rPr sz="1425" b="1">
-                <a:solidFill>
-                  <a:srgbClr val="9A4C25"/>
-                </a:solidFill>
-                <a:latin typeface="Malgun Gothic"/>
-                <a:ea typeface="Malgun Gothic"/>
-                <a:cs typeface="Malgun Gothic"/>
-              </a:rPr>
-              <a:t>목표: 조사 준비의 누락을 줄인다. 리모델링 절감률·현장 원인 적중률을 이 자료로 입증하지 않는다.</a:t>
+            <a:ext cx="10477500" cy="419100"/>
+          </a:xfrm>
+          <a:prstGeom xmlns:a="http://schemas.openxmlformats.org/drawingml/2006/main" prst="rect">
+            <a:avLst/>
+          </a:prstGeom>
+          <a:noFill xmlns:a="http://schemas.openxmlformats.org/drawingml/2006/main"/>
+          <a:ln xmlns:a="http://schemas.openxmlformats.org/drawingml/2006/main" w="0">
+            <a:noFill/>
+          </a:ln>
+        </p:spPr>
+        <p:txBody>
+          <a:bodyPr xmlns:a="http://schemas.openxmlformats.org/drawingml/2006/main">
+            <a:noAutofit/>
+          </a:bodyPr>
+          <a:lstStyle xmlns:a="http://schemas.openxmlformats.org/drawingml/2006/main"/>
+          <a:p xmlns:a="http://schemas.openxmlformats.org/drawingml/2006/main">
+            <a:pPr>
+              <a:defRPr sz="1650" b="1">
+                <a:solidFill>
+                  <a:srgbClr val="127452"/>
+                </a:solidFill>
+                <a:latin typeface="Malgun Gothic"/>
+                <a:ea typeface="Malgun Gothic"/>
+                <a:cs typeface="Malgun Gothic"/>
+              </a:defRPr>
+            </a:pPr>
+            <a:r>
+              <a:rPr sz="1650" b="1">
+                <a:solidFill>
+                  <a:srgbClr val="127452"/>
+                </a:solidFill>
+                <a:latin typeface="Malgun Gothic"/>
+                <a:ea typeface="Malgun Gothic"/>
+                <a:cs typeface="Malgun Gothic"/>
+              </a:rPr>
+              <a:t>분석 결과를 원인 판정이나 절감 수치로 바꾸는 대신, 근거와 조사 항목으로 연결한다.</a:t>
             </a:r>
           </a:p>
         </p:txBody>
@@ -3179,7 +3159,7 @@
     </p:spTree>
     <p:extLst>
       <p:ext uri="{BB962C8B-B14F-4D97-AF65-F5344CB8AC3E}">
-        <p14:creationId xmlns:p14="http://schemas.microsoft.com/office/powerpoint/2010/main" val="1919114079"/>
+        <p14:creationId xmlns:p14="http://schemas.microsoft.com/office/powerpoint/2010/main" val="2077766827"/>
       </p:ext>
     </p:extLst>
   </p:cSld>
@@ -3207,10 +3187,10 @@
       </p:grpSpPr>
       <p:sp>
         <p:nvSpPr>
-          <p:cNvPr id="29" name="">
-            <a:extLst xmlns:a="http://schemas.openxmlformats.org/drawingml/2006/main">
-              <a:ext uri="{FF2B5EF4-FFF2-40B4-BE49-F238E27FC236}">
-                <a16:creationId xmlns:a16="http://schemas.microsoft.com/office/drawing/2014/main" id="{03894898-DB2B-4615-893C-E4335AC6D0FB}"/>
+          <p:cNvPr id="24" name="">
+            <a:extLst xmlns:a="http://schemas.openxmlformats.org/drawingml/2006/main">
+              <a:ext uri="{FF2B5EF4-FFF2-40B4-BE49-F238E27FC236}">
+                <a16:creationId xmlns:a16="http://schemas.microsoft.com/office/drawing/2014/main" id="{4960CDE2-C202-4B7C-B799-DA9E7FCC2253}"/>
               </a:ext>
             </a:extLst>
           </p:cNvPr>
@@ -3240,7 +3220,7 @@
           <p:cNvPr id="2" name="">
             <a:extLst xmlns:a="http://schemas.openxmlformats.org/drawingml/2006/main">
               <a:ext uri="{FF2B5EF4-FFF2-40B4-BE49-F238E27FC236}">
-                <a16:creationId xmlns:a16="http://schemas.microsoft.com/office/drawing/2014/main" id="{0FA4233E-8F80-4110-B58E-F34A11BE04F8}"/>
+                <a16:creationId xmlns:a16="http://schemas.microsoft.com/office/drawing/2014/main" id="{DDF86DCC-AE36-42FE-A123-CF984A7AA8B1}"/>
               </a:ext>
             </a:extLst>
           </p:cNvPr>
@@ -3287,7 +3267,7 @@
                 <a:ea typeface="Malgun Gothic"/>
                 <a:cs typeface="Malgun Gothic"/>
               </a:rPr>
-              <a:t>본선 최소 구현은 네 역할로 나눌 수 있다</a:t>
+              <a:t>네 개의 핵심 기술 책임으로 개발을 분담한다</a:t>
             </a:r>
           </a:p>
         </p:txBody>
@@ -3297,7 +3277,7 @@
           <p:cNvPr id="3" name="">
             <a:extLst xmlns:a="http://schemas.openxmlformats.org/drawingml/2006/main">
               <a:ext uri="{FF2B5EF4-FFF2-40B4-BE49-F238E27FC236}">
-                <a16:creationId xmlns:a16="http://schemas.microsoft.com/office/drawing/2014/main" id="{B17F4970-7872-4FA0-9A84-8F8B1B45F87A}"/>
+                <a16:creationId xmlns:a16="http://schemas.microsoft.com/office/drawing/2014/main" id="{93378426-F6A7-4B7B-8189-878CA1AC66FA}"/>
               </a:ext>
             </a:extLst>
           </p:cNvPr>
@@ -3327,7 +3307,7 @@
           <p:cNvPr id="4" name="">
             <a:extLst xmlns:a="http://schemas.openxmlformats.org/drawingml/2006/main">
               <a:ext uri="{FF2B5EF4-FFF2-40B4-BE49-F238E27FC236}">
-                <a16:creationId xmlns:a16="http://schemas.microsoft.com/office/drawing/2014/main" id="{122DFDD6-3D81-49B0-8AB8-EF6661175A5C}"/>
+                <a16:creationId xmlns:a16="http://schemas.microsoft.com/office/drawing/2014/main" id="{7D101F7E-74B0-47E2-9E73-B5C860D559A2}"/>
               </a:ext>
             </a:extLst>
           </p:cNvPr>
@@ -3384,7 +3364,7 @@
           <p:cNvPr id="5" name="">
             <a:extLst xmlns:a="http://schemas.openxmlformats.org/drawingml/2006/main">
               <a:ext uri="{FF2B5EF4-FFF2-40B4-BE49-F238E27FC236}">
-                <a16:creationId xmlns:a16="http://schemas.microsoft.com/office/drawing/2014/main" id="{44BE3027-4076-4D80-93E6-FBB63C288DE0}"/>
+                <a16:creationId xmlns:a16="http://schemas.microsoft.com/office/drawing/2014/main" id="{4E4B06F4-5A7D-4322-8585-2B35B5A8E1E7}"/>
               </a:ext>
             </a:extLst>
           </p:cNvPr>
@@ -3441,76 +3421,19 @@
           <p:cNvPr id="6" name="">
             <a:extLst xmlns:a="http://schemas.openxmlformats.org/drawingml/2006/main">
               <a:ext uri="{FF2B5EF4-FFF2-40B4-BE49-F238E27FC236}">
-                <a16:creationId xmlns:a16="http://schemas.microsoft.com/office/drawing/2014/main" id="{45267227-8514-4F5C-B27E-9CDF8C58D816}"/>
-              </a:ext>
-            </a:extLst>
-          </p:cNvPr>
-          <p:cNvSpPr>
-            <a:spLocks xmlns:a="http://schemas.openxmlformats.org/drawingml/2006/main" noGrp="1"/>
-          </p:cNvSpPr>
-          <p:nvPr/>
-        </p:nvSpPr>
-        <p:spPr>
-          <a:xfrm xmlns:a="http://schemas.openxmlformats.org/drawingml/2006/main">
-            <a:off x="723900" y="5857875"/>
-            <a:ext cx="10668000" cy="342900"/>
-          </a:xfrm>
-          <a:prstGeom xmlns:a="http://schemas.openxmlformats.org/drawingml/2006/main" prst="rect">
-            <a:avLst/>
-          </a:prstGeom>
-          <a:noFill xmlns:a="http://schemas.openxmlformats.org/drawingml/2006/main"/>
-          <a:ln xmlns:a="http://schemas.openxmlformats.org/drawingml/2006/main" w="0">
-            <a:noFill/>
-          </a:ln>
-        </p:spPr>
-        <p:txBody>
-          <a:bodyPr xmlns:a="http://schemas.openxmlformats.org/drawingml/2006/main">
-            <a:noAutofit/>
-          </a:bodyPr>
-          <a:lstStyle xmlns:a="http://schemas.openxmlformats.org/drawingml/2006/main"/>
-          <a:p xmlns:a="http://schemas.openxmlformats.org/drawingml/2006/main">
-            <a:pPr>
-              <a:defRPr sz="1125" b="0">
-                <a:solidFill>
-                  <a:srgbClr val="4E6157"/>
-                </a:solidFill>
-                <a:latin typeface="Malgun Gothic"/>
-                <a:ea typeface="Malgun Gothic"/>
-                <a:cs typeface="Malgun Gothic"/>
-              </a:defRPr>
-            </a:pPr>
-            <a:r>
-              <a:rPr sz="1125" b="0">
-                <a:solidFill>
-                  <a:srgbClr val="4E6157"/>
-                </a:solidFill>
-                <a:latin typeface="Malgun Gothic"/>
-                <a:ea typeface="Malgun Gothic"/>
-                <a:cs typeface="Malgun Gothic"/>
-              </a:rPr>
-              <a:t>작업량 44~68인시: 기본 웹·Python 경험을 전제로 한 내부 추정. 학습시간 별도.</a:t>
-            </a:r>
-          </a:p>
-        </p:txBody>
-      </p:sp>
-      <p:sp>
-        <p:nvSpPr>
-          <p:cNvPr id="7" name="">
-            <a:extLst xmlns:a="http://schemas.openxmlformats.org/drawingml/2006/main">
-              <a:ext uri="{FF2B5EF4-FFF2-40B4-BE49-F238E27FC236}">
-                <a16:creationId xmlns:a16="http://schemas.microsoft.com/office/drawing/2014/main" id="{F1786620-D5B2-41EE-86BC-5C6B1EFAC669}"/>
-              </a:ext>
-            </a:extLst>
-          </p:cNvPr>
-          <p:cNvSpPr>
-            <a:spLocks xmlns:a="http://schemas.openxmlformats.org/drawingml/2006/main" noGrp="1"/>
-          </p:cNvSpPr>
-          <p:nvPr/>
-        </p:nvSpPr>
-        <p:spPr>
-          <a:xfrm xmlns:a="http://schemas.openxmlformats.org/drawingml/2006/main">
-            <a:off x="742950" y="1428750"/>
-            <a:ext cx="2533650" cy="2895600"/>
+                <a16:creationId xmlns:a16="http://schemas.microsoft.com/office/drawing/2014/main" id="{5D8ED2B3-CF64-4C40-9AC9-3DE10ECA9584}"/>
+              </a:ext>
+            </a:extLst>
+          </p:cNvPr>
+          <p:cNvSpPr>
+            <a:spLocks xmlns:a="http://schemas.openxmlformats.org/drawingml/2006/main" noGrp="1"/>
+          </p:cNvSpPr>
+          <p:nvPr/>
+        </p:nvSpPr>
+        <p:spPr>
+          <a:xfrm xmlns:a="http://schemas.openxmlformats.org/drawingml/2006/main">
+            <a:off x="742950" y="1476375"/>
+            <a:ext cx="2533650" cy="2914650"/>
           </a:xfrm>
           <a:prstGeom xmlns:a="http://schemas.openxmlformats.org/drawingml/2006/main" prst="rect">
             <a:avLst/>
@@ -3527,57 +3450,114 @@
       </p:sp>
       <p:sp>
         <p:nvSpPr>
+          <p:cNvPr id="7" name="">
+            <a:extLst xmlns:a="http://schemas.openxmlformats.org/drawingml/2006/main">
+              <a:ext uri="{FF2B5EF4-FFF2-40B4-BE49-F238E27FC236}">
+                <a16:creationId xmlns:a16="http://schemas.microsoft.com/office/drawing/2014/main" id="{83CC3466-1170-4A31-BA94-BB0830639B75}"/>
+              </a:ext>
+            </a:extLst>
+          </p:cNvPr>
+          <p:cNvSpPr>
+            <a:spLocks xmlns:a="http://schemas.openxmlformats.org/drawingml/2006/main" noGrp="1"/>
+          </p:cNvSpPr>
+          <p:nvPr/>
+        </p:nvSpPr>
+        <p:spPr>
+          <a:xfrm xmlns:a="http://schemas.openxmlformats.org/drawingml/2006/main">
+            <a:off x="914400" y="1647825"/>
+            <a:ext cx="2190750" cy="304800"/>
+          </a:xfrm>
+          <a:prstGeom xmlns:a="http://schemas.openxmlformats.org/drawingml/2006/main" prst="rect">
+            <a:avLst/>
+          </a:prstGeom>
+          <a:noFill xmlns:a="http://schemas.openxmlformats.org/drawingml/2006/main"/>
+          <a:ln xmlns:a="http://schemas.openxmlformats.org/drawingml/2006/main" w="0">
+            <a:noFill/>
+          </a:ln>
+        </p:spPr>
+        <p:txBody>
+          <a:bodyPr xmlns:a="http://schemas.openxmlformats.org/drawingml/2006/main">
+            <a:noAutofit/>
+          </a:bodyPr>
+          <a:lstStyle xmlns:a="http://schemas.openxmlformats.org/drawingml/2006/main"/>
+          <a:p xmlns:a="http://schemas.openxmlformats.org/drawingml/2006/main">
+            <a:pPr>
+              <a:defRPr sz="1500" b="1">
+                <a:solidFill>
+                  <a:srgbClr val="127452"/>
+                </a:solidFill>
+                <a:latin typeface="Malgun Gothic"/>
+                <a:ea typeface="Malgun Gothic"/>
+                <a:cs typeface="Malgun Gothic"/>
+              </a:defRPr>
+            </a:pPr>
+            <a:r>
+              <a:rPr sz="1500" b="1">
+                <a:solidFill>
+                  <a:srgbClr val="127452"/>
+                </a:solidFill>
+                <a:latin typeface="Malgun Gothic"/>
+                <a:ea typeface="Malgun Gothic"/>
+                <a:cs typeface="Malgun Gothic"/>
+              </a:rPr>
+              <a:t>01</a:t>
+            </a:r>
+          </a:p>
+        </p:txBody>
+      </p:sp>
+      <p:sp>
+        <p:nvSpPr>
           <p:cNvPr id="8" name="">
             <a:extLst xmlns:a="http://schemas.openxmlformats.org/drawingml/2006/main">
               <a:ext uri="{FF2B5EF4-FFF2-40B4-BE49-F238E27FC236}">
-                <a16:creationId xmlns:a16="http://schemas.microsoft.com/office/drawing/2014/main" id="{B95DE881-00FD-4BDA-B003-286FF45D3AB5}"/>
-              </a:ext>
-            </a:extLst>
-          </p:cNvPr>
-          <p:cNvSpPr>
-            <a:spLocks xmlns:a="http://schemas.openxmlformats.org/drawingml/2006/main" noGrp="1"/>
-          </p:cNvSpPr>
-          <p:nvPr/>
-        </p:nvSpPr>
-        <p:spPr>
-          <a:xfrm xmlns:a="http://schemas.openxmlformats.org/drawingml/2006/main">
-            <a:off x="914400" y="1600200"/>
-            <a:ext cx="2190750" cy="304800"/>
-          </a:xfrm>
-          <a:prstGeom xmlns:a="http://schemas.openxmlformats.org/drawingml/2006/main" prst="rect">
-            <a:avLst/>
-          </a:prstGeom>
-          <a:noFill xmlns:a="http://schemas.openxmlformats.org/drawingml/2006/main"/>
-          <a:ln xmlns:a="http://schemas.openxmlformats.org/drawingml/2006/main" w="0">
-            <a:noFill/>
-          </a:ln>
-        </p:spPr>
-        <p:txBody>
-          <a:bodyPr xmlns:a="http://schemas.openxmlformats.org/drawingml/2006/main">
-            <a:noAutofit/>
-          </a:bodyPr>
-          <a:lstStyle xmlns:a="http://schemas.openxmlformats.org/drawingml/2006/main"/>
-          <a:p xmlns:a="http://schemas.openxmlformats.org/drawingml/2006/main">
-            <a:pPr>
-              <a:defRPr sz="1500" b="1">
-                <a:solidFill>
-                  <a:srgbClr val="127452"/>
-                </a:solidFill>
-                <a:latin typeface="Malgun Gothic"/>
-                <a:ea typeface="Malgun Gothic"/>
-                <a:cs typeface="Malgun Gothic"/>
-              </a:defRPr>
-            </a:pPr>
-            <a:r>
-              <a:rPr sz="1500" b="1">
-                <a:solidFill>
-                  <a:srgbClr val="127452"/>
-                </a:solidFill>
-                <a:latin typeface="Malgun Gothic"/>
-                <a:ea typeface="Malgun Gothic"/>
-                <a:cs typeface="Malgun Gothic"/>
-              </a:rPr>
-              <a:t>01</a:t>
+                <a16:creationId xmlns:a16="http://schemas.microsoft.com/office/drawing/2014/main" id="{67177FB9-7465-4A8D-B0F5-0BAD41FAA550}"/>
+              </a:ext>
+            </a:extLst>
+          </p:cNvPr>
+          <p:cNvSpPr>
+            <a:spLocks xmlns:a="http://schemas.openxmlformats.org/drawingml/2006/main" noGrp="1"/>
+          </p:cNvSpPr>
+          <p:nvPr/>
+        </p:nvSpPr>
+        <p:spPr>
+          <a:xfrm xmlns:a="http://schemas.openxmlformats.org/drawingml/2006/main">
+            <a:off x="914400" y="2057400"/>
+            <a:ext cx="2190750" cy="523875"/>
+          </a:xfrm>
+          <a:prstGeom xmlns:a="http://schemas.openxmlformats.org/drawingml/2006/main" prst="rect">
+            <a:avLst/>
+          </a:prstGeom>
+          <a:noFill xmlns:a="http://schemas.openxmlformats.org/drawingml/2006/main"/>
+          <a:ln xmlns:a="http://schemas.openxmlformats.org/drawingml/2006/main" w="0">
+            <a:noFill/>
+          </a:ln>
+        </p:spPr>
+        <p:txBody>
+          <a:bodyPr xmlns:a="http://schemas.openxmlformats.org/drawingml/2006/main">
+            <a:noAutofit/>
+          </a:bodyPr>
+          <a:lstStyle xmlns:a="http://schemas.openxmlformats.org/drawingml/2006/main"/>
+          <a:p xmlns:a="http://schemas.openxmlformats.org/drawingml/2006/main">
+            <a:pPr>
+              <a:defRPr sz="1950" b="1">
+                <a:solidFill>
+                  <a:srgbClr val="183329"/>
+                </a:solidFill>
+                <a:latin typeface="Malgun Gothic"/>
+                <a:ea typeface="Malgun Gothic"/>
+                <a:cs typeface="Malgun Gothic"/>
+              </a:defRPr>
+            </a:pPr>
+            <a:r>
+              <a:rPr sz="1950" b="1">
+                <a:solidFill>
+                  <a:srgbClr val="183329"/>
+                </a:solidFill>
+                <a:latin typeface="Malgun Gothic"/>
+                <a:ea typeface="Malgun Gothic"/>
+                <a:cs typeface="Malgun Gothic"/>
+              </a:rPr>
+              <a:t>AI 처리·LLM</a:t>
             </a:r>
           </a:p>
         </p:txBody>
@@ -3587,54 +3567,100 @@
           <p:cNvPr id="9" name="">
             <a:extLst xmlns:a="http://schemas.openxmlformats.org/drawingml/2006/main">
               <a:ext uri="{FF2B5EF4-FFF2-40B4-BE49-F238E27FC236}">
-                <a16:creationId xmlns:a16="http://schemas.microsoft.com/office/drawing/2014/main" id="{92A87383-3E6A-42EE-9C53-0AE6759527B4}"/>
-              </a:ext>
-            </a:extLst>
-          </p:cNvPr>
-          <p:cNvSpPr>
-            <a:spLocks xmlns:a="http://schemas.openxmlformats.org/drawingml/2006/main" noGrp="1"/>
-          </p:cNvSpPr>
-          <p:nvPr/>
-        </p:nvSpPr>
-        <p:spPr>
-          <a:xfrm xmlns:a="http://schemas.openxmlformats.org/drawingml/2006/main">
-            <a:off x="914400" y="2009775"/>
-            <a:ext cx="2190750" cy="523875"/>
-          </a:xfrm>
-          <a:prstGeom xmlns:a="http://schemas.openxmlformats.org/drawingml/2006/main" prst="rect">
-            <a:avLst/>
-          </a:prstGeom>
-          <a:noFill xmlns:a="http://schemas.openxmlformats.org/drawingml/2006/main"/>
-          <a:ln xmlns:a="http://schemas.openxmlformats.org/drawingml/2006/main" w="0">
-            <a:noFill/>
-          </a:ln>
-        </p:spPr>
-        <p:txBody>
-          <a:bodyPr xmlns:a="http://schemas.openxmlformats.org/drawingml/2006/main">
-            <a:noAutofit/>
-          </a:bodyPr>
-          <a:lstStyle xmlns:a="http://schemas.openxmlformats.org/drawingml/2006/main"/>
-          <a:p xmlns:a="http://schemas.openxmlformats.org/drawingml/2006/main">
-            <a:pPr>
-              <a:defRPr sz="1950" b="1">
-                <a:solidFill>
-                  <a:srgbClr val="183329"/>
-                </a:solidFill>
-                <a:latin typeface="Malgun Gothic"/>
-                <a:ea typeface="Malgun Gothic"/>
-                <a:cs typeface="Malgun Gothic"/>
-              </a:defRPr>
-            </a:pPr>
-            <a:r>
-              <a:rPr sz="1950" b="1">
-                <a:solidFill>
-                  <a:srgbClr val="183329"/>
-                </a:solidFill>
-                <a:latin typeface="Malgun Gothic"/>
-                <a:ea typeface="Malgun Gothic"/>
-                <a:cs typeface="Malgun Gothic"/>
-              </a:rPr>
-              <a:t>데이터·평가</a:t>
+                <a16:creationId xmlns:a16="http://schemas.microsoft.com/office/drawing/2014/main" id="{C5F37F9D-71B2-4FD5-83E3-3AF571C2BE7F}"/>
+              </a:ext>
+            </a:extLst>
+          </p:cNvPr>
+          <p:cNvSpPr>
+            <a:spLocks xmlns:a="http://schemas.openxmlformats.org/drawingml/2006/main" noGrp="1"/>
+          </p:cNvSpPr>
+          <p:nvPr/>
+        </p:nvSpPr>
+        <p:spPr>
+          <a:xfrm xmlns:a="http://schemas.openxmlformats.org/drawingml/2006/main">
+            <a:off x="914400" y="2657475"/>
+            <a:ext cx="2190750" cy="1571625"/>
+          </a:xfrm>
+          <a:prstGeom xmlns:a="http://schemas.openxmlformats.org/drawingml/2006/main" prst="rect">
+            <a:avLst/>
+          </a:prstGeom>
+          <a:noFill xmlns:a="http://schemas.openxmlformats.org/drawingml/2006/main"/>
+          <a:ln xmlns:a="http://schemas.openxmlformats.org/drawingml/2006/main" w="0">
+            <a:noFill/>
+          </a:ln>
+        </p:spPr>
+        <p:txBody>
+          <a:bodyPr xmlns:a="http://schemas.openxmlformats.org/drawingml/2006/main">
+            <a:noAutofit/>
+          </a:bodyPr>
+          <a:lstStyle xmlns:a="http://schemas.openxmlformats.org/drawingml/2006/main"/>
+          <a:p xmlns:a="http://schemas.openxmlformats.org/drawingml/2006/main">
+            <a:pPr>
+              <a:defRPr sz="1500" b="0">
+                <a:solidFill>
+                  <a:srgbClr val="4E6157"/>
+                </a:solidFill>
+                <a:latin typeface="Malgun Gothic"/>
+                <a:ea typeface="Malgun Gothic"/>
+                <a:cs typeface="Malgun Gothic"/>
+              </a:defRPr>
+            </a:pPr>
+            <a:r>
+              <a:rPr sz="1500" b="0">
+                <a:solidFill>
+                  <a:srgbClr val="4E6157"/>
+                </a:solidFill>
+                <a:latin typeface="Malgun Gothic"/>
+                <a:ea typeface="Malgun Gothic"/>
+                <a:cs typeface="Malgun Gothic"/>
+              </a:rPr>
+              <a:t>문진 오케스트레이션</a:t>
+            </a:r>
+          </a:p>
+          <a:p xmlns:a="http://schemas.openxmlformats.org/drawingml/2006/main">
+            <a:pPr>
+              <a:defRPr sz="1500" b="0">
+                <a:solidFill>
+                  <a:srgbClr val="4E6157"/>
+                </a:solidFill>
+                <a:latin typeface="Malgun Gothic"/>
+                <a:ea typeface="Malgun Gothic"/>
+                <a:cs typeface="Malgun Gothic"/>
+              </a:defRPr>
+            </a:pPr>
+            <a:r>
+              <a:rPr sz="1500" b="0">
+                <a:solidFill>
+                  <a:srgbClr val="4E6157"/>
+                </a:solidFill>
+                <a:latin typeface="Malgun Gothic"/>
+                <a:ea typeface="Malgun Gothic"/>
+                <a:cs typeface="Malgun Gothic"/>
+              </a:rPr>
+              <a:t>구조화 추출·맥락 질문</a:t>
+            </a:r>
+          </a:p>
+          <a:p xmlns:a="http://schemas.openxmlformats.org/drawingml/2006/main">
+            <a:pPr>
+              <a:defRPr sz="1500" b="0">
+                <a:solidFill>
+                  <a:srgbClr val="4E6157"/>
+                </a:solidFill>
+                <a:latin typeface="Malgun Gothic"/>
+                <a:ea typeface="Malgun Gothic"/>
+                <a:cs typeface="Malgun Gothic"/>
+              </a:defRPr>
+            </a:pPr>
+            <a:r>
+              <a:rPr sz="1500" b="0">
+                <a:solidFill>
+                  <a:srgbClr val="4E6157"/>
+                </a:solidFill>
+                <a:latin typeface="Malgun Gothic"/>
+                <a:ea typeface="Malgun Gothic"/>
+                <a:cs typeface="Malgun Gothic"/>
+              </a:rPr>
+              <a:t>근거 요약·생성 제어</a:t>
             </a:r>
           </a:p>
         </p:txBody>
@@ -3644,156 +3670,19 @@
           <p:cNvPr id="10" name="">
             <a:extLst xmlns:a="http://schemas.openxmlformats.org/drawingml/2006/main">
               <a:ext uri="{FF2B5EF4-FFF2-40B4-BE49-F238E27FC236}">
-                <a16:creationId xmlns:a16="http://schemas.microsoft.com/office/drawing/2014/main" id="{C446B3C9-91BD-4C43-B6CA-560DE5811B09}"/>
-              </a:ext>
-            </a:extLst>
-          </p:cNvPr>
-          <p:cNvSpPr>
-            <a:spLocks xmlns:a="http://schemas.openxmlformats.org/drawingml/2006/main" noGrp="1"/>
-          </p:cNvSpPr>
-          <p:nvPr/>
-        </p:nvSpPr>
-        <p:spPr>
-          <a:xfrm xmlns:a="http://schemas.openxmlformats.org/drawingml/2006/main">
-            <a:off x="914400" y="2609850"/>
-            <a:ext cx="2190750" cy="1552575"/>
-          </a:xfrm>
-          <a:prstGeom xmlns:a="http://schemas.openxmlformats.org/drawingml/2006/main" prst="rect">
-            <a:avLst/>
-          </a:prstGeom>
-          <a:noFill xmlns:a="http://schemas.openxmlformats.org/drawingml/2006/main"/>
-          <a:ln xmlns:a="http://schemas.openxmlformats.org/drawingml/2006/main" w="0">
-            <a:noFill/>
-          </a:ln>
-        </p:spPr>
-        <p:txBody>
-          <a:bodyPr xmlns:a="http://schemas.openxmlformats.org/drawingml/2006/main">
-            <a:noAutofit/>
-          </a:bodyPr>
-          <a:lstStyle xmlns:a="http://schemas.openxmlformats.org/drawingml/2006/main"/>
-          <a:p xmlns:a="http://schemas.openxmlformats.org/drawingml/2006/main">
-            <a:pPr>
-              <a:defRPr sz="1500" b="0">
-                <a:solidFill>
-                  <a:srgbClr val="4E6157"/>
-                </a:solidFill>
-                <a:latin typeface="Malgun Gothic"/>
-                <a:ea typeface="Malgun Gothic"/>
-                <a:cs typeface="Malgun Gothic"/>
-              </a:defRPr>
-            </a:pPr>
-            <a:r>
-              <a:rPr sz="1500" b="0">
-                <a:solidFill>
-                  <a:srgbClr val="4E6157"/>
-                </a:solidFill>
-                <a:latin typeface="Malgun Gothic"/>
-                <a:ea typeface="Malgun Gothic"/>
-                <a:cs typeface="Malgun Gothic"/>
-              </a:rPr>
-              <a:t>CSV 품질·중앙값·회귀</a:t>
-            </a:r>
-          </a:p>
-          <a:p xmlns:a="http://schemas.openxmlformats.org/drawingml/2006/main">
-            <a:pPr>
-              <a:defRPr sz="1500" b="0">
-                <a:solidFill>
-                  <a:srgbClr val="4E6157"/>
-                </a:solidFill>
-                <a:latin typeface="Malgun Gothic"/>
-                <a:ea typeface="Malgun Gothic"/>
-                <a:cs typeface="Malgun Gothic"/>
-              </a:defRPr>
-            </a:pPr>
-            <a:r>
-              <a:rPr sz="1500" b="0">
-                <a:solidFill>
-                  <a:srgbClr val="4E6157"/>
-                </a:solidFill>
-                <a:latin typeface="Malgun Gothic"/>
-                <a:ea typeface="Malgun Gothic"/>
-                <a:cs typeface="Malgun Gothic"/>
-              </a:rPr>
-              <a:t>그룹 분리 검증</a:t>
-            </a:r>
-          </a:p>
-        </p:txBody>
-      </p:sp>
-      <p:sp>
-        <p:nvSpPr>
-          <p:cNvPr id="11" name="">
-            <a:extLst xmlns:a="http://schemas.openxmlformats.org/drawingml/2006/main">
-              <a:ext uri="{FF2B5EF4-FFF2-40B4-BE49-F238E27FC236}">
-                <a16:creationId xmlns:a16="http://schemas.microsoft.com/office/drawing/2014/main" id="{791633BF-B0FB-457B-AB12-559794F6811F}"/>
-              </a:ext>
-            </a:extLst>
-          </p:cNvPr>
-          <p:cNvSpPr>
-            <a:spLocks xmlns:a="http://schemas.openxmlformats.org/drawingml/2006/main" noGrp="1"/>
-          </p:cNvSpPr>
-          <p:nvPr/>
-        </p:nvSpPr>
-        <p:spPr>
-          <a:xfrm xmlns:a="http://schemas.openxmlformats.org/drawingml/2006/main">
-            <a:off x="914400" y="3686175"/>
-            <a:ext cx="2190750" cy="361950"/>
-          </a:xfrm>
-          <a:prstGeom xmlns:a="http://schemas.openxmlformats.org/drawingml/2006/main" prst="rect">
-            <a:avLst/>
-          </a:prstGeom>
-          <a:noFill xmlns:a="http://schemas.openxmlformats.org/drawingml/2006/main"/>
-          <a:ln xmlns:a="http://schemas.openxmlformats.org/drawingml/2006/main" w="0">
-            <a:noFill/>
-          </a:ln>
-        </p:spPr>
-        <p:txBody>
-          <a:bodyPr xmlns:a="http://schemas.openxmlformats.org/drawingml/2006/main">
-            <a:noAutofit/>
-          </a:bodyPr>
-          <a:lstStyle xmlns:a="http://schemas.openxmlformats.org/drawingml/2006/main"/>
-          <a:p xmlns:a="http://schemas.openxmlformats.org/drawingml/2006/main">
-            <a:pPr>
-              <a:defRPr sz="1650" b="1">
-                <a:solidFill>
-                  <a:srgbClr val="127452"/>
-                </a:solidFill>
-                <a:latin typeface="Malgun Gothic"/>
-                <a:ea typeface="Malgun Gothic"/>
-                <a:cs typeface="Malgun Gothic"/>
-              </a:defRPr>
-            </a:pPr>
-            <a:r>
-              <a:rPr sz="1650" b="1">
-                <a:solidFill>
-                  <a:srgbClr val="127452"/>
-                </a:solidFill>
-                <a:latin typeface="Malgun Gothic"/>
-                <a:ea typeface="Malgun Gothic"/>
-                <a:cs typeface="Malgun Gothic"/>
-              </a:rPr>
-              <a:t>14~22인시</a:t>
-            </a:r>
-          </a:p>
-        </p:txBody>
-      </p:sp>
-      <p:sp>
-        <p:nvSpPr>
-          <p:cNvPr id="12" name="">
-            <a:extLst xmlns:a="http://schemas.openxmlformats.org/drawingml/2006/main">
-              <a:ext uri="{FF2B5EF4-FFF2-40B4-BE49-F238E27FC236}">
-                <a16:creationId xmlns:a16="http://schemas.microsoft.com/office/drawing/2014/main" id="{2DFB9367-3E26-4064-9AA2-F2B559BC6211}"/>
-              </a:ext>
-            </a:extLst>
-          </p:cNvPr>
-          <p:cNvSpPr>
-            <a:spLocks xmlns:a="http://schemas.openxmlformats.org/drawingml/2006/main" noGrp="1"/>
-          </p:cNvSpPr>
-          <p:nvPr/>
-        </p:nvSpPr>
-        <p:spPr>
-          <a:xfrm xmlns:a="http://schemas.openxmlformats.org/drawingml/2006/main">
-            <a:off x="3448050" y="1428750"/>
-            <a:ext cx="2533650" cy="2895600"/>
+                <a16:creationId xmlns:a16="http://schemas.microsoft.com/office/drawing/2014/main" id="{BA5E61A3-ABDF-4C65-9DD3-4D575D77D7DB}"/>
+              </a:ext>
+            </a:extLst>
+          </p:cNvPr>
+          <p:cNvSpPr>
+            <a:spLocks xmlns:a="http://schemas.openxmlformats.org/drawingml/2006/main" noGrp="1"/>
+          </p:cNvSpPr>
+          <p:nvPr/>
+        </p:nvSpPr>
+        <p:spPr>
+          <a:xfrm xmlns:a="http://schemas.openxmlformats.org/drawingml/2006/main">
+            <a:off x="3448050" y="1476375"/>
+            <a:ext cx="2533650" cy="2914650"/>
           </a:xfrm>
           <a:prstGeom xmlns:a="http://schemas.openxmlformats.org/drawingml/2006/main" prst="rect">
             <a:avLst/>
@@ -3810,57 +3699,217 @@
       </p:sp>
       <p:sp>
         <p:nvSpPr>
+          <p:cNvPr id="11" name="">
+            <a:extLst xmlns:a="http://schemas.openxmlformats.org/drawingml/2006/main">
+              <a:ext uri="{FF2B5EF4-FFF2-40B4-BE49-F238E27FC236}">
+                <a16:creationId xmlns:a16="http://schemas.microsoft.com/office/drawing/2014/main" id="{239A87F0-CF17-48F2-A2D9-6D98AC910CBF}"/>
+              </a:ext>
+            </a:extLst>
+          </p:cNvPr>
+          <p:cNvSpPr>
+            <a:spLocks xmlns:a="http://schemas.openxmlformats.org/drawingml/2006/main" noGrp="1"/>
+          </p:cNvSpPr>
+          <p:nvPr/>
+        </p:nvSpPr>
+        <p:spPr>
+          <a:xfrm xmlns:a="http://schemas.openxmlformats.org/drawingml/2006/main">
+            <a:off x="3619500" y="1647825"/>
+            <a:ext cx="2190750" cy="304800"/>
+          </a:xfrm>
+          <a:prstGeom xmlns:a="http://schemas.openxmlformats.org/drawingml/2006/main" prst="rect">
+            <a:avLst/>
+          </a:prstGeom>
+          <a:noFill xmlns:a="http://schemas.openxmlformats.org/drawingml/2006/main"/>
+          <a:ln xmlns:a="http://schemas.openxmlformats.org/drawingml/2006/main" w="0">
+            <a:noFill/>
+          </a:ln>
+        </p:spPr>
+        <p:txBody>
+          <a:bodyPr xmlns:a="http://schemas.openxmlformats.org/drawingml/2006/main">
+            <a:noAutofit/>
+          </a:bodyPr>
+          <a:lstStyle xmlns:a="http://schemas.openxmlformats.org/drawingml/2006/main"/>
+          <a:p xmlns:a="http://schemas.openxmlformats.org/drawingml/2006/main">
+            <a:pPr>
+              <a:defRPr sz="1500" b="1">
+                <a:solidFill>
+                  <a:srgbClr val="127452"/>
+                </a:solidFill>
+                <a:latin typeface="Malgun Gothic"/>
+                <a:ea typeface="Malgun Gothic"/>
+                <a:cs typeface="Malgun Gothic"/>
+              </a:defRPr>
+            </a:pPr>
+            <a:r>
+              <a:rPr sz="1500" b="1">
+                <a:solidFill>
+                  <a:srgbClr val="127452"/>
+                </a:solidFill>
+                <a:latin typeface="Malgun Gothic"/>
+                <a:ea typeface="Malgun Gothic"/>
+                <a:cs typeface="Malgun Gothic"/>
+              </a:rPr>
+              <a:t>02</a:t>
+            </a:r>
+          </a:p>
+        </p:txBody>
+      </p:sp>
+      <p:sp>
+        <p:nvSpPr>
+          <p:cNvPr id="12" name="">
+            <a:extLst xmlns:a="http://schemas.openxmlformats.org/drawingml/2006/main">
+              <a:ext uri="{FF2B5EF4-FFF2-40B4-BE49-F238E27FC236}">
+                <a16:creationId xmlns:a16="http://schemas.microsoft.com/office/drawing/2014/main" id="{18FB8C79-4C02-4C1E-BCED-137C42E10FA4}"/>
+              </a:ext>
+            </a:extLst>
+          </p:cNvPr>
+          <p:cNvSpPr>
+            <a:spLocks xmlns:a="http://schemas.openxmlformats.org/drawingml/2006/main" noGrp="1"/>
+          </p:cNvSpPr>
+          <p:nvPr/>
+        </p:nvSpPr>
+        <p:spPr>
+          <a:xfrm xmlns:a="http://schemas.openxmlformats.org/drawingml/2006/main">
+            <a:off x="3619500" y="2057400"/>
+            <a:ext cx="2190750" cy="523875"/>
+          </a:xfrm>
+          <a:prstGeom xmlns:a="http://schemas.openxmlformats.org/drawingml/2006/main" prst="rect">
+            <a:avLst/>
+          </a:prstGeom>
+          <a:noFill xmlns:a="http://schemas.openxmlformats.org/drawingml/2006/main"/>
+          <a:ln xmlns:a="http://schemas.openxmlformats.org/drawingml/2006/main" w="0">
+            <a:noFill/>
+          </a:ln>
+        </p:spPr>
+        <p:txBody>
+          <a:bodyPr xmlns:a="http://schemas.openxmlformats.org/drawingml/2006/main">
+            <a:noAutofit/>
+          </a:bodyPr>
+          <a:lstStyle xmlns:a="http://schemas.openxmlformats.org/drawingml/2006/main"/>
+          <a:p xmlns:a="http://schemas.openxmlformats.org/drawingml/2006/main">
+            <a:pPr>
+              <a:defRPr sz="1950" b="1">
+                <a:solidFill>
+                  <a:srgbClr val="183329"/>
+                </a:solidFill>
+                <a:latin typeface="Malgun Gothic"/>
+                <a:ea typeface="Malgun Gothic"/>
+                <a:cs typeface="Malgun Gothic"/>
+              </a:defRPr>
+            </a:pPr>
+            <a:r>
+              <a:rPr sz="1950" b="1">
+                <a:solidFill>
+                  <a:srgbClr val="183329"/>
+                </a:solidFill>
+                <a:latin typeface="Malgun Gothic"/>
+                <a:ea typeface="Malgun Gothic"/>
+                <a:cs typeface="Malgun Gothic"/>
+              </a:rPr>
+              <a:t>웹·문진 UX</a:t>
+            </a:r>
+          </a:p>
+        </p:txBody>
+      </p:sp>
+      <p:sp>
+        <p:nvSpPr>
           <p:cNvPr id="13" name="">
             <a:extLst xmlns:a="http://schemas.openxmlformats.org/drawingml/2006/main">
               <a:ext uri="{FF2B5EF4-FFF2-40B4-BE49-F238E27FC236}">
-                <a16:creationId xmlns:a16="http://schemas.microsoft.com/office/drawing/2014/main" id="{12EEC53F-0819-4B95-803B-DB0F70CCC9F7}"/>
-              </a:ext>
-            </a:extLst>
-          </p:cNvPr>
-          <p:cNvSpPr>
-            <a:spLocks xmlns:a="http://schemas.openxmlformats.org/drawingml/2006/main" noGrp="1"/>
-          </p:cNvSpPr>
-          <p:nvPr/>
-        </p:nvSpPr>
-        <p:spPr>
-          <a:xfrm xmlns:a="http://schemas.openxmlformats.org/drawingml/2006/main">
-            <a:off x="3619500" y="1600200"/>
-            <a:ext cx="2190750" cy="304800"/>
-          </a:xfrm>
-          <a:prstGeom xmlns:a="http://schemas.openxmlformats.org/drawingml/2006/main" prst="rect">
-            <a:avLst/>
-          </a:prstGeom>
-          <a:noFill xmlns:a="http://schemas.openxmlformats.org/drawingml/2006/main"/>
-          <a:ln xmlns:a="http://schemas.openxmlformats.org/drawingml/2006/main" w="0">
-            <a:noFill/>
-          </a:ln>
-        </p:spPr>
-        <p:txBody>
-          <a:bodyPr xmlns:a="http://schemas.openxmlformats.org/drawingml/2006/main">
-            <a:noAutofit/>
-          </a:bodyPr>
-          <a:lstStyle xmlns:a="http://schemas.openxmlformats.org/drawingml/2006/main"/>
-          <a:p xmlns:a="http://schemas.openxmlformats.org/drawingml/2006/main">
-            <a:pPr>
-              <a:defRPr sz="1500" b="1">
-                <a:solidFill>
-                  <a:srgbClr val="127452"/>
-                </a:solidFill>
-                <a:latin typeface="Malgun Gothic"/>
-                <a:ea typeface="Malgun Gothic"/>
-                <a:cs typeface="Malgun Gothic"/>
-              </a:defRPr>
-            </a:pPr>
-            <a:r>
-              <a:rPr sz="1500" b="1">
-                <a:solidFill>
-                  <a:srgbClr val="127452"/>
-                </a:solidFill>
-                <a:latin typeface="Malgun Gothic"/>
-                <a:ea typeface="Malgun Gothic"/>
-                <a:cs typeface="Malgun Gothic"/>
-              </a:rPr>
-              <a:t>02</a:t>
+                <a16:creationId xmlns:a16="http://schemas.microsoft.com/office/drawing/2014/main" id="{E30FE519-7ED5-4D31-9FBA-165D99158A03}"/>
+              </a:ext>
+            </a:extLst>
+          </p:cNvPr>
+          <p:cNvSpPr>
+            <a:spLocks xmlns:a="http://schemas.openxmlformats.org/drawingml/2006/main" noGrp="1"/>
+          </p:cNvSpPr>
+          <p:nvPr/>
+        </p:nvSpPr>
+        <p:spPr>
+          <a:xfrm xmlns:a="http://schemas.openxmlformats.org/drawingml/2006/main">
+            <a:off x="3619500" y="2657475"/>
+            <a:ext cx="2190750" cy="1571625"/>
+          </a:xfrm>
+          <a:prstGeom xmlns:a="http://schemas.openxmlformats.org/drawingml/2006/main" prst="rect">
+            <a:avLst/>
+          </a:prstGeom>
+          <a:noFill xmlns:a="http://schemas.openxmlformats.org/drawingml/2006/main"/>
+          <a:ln xmlns:a="http://schemas.openxmlformats.org/drawingml/2006/main" w="0">
+            <a:noFill/>
+          </a:ln>
+        </p:spPr>
+        <p:txBody>
+          <a:bodyPr xmlns:a="http://schemas.openxmlformats.org/drawingml/2006/main">
+            <a:noAutofit/>
+          </a:bodyPr>
+          <a:lstStyle xmlns:a="http://schemas.openxmlformats.org/drawingml/2006/main"/>
+          <a:p xmlns:a="http://schemas.openxmlformats.org/drawingml/2006/main">
+            <a:pPr>
+              <a:defRPr sz="1500" b="0">
+                <a:solidFill>
+                  <a:srgbClr val="4E6157"/>
+                </a:solidFill>
+                <a:latin typeface="Malgun Gothic"/>
+                <a:ea typeface="Malgun Gothic"/>
+                <a:cs typeface="Malgun Gothic"/>
+              </a:defRPr>
+            </a:pPr>
+            <a:r>
+              <a:rPr sz="1500" b="0">
+                <a:solidFill>
+                  <a:srgbClr val="4E6157"/>
+                </a:solidFill>
+                <a:latin typeface="Malgun Gothic"/>
+                <a:ea typeface="Malgun Gothic"/>
+                <a:cs typeface="Malgun Gothic"/>
+              </a:rPr>
+              <a:t>반응형 웹 인터페이스</a:t>
+            </a:r>
+          </a:p>
+          <a:p xmlns:a="http://schemas.openxmlformats.org/drawingml/2006/main">
+            <a:pPr>
+              <a:defRPr sz="1500" b="0">
+                <a:solidFill>
+                  <a:srgbClr val="4E6157"/>
+                </a:solidFill>
+                <a:latin typeface="Malgun Gothic"/>
+                <a:ea typeface="Malgun Gothic"/>
+                <a:cs typeface="Malgun Gothic"/>
+              </a:defRPr>
+            </a:pPr>
+            <a:r>
+              <a:rPr sz="1500" b="0">
+                <a:solidFill>
+                  <a:srgbClr val="4E6157"/>
+                </a:solidFill>
+                <a:latin typeface="Malgun Gothic"/>
+                <a:ea typeface="Malgun Gothic"/>
+                <a:cs typeface="Malgun Gothic"/>
+              </a:rPr>
+              <a:t>응답 데이터 구조화</a:t>
+            </a:r>
+          </a:p>
+          <a:p xmlns:a="http://schemas.openxmlformats.org/drawingml/2006/main">
+            <a:pPr>
+              <a:defRPr sz="1500" b="0">
+                <a:solidFill>
+                  <a:srgbClr val="4E6157"/>
+                </a:solidFill>
+                <a:latin typeface="Malgun Gothic"/>
+                <a:ea typeface="Malgun Gothic"/>
+                <a:cs typeface="Malgun Gothic"/>
+              </a:defRPr>
+            </a:pPr>
+            <a:r>
+              <a:rPr sz="1500" b="0">
+                <a:solidFill>
+                  <a:srgbClr val="4E6157"/>
+                </a:solidFill>
+                <a:latin typeface="Malgun Gothic"/>
+                <a:ea typeface="Malgun Gothic"/>
+                <a:cs typeface="Malgun Gothic"/>
+              </a:rPr>
+              <a:t>확인·수정 흐름 개발</a:t>
             </a:r>
           </a:p>
         </p:txBody>
@@ -3870,213 +3919,19 @@
           <p:cNvPr id="14" name="">
             <a:extLst xmlns:a="http://schemas.openxmlformats.org/drawingml/2006/main">
               <a:ext uri="{FF2B5EF4-FFF2-40B4-BE49-F238E27FC236}">
-                <a16:creationId xmlns:a16="http://schemas.microsoft.com/office/drawing/2014/main" id="{FF75C737-7F79-4B19-BF2E-E4EC6920B279}"/>
-              </a:ext>
-            </a:extLst>
-          </p:cNvPr>
-          <p:cNvSpPr>
-            <a:spLocks xmlns:a="http://schemas.openxmlformats.org/drawingml/2006/main" noGrp="1"/>
-          </p:cNvSpPr>
-          <p:nvPr/>
-        </p:nvSpPr>
-        <p:spPr>
-          <a:xfrm xmlns:a="http://schemas.openxmlformats.org/drawingml/2006/main">
-            <a:off x="3619500" y="2009775"/>
-            <a:ext cx="2190750" cy="523875"/>
-          </a:xfrm>
-          <a:prstGeom xmlns:a="http://schemas.openxmlformats.org/drawingml/2006/main" prst="rect">
-            <a:avLst/>
-          </a:prstGeom>
-          <a:noFill xmlns:a="http://schemas.openxmlformats.org/drawingml/2006/main"/>
-          <a:ln xmlns:a="http://schemas.openxmlformats.org/drawingml/2006/main" w="0">
-            <a:noFill/>
-          </a:ln>
-        </p:spPr>
-        <p:txBody>
-          <a:bodyPr xmlns:a="http://schemas.openxmlformats.org/drawingml/2006/main">
-            <a:noAutofit/>
-          </a:bodyPr>
-          <a:lstStyle xmlns:a="http://schemas.openxmlformats.org/drawingml/2006/main"/>
-          <a:p xmlns:a="http://schemas.openxmlformats.org/drawingml/2006/main">
-            <a:pPr>
-              <a:defRPr sz="1950" b="1">
-                <a:solidFill>
-                  <a:srgbClr val="183329"/>
-                </a:solidFill>
-                <a:latin typeface="Malgun Gothic"/>
-                <a:ea typeface="Malgun Gothic"/>
-                <a:cs typeface="Malgun Gothic"/>
-              </a:defRPr>
-            </a:pPr>
-            <a:r>
-              <a:rPr sz="1950" b="1">
-                <a:solidFill>
-                  <a:srgbClr val="183329"/>
-                </a:solidFill>
-                <a:latin typeface="Malgun Gothic"/>
-                <a:ea typeface="Malgun Gothic"/>
-                <a:cs typeface="Malgun Gothic"/>
-              </a:rPr>
-              <a:t>웹·문진</a:t>
-            </a:r>
-          </a:p>
-        </p:txBody>
-      </p:sp>
-      <p:sp>
-        <p:nvSpPr>
-          <p:cNvPr id="15" name="">
-            <a:extLst xmlns:a="http://schemas.openxmlformats.org/drawingml/2006/main">
-              <a:ext uri="{FF2B5EF4-FFF2-40B4-BE49-F238E27FC236}">
-                <a16:creationId xmlns:a16="http://schemas.microsoft.com/office/drawing/2014/main" id="{00EB3E69-A853-42A7-A74F-6790DD3F88C3}"/>
-              </a:ext>
-            </a:extLst>
-          </p:cNvPr>
-          <p:cNvSpPr>
-            <a:spLocks xmlns:a="http://schemas.openxmlformats.org/drawingml/2006/main" noGrp="1"/>
-          </p:cNvSpPr>
-          <p:nvPr/>
-        </p:nvSpPr>
-        <p:spPr>
-          <a:xfrm xmlns:a="http://schemas.openxmlformats.org/drawingml/2006/main">
-            <a:off x="3619500" y="2609850"/>
-            <a:ext cx="2190750" cy="1552575"/>
-          </a:xfrm>
-          <a:prstGeom xmlns:a="http://schemas.openxmlformats.org/drawingml/2006/main" prst="rect">
-            <a:avLst/>
-          </a:prstGeom>
-          <a:noFill xmlns:a="http://schemas.openxmlformats.org/drawingml/2006/main"/>
-          <a:ln xmlns:a="http://schemas.openxmlformats.org/drawingml/2006/main" w="0">
-            <a:noFill/>
-          </a:ln>
-        </p:spPr>
-        <p:txBody>
-          <a:bodyPr xmlns:a="http://schemas.openxmlformats.org/drawingml/2006/main">
-            <a:noAutofit/>
-          </a:bodyPr>
-          <a:lstStyle xmlns:a="http://schemas.openxmlformats.org/drawingml/2006/main"/>
-          <a:p xmlns:a="http://schemas.openxmlformats.org/drawingml/2006/main">
-            <a:pPr>
-              <a:defRPr sz="1500" b="0">
-                <a:solidFill>
-                  <a:srgbClr val="4E6157"/>
-                </a:solidFill>
-                <a:latin typeface="Malgun Gothic"/>
-                <a:ea typeface="Malgun Gothic"/>
-                <a:cs typeface="Malgun Gothic"/>
-              </a:defRPr>
-            </a:pPr>
-            <a:r>
-              <a:rPr sz="1500" b="0">
-                <a:solidFill>
-                  <a:srgbClr val="4E6157"/>
-                </a:solidFill>
-                <a:latin typeface="Malgun Gothic"/>
-                <a:ea typeface="Malgun Gothic"/>
-                <a:cs typeface="Malgun Gothic"/>
-              </a:rPr>
-              <a:t>건물 선택·구조화 문진</a:t>
-            </a:r>
-          </a:p>
-          <a:p xmlns:a="http://schemas.openxmlformats.org/drawingml/2006/main">
-            <a:pPr>
-              <a:defRPr sz="1500" b="0">
-                <a:solidFill>
-                  <a:srgbClr val="4E6157"/>
-                </a:solidFill>
-                <a:latin typeface="Malgun Gothic"/>
-                <a:ea typeface="Malgun Gothic"/>
-                <a:cs typeface="Malgun Gothic"/>
-              </a:defRPr>
-            </a:pPr>
-            <a:r>
-              <a:rPr sz="1500" b="0">
-                <a:solidFill>
-                  <a:srgbClr val="4E6157"/>
-                </a:solidFill>
-                <a:latin typeface="Malgun Gothic"/>
-                <a:ea typeface="Malgun Gothic"/>
-                <a:cs typeface="Malgun Gothic"/>
-              </a:rPr>
-              <a:t>응답 확인·화면 연결</a:t>
-            </a:r>
-          </a:p>
-        </p:txBody>
-      </p:sp>
-      <p:sp>
-        <p:nvSpPr>
-          <p:cNvPr id="16" name="">
-            <a:extLst xmlns:a="http://schemas.openxmlformats.org/drawingml/2006/main">
-              <a:ext uri="{FF2B5EF4-FFF2-40B4-BE49-F238E27FC236}">
-                <a16:creationId xmlns:a16="http://schemas.microsoft.com/office/drawing/2014/main" id="{86602CA2-AFA0-4826-A6A3-4D8D3F40EB64}"/>
-              </a:ext>
-            </a:extLst>
-          </p:cNvPr>
-          <p:cNvSpPr>
-            <a:spLocks xmlns:a="http://schemas.openxmlformats.org/drawingml/2006/main" noGrp="1"/>
-          </p:cNvSpPr>
-          <p:nvPr/>
-        </p:nvSpPr>
-        <p:spPr>
-          <a:xfrm xmlns:a="http://schemas.openxmlformats.org/drawingml/2006/main">
-            <a:off x="3619500" y="3686175"/>
-            <a:ext cx="2190750" cy="361950"/>
-          </a:xfrm>
-          <a:prstGeom xmlns:a="http://schemas.openxmlformats.org/drawingml/2006/main" prst="rect">
-            <a:avLst/>
-          </a:prstGeom>
-          <a:noFill xmlns:a="http://schemas.openxmlformats.org/drawingml/2006/main"/>
-          <a:ln xmlns:a="http://schemas.openxmlformats.org/drawingml/2006/main" w="0">
-            <a:noFill/>
-          </a:ln>
-        </p:spPr>
-        <p:txBody>
-          <a:bodyPr xmlns:a="http://schemas.openxmlformats.org/drawingml/2006/main">
-            <a:noAutofit/>
-          </a:bodyPr>
-          <a:lstStyle xmlns:a="http://schemas.openxmlformats.org/drawingml/2006/main"/>
-          <a:p xmlns:a="http://schemas.openxmlformats.org/drawingml/2006/main">
-            <a:pPr>
-              <a:defRPr sz="1650" b="1">
-                <a:solidFill>
-                  <a:srgbClr val="127452"/>
-                </a:solidFill>
-                <a:latin typeface="Malgun Gothic"/>
-                <a:ea typeface="Malgun Gothic"/>
-                <a:cs typeface="Malgun Gothic"/>
-              </a:defRPr>
-            </a:pPr>
-            <a:r>
-              <a:rPr sz="1650" b="1">
-                <a:solidFill>
-                  <a:srgbClr val="127452"/>
-                </a:solidFill>
-                <a:latin typeface="Malgun Gothic"/>
-                <a:ea typeface="Malgun Gothic"/>
-                <a:cs typeface="Malgun Gothic"/>
-              </a:rPr>
-              <a:t>12~18인시</a:t>
-            </a:r>
-          </a:p>
-        </p:txBody>
-      </p:sp>
-      <p:sp>
-        <p:nvSpPr>
-          <p:cNvPr id="17" name="">
-            <a:extLst xmlns:a="http://schemas.openxmlformats.org/drawingml/2006/main">
-              <a:ext uri="{FF2B5EF4-FFF2-40B4-BE49-F238E27FC236}">
-                <a16:creationId xmlns:a16="http://schemas.microsoft.com/office/drawing/2014/main" id="{B1005D0B-D0A4-417C-9FBE-35851193893F}"/>
-              </a:ext>
-            </a:extLst>
-          </p:cNvPr>
-          <p:cNvSpPr>
-            <a:spLocks xmlns:a="http://schemas.openxmlformats.org/drawingml/2006/main" noGrp="1"/>
-          </p:cNvSpPr>
-          <p:nvPr/>
-        </p:nvSpPr>
-        <p:spPr>
-          <a:xfrm xmlns:a="http://schemas.openxmlformats.org/drawingml/2006/main">
-            <a:off x="6153150" y="1428750"/>
-            <a:ext cx="2533650" cy="2895600"/>
+                <a16:creationId xmlns:a16="http://schemas.microsoft.com/office/drawing/2014/main" id="{81D46262-A59F-4253-BD8D-D715BC9179DF}"/>
+              </a:ext>
+            </a:extLst>
+          </p:cNvPr>
+          <p:cNvSpPr>
+            <a:spLocks xmlns:a="http://schemas.openxmlformats.org/drawingml/2006/main" noGrp="1"/>
+          </p:cNvSpPr>
+          <p:nvPr/>
+        </p:nvSpPr>
+        <p:spPr>
+          <a:xfrm xmlns:a="http://schemas.openxmlformats.org/drawingml/2006/main">
+            <a:off x="6153150" y="1476375"/>
+            <a:ext cx="2533650" cy="2914650"/>
           </a:xfrm>
           <a:prstGeom xmlns:a="http://schemas.openxmlformats.org/drawingml/2006/main" prst="rect">
             <a:avLst/>
@@ -4093,273 +3948,239 @@
       </p:sp>
       <p:sp>
         <p:nvSpPr>
+          <p:cNvPr id="15" name="">
+            <a:extLst xmlns:a="http://schemas.openxmlformats.org/drawingml/2006/main">
+              <a:ext uri="{FF2B5EF4-FFF2-40B4-BE49-F238E27FC236}">
+                <a16:creationId xmlns:a16="http://schemas.microsoft.com/office/drawing/2014/main" id="{5B82BC1C-C619-4E89-8FE8-5985CDE7A134}"/>
+              </a:ext>
+            </a:extLst>
+          </p:cNvPr>
+          <p:cNvSpPr>
+            <a:spLocks xmlns:a="http://schemas.openxmlformats.org/drawingml/2006/main" noGrp="1"/>
+          </p:cNvSpPr>
+          <p:nvPr/>
+        </p:nvSpPr>
+        <p:spPr>
+          <a:xfrm xmlns:a="http://schemas.openxmlformats.org/drawingml/2006/main">
+            <a:off x="6324600" y="1647825"/>
+            <a:ext cx="2190750" cy="304800"/>
+          </a:xfrm>
+          <a:prstGeom xmlns:a="http://schemas.openxmlformats.org/drawingml/2006/main" prst="rect">
+            <a:avLst/>
+          </a:prstGeom>
+          <a:noFill xmlns:a="http://schemas.openxmlformats.org/drawingml/2006/main"/>
+          <a:ln xmlns:a="http://schemas.openxmlformats.org/drawingml/2006/main" w="0">
+            <a:noFill/>
+          </a:ln>
+        </p:spPr>
+        <p:txBody>
+          <a:bodyPr xmlns:a="http://schemas.openxmlformats.org/drawingml/2006/main">
+            <a:noAutofit/>
+          </a:bodyPr>
+          <a:lstStyle xmlns:a="http://schemas.openxmlformats.org/drawingml/2006/main"/>
+          <a:p xmlns:a="http://schemas.openxmlformats.org/drawingml/2006/main">
+            <a:pPr>
+              <a:defRPr sz="1500" b="1">
+                <a:solidFill>
+                  <a:srgbClr val="127452"/>
+                </a:solidFill>
+                <a:latin typeface="Malgun Gothic"/>
+                <a:ea typeface="Malgun Gothic"/>
+                <a:cs typeface="Malgun Gothic"/>
+              </a:defRPr>
+            </a:pPr>
+            <a:r>
+              <a:rPr sz="1500" b="1">
+                <a:solidFill>
+                  <a:srgbClr val="127452"/>
+                </a:solidFill>
+                <a:latin typeface="Malgun Gothic"/>
+                <a:ea typeface="Malgun Gothic"/>
+                <a:cs typeface="Malgun Gothic"/>
+              </a:rPr>
+              <a:t>03</a:t>
+            </a:r>
+          </a:p>
+        </p:txBody>
+      </p:sp>
+      <p:sp>
+        <p:nvSpPr>
+          <p:cNvPr id="16" name="">
+            <a:extLst xmlns:a="http://schemas.openxmlformats.org/drawingml/2006/main">
+              <a:ext uri="{FF2B5EF4-FFF2-40B4-BE49-F238E27FC236}">
+                <a16:creationId xmlns:a16="http://schemas.microsoft.com/office/drawing/2014/main" id="{F39C2FD8-FAB4-45C3-B704-BD55982BDD25}"/>
+              </a:ext>
+            </a:extLst>
+          </p:cNvPr>
+          <p:cNvSpPr>
+            <a:spLocks xmlns:a="http://schemas.openxmlformats.org/drawingml/2006/main" noGrp="1"/>
+          </p:cNvSpPr>
+          <p:nvPr/>
+        </p:nvSpPr>
+        <p:spPr>
+          <a:xfrm xmlns:a="http://schemas.openxmlformats.org/drawingml/2006/main">
+            <a:off x="6324600" y="2057400"/>
+            <a:ext cx="2190750" cy="523875"/>
+          </a:xfrm>
+          <a:prstGeom xmlns:a="http://schemas.openxmlformats.org/drawingml/2006/main" prst="rect">
+            <a:avLst/>
+          </a:prstGeom>
+          <a:noFill xmlns:a="http://schemas.openxmlformats.org/drawingml/2006/main"/>
+          <a:ln xmlns:a="http://schemas.openxmlformats.org/drawingml/2006/main" w="0">
+            <a:noFill/>
+          </a:ln>
+        </p:spPr>
+        <p:txBody>
+          <a:bodyPr xmlns:a="http://schemas.openxmlformats.org/drawingml/2006/main">
+            <a:noAutofit/>
+          </a:bodyPr>
+          <a:lstStyle xmlns:a="http://schemas.openxmlformats.org/drawingml/2006/main"/>
+          <a:p xmlns:a="http://schemas.openxmlformats.org/drawingml/2006/main">
+            <a:pPr>
+              <a:defRPr sz="1950" b="1">
+                <a:solidFill>
+                  <a:srgbClr val="183329"/>
+                </a:solidFill>
+                <a:latin typeface="Malgun Gothic"/>
+                <a:ea typeface="Malgun Gothic"/>
+                <a:cs typeface="Malgun Gothic"/>
+              </a:defRPr>
+            </a:pPr>
+            <a:r>
+              <a:rPr sz="1950" b="1">
+                <a:solidFill>
+                  <a:srgbClr val="183329"/>
+                </a:solidFill>
+                <a:latin typeface="Malgun Gothic"/>
+                <a:ea typeface="Malgun Gothic"/>
+                <a:cs typeface="Malgun Gothic"/>
+              </a:rPr>
+              <a:t>에너지 AI·ETL</a:t>
+            </a:r>
+          </a:p>
+        </p:txBody>
+      </p:sp>
+      <p:sp>
+        <p:nvSpPr>
+          <p:cNvPr id="17" name="">
+            <a:extLst xmlns:a="http://schemas.openxmlformats.org/drawingml/2006/main">
+              <a:ext uri="{FF2B5EF4-FFF2-40B4-BE49-F238E27FC236}">
+                <a16:creationId xmlns:a16="http://schemas.microsoft.com/office/drawing/2014/main" id="{2857328D-E6DC-4F37-9F8E-367167FA063D}"/>
+              </a:ext>
+            </a:extLst>
+          </p:cNvPr>
+          <p:cNvSpPr>
+            <a:spLocks xmlns:a="http://schemas.openxmlformats.org/drawingml/2006/main" noGrp="1"/>
+          </p:cNvSpPr>
+          <p:nvPr/>
+        </p:nvSpPr>
+        <p:spPr>
+          <a:xfrm xmlns:a="http://schemas.openxmlformats.org/drawingml/2006/main">
+            <a:off x="6324600" y="2657475"/>
+            <a:ext cx="2190750" cy="1571625"/>
+          </a:xfrm>
+          <a:prstGeom xmlns:a="http://schemas.openxmlformats.org/drawingml/2006/main" prst="rect">
+            <a:avLst/>
+          </a:prstGeom>
+          <a:noFill xmlns:a="http://schemas.openxmlformats.org/drawingml/2006/main"/>
+          <a:ln xmlns:a="http://schemas.openxmlformats.org/drawingml/2006/main" w="0">
+            <a:noFill/>
+          </a:ln>
+        </p:spPr>
+        <p:txBody>
+          <a:bodyPr xmlns:a="http://schemas.openxmlformats.org/drawingml/2006/main">
+            <a:noAutofit/>
+          </a:bodyPr>
+          <a:lstStyle xmlns:a="http://schemas.openxmlformats.org/drawingml/2006/main"/>
+          <a:p xmlns:a="http://schemas.openxmlformats.org/drawingml/2006/main">
+            <a:pPr>
+              <a:defRPr sz="1500" b="0">
+                <a:solidFill>
+                  <a:srgbClr val="4E6157"/>
+                </a:solidFill>
+                <a:latin typeface="Malgun Gothic"/>
+                <a:ea typeface="Malgun Gothic"/>
+                <a:cs typeface="Malgun Gothic"/>
+              </a:defRPr>
+            </a:pPr>
+            <a:r>
+              <a:rPr sz="1500" b="0">
+                <a:solidFill>
+                  <a:srgbClr val="4E6157"/>
+                </a:solidFill>
+                <a:latin typeface="Malgun Gothic"/>
+                <a:ea typeface="Malgun Gothic"/>
+                <a:cs typeface="Malgun Gothic"/>
+              </a:rPr>
+              <a:t>공개 데이터 정제</a:t>
+            </a:r>
+          </a:p>
+          <a:p xmlns:a="http://schemas.openxmlformats.org/drawingml/2006/main">
+            <a:pPr>
+              <a:defRPr sz="1500" b="0">
+                <a:solidFill>
+                  <a:srgbClr val="4E6157"/>
+                </a:solidFill>
+                <a:latin typeface="Malgun Gothic"/>
+                <a:ea typeface="Malgun Gothic"/>
+                <a:cs typeface="Malgun Gothic"/>
+              </a:defRPr>
+            </a:pPr>
+            <a:r>
+              <a:rPr sz="1500" b="0">
+                <a:solidFill>
+                  <a:srgbClr val="4E6157"/>
+                </a:solidFill>
+                <a:latin typeface="Malgun Gothic"/>
+                <a:ea typeface="Malgun Gothic"/>
+                <a:cs typeface="Malgun Gothic"/>
+              </a:rPr>
+              <a:t>조건별 회귀모델</a:t>
+            </a:r>
+          </a:p>
+          <a:p xmlns:a="http://schemas.openxmlformats.org/drawingml/2006/main">
+            <a:pPr>
+              <a:defRPr sz="1500" b="0">
+                <a:solidFill>
+                  <a:srgbClr val="4E6157"/>
+                </a:solidFill>
+                <a:latin typeface="Malgun Gothic"/>
+                <a:ea typeface="Malgun Gothic"/>
+                <a:cs typeface="Malgun Gothic"/>
+              </a:defRPr>
+            </a:pPr>
+            <a:r>
+              <a:rPr sz="1500" b="0">
+                <a:solidFill>
+                  <a:srgbClr val="4E6157"/>
+                </a:solidFill>
+                <a:latin typeface="Malgun Gothic"/>
+                <a:ea typeface="Malgun Gothic"/>
+                <a:cs typeface="Malgun Gothic"/>
+              </a:rPr>
+              <a:t>비교군·평가 설계</a:t>
+            </a:r>
+          </a:p>
+        </p:txBody>
+      </p:sp>
+      <p:sp>
+        <p:nvSpPr>
           <p:cNvPr id="18" name="">
             <a:extLst xmlns:a="http://schemas.openxmlformats.org/drawingml/2006/main">
               <a:ext uri="{FF2B5EF4-FFF2-40B4-BE49-F238E27FC236}">
-                <a16:creationId xmlns:a16="http://schemas.microsoft.com/office/drawing/2014/main" id="{A886BBD5-F099-4CF8-9C98-6649853752D9}"/>
-              </a:ext>
-            </a:extLst>
-          </p:cNvPr>
-          <p:cNvSpPr>
-            <a:spLocks xmlns:a="http://schemas.openxmlformats.org/drawingml/2006/main" noGrp="1"/>
-          </p:cNvSpPr>
-          <p:nvPr/>
-        </p:nvSpPr>
-        <p:spPr>
-          <a:xfrm xmlns:a="http://schemas.openxmlformats.org/drawingml/2006/main">
-            <a:off x="6324600" y="1600200"/>
-            <a:ext cx="2190750" cy="304800"/>
-          </a:xfrm>
-          <a:prstGeom xmlns:a="http://schemas.openxmlformats.org/drawingml/2006/main" prst="rect">
-            <a:avLst/>
-          </a:prstGeom>
-          <a:noFill xmlns:a="http://schemas.openxmlformats.org/drawingml/2006/main"/>
-          <a:ln xmlns:a="http://schemas.openxmlformats.org/drawingml/2006/main" w="0">
-            <a:noFill/>
-          </a:ln>
-        </p:spPr>
-        <p:txBody>
-          <a:bodyPr xmlns:a="http://schemas.openxmlformats.org/drawingml/2006/main">
-            <a:noAutofit/>
-          </a:bodyPr>
-          <a:lstStyle xmlns:a="http://schemas.openxmlformats.org/drawingml/2006/main"/>
-          <a:p xmlns:a="http://schemas.openxmlformats.org/drawingml/2006/main">
-            <a:pPr>
-              <a:defRPr sz="1500" b="1">
-                <a:solidFill>
-                  <a:srgbClr val="127452"/>
-                </a:solidFill>
-                <a:latin typeface="Malgun Gothic"/>
-                <a:ea typeface="Malgun Gothic"/>
-                <a:cs typeface="Malgun Gothic"/>
-              </a:defRPr>
-            </a:pPr>
-            <a:r>
-              <a:rPr sz="1500" b="1">
-                <a:solidFill>
-                  <a:srgbClr val="127452"/>
-                </a:solidFill>
-                <a:latin typeface="Malgun Gothic"/>
-                <a:ea typeface="Malgun Gothic"/>
-                <a:cs typeface="Malgun Gothic"/>
-              </a:rPr>
-              <a:t>03</a:t>
-            </a:r>
-          </a:p>
-        </p:txBody>
-      </p:sp>
-      <p:sp>
-        <p:nvSpPr>
-          <p:cNvPr id="19" name="">
-            <a:extLst xmlns:a="http://schemas.openxmlformats.org/drawingml/2006/main">
-              <a:ext uri="{FF2B5EF4-FFF2-40B4-BE49-F238E27FC236}">
-                <a16:creationId xmlns:a16="http://schemas.microsoft.com/office/drawing/2014/main" id="{D0989E17-5857-454C-ACB5-5233EFAE5E96}"/>
-              </a:ext>
-            </a:extLst>
-          </p:cNvPr>
-          <p:cNvSpPr>
-            <a:spLocks xmlns:a="http://schemas.openxmlformats.org/drawingml/2006/main" noGrp="1"/>
-          </p:cNvSpPr>
-          <p:nvPr/>
-        </p:nvSpPr>
-        <p:spPr>
-          <a:xfrm xmlns:a="http://schemas.openxmlformats.org/drawingml/2006/main">
-            <a:off x="6324600" y="2009775"/>
-            <a:ext cx="2190750" cy="523875"/>
-          </a:xfrm>
-          <a:prstGeom xmlns:a="http://schemas.openxmlformats.org/drawingml/2006/main" prst="rect">
-            <a:avLst/>
-          </a:prstGeom>
-          <a:noFill xmlns:a="http://schemas.openxmlformats.org/drawingml/2006/main"/>
-          <a:ln xmlns:a="http://schemas.openxmlformats.org/drawingml/2006/main" w="0">
-            <a:noFill/>
-          </a:ln>
-        </p:spPr>
-        <p:txBody>
-          <a:bodyPr xmlns:a="http://schemas.openxmlformats.org/drawingml/2006/main">
-            <a:noAutofit/>
-          </a:bodyPr>
-          <a:lstStyle xmlns:a="http://schemas.openxmlformats.org/drawingml/2006/main"/>
-          <a:p xmlns:a="http://schemas.openxmlformats.org/drawingml/2006/main">
-            <a:pPr>
-              <a:defRPr sz="1950" b="1">
-                <a:solidFill>
-                  <a:srgbClr val="183329"/>
-                </a:solidFill>
-                <a:latin typeface="Malgun Gothic"/>
-                <a:ea typeface="Malgun Gothic"/>
-                <a:cs typeface="Malgun Gothic"/>
-              </a:defRPr>
-            </a:pPr>
-            <a:r>
-              <a:rPr sz="1950" b="1">
-                <a:solidFill>
-                  <a:srgbClr val="183329"/>
-                </a:solidFill>
-                <a:latin typeface="Malgun Gothic"/>
-                <a:ea typeface="Malgun Gothic"/>
-                <a:cs typeface="Malgun Gothic"/>
-              </a:rPr>
-              <a:t>LLM·기록</a:t>
-            </a:r>
-          </a:p>
-        </p:txBody>
-      </p:sp>
-      <p:sp>
-        <p:nvSpPr>
-          <p:cNvPr id="20" name="">
-            <a:extLst xmlns:a="http://schemas.openxmlformats.org/drawingml/2006/main">
-              <a:ext uri="{FF2B5EF4-FFF2-40B4-BE49-F238E27FC236}">
-                <a16:creationId xmlns:a16="http://schemas.microsoft.com/office/drawing/2014/main" id="{6E74FC17-E36B-4245-93F4-411A878F5636}"/>
-              </a:ext>
-            </a:extLst>
-          </p:cNvPr>
-          <p:cNvSpPr>
-            <a:spLocks xmlns:a="http://schemas.openxmlformats.org/drawingml/2006/main" noGrp="1"/>
-          </p:cNvSpPr>
-          <p:nvPr/>
-        </p:nvSpPr>
-        <p:spPr>
-          <a:xfrm xmlns:a="http://schemas.openxmlformats.org/drawingml/2006/main">
-            <a:off x="6324600" y="2609850"/>
-            <a:ext cx="2190750" cy="1552575"/>
-          </a:xfrm>
-          <a:prstGeom xmlns:a="http://schemas.openxmlformats.org/drawingml/2006/main" prst="rect">
-            <a:avLst/>
-          </a:prstGeom>
-          <a:noFill xmlns:a="http://schemas.openxmlformats.org/drawingml/2006/main"/>
-          <a:ln xmlns:a="http://schemas.openxmlformats.org/drawingml/2006/main" w="0">
-            <a:noFill/>
-          </a:ln>
-        </p:spPr>
-        <p:txBody>
-          <a:bodyPr xmlns:a="http://schemas.openxmlformats.org/drawingml/2006/main">
-            <a:noAutofit/>
-          </a:bodyPr>
-          <a:lstStyle xmlns:a="http://schemas.openxmlformats.org/drawingml/2006/main"/>
-          <a:p xmlns:a="http://schemas.openxmlformats.org/drawingml/2006/main">
-            <a:pPr>
-              <a:defRPr sz="1500" b="0">
-                <a:solidFill>
-                  <a:srgbClr val="4E6157"/>
-                </a:solidFill>
-                <a:latin typeface="Malgun Gothic"/>
-                <a:ea typeface="Malgun Gothic"/>
-                <a:cs typeface="Malgun Gothic"/>
-              </a:defRPr>
-            </a:pPr>
-            <a:r>
-              <a:rPr sz="1500" b="0">
-                <a:solidFill>
-                  <a:srgbClr val="4E6157"/>
-                </a:solidFill>
-                <a:latin typeface="Malgun Gothic"/>
-                <a:ea typeface="Malgun Gothic"/>
-                <a:cs typeface="Malgun Gothic"/>
-              </a:rPr>
-              <a:t>실행환경 확인 후 연결</a:t>
-            </a:r>
-          </a:p>
-          <a:p xmlns:a="http://schemas.openxmlformats.org/drawingml/2006/main">
-            <a:pPr>
-              <a:defRPr sz="1500" b="0">
-                <a:solidFill>
-                  <a:srgbClr val="4E6157"/>
-                </a:solidFill>
-                <a:latin typeface="Malgun Gothic"/>
-                <a:ea typeface="Malgun Gothic"/>
-                <a:cs typeface="Malgun Gothic"/>
-              </a:defRPr>
-            </a:pPr>
-            <a:r>
-              <a:rPr sz="1500" b="0">
-                <a:solidFill>
-                  <a:srgbClr val="4E6157"/>
-                </a:solidFill>
-                <a:latin typeface="Malgun Gothic"/>
-                <a:ea typeface="Malgun Gothic"/>
-                <a:cs typeface="Malgun Gothic"/>
-              </a:rPr>
-              <a:t>근거 인용·요청서 저장</a:t>
-            </a:r>
-          </a:p>
-        </p:txBody>
-      </p:sp>
-      <p:sp>
-        <p:nvSpPr>
-          <p:cNvPr id="21" name="">
-            <a:extLst xmlns:a="http://schemas.openxmlformats.org/drawingml/2006/main">
-              <a:ext uri="{FF2B5EF4-FFF2-40B4-BE49-F238E27FC236}">
-                <a16:creationId xmlns:a16="http://schemas.microsoft.com/office/drawing/2014/main" id="{883FA3BC-D85B-4DDB-A336-53E73DA7AAE8}"/>
-              </a:ext>
-            </a:extLst>
-          </p:cNvPr>
-          <p:cNvSpPr>
-            <a:spLocks xmlns:a="http://schemas.openxmlformats.org/drawingml/2006/main" noGrp="1"/>
-          </p:cNvSpPr>
-          <p:nvPr/>
-        </p:nvSpPr>
-        <p:spPr>
-          <a:xfrm xmlns:a="http://schemas.openxmlformats.org/drawingml/2006/main">
-            <a:off x="6324600" y="3686175"/>
-            <a:ext cx="2190750" cy="361950"/>
-          </a:xfrm>
-          <a:prstGeom xmlns:a="http://schemas.openxmlformats.org/drawingml/2006/main" prst="rect">
-            <a:avLst/>
-          </a:prstGeom>
-          <a:noFill xmlns:a="http://schemas.openxmlformats.org/drawingml/2006/main"/>
-          <a:ln xmlns:a="http://schemas.openxmlformats.org/drawingml/2006/main" w="0">
-            <a:noFill/>
-          </a:ln>
-        </p:spPr>
-        <p:txBody>
-          <a:bodyPr xmlns:a="http://schemas.openxmlformats.org/drawingml/2006/main">
-            <a:noAutofit/>
-          </a:bodyPr>
-          <a:lstStyle xmlns:a="http://schemas.openxmlformats.org/drawingml/2006/main"/>
-          <a:p xmlns:a="http://schemas.openxmlformats.org/drawingml/2006/main">
-            <a:pPr>
-              <a:defRPr sz="1650" b="1">
-                <a:solidFill>
-                  <a:srgbClr val="127452"/>
-                </a:solidFill>
-                <a:latin typeface="Malgun Gothic"/>
-                <a:ea typeface="Malgun Gothic"/>
-                <a:cs typeface="Malgun Gothic"/>
-              </a:defRPr>
-            </a:pPr>
-            <a:r>
-              <a:rPr sz="1650" b="1">
-                <a:solidFill>
-                  <a:srgbClr val="127452"/>
-                </a:solidFill>
-                <a:latin typeface="Malgun Gothic"/>
-                <a:ea typeface="Malgun Gothic"/>
-                <a:cs typeface="Malgun Gothic"/>
-              </a:rPr>
-              <a:t>10~16인시</a:t>
-            </a:r>
-          </a:p>
-        </p:txBody>
-      </p:sp>
-      <p:sp>
-        <p:nvSpPr>
-          <p:cNvPr id="22" name="">
-            <a:extLst xmlns:a="http://schemas.openxmlformats.org/drawingml/2006/main">
-              <a:ext uri="{FF2B5EF4-FFF2-40B4-BE49-F238E27FC236}">
-                <a16:creationId xmlns:a16="http://schemas.microsoft.com/office/drawing/2014/main" id="{8CF6A3E9-5B78-4266-8074-C1A9E354E363}"/>
-              </a:ext>
-            </a:extLst>
-          </p:cNvPr>
-          <p:cNvSpPr>
-            <a:spLocks xmlns:a="http://schemas.openxmlformats.org/drawingml/2006/main" noGrp="1"/>
-          </p:cNvSpPr>
-          <p:nvPr/>
-        </p:nvSpPr>
-        <p:spPr>
-          <a:xfrm xmlns:a="http://schemas.openxmlformats.org/drawingml/2006/main">
-            <a:off x="8858250" y="1428750"/>
-            <a:ext cx="2533650" cy="2895600"/>
+                <a16:creationId xmlns:a16="http://schemas.microsoft.com/office/drawing/2014/main" id="{3EC72F6D-41A0-4138-9442-6AC204DBB94D}"/>
+              </a:ext>
+            </a:extLst>
+          </p:cNvPr>
+          <p:cNvSpPr>
+            <a:spLocks xmlns:a="http://schemas.openxmlformats.org/drawingml/2006/main" noGrp="1"/>
+          </p:cNvSpPr>
+          <p:nvPr/>
+        </p:nvSpPr>
+        <p:spPr>
+          <a:xfrm xmlns:a="http://schemas.openxmlformats.org/drawingml/2006/main">
+            <a:off x="8858250" y="1476375"/>
+            <a:ext cx="2533650" cy="2914650"/>
           </a:xfrm>
           <a:prstGeom xmlns:a="http://schemas.openxmlformats.org/drawingml/2006/main" prst="rect">
             <a:avLst/>
@@ -4376,153 +4197,313 @@
       </p:sp>
       <p:sp>
         <p:nvSpPr>
+          <p:cNvPr id="19" name="">
+            <a:extLst xmlns:a="http://schemas.openxmlformats.org/drawingml/2006/main">
+              <a:ext uri="{FF2B5EF4-FFF2-40B4-BE49-F238E27FC236}">
+                <a16:creationId xmlns:a16="http://schemas.microsoft.com/office/drawing/2014/main" id="{838C2DD4-2D1F-4CD6-A9CE-6836BFEA04D8}"/>
+              </a:ext>
+            </a:extLst>
+          </p:cNvPr>
+          <p:cNvSpPr>
+            <a:spLocks xmlns:a="http://schemas.openxmlformats.org/drawingml/2006/main" noGrp="1"/>
+          </p:cNvSpPr>
+          <p:nvPr/>
+        </p:nvSpPr>
+        <p:spPr>
+          <a:xfrm xmlns:a="http://schemas.openxmlformats.org/drawingml/2006/main">
+            <a:off x="9029700" y="1647825"/>
+            <a:ext cx="2190750" cy="304800"/>
+          </a:xfrm>
+          <a:prstGeom xmlns:a="http://schemas.openxmlformats.org/drawingml/2006/main" prst="rect">
+            <a:avLst/>
+          </a:prstGeom>
+          <a:noFill xmlns:a="http://schemas.openxmlformats.org/drawingml/2006/main"/>
+          <a:ln xmlns:a="http://schemas.openxmlformats.org/drawingml/2006/main" w="0">
+            <a:noFill/>
+          </a:ln>
+        </p:spPr>
+        <p:txBody>
+          <a:bodyPr xmlns:a="http://schemas.openxmlformats.org/drawingml/2006/main">
+            <a:noAutofit/>
+          </a:bodyPr>
+          <a:lstStyle xmlns:a="http://schemas.openxmlformats.org/drawingml/2006/main"/>
+          <a:p xmlns:a="http://schemas.openxmlformats.org/drawingml/2006/main">
+            <a:pPr>
+              <a:defRPr sz="1500" b="1">
+                <a:solidFill>
+                  <a:srgbClr val="127452"/>
+                </a:solidFill>
+                <a:latin typeface="Malgun Gothic"/>
+                <a:ea typeface="Malgun Gothic"/>
+                <a:cs typeface="Malgun Gothic"/>
+              </a:defRPr>
+            </a:pPr>
+            <a:r>
+              <a:rPr sz="1500" b="1">
+                <a:solidFill>
+                  <a:srgbClr val="127452"/>
+                </a:solidFill>
+                <a:latin typeface="Malgun Gothic"/>
+                <a:ea typeface="Malgun Gothic"/>
+                <a:cs typeface="Malgun Gothic"/>
+              </a:rPr>
+              <a:t>04</a:t>
+            </a:r>
+          </a:p>
+        </p:txBody>
+      </p:sp>
+      <p:sp>
+        <p:nvSpPr>
+          <p:cNvPr id="20" name="">
+            <a:extLst xmlns:a="http://schemas.openxmlformats.org/drawingml/2006/main">
+              <a:ext uri="{FF2B5EF4-FFF2-40B4-BE49-F238E27FC236}">
+                <a16:creationId xmlns:a16="http://schemas.microsoft.com/office/drawing/2014/main" id="{E107EB15-F703-43BA-82C0-19267B16A4C8}"/>
+              </a:ext>
+            </a:extLst>
+          </p:cNvPr>
+          <p:cNvSpPr>
+            <a:spLocks xmlns:a="http://schemas.openxmlformats.org/drawingml/2006/main" noGrp="1"/>
+          </p:cNvSpPr>
+          <p:nvPr/>
+        </p:nvSpPr>
+        <p:spPr>
+          <a:xfrm xmlns:a="http://schemas.openxmlformats.org/drawingml/2006/main">
+            <a:off x="9029700" y="2057400"/>
+            <a:ext cx="2190750" cy="523875"/>
+          </a:xfrm>
+          <a:prstGeom xmlns:a="http://schemas.openxmlformats.org/drawingml/2006/main" prst="rect">
+            <a:avLst/>
+          </a:prstGeom>
+          <a:noFill xmlns:a="http://schemas.openxmlformats.org/drawingml/2006/main"/>
+          <a:ln xmlns:a="http://schemas.openxmlformats.org/drawingml/2006/main" w="0">
+            <a:noFill/>
+          </a:ln>
+        </p:spPr>
+        <p:txBody>
+          <a:bodyPr xmlns:a="http://schemas.openxmlformats.org/drawingml/2006/main">
+            <a:noAutofit/>
+          </a:bodyPr>
+          <a:lstStyle xmlns:a="http://schemas.openxmlformats.org/drawingml/2006/main"/>
+          <a:p xmlns:a="http://schemas.openxmlformats.org/drawingml/2006/main">
+            <a:pPr>
+              <a:defRPr sz="1950" b="1">
+                <a:solidFill>
+                  <a:srgbClr val="183329"/>
+                </a:solidFill>
+                <a:latin typeface="Malgun Gothic"/>
+                <a:ea typeface="Malgun Gothic"/>
+                <a:cs typeface="Malgun Gothic"/>
+              </a:defRPr>
+            </a:pPr>
+            <a:r>
+              <a:rPr sz="1950" b="1">
+                <a:solidFill>
+                  <a:srgbClr val="183329"/>
+                </a:solidFill>
+                <a:latin typeface="Malgun Gothic"/>
+                <a:ea typeface="Malgun Gothic"/>
+                <a:cs typeface="Malgun Gothic"/>
+              </a:rPr>
+              <a:t>백엔드·통합</a:t>
+            </a:r>
+          </a:p>
+        </p:txBody>
+      </p:sp>
+      <p:sp>
+        <p:nvSpPr>
+          <p:cNvPr id="21" name="">
+            <a:extLst xmlns:a="http://schemas.openxmlformats.org/drawingml/2006/main">
+              <a:ext uri="{FF2B5EF4-FFF2-40B4-BE49-F238E27FC236}">
+                <a16:creationId xmlns:a16="http://schemas.microsoft.com/office/drawing/2014/main" id="{1A1C1EE1-95FD-442C-B88E-AB4D7C560510}"/>
+              </a:ext>
+            </a:extLst>
+          </p:cNvPr>
+          <p:cNvSpPr>
+            <a:spLocks xmlns:a="http://schemas.openxmlformats.org/drawingml/2006/main" noGrp="1"/>
+          </p:cNvSpPr>
+          <p:nvPr/>
+        </p:nvSpPr>
+        <p:spPr>
+          <a:xfrm xmlns:a="http://schemas.openxmlformats.org/drawingml/2006/main">
+            <a:off x="9029700" y="2657475"/>
+            <a:ext cx="2190750" cy="1571625"/>
+          </a:xfrm>
+          <a:prstGeom xmlns:a="http://schemas.openxmlformats.org/drawingml/2006/main" prst="rect">
+            <a:avLst/>
+          </a:prstGeom>
+          <a:noFill xmlns:a="http://schemas.openxmlformats.org/drawingml/2006/main"/>
+          <a:ln xmlns:a="http://schemas.openxmlformats.org/drawingml/2006/main" w="0">
+            <a:noFill/>
+          </a:ln>
+        </p:spPr>
+        <p:txBody>
+          <a:bodyPr xmlns:a="http://schemas.openxmlformats.org/drawingml/2006/main">
+            <a:noAutofit/>
+          </a:bodyPr>
+          <a:lstStyle xmlns:a="http://schemas.openxmlformats.org/drawingml/2006/main"/>
+          <a:p xmlns:a="http://schemas.openxmlformats.org/drawingml/2006/main">
+            <a:pPr>
+              <a:defRPr sz="1500" b="0">
+                <a:solidFill>
+                  <a:srgbClr val="4E6157"/>
+                </a:solidFill>
+                <a:latin typeface="Malgun Gothic"/>
+                <a:ea typeface="Malgun Gothic"/>
+                <a:cs typeface="Malgun Gothic"/>
+              </a:defRPr>
+            </a:pPr>
+            <a:r>
+              <a:rPr sz="1500" b="0">
+                <a:solidFill>
+                  <a:srgbClr val="4E6157"/>
+                </a:solidFill>
+                <a:latin typeface="Malgun Gothic"/>
+                <a:ea typeface="Malgun Gothic"/>
+                <a:cs typeface="Malgun Gothic"/>
+              </a:rPr>
+              <a:t>건물·응답 DB/API</a:t>
+            </a:r>
+          </a:p>
+          <a:p xmlns:a="http://schemas.openxmlformats.org/drawingml/2006/main">
+            <a:pPr>
+              <a:defRPr sz="1500" b="0">
+                <a:solidFill>
+                  <a:srgbClr val="4E6157"/>
+                </a:solidFill>
+                <a:latin typeface="Malgun Gothic"/>
+                <a:ea typeface="Malgun Gothic"/>
+                <a:cs typeface="Malgun Gothic"/>
+              </a:defRPr>
+            </a:pPr>
+            <a:r>
+              <a:rPr sz="1500" b="0">
+                <a:solidFill>
+                  <a:srgbClr val="4E6157"/>
+                </a:solidFill>
+                <a:latin typeface="Malgun Gothic"/>
+                <a:ea typeface="Malgun Gothic"/>
+                <a:cs typeface="Malgun Gothic"/>
+              </a:rPr>
+              <a:t>PDF 요청서 생성</a:t>
+            </a:r>
+          </a:p>
+          <a:p xmlns:a="http://schemas.openxmlformats.org/drawingml/2006/main">
+            <a:pPr>
+              <a:defRPr sz="1500" b="0">
+                <a:solidFill>
+                  <a:srgbClr val="4E6157"/>
+                </a:solidFill>
+                <a:latin typeface="Malgun Gothic"/>
+                <a:ea typeface="Malgun Gothic"/>
+                <a:cs typeface="Malgun Gothic"/>
+              </a:defRPr>
+            </a:pPr>
+            <a:r>
+              <a:rPr sz="1500" b="0">
+                <a:solidFill>
+                  <a:srgbClr val="4E6157"/>
+                </a:solidFill>
+                <a:latin typeface="Malgun Gothic"/>
+                <a:ea typeface="Malgun Gothic"/>
+                <a:cs typeface="Malgun Gothic"/>
+              </a:rPr>
+              <a:t>기능 연결·통합 검증</a:t>
+            </a:r>
+          </a:p>
+        </p:txBody>
+      </p:sp>
+      <p:sp>
+        <p:nvSpPr>
+          <p:cNvPr id="22" name="">
+            <a:extLst xmlns:a="http://schemas.openxmlformats.org/drawingml/2006/main">
+              <a:ext uri="{FF2B5EF4-FFF2-40B4-BE49-F238E27FC236}">
+                <a16:creationId xmlns:a16="http://schemas.microsoft.com/office/drawing/2014/main" id="{D6BBB513-288D-41C7-AA34-8B449E249034}"/>
+              </a:ext>
+            </a:extLst>
+          </p:cNvPr>
+          <p:cNvSpPr>
+            <a:spLocks xmlns:a="http://schemas.openxmlformats.org/drawingml/2006/main" noGrp="1"/>
+          </p:cNvSpPr>
+          <p:nvPr/>
+        </p:nvSpPr>
+        <p:spPr>
+          <a:xfrm xmlns:a="http://schemas.openxmlformats.org/drawingml/2006/main">
+            <a:off x="742950" y="4829175"/>
+            <a:ext cx="10477500" cy="552450"/>
+          </a:xfrm>
+          <a:prstGeom xmlns:a="http://schemas.openxmlformats.org/drawingml/2006/main" prst="rect">
+            <a:avLst/>
+          </a:prstGeom>
+          <a:noFill xmlns:a="http://schemas.openxmlformats.org/drawingml/2006/main"/>
+          <a:ln xmlns:a="http://schemas.openxmlformats.org/drawingml/2006/main" w="0">
+            <a:noFill/>
+          </a:ln>
+        </p:spPr>
+        <p:txBody>
+          <a:bodyPr xmlns:a="http://schemas.openxmlformats.org/drawingml/2006/main">
+            <a:noAutofit/>
+          </a:bodyPr>
+          <a:lstStyle xmlns:a="http://schemas.openxmlformats.org/drawingml/2006/main"/>
+          <a:p xmlns:a="http://schemas.openxmlformats.org/drawingml/2006/main">
+            <a:pPr>
+              <a:defRPr sz="2025" b="1">
+                <a:solidFill>
+                  <a:srgbClr val="127452"/>
+                </a:solidFill>
+                <a:latin typeface="Malgun Gothic"/>
+                <a:ea typeface="Malgun Gothic"/>
+                <a:cs typeface="Malgun Gothic"/>
+              </a:defRPr>
+            </a:pPr>
+            <a:r>
+              <a:rPr sz="2025" b="1">
+                <a:solidFill>
+                  <a:srgbClr val="127452"/>
+                </a:solidFill>
+                <a:latin typeface="Malgun Gothic"/>
+                <a:ea typeface="Malgun Gothic"/>
+                <a:cs typeface="Malgun Gothic"/>
+              </a:rPr>
+              <a:t>웹 화면 ↔ Python 분석·LLM 처리 ↔ 건물·응답 저장 ↔ 조사 요청서</a:t>
+            </a:r>
+          </a:p>
+        </p:txBody>
+      </p:sp>
+      <p:sp>
+        <p:nvSpPr>
           <p:cNvPr id="23" name="">
             <a:extLst xmlns:a="http://schemas.openxmlformats.org/drawingml/2006/main">
               <a:ext uri="{FF2B5EF4-FFF2-40B4-BE49-F238E27FC236}">
-                <a16:creationId xmlns:a16="http://schemas.microsoft.com/office/drawing/2014/main" id="{97D4B269-2C36-48B7-AA8C-DAA83DFE691F}"/>
-              </a:ext>
-            </a:extLst>
-          </p:cNvPr>
-          <p:cNvSpPr>
-            <a:spLocks xmlns:a="http://schemas.openxmlformats.org/drawingml/2006/main" noGrp="1"/>
-          </p:cNvSpPr>
-          <p:nvPr/>
-        </p:nvSpPr>
-        <p:spPr>
-          <a:xfrm xmlns:a="http://schemas.openxmlformats.org/drawingml/2006/main">
-            <a:off x="9029700" y="1600200"/>
-            <a:ext cx="2190750" cy="304800"/>
-          </a:xfrm>
-          <a:prstGeom xmlns:a="http://schemas.openxmlformats.org/drawingml/2006/main" prst="rect">
-            <a:avLst/>
-          </a:prstGeom>
-          <a:noFill xmlns:a="http://schemas.openxmlformats.org/drawingml/2006/main"/>
-          <a:ln xmlns:a="http://schemas.openxmlformats.org/drawingml/2006/main" w="0">
-            <a:noFill/>
-          </a:ln>
-        </p:spPr>
-        <p:txBody>
-          <a:bodyPr xmlns:a="http://schemas.openxmlformats.org/drawingml/2006/main">
-            <a:noAutofit/>
-          </a:bodyPr>
-          <a:lstStyle xmlns:a="http://schemas.openxmlformats.org/drawingml/2006/main"/>
-          <a:p xmlns:a="http://schemas.openxmlformats.org/drawingml/2006/main">
-            <a:pPr>
-              <a:defRPr sz="1500" b="1">
-                <a:solidFill>
-                  <a:srgbClr val="127452"/>
-                </a:solidFill>
-                <a:latin typeface="Malgun Gothic"/>
-                <a:ea typeface="Malgun Gothic"/>
-                <a:cs typeface="Malgun Gothic"/>
-              </a:defRPr>
-            </a:pPr>
-            <a:r>
-              <a:rPr sz="1500" b="1">
-                <a:solidFill>
-                  <a:srgbClr val="127452"/>
-                </a:solidFill>
-                <a:latin typeface="Malgun Gothic"/>
-                <a:ea typeface="Malgun Gothic"/>
-                <a:cs typeface="Malgun Gothic"/>
-              </a:rPr>
-              <a:t>04</a:t>
-            </a:r>
-          </a:p>
-        </p:txBody>
-      </p:sp>
-      <p:sp>
-        <p:nvSpPr>
-          <p:cNvPr id="24" name="">
-            <a:extLst xmlns:a="http://schemas.openxmlformats.org/drawingml/2006/main">
-              <a:ext uri="{FF2B5EF4-FFF2-40B4-BE49-F238E27FC236}">
-                <a16:creationId xmlns:a16="http://schemas.microsoft.com/office/drawing/2014/main" id="{1E30671E-BC34-4349-AA72-DA289FC15496}"/>
-              </a:ext>
-            </a:extLst>
-          </p:cNvPr>
-          <p:cNvSpPr>
-            <a:spLocks xmlns:a="http://schemas.openxmlformats.org/drawingml/2006/main" noGrp="1"/>
-          </p:cNvSpPr>
-          <p:nvPr/>
-        </p:nvSpPr>
-        <p:spPr>
-          <a:xfrm xmlns:a="http://schemas.openxmlformats.org/drawingml/2006/main">
-            <a:off x="9029700" y="2009775"/>
-            <a:ext cx="2190750" cy="523875"/>
-          </a:xfrm>
-          <a:prstGeom xmlns:a="http://schemas.openxmlformats.org/drawingml/2006/main" prst="rect">
-            <a:avLst/>
-          </a:prstGeom>
-          <a:noFill xmlns:a="http://schemas.openxmlformats.org/drawingml/2006/main"/>
-          <a:ln xmlns:a="http://schemas.openxmlformats.org/drawingml/2006/main" w="0">
-            <a:noFill/>
-          </a:ln>
-        </p:spPr>
-        <p:txBody>
-          <a:bodyPr xmlns:a="http://schemas.openxmlformats.org/drawingml/2006/main">
-            <a:noAutofit/>
-          </a:bodyPr>
-          <a:lstStyle xmlns:a="http://schemas.openxmlformats.org/drawingml/2006/main"/>
-          <a:p xmlns:a="http://schemas.openxmlformats.org/drawingml/2006/main">
-            <a:pPr>
-              <a:defRPr sz="1950" b="1">
-                <a:solidFill>
-                  <a:srgbClr val="183329"/>
-                </a:solidFill>
-                <a:latin typeface="Malgun Gothic"/>
-                <a:ea typeface="Malgun Gothic"/>
-                <a:cs typeface="Malgun Gothic"/>
-              </a:defRPr>
-            </a:pPr>
-            <a:r>
-              <a:rPr sz="1950" b="1">
-                <a:solidFill>
-                  <a:srgbClr val="183329"/>
-                </a:solidFill>
-                <a:latin typeface="Malgun Gothic"/>
-                <a:ea typeface="Malgun Gothic"/>
-                <a:cs typeface="Malgun Gothic"/>
-              </a:rPr>
-              <a:t>검증·시연</a:t>
-            </a:r>
-          </a:p>
-        </p:txBody>
-      </p:sp>
-      <p:sp>
-        <p:nvSpPr>
-          <p:cNvPr id="25" name="">
-            <a:extLst xmlns:a="http://schemas.openxmlformats.org/drawingml/2006/main">
-              <a:ext uri="{FF2B5EF4-FFF2-40B4-BE49-F238E27FC236}">
-                <a16:creationId xmlns:a16="http://schemas.microsoft.com/office/drawing/2014/main" id="{73057353-D7A7-464A-B21B-027FC0A8C1AF}"/>
-              </a:ext>
-            </a:extLst>
-          </p:cNvPr>
-          <p:cNvSpPr>
-            <a:spLocks xmlns:a="http://schemas.openxmlformats.org/drawingml/2006/main" noGrp="1"/>
-          </p:cNvSpPr>
-          <p:nvPr/>
-        </p:nvSpPr>
-        <p:spPr>
-          <a:xfrm xmlns:a="http://schemas.openxmlformats.org/drawingml/2006/main">
-            <a:off x="9029700" y="2609850"/>
-            <a:ext cx="2190750" cy="1552575"/>
-          </a:xfrm>
-          <a:prstGeom xmlns:a="http://schemas.openxmlformats.org/drawingml/2006/main" prst="rect">
-            <a:avLst/>
-          </a:prstGeom>
-          <a:noFill xmlns:a="http://schemas.openxmlformats.org/drawingml/2006/main"/>
-          <a:ln xmlns:a="http://schemas.openxmlformats.org/drawingml/2006/main" w="0">
-            <a:noFill/>
-          </a:ln>
-        </p:spPr>
-        <p:txBody>
-          <a:bodyPr xmlns:a="http://schemas.openxmlformats.org/drawingml/2006/main">
-            <a:noAutofit/>
-          </a:bodyPr>
-          <a:lstStyle xmlns:a="http://schemas.openxmlformats.org/drawingml/2006/main"/>
-          <a:p xmlns:a="http://schemas.openxmlformats.org/drawingml/2006/main">
-            <a:pPr>
-              <a:defRPr sz="1500" b="0">
+                <a16:creationId xmlns:a16="http://schemas.microsoft.com/office/drawing/2014/main" id="{352E02E6-6FFC-4E8F-BB3D-1EAC224638DF}"/>
+              </a:ext>
+            </a:extLst>
+          </p:cNvPr>
+          <p:cNvSpPr>
+            <a:spLocks xmlns:a="http://schemas.openxmlformats.org/drawingml/2006/main" noGrp="1"/>
+          </p:cNvSpPr>
+          <p:nvPr/>
+        </p:nvSpPr>
+        <p:spPr>
+          <a:xfrm xmlns:a="http://schemas.openxmlformats.org/drawingml/2006/main">
+            <a:off x="742950" y="5524500"/>
+            <a:ext cx="10477500" cy="381000"/>
+          </a:xfrm>
+          <a:prstGeom xmlns:a="http://schemas.openxmlformats.org/drawingml/2006/main" prst="rect">
+            <a:avLst/>
+          </a:prstGeom>
+          <a:noFill xmlns:a="http://schemas.openxmlformats.org/drawingml/2006/main"/>
+          <a:ln xmlns:a="http://schemas.openxmlformats.org/drawingml/2006/main" w="0">
+            <a:noFill/>
+          </a:ln>
+        </p:spPr>
+        <p:txBody>
+          <a:bodyPr xmlns:a="http://schemas.openxmlformats.org/drawingml/2006/main">
+            <a:noAutofit/>
+          </a:bodyPr>
+          <a:lstStyle xmlns:a="http://schemas.openxmlformats.org/drawingml/2006/main"/>
+          <a:p xmlns:a="http://schemas.openxmlformats.org/drawingml/2006/main">
+            <a:pPr>
+              <a:defRPr sz="1725" b="0">
                 <a:solidFill>
                   <a:srgbClr val="4E6157"/>
                 </a:solidFill>
@@ -4532,7 +4513,7 @@
               </a:defRPr>
             </a:pPr>
             <a:r>
-              <a:rPr sz="1500" b="0">
+              <a:rPr sz="1725" b="0">
                 <a:solidFill>
                   <a:srgbClr val="4E6157"/>
                 </a:solidFill>
@@ -4540,224 +4521,7 @@
                 <a:ea typeface="Malgun Gothic"/>
                 <a:cs typeface="Malgun Gothic"/>
               </a:rPr>
-              <a:t>실패 경로·파일 저장</a:t>
-            </a:r>
-          </a:p>
-          <a:p xmlns:a="http://schemas.openxmlformats.org/drawingml/2006/main">
-            <a:pPr>
-              <a:defRPr sz="1500" b="0">
-                <a:solidFill>
-                  <a:srgbClr val="4E6157"/>
-                </a:solidFill>
-                <a:latin typeface="Malgun Gothic"/>
-                <a:ea typeface="Malgun Gothic"/>
-                <a:cs typeface="Malgun Gothic"/>
-              </a:defRPr>
-            </a:pPr>
-            <a:r>
-              <a:rPr sz="1500" b="0">
-                <a:solidFill>
-                  <a:srgbClr val="4E6157"/>
-                </a:solidFill>
-                <a:latin typeface="Malgun Gothic"/>
-                <a:ea typeface="Malgun Gothic"/>
-                <a:cs typeface="Malgun Gothic"/>
-              </a:rPr>
-              <a:t>사용자 검토·시연</a:t>
-            </a:r>
-          </a:p>
-        </p:txBody>
-      </p:sp>
-      <p:sp>
-        <p:nvSpPr>
-          <p:cNvPr id="26" name="">
-            <a:extLst xmlns:a="http://schemas.openxmlformats.org/drawingml/2006/main">
-              <a:ext uri="{FF2B5EF4-FFF2-40B4-BE49-F238E27FC236}">
-                <a16:creationId xmlns:a16="http://schemas.microsoft.com/office/drawing/2014/main" id="{8BDE84F7-A3B8-44F9-8483-EADCD4DC75BD}"/>
-              </a:ext>
-            </a:extLst>
-          </p:cNvPr>
-          <p:cNvSpPr>
-            <a:spLocks xmlns:a="http://schemas.openxmlformats.org/drawingml/2006/main" noGrp="1"/>
-          </p:cNvSpPr>
-          <p:nvPr/>
-        </p:nvSpPr>
-        <p:spPr>
-          <a:xfrm xmlns:a="http://schemas.openxmlformats.org/drawingml/2006/main">
-            <a:off x="9029700" y="3686175"/>
-            <a:ext cx="2190750" cy="361950"/>
-          </a:xfrm>
-          <a:prstGeom xmlns:a="http://schemas.openxmlformats.org/drawingml/2006/main" prst="rect">
-            <a:avLst/>
-          </a:prstGeom>
-          <a:noFill xmlns:a="http://schemas.openxmlformats.org/drawingml/2006/main"/>
-          <a:ln xmlns:a="http://schemas.openxmlformats.org/drawingml/2006/main" w="0">
-            <a:noFill/>
-          </a:ln>
-        </p:spPr>
-        <p:txBody>
-          <a:bodyPr xmlns:a="http://schemas.openxmlformats.org/drawingml/2006/main">
-            <a:noAutofit/>
-          </a:bodyPr>
-          <a:lstStyle xmlns:a="http://schemas.openxmlformats.org/drawingml/2006/main"/>
-          <a:p xmlns:a="http://schemas.openxmlformats.org/drawingml/2006/main">
-            <a:pPr>
-              <a:defRPr sz="1650" b="1">
-                <a:solidFill>
-                  <a:srgbClr val="127452"/>
-                </a:solidFill>
-                <a:latin typeface="Malgun Gothic"/>
-                <a:ea typeface="Malgun Gothic"/>
-                <a:cs typeface="Malgun Gothic"/>
-              </a:defRPr>
-            </a:pPr>
-            <a:r>
-              <a:rPr sz="1650" b="1">
-                <a:solidFill>
-                  <a:srgbClr val="127452"/>
-                </a:solidFill>
-                <a:latin typeface="Malgun Gothic"/>
-                <a:ea typeface="Malgun Gothic"/>
-                <a:cs typeface="Malgun Gothic"/>
-              </a:rPr>
-              <a:t>8~12인시</a:t>
-            </a:r>
-          </a:p>
-        </p:txBody>
-      </p:sp>
-      <p:sp>
-        <p:nvSpPr>
-          <p:cNvPr id="27" name="">
-            <a:extLst xmlns:a="http://schemas.openxmlformats.org/drawingml/2006/main">
-              <a:ext uri="{FF2B5EF4-FFF2-40B4-BE49-F238E27FC236}">
-                <a16:creationId xmlns:a16="http://schemas.microsoft.com/office/drawing/2014/main" id="{7E7FC67C-EA17-4648-9E7A-C10181DD1453}"/>
-              </a:ext>
-            </a:extLst>
-          </p:cNvPr>
-          <p:cNvSpPr>
-            <a:spLocks xmlns:a="http://schemas.openxmlformats.org/drawingml/2006/main" noGrp="1"/>
-          </p:cNvSpPr>
-          <p:nvPr/>
-        </p:nvSpPr>
-        <p:spPr>
-          <a:xfrm xmlns:a="http://schemas.openxmlformats.org/drawingml/2006/main">
-            <a:off x="742950" y="4657725"/>
-            <a:ext cx="10477500" cy="542925"/>
-          </a:xfrm>
-          <a:prstGeom xmlns:a="http://schemas.openxmlformats.org/drawingml/2006/main" prst="rect">
-            <a:avLst/>
-          </a:prstGeom>
-          <a:noFill xmlns:a="http://schemas.openxmlformats.org/drawingml/2006/main"/>
-          <a:ln xmlns:a="http://schemas.openxmlformats.org/drawingml/2006/main" w="0">
-            <a:noFill/>
-          </a:ln>
-        </p:spPr>
-        <p:txBody>
-          <a:bodyPr xmlns:a="http://schemas.openxmlformats.org/drawingml/2006/main">
-            <a:noAutofit/>
-          </a:bodyPr>
-          <a:lstStyle xmlns:a="http://schemas.openxmlformats.org/drawingml/2006/main"/>
-          <a:p xmlns:a="http://schemas.openxmlformats.org/drawingml/2006/main">
-            <a:pPr>
-              <a:defRPr sz="1875" b="1">
-                <a:solidFill>
-                  <a:srgbClr val="127452"/>
-                </a:solidFill>
-                <a:latin typeface="Malgun Gothic"/>
-                <a:ea typeface="Malgun Gothic"/>
-                <a:cs typeface="Malgun Gothic"/>
-              </a:defRPr>
-            </a:pPr>
-            <a:r>
-              <a:rPr sz="1875" b="1">
-                <a:solidFill>
-                  <a:srgbClr val="127452"/>
-                </a:solidFill>
-                <a:latin typeface="Malgun Gothic"/>
-                <a:ea typeface="Malgun Gothic"/>
-                <a:cs typeface="Malgun Gothic"/>
-              </a:rPr>
-              <a:t>진출 확인 후 핵심 흐름 구현 → 기준선·모델 평가 → 문진 연결 → 통합 시연</a:t>
-            </a:r>
-          </a:p>
-        </p:txBody>
-      </p:sp>
-      <p:sp>
-        <p:nvSpPr>
-          <p:cNvPr id="28" name="">
-            <a:extLst xmlns:a="http://schemas.openxmlformats.org/drawingml/2006/main">
-              <a:ext uri="{FF2B5EF4-FFF2-40B4-BE49-F238E27FC236}">
-                <a16:creationId xmlns:a16="http://schemas.microsoft.com/office/drawing/2014/main" id="{6CDE1A51-351A-4AD7-BC34-F2FFE1B8752A}"/>
-              </a:ext>
-            </a:extLst>
-          </p:cNvPr>
-          <p:cNvSpPr>
-            <a:spLocks xmlns:a="http://schemas.openxmlformats.org/drawingml/2006/main" noGrp="1"/>
-          </p:cNvSpPr>
-          <p:nvPr/>
-        </p:nvSpPr>
-        <p:spPr>
-          <a:xfrm xmlns:a="http://schemas.openxmlformats.org/drawingml/2006/main">
-            <a:off x="742950" y="5276850"/>
-            <a:ext cx="10477500" cy="552450"/>
-          </a:xfrm>
-          <a:prstGeom xmlns:a="http://schemas.openxmlformats.org/drawingml/2006/main" prst="rect">
-            <a:avLst/>
-          </a:prstGeom>
-          <a:noFill xmlns:a="http://schemas.openxmlformats.org/drawingml/2006/main"/>
-          <a:ln xmlns:a="http://schemas.openxmlformats.org/drawingml/2006/main" w="0">
-            <a:noFill/>
-          </a:ln>
-        </p:spPr>
-        <p:txBody>
-          <a:bodyPr xmlns:a="http://schemas.openxmlformats.org/drawingml/2006/main">
-            <a:noAutofit/>
-          </a:bodyPr>
-          <a:lstStyle xmlns:a="http://schemas.openxmlformats.org/drawingml/2006/main"/>
-          <a:p xmlns:a="http://schemas.openxmlformats.org/drawingml/2006/main">
-            <a:pPr>
-              <a:defRPr sz="1500" b="0">
-                <a:solidFill>
-                  <a:srgbClr val="4E6157"/>
-                </a:solidFill>
-                <a:latin typeface="Malgun Gothic"/>
-                <a:ea typeface="Malgun Gothic"/>
-                <a:cs typeface="Malgun Gothic"/>
-              </a:defRPr>
-            </a:pPr>
-            <a:r>
-              <a:rPr sz="1500" b="0">
-                <a:solidFill>
-                  <a:srgbClr val="4E6157"/>
-                </a:solidFill>
-                <a:latin typeface="Malgun Gothic"/>
-                <a:ea typeface="Malgun Gothic"/>
-                <a:cs typeface="Malgun Gothic"/>
-              </a:rPr>
-              <a:t>LLM 키·비용 또는 로컬 실행이 확보되지 않으면 구조화 문진으로 진행한다.</a:t>
-            </a:r>
-          </a:p>
-          <a:p xmlns:a="http://schemas.openxmlformats.org/drawingml/2006/main">
-            <a:pPr>
-              <a:defRPr sz="1500" b="0">
-                <a:solidFill>
-                  <a:srgbClr val="4E6157"/>
-                </a:solidFill>
-                <a:latin typeface="Malgun Gothic"/>
-                <a:ea typeface="Malgun Gothic"/>
-                <a:cs typeface="Malgun Gothic"/>
-              </a:defRPr>
-            </a:pPr>
-            <a:r>
-              <a:rPr sz="1500" b="0">
-                <a:solidFill>
-                  <a:srgbClr val="4E6157"/>
-                </a:solidFill>
-                <a:latin typeface="Malgun Gothic"/>
-                <a:ea typeface="Malgun Gothic"/>
-                <a:cs typeface="Malgun Gothic"/>
-              </a:rPr>
-              <a:t>실시간 API·도면 자동 조회·정량 에너지 시뮬레이션은 초기 구현에 포함하지 않는다.</a:t>
+              <a:t>분석·문진·저장·출력을 모듈로 분리해 기능별 개발과 통합을 진행하는 구성</a:t>
             </a:r>
           </a:p>
         </p:txBody>
@@ -4765,7 +4529,7 @@
     </p:spTree>
     <p:extLst>
       <p:ext uri="{BB962C8B-B14F-4D97-AF65-F5344CB8AC3E}">
-        <p14:creationId xmlns:p14="http://schemas.microsoft.com/office/powerpoint/2010/main" val="1184780654"/>
+        <p14:creationId xmlns:p14="http://schemas.microsoft.com/office/powerpoint/2010/main" val="773763335"/>
       </p:ext>
     </p:extLst>
   </p:cSld>
@@ -4796,7 +4560,7 @@
           <p:cNvPr id="14" name="">
             <a:extLst xmlns:a="http://schemas.openxmlformats.org/drawingml/2006/main">
               <a:ext uri="{FF2B5EF4-FFF2-40B4-BE49-F238E27FC236}">
-                <a16:creationId xmlns:a16="http://schemas.microsoft.com/office/drawing/2014/main" id="{CC6CCF1F-DA55-4C6A-B3E3-C3EA66B23FCC}"/>
+                <a16:creationId xmlns:a16="http://schemas.microsoft.com/office/drawing/2014/main" id="{D45A7B8D-37A1-4EFF-822A-E19D3C54538F}"/>
               </a:ext>
             </a:extLst>
           </p:cNvPr>
@@ -4826,7 +4590,7 @@
           <p:cNvPr id="2" name="">
             <a:extLst xmlns:a="http://schemas.openxmlformats.org/drawingml/2006/main">
               <a:ext uri="{FF2B5EF4-FFF2-40B4-BE49-F238E27FC236}">
-                <a16:creationId xmlns:a16="http://schemas.microsoft.com/office/drawing/2014/main" id="{92019812-F1B8-4DD9-A04D-7BBC39493CCE}"/>
+                <a16:creationId xmlns:a16="http://schemas.microsoft.com/office/drawing/2014/main" id="{C4EED229-17B7-4B04-831C-31FE7F498CB6}"/>
               </a:ext>
             </a:extLst>
           </p:cNvPr>
@@ -4873,7 +4637,7 @@
                 <a:ea typeface="Malgun Gothic"/>
                 <a:cs typeface="Malgun Gothic"/>
               </a:rPr>
-              <a:t>GreenLoop를 선택한 이유와 발전 방향</a:t>
+              <a:t>조사 준비의 부담을 줄이고 리모델링 검토를 구체화한다</a:t>
             </a:r>
           </a:p>
         </p:txBody>
@@ -4883,7 +4647,7 @@
           <p:cNvPr id="3" name="">
             <a:extLst xmlns:a="http://schemas.openxmlformats.org/drawingml/2006/main">
               <a:ext uri="{FF2B5EF4-FFF2-40B4-BE49-F238E27FC236}">
-                <a16:creationId xmlns:a16="http://schemas.microsoft.com/office/drawing/2014/main" id="{7D6F77E6-80FA-44DB-9C1C-49C49119341F}"/>
+                <a16:creationId xmlns:a16="http://schemas.microsoft.com/office/drawing/2014/main" id="{B5D143A5-C7D6-42CD-ABDD-5824862284D5}"/>
               </a:ext>
             </a:extLst>
           </p:cNvPr>
@@ -4913,7 +4677,7 @@
           <p:cNvPr id="4" name="">
             <a:extLst xmlns:a="http://schemas.openxmlformats.org/drawingml/2006/main">
               <a:ext uri="{FF2B5EF4-FFF2-40B4-BE49-F238E27FC236}">
-                <a16:creationId xmlns:a16="http://schemas.microsoft.com/office/drawing/2014/main" id="{D14BEE19-CA75-4C53-BDD9-BDD0FB32EA11}"/>
+                <a16:creationId xmlns:a16="http://schemas.microsoft.com/office/drawing/2014/main" id="{F3F97DAF-69D6-4ED1-BE2A-EB5CA07550CD}"/>
               </a:ext>
             </a:extLst>
           </p:cNvPr>
@@ -4970,7 +4734,7 @@
           <p:cNvPr id="5" name="">
             <a:extLst xmlns:a="http://schemas.openxmlformats.org/drawingml/2006/main">
               <a:ext uri="{FF2B5EF4-FFF2-40B4-BE49-F238E27FC236}">
-                <a16:creationId xmlns:a16="http://schemas.microsoft.com/office/drawing/2014/main" id="{91E9FABD-A530-40F8-A7AF-AB84FEBE1F6C}"/>
+                <a16:creationId xmlns:a16="http://schemas.microsoft.com/office/drawing/2014/main" id="{7FA9DA61-AA02-43FD-85E3-EDA2228E56AB}"/>
               </a:ext>
             </a:extLst>
           </p:cNvPr>
@@ -5027,7 +4791,7 @@
           <p:cNvPr id="6" name="">
             <a:extLst xmlns:a="http://schemas.openxmlformats.org/drawingml/2006/main">
               <a:ext uri="{FF2B5EF4-FFF2-40B4-BE49-F238E27FC236}">
-                <a16:creationId xmlns:a16="http://schemas.microsoft.com/office/drawing/2014/main" id="{396C07E4-A7C0-4618-805D-A5BC0469B251}"/>
+                <a16:creationId xmlns:a16="http://schemas.microsoft.com/office/drawing/2014/main" id="{14E5F38E-9316-42D4-BCF2-19DC84B096B5}"/>
               </a:ext>
             </a:extLst>
           </p:cNvPr>
@@ -5074,7 +4838,7 @@
                 <a:ea typeface="Malgun Gothic"/>
                 <a:cs typeface="Malgun Gothic"/>
               </a:rPr>
-              <a:t>기존 기능: Greeny 공사 시나리오 분석, CBE 분기 설문·건물 비교 [13쪽]</a:t>
+              <a:t>연계 개념: Greeny 상세 성능분석 · UC Berkeley CBE 이용자 설문 [13쪽]</a:t>
             </a:r>
           </a:p>
         </p:txBody>
@@ -5084,7 +4848,7 @@
           <p:cNvPr id="7" name="">
             <a:extLst xmlns:a="http://schemas.openxmlformats.org/drawingml/2006/main">
               <a:ext uri="{FF2B5EF4-FFF2-40B4-BE49-F238E27FC236}">
-                <a16:creationId xmlns:a16="http://schemas.microsoft.com/office/drawing/2014/main" id="{D61CF074-CC1F-4894-B916-8B5D91A5C5BD}"/>
+                <a16:creationId xmlns:a16="http://schemas.microsoft.com/office/drawing/2014/main" id="{92BD5F58-C738-4134-B975-896AECA2A57A}"/>
               </a:ext>
             </a:extLst>
           </p:cNvPr>
@@ -5131,7 +4895,7 @@
                 <a:ea typeface="Malgun Gothic"/>
                 <a:cs typeface="Malgun Gothic"/>
               </a:rPr>
-              <a:t>선택한 이유</a:t>
+              <a:t>시설 담당자에게</a:t>
             </a:r>
           </a:p>
         </p:txBody>
@@ -5141,7 +4905,7 @@
           <p:cNvPr id="8" name="">
             <a:extLst xmlns:a="http://schemas.openxmlformats.org/drawingml/2006/main">
               <a:ext uri="{FF2B5EF4-FFF2-40B4-BE49-F238E27FC236}">
-                <a16:creationId xmlns:a16="http://schemas.microsoft.com/office/drawing/2014/main" id="{BCFD2A50-335D-49BE-B27F-F280F8D12BA7}"/>
+                <a16:creationId xmlns:a16="http://schemas.microsoft.com/office/drawing/2014/main" id="{3570D6A6-4C19-4681-9E9E-B9F2C23C1AF5}"/>
               </a:ext>
             </a:extLst>
           </p:cNvPr>
@@ -5188,7 +4952,7 @@
                 <a:ea typeface="Malgun Gothic"/>
                 <a:cs typeface="Malgun Gothic"/>
               </a:rPr>
-              <a:t>실제 접근 가능한 데이터로 시작하고</a:t>
+              <a:t>에너지와 불편을 한 기록에서 확인</a:t>
             </a:r>
           </a:p>
           <a:p xmlns:a="http://schemas.openxmlformats.org/drawingml/2006/main">
@@ -5211,7 +4975,7 @@
                 <a:ea typeface="Malgun Gothic"/>
                 <a:cs typeface="Malgun Gothic"/>
               </a:rPr>
-              <a:t>이용자 특성을 문진으로 연결할 수 있다.</a:t>
+              <a:t>상담 전에 필요한 자료와 질문 정리</a:t>
             </a:r>
           </a:p>
           <a:p xmlns:a="http://schemas.openxmlformats.org/drawingml/2006/main">
@@ -5234,7 +4998,7 @@
                 <a:ea typeface="Malgun Gothic"/>
                 <a:cs typeface="Malgun Gothic"/>
               </a:rPr>
-              <a:t>예선 아이디어를 한 건물 흐름으로 시연 가능.</a:t>
+              <a:t>전문가에게 전달할 요청서 작성</a:t>
             </a:r>
           </a:p>
         </p:txBody>
@@ -5244,7 +5008,7 @@
           <p:cNvPr id="9" name="">
             <a:extLst xmlns:a="http://schemas.openxmlformats.org/drawingml/2006/main">
               <a:ext uri="{FF2B5EF4-FFF2-40B4-BE49-F238E27FC236}">
-                <a16:creationId xmlns:a16="http://schemas.microsoft.com/office/drawing/2014/main" id="{5E08775D-8B02-40E8-83BF-7549C8A1DCDF}"/>
+                <a16:creationId xmlns:a16="http://schemas.microsoft.com/office/drawing/2014/main" id="{8AF33D2C-9B1C-468F-BB7B-9FD3458496EC}"/>
               </a:ext>
             </a:extLst>
           </p:cNvPr>
@@ -5291,7 +5055,7 @@
                 <a:ea typeface="Malgun Gothic"/>
                 <a:cs typeface="Malgun Gothic"/>
               </a:rPr>
-              <a:t>기존 서비스와 연결</a:t>
+              <a:t>이용자와 전문가에게</a:t>
             </a:r>
           </a:p>
         </p:txBody>
@@ -5301,7 +5065,7 @@
           <p:cNvPr id="10" name="">
             <a:extLst xmlns:a="http://schemas.openxmlformats.org/drawingml/2006/main">
               <a:ext uri="{FF2B5EF4-FFF2-40B4-BE49-F238E27FC236}">
-                <a16:creationId xmlns:a16="http://schemas.microsoft.com/office/drawing/2014/main" id="{E7B10013-B07A-4AD3-883A-D0A45787650A}"/>
+                <a16:creationId xmlns:a16="http://schemas.microsoft.com/office/drawing/2014/main" id="{41832CDB-2A2A-4CCB-95CC-4DFBC3A867F3}"/>
               </a:ext>
             </a:extLst>
           </p:cNvPr>
@@ -5348,7 +5112,7 @@
                 <a:ea typeface="Malgun Gothic"/>
                 <a:cs typeface="Malgun Gothic"/>
               </a:rPr>
-              <a:t>Greeny의 상세 분석 전 자료를 정리하고</a:t>
+              <a:t>이용자는 생활 속 불편을 간단히 전달</a:t>
             </a:r>
           </a:p>
           <a:p xmlns:a="http://schemas.openxmlformats.org/drawingml/2006/main">
@@ -5371,7 +5135,7 @@
                 <a:ea typeface="Malgun Gothic"/>
                 <a:cs typeface="Malgun Gothic"/>
               </a:rPr>
-              <a:t>기존 이용자 설문의 개념을 참고하여</a:t>
+              <a:t>전문가는 위치·시간·상황을 함께 파악</a:t>
             </a:r>
           </a:p>
           <a:p xmlns:a="http://schemas.openxmlformats.org/drawingml/2006/main">
@@ -5394,7 +5158,7 @@
                 <a:ea typeface="Malgun Gothic"/>
                 <a:cs typeface="Malgun Gothic"/>
               </a:rPr>
-              <a:t>국내 공개자료·현장조사 기록으로 연결한다.</a:t>
+              <a:t>후보별 조사 항목으로 현장 상담 시작</a:t>
             </a:r>
           </a:p>
         </p:txBody>
@@ -5404,7 +5168,7 @@
           <p:cNvPr id="11" name="">
             <a:extLst xmlns:a="http://schemas.openxmlformats.org/drawingml/2006/main">
               <a:ext uri="{FF2B5EF4-FFF2-40B4-BE49-F238E27FC236}">
-                <a16:creationId xmlns:a16="http://schemas.microsoft.com/office/drawing/2014/main" id="{53F5AD60-F140-4D61-AE9C-C08AC2E84AC9}"/>
+                <a16:creationId xmlns:a16="http://schemas.microsoft.com/office/drawing/2014/main" id="{D8FD0D0F-FB9F-4192-8E52-85A6E6A970B2}"/>
               </a:ext>
             </a:extLst>
           </p:cNvPr>
@@ -5434,7 +5198,7 @@
           <p:cNvPr id="12" name="">
             <a:extLst xmlns:a="http://schemas.openxmlformats.org/drawingml/2006/main">
               <a:ext uri="{FF2B5EF4-FFF2-40B4-BE49-F238E27FC236}">
-                <a16:creationId xmlns:a16="http://schemas.microsoft.com/office/drawing/2014/main" id="{2AA6A891-C31B-4061-B970-EA6BA0E17009}"/>
+                <a16:creationId xmlns:a16="http://schemas.microsoft.com/office/drawing/2014/main" id="{87045D1F-846C-4544-810E-88EBCC3A2CDB}"/>
               </a:ext>
             </a:extLst>
           </p:cNvPr>
@@ -5463,7 +5227,7 @@
           <a:lstStyle xmlns:a="http://schemas.openxmlformats.org/drawingml/2006/main"/>
           <a:p xmlns:a="http://schemas.openxmlformats.org/drawingml/2006/main">
             <a:pPr>
-              <a:defRPr sz="2025" b="1">
+              <a:defRPr sz="1950" b="1">
                 <a:solidFill>
                   <a:srgbClr val="127452"/>
                 </a:solidFill>
@@ -5473,7 +5237,7 @@
               </a:defRPr>
             </a:pPr>
             <a:r>
-              <a:rPr sz="2025" b="1">
+              <a:rPr sz="1950" b="1">
                 <a:solidFill>
                   <a:srgbClr val="127452"/>
                 </a:solidFill>
@@ -5481,7 +5245,7 @@
                 <a:ea typeface="Malgun Gothic"/>
                 <a:cs typeface="Malgun Gothic"/>
               </a:rPr>
-              <a:t>기대효과는 조사 준비의 누락 감소 · 검증은 본선에서</a:t>
+              <a:t>기대효과: 정보 누락 감소 · 상담 준비 부담 완화 · 근거 공유</a:t>
             </a:r>
           </a:p>
         </p:txBody>
@@ -5491,7 +5255,7 @@
           <p:cNvPr id="13" name="">
             <a:extLst xmlns:a="http://schemas.openxmlformats.org/drawingml/2006/main">
               <a:ext uri="{FF2B5EF4-FFF2-40B4-BE49-F238E27FC236}">
-                <a16:creationId xmlns:a16="http://schemas.microsoft.com/office/drawing/2014/main" id="{134A9022-7261-473D-B1A0-C348D5A53DE9}"/>
+                <a16:creationId xmlns:a16="http://schemas.microsoft.com/office/drawing/2014/main" id="{DCD8C805-DD0C-4AA5-A654-651F5F46A92F}"/>
               </a:ext>
             </a:extLst>
           </p:cNvPr>
@@ -5520,48 +5284,48 @@
           <a:lstStyle xmlns:a="http://schemas.openxmlformats.org/drawingml/2006/main"/>
           <a:p xmlns:a="http://schemas.openxmlformats.org/drawingml/2006/main">
             <a:pPr>
-              <a:defRPr sz="1725" b="0">
-                <a:solidFill>
-                  <a:srgbClr val="183329"/>
-                </a:solidFill>
-                <a:latin typeface="Malgun Gothic"/>
-                <a:ea typeface="Malgun Gothic"/>
-                <a:cs typeface="Malgun Gothic"/>
-              </a:defRPr>
-            </a:pPr>
-            <a:r>
-              <a:rPr sz="1725" b="0">
-                <a:solidFill>
-                  <a:srgbClr val="183329"/>
-                </a:solidFill>
-                <a:latin typeface="Malgun Gothic"/>
-                <a:ea typeface="Malgun Gothic"/>
-                <a:cs typeface="Malgun Gothic"/>
-              </a:rPr>
-              <a:t>확장 순서: 실제 시설 검토 → 여러 건물 조사 우선순위 → 공사 전후 체감·사용량 확인.</a:t>
-            </a:r>
-          </a:p>
-          <a:p xmlns:a="http://schemas.openxmlformats.org/drawingml/2006/main">
-            <a:pPr>
-              <a:defRPr sz="1725" b="0">
-                <a:solidFill>
-                  <a:srgbClr val="183329"/>
-                </a:solidFill>
-                <a:latin typeface="Malgun Gothic"/>
-                <a:ea typeface="Malgun Gothic"/>
-                <a:cs typeface="Malgun Gothic"/>
-              </a:defRPr>
-            </a:pPr>
-            <a:r>
-              <a:rPr sz="1725" b="0">
-                <a:solidFill>
-                  <a:srgbClr val="183329"/>
-                </a:solidFill>
-                <a:latin typeface="Malgun Gothic"/>
-                <a:ea typeface="Malgun Gothic"/>
-                <a:cs typeface="Malgun Gothic"/>
-              </a:rPr>
-              <a:t>분석 범위가 다른 소형 민간 건물은 추가 데이터와 검증 후 확장한다.</a:t>
+              <a:defRPr sz="1800" b="0">
+                <a:solidFill>
+                  <a:srgbClr val="183329"/>
+                </a:solidFill>
+                <a:latin typeface="Malgun Gothic"/>
+                <a:ea typeface="Malgun Gothic"/>
+                <a:cs typeface="Malgun Gothic"/>
+              </a:defRPr>
+            </a:pPr>
+            <a:r>
+              <a:rPr sz="1800" b="0">
+                <a:solidFill>
+                  <a:srgbClr val="183329"/>
+                </a:solidFill>
+                <a:latin typeface="Malgun Gothic"/>
+                <a:ea typeface="Malgun Gothic"/>
+                <a:cs typeface="Malgun Gothic"/>
+              </a:rPr>
+              <a:t>확장 방향: 여러 건물의 조사 우선순위 · 공사 전후 이용자 체감 관리</a:t>
+            </a:r>
+          </a:p>
+          <a:p xmlns:a="http://schemas.openxmlformats.org/drawingml/2006/main">
+            <a:pPr>
+              <a:defRPr sz="1800" b="0">
+                <a:solidFill>
+                  <a:srgbClr val="183329"/>
+                </a:solidFill>
+                <a:latin typeface="Malgun Gothic"/>
+                <a:ea typeface="Malgun Gothic"/>
+                <a:cs typeface="Malgun Gothic"/>
+              </a:defRPr>
+            </a:pPr>
+            <a:r>
+              <a:rPr sz="1800" b="0">
+                <a:solidFill>
+                  <a:srgbClr val="183329"/>
+                </a:solidFill>
+                <a:latin typeface="Malgun Gothic"/>
+                <a:ea typeface="Malgun Gothic"/>
+                <a:cs typeface="Malgun Gothic"/>
+              </a:rPr>
+              <a:t>공공시설 한 동의 흐름을 여러 시설의 관리 업무로 넓히는 서비스 구조</a:t>
             </a:r>
           </a:p>
         </p:txBody>
@@ -5569,7 +5333,7 @@
     </p:spTree>
     <p:extLst>
       <p:ext uri="{BB962C8B-B14F-4D97-AF65-F5344CB8AC3E}">
-        <p14:creationId xmlns:p14="http://schemas.microsoft.com/office/powerpoint/2010/main" val="328773710"/>
+        <p14:creationId xmlns:p14="http://schemas.microsoft.com/office/powerpoint/2010/main" val="577829615"/>
       </p:ext>
     </p:extLst>
   </p:cSld>
@@ -5597,10 +5361,10 @@
       </p:grpSpPr>
       <p:sp>
         <p:nvSpPr>
-          <p:cNvPr id="17" name="">
-            <a:extLst xmlns:a="http://schemas.openxmlformats.org/drawingml/2006/main">
-              <a:ext uri="{FF2B5EF4-FFF2-40B4-BE49-F238E27FC236}">
-                <a16:creationId xmlns:a16="http://schemas.microsoft.com/office/drawing/2014/main" id="{EEB352CF-DA24-449E-BAAB-22A1DED0C23D}"/>
+          <p:cNvPr id="15" name="">
+            <a:extLst xmlns:a="http://schemas.openxmlformats.org/drawingml/2006/main">
+              <a:ext uri="{FF2B5EF4-FFF2-40B4-BE49-F238E27FC236}">
+                <a16:creationId xmlns:a16="http://schemas.microsoft.com/office/drawing/2014/main" id="{7758BC6C-B242-4B9F-8DB1-857B840F12E9}"/>
               </a:ext>
             </a:extLst>
           </p:cNvPr>
@@ -5630,7 +5394,7 @@
           <p:cNvPr id="2" name="">
             <a:extLst xmlns:a="http://schemas.openxmlformats.org/drawingml/2006/main">
               <a:ext uri="{FF2B5EF4-FFF2-40B4-BE49-F238E27FC236}">
-                <a16:creationId xmlns:a16="http://schemas.microsoft.com/office/drawing/2014/main" id="{DE3285FC-E9E5-46B8-85B1-9C8C55C634FE}"/>
+                <a16:creationId xmlns:a16="http://schemas.microsoft.com/office/drawing/2014/main" id="{69A0BE65-0FFE-4342-9109-6E68191D6BDF}"/>
               </a:ext>
             </a:extLst>
           </p:cNvPr>
@@ -5677,7 +5441,7 @@
                 <a:ea typeface="Malgun Gothic"/>
                 <a:cs typeface="Malgun Gothic"/>
               </a:rPr>
-              <a:t>외부 자료와 생성형 AI 활용 기록</a:t>
+              <a:t>자료 출처와 AI 도구 활용</a:t>
             </a:r>
           </a:p>
         </p:txBody>
@@ -5687,7 +5451,7 @@
           <p:cNvPr id="3" name="">
             <a:extLst xmlns:a="http://schemas.openxmlformats.org/drawingml/2006/main">
               <a:ext uri="{FF2B5EF4-FFF2-40B4-BE49-F238E27FC236}">
-                <a16:creationId xmlns:a16="http://schemas.microsoft.com/office/drawing/2014/main" id="{FCF4B8F7-6D50-4C35-829F-D1F38ED2543B}"/>
+                <a16:creationId xmlns:a16="http://schemas.microsoft.com/office/drawing/2014/main" id="{BCADD8CB-9A79-47C1-884D-EAA3D2EC393C}"/>
               </a:ext>
             </a:extLst>
           </p:cNvPr>
@@ -5717,7 +5481,7 @@
           <p:cNvPr id="4" name="">
             <a:extLst xmlns:a="http://schemas.openxmlformats.org/drawingml/2006/main">
               <a:ext uri="{FF2B5EF4-FFF2-40B4-BE49-F238E27FC236}">
-                <a16:creationId xmlns:a16="http://schemas.microsoft.com/office/drawing/2014/main" id="{BA4BBE61-B9F7-4551-852A-8A3CD4F19C0C}"/>
+                <a16:creationId xmlns:a16="http://schemas.microsoft.com/office/drawing/2014/main" id="{0FD81FDE-A391-4B53-A8A9-A2F5123294B4}"/>
               </a:ext>
             </a:extLst>
           </p:cNvPr>
@@ -5774,7 +5538,7 @@
           <p:cNvPr id="5" name="">
             <a:extLst xmlns:a="http://schemas.openxmlformats.org/drawingml/2006/main">
               <a:ext uri="{FF2B5EF4-FFF2-40B4-BE49-F238E27FC236}">
-                <a16:creationId xmlns:a16="http://schemas.microsoft.com/office/drawing/2014/main" id="{F81932BF-AF96-4170-A5B5-6E6B0ED70DF0}"/>
+                <a16:creationId xmlns:a16="http://schemas.microsoft.com/office/drawing/2014/main" id="{B4C58F3A-1B8F-4BC8-AAF7-824049A03B4C}"/>
               </a:ext>
             </a:extLst>
           </p:cNvPr>
@@ -5831,36 +5595,36 @@
           <p:cNvPr id="6" name="">
             <a:extLst xmlns:a="http://schemas.openxmlformats.org/drawingml/2006/main">
               <a:ext uri="{FF2B5EF4-FFF2-40B4-BE49-F238E27FC236}">
-                <a16:creationId xmlns:a16="http://schemas.microsoft.com/office/drawing/2014/main" id="{AA6227DB-37D0-4249-9214-031D1830C58C}"/>
-              </a:ext>
-            </a:extLst>
-          </p:cNvPr>
-          <p:cNvSpPr>
-            <a:spLocks xmlns:a="http://schemas.openxmlformats.org/drawingml/2006/main" noGrp="1"/>
-          </p:cNvSpPr>
-          <p:nvPr/>
-        </p:nvSpPr>
-        <p:spPr>
-          <a:xfrm xmlns:a="http://schemas.openxmlformats.org/drawingml/2006/main">
-            <a:off x="742950" y="1276350"/>
-            <a:ext cx="10458450" cy="323850"/>
-          </a:xfrm>
-          <a:prstGeom xmlns:a="http://schemas.openxmlformats.org/drawingml/2006/main" prst="rect">
-            <a:avLst/>
-          </a:prstGeom>
-          <a:noFill xmlns:a="http://schemas.openxmlformats.org/drawingml/2006/main"/>
-          <a:ln xmlns:a="http://schemas.openxmlformats.org/drawingml/2006/main" w="0">
-            <a:noFill/>
-          </a:ln>
-        </p:spPr>
-        <p:txBody>
-          <a:bodyPr xmlns:a="http://schemas.openxmlformats.org/drawingml/2006/main">
-            <a:noAutofit/>
-          </a:bodyPr>
-          <a:lstStyle xmlns:a="http://schemas.openxmlformats.org/drawingml/2006/main"/>
-          <a:p xmlns:a="http://schemas.openxmlformats.org/drawingml/2006/main">
-            <a:pPr>
-              <a:defRPr sz="1575" b="1">
+                <a16:creationId xmlns:a16="http://schemas.microsoft.com/office/drawing/2014/main" id="{1618B342-55DF-4DD5-A6D0-D0D8D7C5F008}"/>
+              </a:ext>
+            </a:extLst>
+          </p:cNvPr>
+          <p:cNvSpPr>
+            <a:spLocks xmlns:a="http://schemas.openxmlformats.org/drawingml/2006/main" noGrp="1"/>
+          </p:cNvSpPr>
+          <p:nvPr/>
+        </p:nvSpPr>
+        <p:spPr>
+          <a:xfrm xmlns:a="http://schemas.openxmlformats.org/drawingml/2006/main">
+            <a:off x="742950" y="1381125"/>
+            <a:ext cx="10477500" cy="342900"/>
+          </a:xfrm>
+          <a:prstGeom xmlns:a="http://schemas.openxmlformats.org/drawingml/2006/main" prst="rect">
+            <a:avLst/>
+          </a:prstGeom>
+          <a:noFill xmlns:a="http://schemas.openxmlformats.org/drawingml/2006/main"/>
+          <a:ln xmlns:a="http://schemas.openxmlformats.org/drawingml/2006/main" w="0">
+            <a:noFill/>
+          </a:ln>
+        </p:spPr>
+        <p:txBody>
+          <a:bodyPr xmlns:a="http://schemas.openxmlformats.org/drawingml/2006/main">
+            <a:noAutofit/>
+          </a:bodyPr>
+          <a:lstStyle xmlns:a="http://schemas.openxmlformats.org/drawingml/2006/main"/>
+          <a:p xmlns:a="http://schemas.openxmlformats.org/drawingml/2006/main">
+            <a:pPr>
+              <a:defRPr sz="1725" b="1">
                 <a:solidFill>
                   <a:srgbClr val="127452"/>
                 </a:solidFill>
@@ -5870,7 +5634,7 @@
               </a:defRPr>
             </a:pPr>
             <a:r>
-              <a:rPr sz="1575" b="1">
+              <a:rPr sz="1725" b="1">
                 <a:solidFill>
                   <a:srgbClr val="127452"/>
                 </a:solidFill>
@@ -5878,7 +5642,7 @@
                 <a:ea typeface="Malgun Gothic"/>
                 <a:cs typeface="Malgun Gothic"/>
               </a:rPr>
-              <a:t>공공건축물 에너지 소비량 · 국토안전관리원</a:t>
+              <a:t>국토안전관리원 · 공공건축물 에너지 소비량_20260331</a:t>
             </a:r>
           </a:p>
         </p:txBody>
@@ -5888,36 +5652,36 @@
           <p:cNvPr id="7" name="">
             <a:extLst xmlns:a="http://schemas.openxmlformats.org/drawingml/2006/main">
               <a:ext uri="{FF2B5EF4-FFF2-40B4-BE49-F238E27FC236}">
-                <a16:creationId xmlns:a16="http://schemas.microsoft.com/office/drawing/2014/main" id="{0E8EF7AB-A148-4E60-93F9-552AB7037CBD}"/>
-              </a:ext>
-            </a:extLst>
-          </p:cNvPr>
-          <p:cNvSpPr>
-            <a:spLocks xmlns:a="http://schemas.openxmlformats.org/drawingml/2006/main" noGrp="1"/>
-          </p:cNvSpPr>
-          <p:nvPr/>
-        </p:nvSpPr>
-        <p:spPr>
-          <a:xfrm xmlns:a="http://schemas.openxmlformats.org/drawingml/2006/main">
-            <a:off x="742950" y="1619250"/>
-            <a:ext cx="10572750" cy="295275"/>
-          </a:xfrm>
-          <a:prstGeom xmlns:a="http://schemas.openxmlformats.org/drawingml/2006/main" prst="rect">
-            <a:avLst/>
-          </a:prstGeom>
-          <a:noFill xmlns:a="http://schemas.openxmlformats.org/drawingml/2006/main"/>
-          <a:ln xmlns:a="http://schemas.openxmlformats.org/drawingml/2006/main" w="0">
-            <a:noFill/>
-          </a:ln>
-        </p:spPr>
-        <p:txBody>
-          <a:bodyPr xmlns:a="http://schemas.openxmlformats.org/drawingml/2006/main">
-            <a:noAutofit/>
-          </a:bodyPr>
-          <a:lstStyle xmlns:a="http://schemas.openxmlformats.org/drawingml/2006/main"/>
-          <a:p xmlns:a="http://schemas.openxmlformats.org/drawingml/2006/main">
-            <a:pPr>
-              <a:defRPr sz="1350" b="0">
+                <a16:creationId xmlns:a16="http://schemas.microsoft.com/office/drawing/2014/main" id="{ABB23002-4209-4C12-8288-F77E1D09DA62}"/>
+              </a:ext>
+            </a:extLst>
+          </p:cNvPr>
+          <p:cNvSpPr>
+            <a:spLocks xmlns:a="http://schemas.openxmlformats.org/drawingml/2006/main" noGrp="1"/>
+          </p:cNvSpPr>
+          <p:nvPr/>
+        </p:nvSpPr>
+        <p:spPr>
+          <a:xfrm xmlns:a="http://schemas.openxmlformats.org/drawingml/2006/main">
+            <a:off x="742950" y="1790700"/>
+            <a:ext cx="10572750" cy="361950"/>
+          </a:xfrm>
+          <a:prstGeom xmlns:a="http://schemas.openxmlformats.org/drawingml/2006/main" prst="rect">
+            <a:avLst/>
+          </a:prstGeom>
+          <a:noFill xmlns:a="http://schemas.openxmlformats.org/drawingml/2006/main"/>
+          <a:ln xmlns:a="http://schemas.openxmlformats.org/drawingml/2006/main" w="0">
+            <a:noFill/>
+          </a:ln>
+        </p:spPr>
+        <p:txBody>
+          <a:bodyPr xmlns:a="http://schemas.openxmlformats.org/drawingml/2006/main">
+            <a:noAutofit/>
+          </a:bodyPr>
+          <a:lstStyle xmlns:a="http://schemas.openxmlformats.org/drawingml/2006/main"/>
+          <a:p xmlns:a="http://schemas.openxmlformats.org/drawingml/2006/main">
+            <a:pPr>
+              <a:defRPr sz="1425" b="0">
                 <a:solidFill>
                   <a:srgbClr val="4E6157"/>
                 </a:solidFill>
@@ -5927,7 +5691,7 @@
               </a:defRPr>
             </a:pPr>
             <a:r>
-              <a:rPr sz="1350" b="0">
+              <a:rPr sz="1425" b="0">
                 <a:solidFill>
                   <a:srgbClr val="4E6157"/>
                 </a:solidFill>
@@ -5945,36 +5709,36 @@
           <p:cNvPr id="8" name="">
             <a:extLst xmlns:a="http://schemas.openxmlformats.org/drawingml/2006/main">
               <a:ext uri="{FF2B5EF4-FFF2-40B4-BE49-F238E27FC236}">
-                <a16:creationId xmlns:a16="http://schemas.microsoft.com/office/drawing/2014/main" id="{F30EB99B-A7F8-4EE5-8FA5-45BDEBC2AB7B}"/>
-              </a:ext>
-            </a:extLst>
-          </p:cNvPr>
-          <p:cNvSpPr>
-            <a:spLocks xmlns:a="http://schemas.openxmlformats.org/drawingml/2006/main" noGrp="1"/>
-          </p:cNvSpPr>
-          <p:nvPr/>
-        </p:nvSpPr>
-        <p:spPr>
-          <a:xfrm xmlns:a="http://schemas.openxmlformats.org/drawingml/2006/main">
-            <a:off x="742950" y="2066925"/>
-            <a:ext cx="10458450" cy="323850"/>
-          </a:xfrm>
-          <a:prstGeom xmlns:a="http://schemas.openxmlformats.org/drawingml/2006/main" prst="rect">
-            <a:avLst/>
-          </a:prstGeom>
-          <a:noFill xmlns:a="http://schemas.openxmlformats.org/drawingml/2006/main"/>
-          <a:ln xmlns:a="http://schemas.openxmlformats.org/drawingml/2006/main" w="0">
-            <a:noFill/>
-          </a:ln>
-        </p:spPr>
-        <p:txBody>
-          <a:bodyPr xmlns:a="http://schemas.openxmlformats.org/drawingml/2006/main">
-            <a:noAutofit/>
-          </a:bodyPr>
-          <a:lstStyle xmlns:a="http://schemas.openxmlformats.org/drawingml/2006/main"/>
-          <a:p xmlns:a="http://schemas.openxmlformats.org/drawingml/2006/main">
-            <a:pPr>
-              <a:defRPr sz="1575" b="1">
+                <a16:creationId xmlns:a16="http://schemas.microsoft.com/office/drawing/2014/main" id="{11E7E127-ADBA-4E18-9658-901555162A21}"/>
+              </a:ext>
+            </a:extLst>
+          </p:cNvPr>
+          <p:cNvSpPr>
+            <a:spLocks xmlns:a="http://schemas.openxmlformats.org/drawingml/2006/main" noGrp="1"/>
+          </p:cNvSpPr>
+          <p:nvPr/>
+        </p:nvSpPr>
+        <p:spPr>
+          <a:xfrm xmlns:a="http://schemas.openxmlformats.org/drawingml/2006/main">
+            <a:off x="742950" y="2362200"/>
+            <a:ext cx="10477500" cy="342900"/>
+          </a:xfrm>
+          <a:prstGeom xmlns:a="http://schemas.openxmlformats.org/drawingml/2006/main" prst="rect">
+            <a:avLst/>
+          </a:prstGeom>
+          <a:noFill xmlns:a="http://schemas.openxmlformats.org/drawingml/2006/main"/>
+          <a:ln xmlns:a="http://schemas.openxmlformats.org/drawingml/2006/main" w="0">
+            <a:noFill/>
+          </a:ln>
+        </p:spPr>
+        <p:txBody>
+          <a:bodyPr xmlns:a="http://schemas.openxmlformats.org/drawingml/2006/main">
+            <a:noAutofit/>
+          </a:bodyPr>
+          <a:lstStyle xmlns:a="http://schemas.openxmlformats.org/drawingml/2006/main"/>
+          <a:p xmlns:a="http://schemas.openxmlformats.org/drawingml/2006/main">
+            <a:pPr>
+              <a:defRPr sz="1725" b="1">
                 <a:solidFill>
                   <a:srgbClr val="127452"/>
                 </a:solidFill>
@@ -5984,7 +5748,7 @@
               </a:defRPr>
             </a:pPr>
             <a:r>
-              <a:rPr sz="1575" b="1">
+              <a:rPr sz="1725" b="1">
                 <a:solidFill>
                   <a:srgbClr val="127452"/>
                 </a:solidFill>
@@ -5992,7 +5756,7 @@
                 <a:ea typeface="Malgun Gothic"/>
                 <a:cs typeface="Malgun Gothic"/>
               </a:rPr>
-              <a:t>Greeny 분석시스템 · 그린리모델링 창조센터</a:t>
+              <a:t>그린리모델링 창조센터 · Greeny 분석시스템</a:t>
             </a:r>
           </a:p>
         </p:txBody>
@@ -6002,36 +5766,36 @@
           <p:cNvPr id="9" name="">
             <a:extLst xmlns:a="http://schemas.openxmlformats.org/drawingml/2006/main">
               <a:ext uri="{FF2B5EF4-FFF2-40B4-BE49-F238E27FC236}">
-                <a16:creationId xmlns:a16="http://schemas.microsoft.com/office/drawing/2014/main" id="{C30F95EC-54ED-4EB6-86AD-6E668914B9A7}"/>
-              </a:ext>
-            </a:extLst>
-          </p:cNvPr>
-          <p:cNvSpPr>
-            <a:spLocks xmlns:a="http://schemas.openxmlformats.org/drawingml/2006/main" noGrp="1"/>
-          </p:cNvSpPr>
-          <p:nvPr/>
-        </p:nvSpPr>
-        <p:spPr>
-          <a:xfrm xmlns:a="http://schemas.openxmlformats.org/drawingml/2006/main">
-            <a:off x="742950" y="2409825"/>
-            <a:ext cx="10572750" cy="295275"/>
-          </a:xfrm>
-          <a:prstGeom xmlns:a="http://schemas.openxmlformats.org/drawingml/2006/main" prst="rect">
-            <a:avLst/>
-          </a:prstGeom>
-          <a:noFill xmlns:a="http://schemas.openxmlformats.org/drawingml/2006/main"/>
-          <a:ln xmlns:a="http://schemas.openxmlformats.org/drawingml/2006/main" w="0">
-            <a:noFill/>
-          </a:ln>
-        </p:spPr>
-        <p:txBody>
-          <a:bodyPr xmlns:a="http://schemas.openxmlformats.org/drawingml/2006/main">
-            <a:noAutofit/>
-          </a:bodyPr>
-          <a:lstStyle xmlns:a="http://schemas.openxmlformats.org/drawingml/2006/main"/>
-          <a:p xmlns:a="http://schemas.openxmlformats.org/drawingml/2006/main">
-            <a:pPr>
-              <a:defRPr sz="1350" b="0">
+                <a16:creationId xmlns:a16="http://schemas.microsoft.com/office/drawing/2014/main" id="{3EBA7B7C-3056-4F78-A872-068C7BD9EC75}"/>
+              </a:ext>
+            </a:extLst>
+          </p:cNvPr>
+          <p:cNvSpPr>
+            <a:spLocks xmlns:a="http://schemas.openxmlformats.org/drawingml/2006/main" noGrp="1"/>
+          </p:cNvSpPr>
+          <p:nvPr/>
+        </p:nvSpPr>
+        <p:spPr>
+          <a:xfrm xmlns:a="http://schemas.openxmlformats.org/drawingml/2006/main">
+            <a:off x="742950" y="2771775"/>
+            <a:ext cx="10572750" cy="361950"/>
+          </a:xfrm>
+          <a:prstGeom xmlns:a="http://schemas.openxmlformats.org/drawingml/2006/main" prst="rect">
+            <a:avLst/>
+          </a:prstGeom>
+          <a:noFill xmlns:a="http://schemas.openxmlformats.org/drawingml/2006/main"/>
+          <a:ln xmlns:a="http://schemas.openxmlformats.org/drawingml/2006/main" w="0">
+            <a:noFill/>
+          </a:ln>
+        </p:spPr>
+        <p:txBody>
+          <a:bodyPr xmlns:a="http://schemas.openxmlformats.org/drawingml/2006/main">
+            <a:noAutofit/>
+          </a:bodyPr>
+          <a:lstStyle xmlns:a="http://schemas.openxmlformats.org/drawingml/2006/main"/>
+          <a:p xmlns:a="http://schemas.openxmlformats.org/drawingml/2006/main">
+            <a:pPr>
+              <a:defRPr sz="1425" b="0">
                 <a:solidFill>
                   <a:srgbClr val="4E6157"/>
                 </a:solidFill>
@@ -6041,7 +5805,7 @@
               </a:defRPr>
             </a:pPr>
             <a:r>
-              <a:rPr sz="1350" b="0">
+              <a:rPr sz="1425" b="0">
                 <a:solidFill>
                   <a:srgbClr val="4E6157"/>
                 </a:solidFill>
@@ -6059,36 +5823,36 @@
           <p:cNvPr id="10" name="">
             <a:extLst xmlns:a="http://schemas.openxmlformats.org/drawingml/2006/main">
               <a:ext uri="{FF2B5EF4-FFF2-40B4-BE49-F238E27FC236}">
-                <a16:creationId xmlns:a16="http://schemas.microsoft.com/office/drawing/2014/main" id="{FFC12D16-A435-4C65-BBEC-2163113CF631}"/>
-              </a:ext>
-            </a:extLst>
-          </p:cNvPr>
-          <p:cNvSpPr>
-            <a:spLocks xmlns:a="http://schemas.openxmlformats.org/drawingml/2006/main" noGrp="1"/>
-          </p:cNvSpPr>
-          <p:nvPr/>
-        </p:nvSpPr>
-        <p:spPr>
-          <a:xfrm xmlns:a="http://schemas.openxmlformats.org/drawingml/2006/main">
-            <a:off x="742950" y="2857500"/>
-            <a:ext cx="10458450" cy="323850"/>
-          </a:xfrm>
-          <a:prstGeom xmlns:a="http://schemas.openxmlformats.org/drawingml/2006/main" prst="rect">
-            <a:avLst/>
-          </a:prstGeom>
-          <a:noFill xmlns:a="http://schemas.openxmlformats.org/drawingml/2006/main"/>
-          <a:ln xmlns:a="http://schemas.openxmlformats.org/drawingml/2006/main" w="0">
-            <a:noFill/>
-          </a:ln>
-        </p:spPr>
-        <p:txBody>
-          <a:bodyPr xmlns:a="http://schemas.openxmlformats.org/drawingml/2006/main">
-            <a:noAutofit/>
-          </a:bodyPr>
-          <a:lstStyle xmlns:a="http://schemas.openxmlformats.org/drawingml/2006/main"/>
-          <a:p xmlns:a="http://schemas.openxmlformats.org/drawingml/2006/main">
-            <a:pPr>
-              <a:defRPr sz="1575" b="1">
+                <a16:creationId xmlns:a16="http://schemas.microsoft.com/office/drawing/2014/main" id="{A1EF6C50-527B-4488-886F-5B05DA845E01}"/>
+              </a:ext>
+            </a:extLst>
+          </p:cNvPr>
+          <p:cNvSpPr>
+            <a:spLocks xmlns:a="http://schemas.openxmlformats.org/drawingml/2006/main" noGrp="1"/>
+          </p:cNvSpPr>
+          <p:nvPr/>
+        </p:nvSpPr>
+        <p:spPr>
+          <a:xfrm xmlns:a="http://schemas.openxmlformats.org/drawingml/2006/main">
+            <a:off x="742950" y="3343275"/>
+            <a:ext cx="10477500" cy="342900"/>
+          </a:xfrm>
+          <a:prstGeom xmlns:a="http://schemas.openxmlformats.org/drawingml/2006/main" prst="rect">
+            <a:avLst/>
+          </a:prstGeom>
+          <a:noFill xmlns:a="http://schemas.openxmlformats.org/drawingml/2006/main"/>
+          <a:ln xmlns:a="http://schemas.openxmlformats.org/drawingml/2006/main" w="0">
+            <a:noFill/>
+          </a:ln>
+        </p:spPr>
+        <p:txBody>
+          <a:bodyPr xmlns:a="http://schemas.openxmlformats.org/drawingml/2006/main">
+            <a:noAutofit/>
+          </a:bodyPr>
+          <a:lstStyle xmlns:a="http://schemas.openxmlformats.org/drawingml/2006/main"/>
+          <a:p xmlns:a="http://schemas.openxmlformats.org/drawingml/2006/main">
+            <a:pPr>
+              <a:defRPr sz="1725" b="1">
                 <a:solidFill>
                   <a:srgbClr val="127452"/>
                 </a:solidFill>
@@ -6098,7 +5862,7 @@
               </a:defRPr>
             </a:pPr>
             <a:r>
-              <a:rPr sz="1575" b="1">
+              <a:rPr sz="1725" b="1">
                 <a:solidFill>
                   <a:srgbClr val="127452"/>
                 </a:solidFill>
@@ -6106,7 +5870,7 @@
                 <a:ea typeface="Malgun Gothic"/>
                 <a:cs typeface="Malgun Gothic"/>
               </a:rPr>
-              <a:t>Occupant Survey · UC Berkeley CBE</a:t>
+              <a:t>UC Berkeley CBE · Occupant Survey and Building Benchmarking</a:t>
             </a:r>
           </a:p>
         </p:txBody>
@@ -6116,36 +5880,36 @@
           <p:cNvPr id="11" name="">
             <a:extLst xmlns:a="http://schemas.openxmlformats.org/drawingml/2006/main">
               <a:ext uri="{FF2B5EF4-FFF2-40B4-BE49-F238E27FC236}">
-                <a16:creationId xmlns:a16="http://schemas.microsoft.com/office/drawing/2014/main" id="{AB3C351B-A951-48AA-808B-534D9D6B65FC}"/>
-              </a:ext>
-            </a:extLst>
-          </p:cNvPr>
-          <p:cNvSpPr>
-            <a:spLocks xmlns:a="http://schemas.openxmlformats.org/drawingml/2006/main" noGrp="1"/>
-          </p:cNvSpPr>
-          <p:nvPr/>
-        </p:nvSpPr>
-        <p:spPr>
-          <a:xfrm xmlns:a="http://schemas.openxmlformats.org/drawingml/2006/main">
-            <a:off x="742950" y="3200400"/>
-            <a:ext cx="10572750" cy="295275"/>
-          </a:xfrm>
-          <a:prstGeom xmlns:a="http://schemas.openxmlformats.org/drawingml/2006/main" prst="rect">
-            <a:avLst/>
-          </a:prstGeom>
-          <a:noFill xmlns:a="http://schemas.openxmlformats.org/drawingml/2006/main"/>
-          <a:ln xmlns:a="http://schemas.openxmlformats.org/drawingml/2006/main" w="0">
-            <a:noFill/>
-          </a:ln>
-        </p:spPr>
-        <p:txBody>
-          <a:bodyPr xmlns:a="http://schemas.openxmlformats.org/drawingml/2006/main">
-            <a:noAutofit/>
-          </a:bodyPr>
-          <a:lstStyle xmlns:a="http://schemas.openxmlformats.org/drawingml/2006/main"/>
-          <a:p xmlns:a="http://schemas.openxmlformats.org/drawingml/2006/main">
-            <a:pPr>
-              <a:defRPr sz="1350" b="0">
+                <a16:creationId xmlns:a16="http://schemas.microsoft.com/office/drawing/2014/main" id="{5B737FBC-2E08-4B7F-8F78-B85DEBE7EDBA}"/>
+              </a:ext>
+            </a:extLst>
+          </p:cNvPr>
+          <p:cNvSpPr>
+            <a:spLocks xmlns:a="http://schemas.openxmlformats.org/drawingml/2006/main" noGrp="1"/>
+          </p:cNvSpPr>
+          <p:nvPr/>
+        </p:nvSpPr>
+        <p:spPr>
+          <a:xfrm xmlns:a="http://schemas.openxmlformats.org/drawingml/2006/main">
+            <a:off x="742950" y="3752850"/>
+            <a:ext cx="10572750" cy="361950"/>
+          </a:xfrm>
+          <a:prstGeom xmlns:a="http://schemas.openxmlformats.org/drawingml/2006/main" prst="rect">
+            <a:avLst/>
+          </a:prstGeom>
+          <a:noFill xmlns:a="http://schemas.openxmlformats.org/drawingml/2006/main"/>
+          <a:ln xmlns:a="http://schemas.openxmlformats.org/drawingml/2006/main" w="0">
+            <a:noFill/>
+          </a:ln>
+        </p:spPr>
+        <p:txBody>
+          <a:bodyPr xmlns:a="http://schemas.openxmlformats.org/drawingml/2006/main">
+            <a:noAutofit/>
+          </a:bodyPr>
+          <a:lstStyle xmlns:a="http://schemas.openxmlformats.org/drawingml/2006/main"/>
+          <a:p xmlns:a="http://schemas.openxmlformats.org/drawingml/2006/main">
+            <a:pPr>
+              <a:defRPr sz="1425" b="0">
                 <a:solidFill>
                   <a:srgbClr val="4E6157"/>
                 </a:solidFill>
@@ -6155,7 +5919,7 @@
               </a:defRPr>
             </a:pPr>
             <a:r>
-              <a:rPr sz="1350" b="0">
+              <a:rPr sz="1425" b="0">
                 <a:solidFill>
                   <a:srgbClr val="4E6157"/>
                 </a:solidFill>
@@ -6173,132 +5937,18 @@
           <p:cNvPr id="12" name="">
             <a:extLst xmlns:a="http://schemas.openxmlformats.org/drawingml/2006/main">
               <a:ext uri="{FF2B5EF4-FFF2-40B4-BE49-F238E27FC236}">
-                <a16:creationId xmlns:a16="http://schemas.microsoft.com/office/drawing/2014/main" id="{F49AAA84-74F7-44AF-A559-23647C21FA68}"/>
-              </a:ext>
-            </a:extLst>
-          </p:cNvPr>
-          <p:cNvSpPr>
-            <a:spLocks xmlns:a="http://schemas.openxmlformats.org/drawingml/2006/main" noGrp="1"/>
-          </p:cNvSpPr>
-          <p:nvPr/>
-        </p:nvSpPr>
-        <p:spPr>
-          <a:xfrm xmlns:a="http://schemas.openxmlformats.org/drawingml/2006/main">
-            <a:off x="742950" y="3648075"/>
-            <a:ext cx="10458450" cy="323850"/>
-          </a:xfrm>
-          <a:prstGeom xmlns:a="http://schemas.openxmlformats.org/drawingml/2006/main" prst="rect">
-            <a:avLst/>
-          </a:prstGeom>
-          <a:noFill xmlns:a="http://schemas.openxmlformats.org/drawingml/2006/main"/>
-          <a:ln xmlns:a="http://schemas.openxmlformats.org/drawingml/2006/main" w="0">
-            <a:noFill/>
-          </a:ln>
-        </p:spPr>
-        <p:txBody>
-          <a:bodyPr xmlns:a="http://schemas.openxmlformats.org/drawingml/2006/main">
-            <a:noAutofit/>
-          </a:bodyPr>
-          <a:lstStyle xmlns:a="http://schemas.openxmlformats.org/drawingml/2006/main"/>
-          <a:p xmlns:a="http://schemas.openxmlformats.org/drawingml/2006/main">
-            <a:pPr>
-              <a:defRPr sz="1575" b="1">
-                <a:solidFill>
-                  <a:srgbClr val="127452"/>
-                </a:solidFill>
-                <a:latin typeface="Malgun Gothic"/>
-                <a:ea typeface="Malgun Gothic"/>
-                <a:cs typeface="Malgun Gothic"/>
-              </a:defRPr>
-            </a:pPr>
-            <a:r>
-              <a:rPr sz="1575" b="1">
-                <a:solidFill>
-                  <a:srgbClr val="127452"/>
-                </a:solidFill>
-                <a:latin typeface="Malgun Gothic"/>
-                <a:ea typeface="Malgun Gothic"/>
-                <a:cs typeface="Malgun Gothic"/>
-              </a:rPr>
-              <a:t>건축HUB 월별 에너지 API · 초기 구현에서 제외</a:t>
-            </a:r>
-          </a:p>
-        </p:txBody>
-      </p:sp>
-      <p:sp>
-        <p:nvSpPr>
-          <p:cNvPr id="13" name="">
-            <a:extLst xmlns:a="http://schemas.openxmlformats.org/drawingml/2006/main">
-              <a:ext uri="{FF2B5EF4-FFF2-40B4-BE49-F238E27FC236}">
-                <a16:creationId xmlns:a16="http://schemas.microsoft.com/office/drawing/2014/main" id="{C0095FF0-0915-4CD6-ABBA-DD03BE00191E}"/>
-              </a:ext>
-            </a:extLst>
-          </p:cNvPr>
-          <p:cNvSpPr>
-            <a:spLocks xmlns:a="http://schemas.openxmlformats.org/drawingml/2006/main" noGrp="1"/>
-          </p:cNvSpPr>
-          <p:nvPr/>
-        </p:nvSpPr>
-        <p:spPr>
-          <a:xfrm xmlns:a="http://schemas.openxmlformats.org/drawingml/2006/main">
-            <a:off x="742950" y="3990975"/>
-            <a:ext cx="10572750" cy="295275"/>
-          </a:xfrm>
-          <a:prstGeom xmlns:a="http://schemas.openxmlformats.org/drawingml/2006/main" prst="rect">
-            <a:avLst/>
-          </a:prstGeom>
-          <a:noFill xmlns:a="http://schemas.openxmlformats.org/drawingml/2006/main"/>
-          <a:ln xmlns:a="http://schemas.openxmlformats.org/drawingml/2006/main" w="0">
-            <a:noFill/>
-          </a:ln>
-        </p:spPr>
-        <p:txBody>
-          <a:bodyPr xmlns:a="http://schemas.openxmlformats.org/drawingml/2006/main">
-            <a:noAutofit/>
-          </a:bodyPr>
-          <a:lstStyle xmlns:a="http://schemas.openxmlformats.org/drawingml/2006/main"/>
-          <a:p xmlns:a="http://schemas.openxmlformats.org/drawingml/2006/main">
-            <a:pPr>
-              <a:defRPr sz="1350" b="0">
-                <a:solidFill>
-                  <a:srgbClr val="4E6157"/>
-                </a:solidFill>
-                <a:latin typeface="Malgun Gothic"/>
-                <a:ea typeface="Malgun Gothic"/>
-                <a:cs typeface="Malgun Gothic"/>
-              </a:defRPr>
-            </a:pPr>
-            <a:r>
-              <a:rPr sz="1350" b="0">
-                <a:solidFill>
-                  <a:srgbClr val="4E6157"/>
-                </a:solidFill>
-                <a:latin typeface="Malgun Gothic"/>
-                <a:ea typeface="Malgun Gothic"/>
-                <a:cs typeface="Malgun Gothic"/>
-              </a:rPr>
-              <a:t>https://www.data.go.kr/data/15135963/openapi.do</a:t>
-            </a:r>
-          </a:p>
-        </p:txBody>
-      </p:sp>
-      <p:sp>
-        <p:nvSpPr>
-          <p:cNvPr id="14" name="">
-            <a:extLst xmlns:a="http://schemas.openxmlformats.org/drawingml/2006/main">
-              <a:ext uri="{FF2B5EF4-FFF2-40B4-BE49-F238E27FC236}">
-                <a16:creationId xmlns:a16="http://schemas.microsoft.com/office/drawing/2014/main" id="{383F2921-E48F-49C9-8373-923E95FB1492}"/>
-              </a:ext>
-            </a:extLst>
-          </p:cNvPr>
-          <p:cNvSpPr>
-            <a:spLocks xmlns:a="http://schemas.openxmlformats.org/drawingml/2006/main" noGrp="1"/>
-          </p:cNvSpPr>
-          <p:nvPr/>
-        </p:nvSpPr>
-        <p:spPr>
-          <a:xfrm xmlns:a="http://schemas.openxmlformats.org/drawingml/2006/main">
-            <a:off x="742950" y="4610100"/>
+                <a16:creationId xmlns:a16="http://schemas.microsoft.com/office/drawing/2014/main" id="{BF92EA11-EE1A-45B6-B127-E7F65D468BE2}"/>
+              </a:ext>
+            </a:extLst>
+          </p:cNvPr>
+          <p:cNvSpPr>
+            <a:spLocks xmlns:a="http://schemas.openxmlformats.org/drawingml/2006/main" noGrp="1"/>
+          </p:cNvSpPr>
+          <p:nvPr/>
+        </p:nvSpPr>
+        <p:spPr>
+          <a:xfrm xmlns:a="http://schemas.openxmlformats.org/drawingml/2006/main">
+            <a:off x="742950" y="4448175"/>
             <a:ext cx="10525125" cy="19050"/>
           </a:xfrm>
           <a:prstGeom xmlns:a="http://schemas.openxmlformats.org/drawingml/2006/main" prst="rect">
@@ -6314,21 +5964,21 @@
       </p:sp>
       <p:sp>
         <p:nvSpPr>
-          <p:cNvPr id="15" name="">
-            <a:extLst xmlns:a="http://schemas.openxmlformats.org/drawingml/2006/main">
-              <a:ext uri="{FF2B5EF4-FFF2-40B4-BE49-F238E27FC236}">
-                <a16:creationId xmlns:a16="http://schemas.microsoft.com/office/drawing/2014/main" id="{7B6B1296-6FAA-4C7E-823E-B84CC4300C2A}"/>
-              </a:ext>
-            </a:extLst>
-          </p:cNvPr>
-          <p:cNvSpPr>
-            <a:spLocks xmlns:a="http://schemas.openxmlformats.org/drawingml/2006/main" noGrp="1"/>
-          </p:cNvSpPr>
-          <p:nvPr/>
-        </p:nvSpPr>
-        <p:spPr>
-          <a:xfrm xmlns:a="http://schemas.openxmlformats.org/drawingml/2006/main">
-            <a:off x="742950" y="4810125"/>
+          <p:cNvPr id="13" name="">
+            <a:extLst xmlns:a="http://schemas.openxmlformats.org/drawingml/2006/main">
+              <a:ext uri="{FF2B5EF4-FFF2-40B4-BE49-F238E27FC236}">
+                <a16:creationId xmlns:a16="http://schemas.microsoft.com/office/drawing/2014/main" id="{EFDED9D6-4510-4C2D-8832-8DE2DF0E6E8E}"/>
+              </a:ext>
+            </a:extLst>
+          </p:cNvPr>
+          <p:cNvSpPr>
+            <a:spLocks xmlns:a="http://schemas.openxmlformats.org/drawingml/2006/main" noGrp="1"/>
+          </p:cNvSpPr>
+          <p:nvPr/>
+        </p:nvSpPr>
+        <p:spPr>
+          <a:xfrm xmlns:a="http://schemas.openxmlformats.org/drawingml/2006/main">
+            <a:off x="742950" y="4686300"/>
             <a:ext cx="10477500" cy="381000"/>
           </a:xfrm>
           <a:prstGeom xmlns:a="http://schemas.openxmlformats.org/drawingml/2006/main" prst="rect">
@@ -6364,110 +6014,110 @@
                 <a:ea typeface="Malgun Gothic"/>
                 <a:cs typeface="Malgun Gothic"/>
               </a:rPr>
-              <a:t>생성형 AI: OpenAI Codex</a:t>
-            </a:r>
-          </a:p>
-        </p:txBody>
-      </p:sp>
-      <p:sp>
-        <p:nvSpPr>
-          <p:cNvPr id="16" name="">
-            <a:extLst xmlns:a="http://schemas.openxmlformats.org/drawingml/2006/main">
-              <a:ext uri="{FF2B5EF4-FFF2-40B4-BE49-F238E27FC236}">
-                <a16:creationId xmlns:a16="http://schemas.microsoft.com/office/drawing/2014/main" id="{0E25766B-196D-4A77-917C-383D3935E1EA}"/>
-              </a:ext>
-            </a:extLst>
-          </p:cNvPr>
-          <p:cNvSpPr>
-            <a:spLocks xmlns:a="http://schemas.openxmlformats.org/drawingml/2006/main" noGrp="1"/>
-          </p:cNvSpPr>
-          <p:nvPr/>
-        </p:nvSpPr>
-        <p:spPr>
-          <a:xfrm xmlns:a="http://schemas.openxmlformats.org/drawingml/2006/main">
-            <a:off x="742950" y="5238750"/>
-            <a:ext cx="10477500" cy="885825"/>
-          </a:xfrm>
-          <a:prstGeom xmlns:a="http://schemas.openxmlformats.org/drawingml/2006/main" prst="rect">
-            <a:avLst/>
-          </a:prstGeom>
-          <a:noFill xmlns:a="http://schemas.openxmlformats.org/drawingml/2006/main"/>
-          <a:ln xmlns:a="http://schemas.openxmlformats.org/drawingml/2006/main" w="0">
-            <a:noFill/>
-          </a:ln>
-        </p:spPr>
-        <p:txBody>
-          <a:bodyPr xmlns:a="http://schemas.openxmlformats.org/drawingml/2006/main">
-            <a:noAutofit/>
-          </a:bodyPr>
-          <a:lstStyle xmlns:a="http://schemas.openxmlformats.org/drawingml/2006/main"/>
-          <a:p xmlns:a="http://schemas.openxmlformats.org/drawingml/2006/main">
-            <a:pPr>
-              <a:defRPr sz="1500" b="0">
-                <a:solidFill>
-                  <a:srgbClr val="183329"/>
-                </a:solidFill>
-                <a:latin typeface="Malgun Gothic"/>
-                <a:ea typeface="Malgun Gothic"/>
-                <a:cs typeface="Malgun Gothic"/>
-              </a:defRPr>
-            </a:pPr>
-            <a:r>
-              <a:rPr sz="1500" b="0">
-                <a:solidFill>
-                  <a:srgbClr val="183329"/>
-                </a:solidFill>
-                <a:latin typeface="Malgun Gothic"/>
-                <a:ea typeface="Malgun Gothic"/>
-                <a:cs typeface="Malgun Gothic"/>
-              </a:rPr>
-              <a:t>활용 범위: 후보 조사·비교, 문안·화면 시안, 공식 서식 및 제출파일 작성.</a:t>
-            </a:r>
-          </a:p>
-          <a:p xmlns:a="http://schemas.openxmlformats.org/drawingml/2006/main">
-            <a:pPr>
-              <a:defRPr sz="1500" b="0">
-                <a:solidFill>
-                  <a:srgbClr val="183329"/>
-                </a:solidFill>
-                <a:latin typeface="Malgun Gothic"/>
-                <a:ea typeface="Malgun Gothic"/>
-                <a:cs typeface="Malgun Gothic"/>
-              </a:defRPr>
-            </a:pPr>
-            <a:r>
-              <a:rPr sz="1500" b="0">
-                <a:solidFill>
-                  <a:srgbClr val="183329"/>
-                </a:solidFill>
-                <a:latin typeface="Malgun Gothic"/>
-                <a:ea typeface="Malgun Gothic"/>
-                <a:cs typeface="Malgun Gothic"/>
-              </a:rPr>
-              <a:t>자료 확인: 2026.9.30. 모델 학습·LLM 실행·현장 검증은 미실시.</a:t>
-            </a:r>
-          </a:p>
-          <a:p xmlns:a="http://schemas.openxmlformats.org/drawingml/2006/main">
-            <a:pPr>
-              <a:defRPr sz="1500" b="0">
-                <a:solidFill>
-                  <a:srgbClr val="183329"/>
-                </a:solidFill>
-                <a:latin typeface="Malgun Gothic"/>
-                <a:ea typeface="Malgun Gothic"/>
-                <a:cs typeface="Malgun Gothic"/>
-              </a:defRPr>
-            </a:pPr>
-            <a:r>
-              <a:rPr sz="1500" b="0">
-                <a:solidFill>
-                  <a:srgbClr val="183329"/>
-                </a:solidFill>
-                <a:latin typeface="Malgun Gothic"/>
-                <a:ea typeface="Malgun Gothic"/>
-                <a:cs typeface="Malgun Gothic"/>
-              </a:rPr>
-              <a:t>확보한 수치는 공개 CSV의 행·열 수와 기본 검사 결과이며 절감 효과가 아니다.</a:t>
+              <a:t>자료 확인: 2026.9.30</a:t>
+            </a:r>
+          </a:p>
+        </p:txBody>
+      </p:sp>
+      <p:sp>
+        <p:nvSpPr>
+          <p:cNvPr id="14" name="">
+            <a:extLst xmlns:a="http://schemas.openxmlformats.org/drawingml/2006/main">
+              <a:ext uri="{FF2B5EF4-FFF2-40B4-BE49-F238E27FC236}">
+                <a16:creationId xmlns:a16="http://schemas.microsoft.com/office/drawing/2014/main" id="{E206908A-A4C8-4B36-BD63-E4376D3702C3}"/>
+              </a:ext>
+            </a:extLst>
+          </p:cNvPr>
+          <p:cNvSpPr>
+            <a:spLocks xmlns:a="http://schemas.openxmlformats.org/drawingml/2006/main" noGrp="1"/>
+          </p:cNvSpPr>
+          <p:nvPr/>
+        </p:nvSpPr>
+        <p:spPr>
+          <a:xfrm xmlns:a="http://schemas.openxmlformats.org/drawingml/2006/main">
+            <a:off x="742950" y="5210175"/>
+            <a:ext cx="10477500" cy="904875"/>
+          </a:xfrm>
+          <a:prstGeom xmlns:a="http://schemas.openxmlformats.org/drawingml/2006/main" prst="rect">
+            <a:avLst/>
+          </a:prstGeom>
+          <a:noFill xmlns:a="http://schemas.openxmlformats.org/drawingml/2006/main"/>
+          <a:ln xmlns:a="http://schemas.openxmlformats.org/drawingml/2006/main" w="0">
+            <a:noFill/>
+          </a:ln>
+        </p:spPr>
+        <p:txBody>
+          <a:bodyPr xmlns:a="http://schemas.openxmlformats.org/drawingml/2006/main">
+            <a:noAutofit/>
+          </a:bodyPr>
+          <a:lstStyle xmlns:a="http://schemas.openxmlformats.org/drawingml/2006/main"/>
+          <a:p xmlns:a="http://schemas.openxmlformats.org/drawingml/2006/main">
+            <a:pPr>
+              <a:defRPr sz="1725" b="0">
+                <a:solidFill>
+                  <a:srgbClr val="183329"/>
+                </a:solidFill>
+                <a:latin typeface="Malgun Gothic"/>
+                <a:ea typeface="Malgun Gothic"/>
+                <a:cs typeface="Malgun Gothic"/>
+              </a:defRPr>
+            </a:pPr>
+            <a:r>
+              <a:rPr sz="1725" b="0">
+                <a:solidFill>
+                  <a:srgbClr val="183329"/>
+                </a:solidFill>
+                <a:latin typeface="Malgun Gothic"/>
+                <a:ea typeface="Malgun Gothic"/>
+                <a:cs typeface="Malgun Gothic"/>
+              </a:rPr>
+              <a:t>OpenAI Codex: 후보 조사·비교, 문안·공식 서식·제출파일 작성</a:t>
+            </a:r>
+          </a:p>
+          <a:p xmlns:a="http://schemas.openxmlformats.org/drawingml/2006/main">
+            <a:pPr>
+              <a:defRPr sz="1725" b="0">
+                <a:solidFill>
+                  <a:srgbClr val="183329"/>
+                </a:solidFill>
+                <a:latin typeface="Malgun Gothic"/>
+                <a:ea typeface="Malgun Gothic"/>
+                <a:cs typeface="Malgun Gothic"/>
+              </a:defRPr>
+            </a:pPr>
+            <a:r>
+              <a:rPr sz="1725" b="0">
+                <a:solidFill>
+                  <a:srgbClr val="183329"/>
+                </a:solidFill>
+                <a:latin typeface="Malgun Gothic"/>
+                <a:ea typeface="Malgun Gothic"/>
+                <a:cs typeface="Malgun Gothic"/>
+              </a:rPr>
+              <a:t>OpenAI 이미지 생성: 서비스 흐름도·화면 구성안 제작</a:t>
+            </a:r>
+          </a:p>
+          <a:p xmlns:a="http://schemas.openxmlformats.org/drawingml/2006/main">
+            <a:pPr>
+              <a:defRPr sz="1725" b="0">
+                <a:solidFill>
+                  <a:srgbClr val="183329"/>
+                </a:solidFill>
+                <a:latin typeface="Malgun Gothic"/>
+                <a:ea typeface="Malgun Gothic"/>
+                <a:cs typeface="Malgun Gothic"/>
+              </a:defRPr>
+            </a:pPr>
+            <a:r>
+              <a:rPr sz="1725" b="0">
+                <a:solidFill>
+                  <a:srgbClr val="183329"/>
+                </a:solidFill>
+                <a:latin typeface="Malgun Gothic"/>
+                <a:ea typeface="Malgun Gothic"/>
+                <a:cs typeface="Malgun Gothic"/>
+              </a:rPr>
+              <a:t>화면 구성안은 서비스 이용 과정을 설명하는 예시다.</a:t>
             </a:r>
           </a:p>
         </p:txBody>
@@ -6475,7 +6125,7 @@
     </p:spTree>
     <p:extLst>
       <p:ext uri="{BB962C8B-B14F-4D97-AF65-F5344CB8AC3E}">
-        <p14:creationId xmlns:p14="http://schemas.microsoft.com/office/powerpoint/2010/main" val="713817598"/>
+        <p14:creationId xmlns:p14="http://schemas.microsoft.com/office/powerpoint/2010/main" val="1582166691"/>
       </p:ext>
     </p:extLst>
   </p:cSld>
@@ -6506,7 +6156,7 @@
           <p:cNvPr id="14" name="">
             <a:extLst xmlns:a="http://schemas.openxmlformats.org/drawingml/2006/main">
               <a:ext uri="{FF2B5EF4-FFF2-40B4-BE49-F238E27FC236}">
-                <a16:creationId xmlns:a16="http://schemas.microsoft.com/office/drawing/2014/main" id="{A1AE5CD7-9823-45C5-8856-E17057FC87C9}"/>
+                <a16:creationId xmlns:a16="http://schemas.microsoft.com/office/drawing/2014/main" id="{A092A348-D2B5-4FA9-909D-15796B1422E1}"/>
               </a:ext>
             </a:extLst>
           </p:cNvPr>
@@ -6536,7 +6186,7 @@
           <p:cNvPr id="2" name="">
             <a:extLst xmlns:a="http://schemas.openxmlformats.org/drawingml/2006/main">
               <a:ext uri="{FF2B5EF4-FFF2-40B4-BE49-F238E27FC236}">
-                <a16:creationId xmlns:a16="http://schemas.microsoft.com/office/drawing/2014/main" id="{82E47E8B-52E6-4DA9-B513-15566DA385A8}"/>
+                <a16:creationId xmlns:a16="http://schemas.microsoft.com/office/drawing/2014/main" id="{58B2B7CB-586E-42C3-AD1E-D425D89DF184}"/>
               </a:ext>
             </a:extLst>
           </p:cNvPr>
@@ -6583,7 +6233,7 @@
                 <a:ea typeface="Malgun Gothic"/>
                 <a:cs typeface="Malgun Gothic"/>
               </a:rPr>
-              <a:t>사용량과 불편을 함께 봐야 조사 질문이 구체화된다</a:t>
+              <a:t>흩어진 에너지 자료와 불편을 조사 근거로 연결한다</a:t>
             </a:r>
           </a:p>
         </p:txBody>
@@ -6593,7 +6243,7 @@
           <p:cNvPr id="3" name="">
             <a:extLst xmlns:a="http://schemas.openxmlformats.org/drawingml/2006/main">
               <a:ext uri="{FF2B5EF4-FFF2-40B4-BE49-F238E27FC236}">
-                <a16:creationId xmlns:a16="http://schemas.microsoft.com/office/drawing/2014/main" id="{1401B43B-F123-49BD-BEA1-FE31346293BA}"/>
+                <a16:creationId xmlns:a16="http://schemas.microsoft.com/office/drawing/2014/main" id="{A016AB8E-3970-4888-992A-B7EF389A4D2C}"/>
               </a:ext>
             </a:extLst>
           </p:cNvPr>
@@ -6623,7 +6273,7 @@
           <p:cNvPr id="4" name="">
             <a:extLst xmlns:a="http://schemas.openxmlformats.org/drawingml/2006/main">
               <a:ext uri="{FF2B5EF4-FFF2-40B4-BE49-F238E27FC236}">
-                <a16:creationId xmlns:a16="http://schemas.microsoft.com/office/drawing/2014/main" id="{0A6904F5-41F4-4B59-8BEF-E1841C3E1BB5}"/>
+                <a16:creationId xmlns:a16="http://schemas.microsoft.com/office/drawing/2014/main" id="{B3B4F414-7306-4797-ADF2-E399A0266F89}"/>
               </a:ext>
             </a:extLst>
           </p:cNvPr>
@@ -6680,7 +6330,7 @@
           <p:cNvPr id="5" name="">
             <a:extLst xmlns:a="http://schemas.openxmlformats.org/drawingml/2006/main">
               <a:ext uri="{FF2B5EF4-FFF2-40B4-BE49-F238E27FC236}">
-                <a16:creationId xmlns:a16="http://schemas.microsoft.com/office/drawing/2014/main" id="{29433F27-7E78-4A10-BA15-8BF9D1A5FCA4}"/>
+                <a16:creationId xmlns:a16="http://schemas.microsoft.com/office/drawing/2014/main" id="{E3FD4211-2B55-41A2-AE21-C63BD6DA11DF}"/>
               </a:ext>
             </a:extLst>
           </p:cNvPr>
@@ -6737,7 +6387,7 @@
           <p:cNvPr id="6" name="">
             <a:extLst xmlns:a="http://schemas.openxmlformats.org/drawingml/2006/main">
               <a:ext uri="{FF2B5EF4-FFF2-40B4-BE49-F238E27FC236}">
-                <a16:creationId xmlns:a16="http://schemas.microsoft.com/office/drawing/2014/main" id="{9F98B8F2-05C3-41B9-9D41-902F802EBCAA}"/>
+                <a16:creationId xmlns:a16="http://schemas.microsoft.com/office/drawing/2014/main" id="{7E4BF714-D21C-438F-91E2-C6FA1A01A41B}"/>
               </a:ext>
             </a:extLst>
           </p:cNvPr>
@@ -6784,7 +6434,7 @@
                 <a:ea typeface="Malgun Gothic"/>
                 <a:cs typeface="Malgun Gothic"/>
               </a:rPr>
-              <a:t>출처: 국토안전관리원 공공건축물 소비량 자료, UC Berkeley CBE 이용자 설문 [13쪽]</a:t>
+              <a:t>자료·설문 개념 참고: 국토안전관리원 공공건축물 소비량, UC Berkeley CBE [13쪽]</a:t>
             </a:r>
           </a:p>
         </p:txBody>
@@ -6794,7 +6444,7 @@
           <p:cNvPr id="7" name="">
             <a:extLst xmlns:a="http://schemas.openxmlformats.org/drawingml/2006/main">
               <a:ext uri="{FF2B5EF4-FFF2-40B4-BE49-F238E27FC236}">
-                <a16:creationId xmlns:a16="http://schemas.microsoft.com/office/drawing/2014/main" id="{718FB442-4C86-4803-AD98-202109E51E54}"/>
+                <a16:creationId xmlns:a16="http://schemas.microsoft.com/office/drawing/2014/main" id="{5103BDC3-CB57-47CC-B8AE-ADCFDDD82D45}"/>
               </a:ext>
             </a:extLst>
           </p:cNvPr>
@@ -6841,7 +6491,7 @@
                 <a:ea typeface="Malgun Gothic"/>
                 <a:cs typeface="Malgun Gothic"/>
               </a:rPr>
-              <a:t>에너지 데이터가 알려주는 것</a:t>
+              <a:t>건물의 사용 수준</a:t>
             </a:r>
           </a:p>
         </p:txBody>
@@ -6851,7 +6501,7 @@
           <p:cNvPr id="8" name="">
             <a:extLst xmlns:a="http://schemas.openxmlformats.org/drawingml/2006/main">
               <a:ext uri="{FF2B5EF4-FFF2-40B4-BE49-F238E27FC236}">
-                <a16:creationId xmlns:a16="http://schemas.microsoft.com/office/drawing/2014/main" id="{A0AA6E5D-3D01-4CE9-8F13-FC5328BA1B4B}"/>
+                <a16:creationId xmlns:a16="http://schemas.microsoft.com/office/drawing/2014/main" id="{CD3CAB78-BB6A-450C-9E36-20713BDA9FB0}"/>
               </a:ext>
             </a:extLst>
           </p:cNvPr>
@@ -6898,7 +6548,7 @@
                 <a:ea typeface="Malgun Gothic"/>
                 <a:cs typeface="Malgun Gothic"/>
               </a:rPr>
-              <a:t>건물 전체의 사용 수준과 보고 누락.</a:t>
+              <a:t>공공건축물 에너지 자료에서</a:t>
             </a:r>
           </a:p>
           <a:p xmlns:a="http://schemas.openxmlformats.org/drawingml/2006/main">
@@ -6921,7 +6571,7 @@
                 <a:ea typeface="Malgun Gothic"/>
                 <a:cs typeface="Malgun Gothic"/>
               </a:rPr>
-              <a:t>어느 방의 창호가 문제인지까지</a:t>
+              <a:t>지역·용도·면적·준공 시기를 살펴</a:t>
             </a:r>
           </a:p>
           <a:p xmlns:a="http://schemas.openxmlformats.org/drawingml/2006/main">
@@ -6944,7 +6594,7 @@
                 <a:ea typeface="Malgun Gothic"/>
                 <a:cs typeface="Malgun Gothic"/>
               </a:rPr>
-              <a:t>알려주지는 않는다.</a:t>
+              <a:t>유사 조건에 맞춰 소비량을 비교한다.</a:t>
             </a:r>
           </a:p>
         </p:txBody>
@@ -6954,7 +6604,7 @@
           <p:cNvPr id="9" name="">
             <a:extLst xmlns:a="http://schemas.openxmlformats.org/drawingml/2006/main">
               <a:ext uri="{FF2B5EF4-FFF2-40B4-BE49-F238E27FC236}">
-                <a16:creationId xmlns:a16="http://schemas.microsoft.com/office/drawing/2014/main" id="{426F168D-A8A0-4536-9A38-71053DCF0C7E}"/>
+                <a16:creationId xmlns:a16="http://schemas.microsoft.com/office/drawing/2014/main" id="{63A7EFCC-D38D-4903-A39E-8A62A36EACFB}"/>
               </a:ext>
             </a:extLst>
           </p:cNvPr>
@@ -7001,7 +6651,7 @@
                 <a:ea typeface="Malgun Gothic"/>
                 <a:cs typeface="Malgun Gothic"/>
               </a:rPr>
-              <a:t>이용자가 알려주는 것</a:t>
+              <a:t>이용자의 생활 맥락</a:t>
             </a:r>
           </a:p>
         </p:txBody>
@@ -7011,7 +6661,7 @@
           <p:cNvPr id="10" name="">
             <a:extLst xmlns:a="http://schemas.openxmlformats.org/drawingml/2006/main">
               <a:ext uri="{FF2B5EF4-FFF2-40B4-BE49-F238E27FC236}">
-                <a16:creationId xmlns:a16="http://schemas.microsoft.com/office/drawing/2014/main" id="{55950E87-F6C1-44C8-BA61-0433C9C0D977}"/>
+                <a16:creationId xmlns:a16="http://schemas.microsoft.com/office/drawing/2014/main" id="{F49415F6-B502-4BA8-B010-A212C29017BA}"/>
               </a:ext>
             </a:extLst>
           </p:cNvPr>
@@ -7058,7 +6708,7 @@
                 <a:ea typeface="Malgun Gothic"/>
                 <a:cs typeface="Malgun Gothic"/>
               </a:rPr>
-              <a:t>덥거나 추운 장소·시간·상황.</a:t>
+              <a:t>“창가가 덥다”, “오전에 춥다”처럼</a:t>
             </a:r>
           </a:p>
           <a:p xmlns:a="http://schemas.openxmlformats.org/drawingml/2006/main">
@@ -7081,7 +6731,7 @@
                 <a:ea typeface="Malgun Gothic"/>
                 <a:cs typeface="Malgun Gothic"/>
               </a:rPr>
-              <a:t>건물 전체 소비량이나 공사 효과를</a:t>
+              <a:t>다양한 표현을 장소·시간·증상과</a:t>
             </a:r>
           </a:p>
           <a:p xmlns:a="http://schemas.openxmlformats.org/drawingml/2006/main">
@@ -7104,7 +6754,7 @@
                 <a:ea typeface="Malgun Gothic"/>
                 <a:cs typeface="Malgun Gothic"/>
               </a:rPr>
-              <a:t>대신 측정하지는 않는다.</a:t>
+              <a:t>이용 상황으로 구체화한다.</a:t>
             </a:r>
           </a:p>
         </p:txBody>
@@ -7114,7 +6764,7 @@
           <p:cNvPr id="11" name="">
             <a:extLst xmlns:a="http://schemas.openxmlformats.org/drawingml/2006/main">
               <a:ext uri="{FF2B5EF4-FFF2-40B4-BE49-F238E27FC236}">
-                <a16:creationId xmlns:a16="http://schemas.microsoft.com/office/drawing/2014/main" id="{5F5F9FCD-A66C-42D2-BFF9-AD42032B00C9}"/>
+                <a16:creationId xmlns:a16="http://schemas.microsoft.com/office/drawing/2014/main" id="{F0B651FE-1702-4724-946C-C1755DAAA95C}"/>
               </a:ext>
             </a:extLst>
           </p:cNvPr>
@@ -7144,7 +6794,7 @@
           <p:cNvPr id="12" name="">
             <a:extLst xmlns:a="http://schemas.openxmlformats.org/drawingml/2006/main">
               <a:ext uri="{FF2B5EF4-FFF2-40B4-BE49-F238E27FC236}">
-                <a16:creationId xmlns:a16="http://schemas.microsoft.com/office/drawing/2014/main" id="{13AF6C09-FEB6-4DA6-B1DE-C72877CA3223}"/>
+                <a16:creationId xmlns:a16="http://schemas.microsoft.com/office/drawing/2014/main" id="{E8DFEE34-5597-446C-9189-F2A85B59A7C9}"/>
               </a:ext>
             </a:extLst>
           </p:cNvPr>
@@ -7191,7 +6841,7 @@
                 <a:ea typeface="Malgun Gothic"/>
                 <a:cs typeface="Malgun Gothic"/>
               </a:rPr>
-              <a:t>두 자료 사이에 필요한 것은 “현장에서 확인할 질문”</a:t>
+              <a:t>담당자에게 필요한 것은 “어디를, 무엇부터 살펴볼지”</a:t>
             </a:r>
           </a:p>
         </p:txBody>
@@ -7201,7 +6851,7 @@
           <p:cNvPr id="13" name="">
             <a:extLst xmlns:a="http://schemas.openxmlformats.org/drawingml/2006/main">
               <a:ext uri="{FF2B5EF4-FFF2-40B4-BE49-F238E27FC236}">
-                <a16:creationId xmlns:a16="http://schemas.microsoft.com/office/drawing/2014/main" id="{C93E39D3-6E1B-4E17-81B5-40E6FFAD4BD1}"/>
+                <a16:creationId xmlns:a16="http://schemas.microsoft.com/office/drawing/2014/main" id="{587DAC48-F9FE-4B0C-AE14-B699709F40D9}"/>
               </a:ext>
             </a:extLst>
           </p:cNvPr>
@@ -7248,7 +6898,7 @@
                 <a:ea typeface="Malgun Gothic"/>
                 <a:cs typeface="Malgun Gothic"/>
               </a:rPr>
-              <a:t>시설 담당자가 사실·이용자 진술·점검 가설을 구분한 요청서를 만든다.</a:t>
+              <a:t>두 정보를 한 건물 기록에 묶어 현장 전문가에게 전달할 조사 요청서를 만든다.</a:t>
             </a:r>
           </a:p>
         </p:txBody>
@@ -7256,7 +6906,7 @@
     </p:spTree>
     <p:extLst>
       <p:ext uri="{BB962C8B-B14F-4D97-AF65-F5344CB8AC3E}">
-        <p14:creationId xmlns:p14="http://schemas.microsoft.com/office/powerpoint/2010/main" val="1443061921"/>
+        <p14:creationId xmlns:p14="http://schemas.microsoft.com/office/powerpoint/2010/main" val="307633402"/>
       </p:ext>
     </p:extLst>
   </p:cSld>
@@ -7284,10 +6934,10 @@
       </p:grpSpPr>
       <p:sp>
         <p:nvSpPr>
-          <p:cNvPr id="27" name="">
-            <a:extLst xmlns:a="http://schemas.openxmlformats.org/drawingml/2006/main">
-              <a:ext uri="{FF2B5EF4-FFF2-40B4-BE49-F238E27FC236}">
-                <a16:creationId xmlns:a16="http://schemas.microsoft.com/office/drawing/2014/main" id="{F39A95D2-DC0C-4384-B51F-DB0471A7E051}"/>
+          <p:cNvPr id="8" name="">
+            <a:extLst xmlns:a="http://schemas.openxmlformats.org/drawingml/2006/main">
+              <a:ext uri="{FF2B5EF4-FFF2-40B4-BE49-F238E27FC236}">
+                <a16:creationId xmlns:a16="http://schemas.microsoft.com/office/drawing/2014/main" id="{BC38E164-4B83-402E-BF9B-9C5234EAFF7B}"/>
               </a:ext>
             </a:extLst>
           </p:cNvPr>
@@ -7317,7 +6967,7 @@
           <p:cNvPr id="2" name="">
             <a:extLst xmlns:a="http://schemas.openxmlformats.org/drawingml/2006/main">
               <a:ext uri="{FF2B5EF4-FFF2-40B4-BE49-F238E27FC236}">
-                <a16:creationId xmlns:a16="http://schemas.microsoft.com/office/drawing/2014/main" id="{5F87AFB6-10F8-4825-BFB6-10B605A9A871}"/>
+                <a16:creationId xmlns:a16="http://schemas.microsoft.com/office/drawing/2014/main" id="{D77B8E85-39D7-4B4F-B88B-68EE4BAC78B2}"/>
               </a:ext>
             </a:extLst>
           </p:cNvPr>
@@ -7364,7 +7014,7 @@
                 <a:ea typeface="Malgun Gothic"/>
                 <a:cs typeface="Malgun Gothic"/>
               </a:rPr>
-              <a:t>한 건물의 조사 준비를 끝내는 다섯 단계</a:t>
+              <a:t>건물 선택부터 조사 요청까지 이어지는 다섯 단계</a:t>
             </a:r>
           </a:p>
         </p:txBody>
@@ -7374,7 +7024,7 @@
           <p:cNvPr id="3" name="">
             <a:extLst xmlns:a="http://schemas.openxmlformats.org/drawingml/2006/main">
               <a:ext uri="{FF2B5EF4-FFF2-40B4-BE49-F238E27FC236}">
-                <a16:creationId xmlns:a16="http://schemas.microsoft.com/office/drawing/2014/main" id="{1B950BCA-7035-4E6C-BD57-AEDD40B4E2A1}"/>
+                <a16:creationId xmlns:a16="http://schemas.microsoft.com/office/drawing/2014/main" id="{ED855238-FD2F-4E07-B8E1-3B4145B68234}"/>
               </a:ext>
             </a:extLst>
           </p:cNvPr>
@@ -7404,7 +7054,7 @@
           <p:cNvPr id="4" name="">
             <a:extLst xmlns:a="http://schemas.openxmlformats.org/drawingml/2006/main">
               <a:ext uri="{FF2B5EF4-FFF2-40B4-BE49-F238E27FC236}">
-                <a16:creationId xmlns:a16="http://schemas.microsoft.com/office/drawing/2014/main" id="{4EE7D509-4A00-404B-8B26-BE850F0F1825}"/>
+                <a16:creationId xmlns:a16="http://schemas.microsoft.com/office/drawing/2014/main" id="{0209DEBD-2CDE-4552-B521-8335AE3757CF}"/>
               </a:ext>
             </a:extLst>
           </p:cNvPr>
@@ -7461,7 +7111,7 @@
           <p:cNvPr id="5" name="">
             <a:extLst xmlns:a="http://schemas.openxmlformats.org/drawingml/2006/main">
               <a:ext uri="{FF2B5EF4-FFF2-40B4-BE49-F238E27FC236}">
-                <a16:creationId xmlns:a16="http://schemas.microsoft.com/office/drawing/2014/main" id="{0C367FC1-DAD3-4B15-9050-3C6BC445B5F6}"/>
+                <a16:creationId xmlns:a16="http://schemas.microsoft.com/office/drawing/2014/main" id="{B52FE025-AF1F-4318-A318-0DB9F2E0C4AF}"/>
               </a:ext>
             </a:extLst>
           </p:cNvPr>
@@ -7513,73 +7163,63 @@
           </a:p>
         </p:txBody>
       </p:sp>
-      <p:sp>
-        <p:nvSpPr>
-          <p:cNvPr id="6" name="">
-            <a:extLst xmlns:a="http://schemas.openxmlformats.org/drawingml/2006/main">
-              <a:ext uri="{FF2B5EF4-FFF2-40B4-BE49-F238E27FC236}">
-                <a16:creationId xmlns:a16="http://schemas.microsoft.com/office/drawing/2014/main" id="{E8433478-D015-4295-8E74-043C15326372}"/>
-              </a:ext>
-            </a:extLst>
-          </p:cNvPr>
-          <p:cNvSpPr>
-            <a:spLocks xmlns:a="http://schemas.openxmlformats.org/drawingml/2006/main" noGrp="1"/>
-          </p:cNvSpPr>
-          <p:nvPr/>
-        </p:nvSpPr>
-        <p:spPr>
-          <a:xfrm xmlns:a="http://schemas.openxmlformats.org/drawingml/2006/main">
-            <a:off x="685800" y="1581150"/>
-            <a:ext cx="2114550" cy="2895600"/>
-          </a:xfrm>
-          <a:prstGeom xmlns:a="http://schemas.openxmlformats.org/drawingml/2006/main" prst="rect">
-            <a:avLst/>
-          </a:prstGeom>
-          <a:solidFill xmlns:a="http://schemas.openxmlformats.org/drawingml/2006/main">
-            <a:srgbClr val="FFFFFF"/>
-          </a:solidFill>
-          <a:ln xmlns:a="http://schemas.openxmlformats.org/drawingml/2006/main" w="14288">
-            <a:solidFill>
-              <a:srgbClr val="CADBCE"/>
-            </a:solidFill>
-          </a:ln>
-        </p:spPr>
-      </p:sp>
+      <p:pic>
+        <p:nvPicPr>
+          <p:cNvPr id="13" name=""/>
+          <p:cNvPicPr>
+            <a:picLocks xmlns:a="http://schemas.openxmlformats.org/drawingml/2006/main" noChangeAspect="1"/>
+          </p:cNvPicPr>
+          <p:nvPr/>
+        </p:nvPicPr>
+        <p:blipFill>
+          <a:blip xmlns:r="http://schemas.openxmlformats.org/officeDocument/2006/relationships" xmlns:a="http://schemas.openxmlformats.org/drawingml/2006/main" r:embed="R2822bc12c15d47d4"/>
+          <a:stretch xmlns:a="http://schemas.openxmlformats.org/drawingml/2006/main"/>
+        </p:blipFill>
+        <p:spPr>
+          <a:xfrm xmlns:a="http://schemas.openxmlformats.org/drawingml/2006/main">
+            <a:off x="723900" y="1352550"/>
+            <a:ext cx="10744200" cy="3581400"/>
+          </a:xfrm>
+          <a:prstGeom xmlns:a="http://schemas.openxmlformats.org/drawingml/2006/main" prst="rect">
+            <a:avLst/>
+          </a:prstGeom>
+        </p:spPr>
+      </p:pic>
       <p:sp>
         <p:nvSpPr>
           <p:cNvPr id="7" name="">
             <a:extLst xmlns:a="http://schemas.openxmlformats.org/drawingml/2006/main">
               <a:ext uri="{FF2B5EF4-FFF2-40B4-BE49-F238E27FC236}">
-                <a16:creationId xmlns:a16="http://schemas.microsoft.com/office/drawing/2014/main" id="{93397DEA-FA24-4418-8BCD-22591B64EF7E}"/>
-              </a:ext>
-            </a:extLst>
-          </p:cNvPr>
-          <p:cNvSpPr>
-            <a:spLocks xmlns:a="http://schemas.openxmlformats.org/drawingml/2006/main" noGrp="1"/>
-          </p:cNvSpPr>
-          <p:nvPr/>
-        </p:nvSpPr>
-        <p:spPr>
-          <a:xfrm xmlns:a="http://schemas.openxmlformats.org/drawingml/2006/main">
-            <a:off x="857250" y="1752600"/>
-            <a:ext cx="1771650" cy="304800"/>
-          </a:xfrm>
-          <a:prstGeom xmlns:a="http://schemas.openxmlformats.org/drawingml/2006/main" prst="rect">
-            <a:avLst/>
-          </a:prstGeom>
-          <a:noFill xmlns:a="http://schemas.openxmlformats.org/drawingml/2006/main"/>
-          <a:ln xmlns:a="http://schemas.openxmlformats.org/drawingml/2006/main" w="0">
-            <a:noFill/>
-          </a:ln>
-        </p:spPr>
-        <p:txBody>
-          <a:bodyPr xmlns:a="http://schemas.openxmlformats.org/drawingml/2006/main">
-            <a:noAutofit/>
-          </a:bodyPr>
-          <a:lstStyle xmlns:a="http://schemas.openxmlformats.org/drawingml/2006/main"/>
-          <a:p xmlns:a="http://schemas.openxmlformats.org/drawingml/2006/main">
-            <a:pPr>
-              <a:defRPr sz="1500" b="1">
+                <a16:creationId xmlns:a16="http://schemas.microsoft.com/office/drawing/2014/main" id="{09651B66-4779-4B2C-829F-C4F6A29CEE91}"/>
+              </a:ext>
+            </a:extLst>
+          </p:cNvPr>
+          <p:cNvSpPr>
+            <a:spLocks xmlns:a="http://schemas.openxmlformats.org/drawingml/2006/main" noGrp="1"/>
+          </p:cNvSpPr>
+          <p:nvPr/>
+        </p:nvSpPr>
+        <p:spPr>
+          <a:xfrm xmlns:a="http://schemas.openxmlformats.org/drawingml/2006/main">
+            <a:off x="742950" y="5210175"/>
+            <a:ext cx="10382250" cy="628650"/>
+          </a:xfrm>
+          <a:prstGeom xmlns:a="http://schemas.openxmlformats.org/drawingml/2006/main" prst="rect">
+            <a:avLst/>
+          </a:prstGeom>
+          <a:noFill xmlns:a="http://schemas.openxmlformats.org/drawingml/2006/main"/>
+          <a:ln xmlns:a="http://schemas.openxmlformats.org/drawingml/2006/main" w="0">
+            <a:noFill/>
+          </a:ln>
+        </p:spPr>
+        <p:txBody>
+          <a:bodyPr xmlns:a="http://schemas.openxmlformats.org/drawingml/2006/main">
+            <a:noAutofit/>
+          </a:bodyPr>
+          <a:lstStyle xmlns:a="http://schemas.openxmlformats.org/drawingml/2006/main"/>
+          <a:p xmlns:a="http://schemas.openxmlformats.org/drawingml/2006/main">
+            <a:pPr>
+              <a:defRPr sz="2100" b="1">
                 <a:solidFill>
                   <a:srgbClr val="127452"/>
                 </a:solidFill>
@@ -7589,7 +7229,7 @@
               </a:defRPr>
             </a:pPr>
             <a:r>
-              <a:rPr sz="1500" b="1">
+              <a:rPr sz="2100" b="1">
                 <a:solidFill>
                   <a:srgbClr val="127452"/>
                 </a:solidFill>
@@ -7597,1105 +7237,7 @@
                 <a:ea typeface="Malgun Gothic"/>
                 <a:cs typeface="Malgun Gothic"/>
               </a:rPr>
-              <a:t>01</a:t>
-            </a:r>
-          </a:p>
-        </p:txBody>
-      </p:sp>
-      <p:sp>
-        <p:nvSpPr>
-          <p:cNvPr id="8" name="">
-            <a:extLst xmlns:a="http://schemas.openxmlformats.org/drawingml/2006/main">
-              <a:ext uri="{FF2B5EF4-FFF2-40B4-BE49-F238E27FC236}">
-                <a16:creationId xmlns:a16="http://schemas.microsoft.com/office/drawing/2014/main" id="{B1B1CAF0-EDC4-462E-B6C7-323C8DFD2713}"/>
-              </a:ext>
-            </a:extLst>
-          </p:cNvPr>
-          <p:cNvSpPr>
-            <a:spLocks xmlns:a="http://schemas.openxmlformats.org/drawingml/2006/main" noGrp="1"/>
-          </p:cNvSpPr>
-          <p:nvPr/>
-        </p:nvSpPr>
-        <p:spPr>
-          <a:xfrm xmlns:a="http://schemas.openxmlformats.org/drawingml/2006/main">
-            <a:off x="857250" y="2162175"/>
-            <a:ext cx="1771650" cy="523875"/>
-          </a:xfrm>
-          <a:prstGeom xmlns:a="http://schemas.openxmlformats.org/drawingml/2006/main" prst="rect">
-            <a:avLst/>
-          </a:prstGeom>
-          <a:noFill xmlns:a="http://schemas.openxmlformats.org/drawingml/2006/main"/>
-          <a:ln xmlns:a="http://schemas.openxmlformats.org/drawingml/2006/main" w="0">
-            <a:noFill/>
-          </a:ln>
-        </p:spPr>
-        <p:txBody>
-          <a:bodyPr xmlns:a="http://schemas.openxmlformats.org/drawingml/2006/main">
-            <a:noAutofit/>
-          </a:bodyPr>
-          <a:lstStyle xmlns:a="http://schemas.openxmlformats.org/drawingml/2006/main"/>
-          <a:p xmlns:a="http://schemas.openxmlformats.org/drawingml/2006/main">
-            <a:pPr>
-              <a:defRPr sz="1950" b="1">
-                <a:solidFill>
-                  <a:srgbClr val="183329"/>
-                </a:solidFill>
-                <a:latin typeface="Malgun Gothic"/>
-                <a:ea typeface="Malgun Gothic"/>
-                <a:cs typeface="Malgun Gothic"/>
-              </a:defRPr>
-            </a:pPr>
-            <a:r>
-              <a:rPr sz="1950" b="1">
-                <a:solidFill>
-                  <a:srgbClr val="183329"/>
-                </a:solidFill>
-                <a:latin typeface="Malgun Gothic"/>
-                <a:ea typeface="Malgun Gothic"/>
-                <a:cs typeface="Malgun Gothic"/>
-              </a:rPr>
-              <a:t>건물 선택</a:t>
-            </a:r>
-          </a:p>
-        </p:txBody>
-      </p:sp>
-      <p:sp>
-        <p:nvSpPr>
-          <p:cNvPr id="9" name="">
-            <a:extLst xmlns:a="http://schemas.openxmlformats.org/drawingml/2006/main">
-              <a:ext uri="{FF2B5EF4-FFF2-40B4-BE49-F238E27FC236}">
-                <a16:creationId xmlns:a16="http://schemas.microsoft.com/office/drawing/2014/main" id="{DCEE24EA-8925-42F4-9A5C-15E79976B0B4}"/>
-              </a:ext>
-            </a:extLst>
-          </p:cNvPr>
-          <p:cNvSpPr>
-            <a:spLocks xmlns:a="http://schemas.openxmlformats.org/drawingml/2006/main" noGrp="1"/>
-          </p:cNvSpPr>
-          <p:nvPr/>
-        </p:nvSpPr>
-        <p:spPr>
-          <a:xfrm xmlns:a="http://schemas.openxmlformats.org/drawingml/2006/main">
-            <a:off x="857250" y="2762250"/>
-            <a:ext cx="1771650" cy="1552575"/>
-          </a:xfrm>
-          <a:prstGeom xmlns:a="http://schemas.openxmlformats.org/drawingml/2006/main" prst="rect">
-            <a:avLst/>
-          </a:prstGeom>
-          <a:noFill xmlns:a="http://schemas.openxmlformats.org/drawingml/2006/main"/>
-          <a:ln xmlns:a="http://schemas.openxmlformats.org/drawingml/2006/main" w="0">
-            <a:noFill/>
-          </a:ln>
-        </p:spPr>
-        <p:txBody>
-          <a:bodyPr xmlns:a="http://schemas.openxmlformats.org/drawingml/2006/main">
-            <a:noAutofit/>
-          </a:bodyPr>
-          <a:lstStyle xmlns:a="http://schemas.openxmlformats.org/drawingml/2006/main"/>
-          <a:p xmlns:a="http://schemas.openxmlformats.org/drawingml/2006/main">
-            <a:pPr>
-              <a:defRPr sz="1500" b="0">
-                <a:solidFill>
-                  <a:srgbClr val="4E6157"/>
-                </a:solidFill>
-                <a:latin typeface="Malgun Gothic"/>
-                <a:ea typeface="Malgun Gothic"/>
-                <a:cs typeface="Malgun Gothic"/>
-              </a:defRPr>
-            </a:pPr>
-            <a:r>
-              <a:rPr sz="1500" b="0">
-                <a:solidFill>
-                  <a:srgbClr val="4E6157"/>
-                </a:solidFill>
-                <a:latin typeface="Malgun Gothic"/>
-                <a:ea typeface="Malgun Gothic"/>
-                <a:cs typeface="Malgun Gothic"/>
-              </a:rPr>
-              <a:t>공개 목록에서</a:t>
-            </a:r>
-          </a:p>
-          <a:p xmlns:a="http://schemas.openxmlformats.org/drawingml/2006/main">
-            <a:pPr>
-              <a:defRPr sz="1500" b="0">
-                <a:solidFill>
-                  <a:srgbClr val="4E6157"/>
-                </a:solidFill>
-                <a:latin typeface="Malgun Gothic"/>
-                <a:ea typeface="Malgun Gothic"/>
-                <a:cs typeface="Malgun Gothic"/>
-              </a:defRPr>
-            </a:pPr>
-            <a:r>
-              <a:rPr sz="1500" b="0">
-                <a:solidFill>
-                  <a:srgbClr val="4E6157"/>
-                </a:solidFill>
-                <a:latin typeface="Malgun Gothic"/>
-                <a:ea typeface="Malgun Gothic"/>
-                <a:cs typeface="Malgun Gothic"/>
-              </a:rPr>
-              <a:t>대상 한 동 선택</a:t>
-            </a:r>
-          </a:p>
-        </p:txBody>
-      </p:sp>
-      <p:sp>
-        <p:nvSpPr>
-          <p:cNvPr id="10" name="">
-            <a:extLst xmlns:a="http://schemas.openxmlformats.org/drawingml/2006/main">
-              <a:ext uri="{FF2B5EF4-FFF2-40B4-BE49-F238E27FC236}">
-                <a16:creationId xmlns:a16="http://schemas.microsoft.com/office/drawing/2014/main" id="{1E51431F-99BA-4D4D-8F91-217CB0ED2AD3}"/>
-              </a:ext>
-            </a:extLst>
-          </p:cNvPr>
-          <p:cNvSpPr>
-            <a:spLocks xmlns:a="http://schemas.openxmlformats.org/drawingml/2006/main" noGrp="1"/>
-          </p:cNvSpPr>
-          <p:nvPr/>
-        </p:nvSpPr>
-        <p:spPr>
-          <a:xfrm xmlns:a="http://schemas.openxmlformats.org/drawingml/2006/main">
-            <a:off x="2962275" y="1581150"/>
-            <a:ext cx="2114550" cy="2895600"/>
-          </a:xfrm>
-          <a:prstGeom xmlns:a="http://schemas.openxmlformats.org/drawingml/2006/main" prst="rect">
-            <a:avLst/>
-          </a:prstGeom>
-          <a:solidFill xmlns:a="http://schemas.openxmlformats.org/drawingml/2006/main">
-            <a:srgbClr val="FFFFFF"/>
-          </a:solidFill>
-          <a:ln xmlns:a="http://schemas.openxmlformats.org/drawingml/2006/main" w="14288">
-            <a:solidFill>
-              <a:srgbClr val="CADBCE"/>
-            </a:solidFill>
-          </a:ln>
-        </p:spPr>
-      </p:sp>
-      <p:sp>
-        <p:nvSpPr>
-          <p:cNvPr id="11" name="">
-            <a:extLst xmlns:a="http://schemas.openxmlformats.org/drawingml/2006/main">
-              <a:ext uri="{FF2B5EF4-FFF2-40B4-BE49-F238E27FC236}">
-                <a16:creationId xmlns:a16="http://schemas.microsoft.com/office/drawing/2014/main" id="{974DBA6B-E497-408A-B796-74C4CDBBFD16}"/>
-              </a:ext>
-            </a:extLst>
-          </p:cNvPr>
-          <p:cNvSpPr>
-            <a:spLocks xmlns:a="http://schemas.openxmlformats.org/drawingml/2006/main" noGrp="1"/>
-          </p:cNvSpPr>
-          <p:nvPr/>
-        </p:nvSpPr>
-        <p:spPr>
-          <a:xfrm xmlns:a="http://schemas.openxmlformats.org/drawingml/2006/main">
-            <a:off x="3133725" y="1752600"/>
-            <a:ext cx="1771650" cy="304800"/>
-          </a:xfrm>
-          <a:prstGeom xmlns:a="http://schemas.openxmlformats.org/drawingml/2006/main" prst="rect">
-            <a:avLst/>
-          </a:prstGeom>
-          <a:noFill xmlns:a="http://schemas.openxmlformats.org/drawingml/2006/main"/>
-          <a:ln xmlns:a="http://schemas.openxmlformats.org/drawingml/2006/main" w="0">
-            <a:noFill/>
-          </a:ln>
-        </p:spPr>
-        <p:txBody>
-          <a:bodyPr xmlns:a="http://schemas.openxmlformats.org/drawingml/2006/main">
-            <a:noAutofit/>
-          </a:bodyPr>
-          <a:lstStyle xmlns:a="http://schemas.openxmlformats.org/drawingml/2006/main"/>
-          <a:p xmlns:a="http://schemas.openxmlformats.org/drawingml/2006/main">
-            <a:pPr>
-              <a:defRPr sz="1500" b="1">
-                <a:solidFill>
-                  <a:srgbClr val="127452"/>
-                </a:solidFill>
-                <a:latin typeface="Malgun Gothic"/>
-                <a:ea typeface="Malgun Gothic"/>
-                <a:cs typeface="Malgun Gothic"/>
-              </a:defRPr>
-            </a:pPr>
-            <a:r>
-              <a:rPr sz="1500" b="1">
-                <a:solidFill>
-                  <a:srgbClr val="127452"/>
-                </a:solidFill>
-                <a:latin typeface="Malgun Gothic"/>
-                <a:ea typeface="Malgun Gothic"/>
-                <a:cs typeface="Malgun Gothic"/>
-              </a:rPr>
-              <a:t>02</a:t>
-            </a:r>
-          </a:p>
-        </p:txBody>
-      </p:sp>
-      <p:sp>
-        <p:nvSpPr>
-          <p:cNvPr id="12" name="">
-            <a:extLst xmlns:a="http://schemas.openxmlformats.org/drawingml/2006/main">
-              <a:ext uri="{FF2B5EF4-FFF2-40B4-BE49-F238E27FC236}">
-                <a16:creationId xmlns:a16="http://schemas.microsoft.com/office/drawing/2014/main" id="{A18E87BA-643E-4C86-8AAA-CA794B8C5A91}"/>
-              </a:ext>
-            </a:extLst>
-          </p:cNvPr>
-          <p:cNvSpPr>
-            <a:spLocks xmlns:a="http://schemas.openxmlformats.org/drawingml/2006/main" noGrp="1"/>
-          </p:cNvSpPr>
-          <p:nvPr/>
-        </p:nvSpPr>
-        <p:spPr>
-          <a:xfrm xmlns:a="http://schemas.openxmlformats.org/drawingml/2006/main">
-            <a:off x="3133725" y="2162175"/>
-            <a:ext cx="1771650" cy="523875"/>
-          </a:xfrm>
-          <a:prstGeom xmlns:a="http://schemas.openxmlformats.org/drawingml/2006/main" prst="rect">
-            <a:avLst/>
-          </a:prstGeom>
-          <a:noFill xmlns:a="http://schemas.openxmlformats.org/drawingml/2006/main"/>
-          <a:ln xmlns:a="http://schemas.openxmlformats.org/drawingml/2006/main" w="0">
-            <a:noFill/>
-          </a:ln>
-        </p:spPr>
-        <p:txBody>
-          <a:bodyPr xmlns:a="http://schemas.openxmlformats.org/drawingml/2006/main">
-            <a:noAutofit/>
-          </a:bodyPr>
-          <a:lstStyle xmlns:a="http://schemas.openxmlformats.org/drawingml/2006/main"/>
-          <a:p xmlns:a="http://schemas.openxmlformats.org/drawingml/2006/main">
-            <a:pPr>
-              <a:defRPr sz="1950" b="1">
-                <a:solidFill>
-                  <a:srgbClr val="183329"/>
-                </a:solidFill>
-                <a:latin typeface="Malgun Gothic"/>
-                <a:ea typeface="Malgun Gothic"/>
-                <a:cs typeface="Malgun Gothic"/>
-              </a:defRPr>
-            </a:pPr>
-            <a:r>
-              <a:rPr sz="1950" b="1">
-                <a:solidFill>
-                  <a:srgbClr val="183329"/>
-                </a:solidFill>
-                <a:latin typeface="Malgun Gothic"/>
-                <a:ea typeface="Malgun Gothic"/>
-                <a:cs typeface="Malgun Gothic"/>
-              </a:rPr>
-              <a:t>에너지 비교</a:t>
-            </a:r>
-          </a:p>
-        </p:txBody>
-      </p:sp>
-      <p:sp>
-        <p:nvSpPr>
-          <p:cNvPr id="13" name="">
-            <a:extLst xmlns:a="http://schemas.openxmlformats.org/drawingml/2006/main">
-              <a:ext uri="{FF2B5EF4-FFF2-40B4-BE49-F238E27FC236}">
-                <a16:creationId xmlns:a16="http://schemas.microsoft.com/office/drawing/2014/main" id="{1854CB05-BE8D-4DFC-9E5F-13E76CC9D0B7}"/>
-              </a:ext>
-            </a:extLst>
-          </p:cNvPr>
-          <p:cNvSpPr>
-            <a:spLocks xmlns:a="http://schemas.openxmlformats.org/drawingml/2006/main" noGrp="1"/>
-          </p:cNvSpPr>
-          <p:nvPr/>
-        </p:nvSpPr>
-        <p:spPr>
-          <a:xfrm xmlns:a="http://schemas.openxmlformats.org/drawingml/2006/main">
-            <a:off x="3133725" y="2762250"/>
-            <a:ext cx="1771650" cy="1552575"/>
-          </a:xfrm>
-          <a:prstGeom xmlns:a="http://schemas.openxmlformats.org/drawingml/2006/main" prst="rect">
-            <a:avLst/>
-          </a:prstGeom>
-          <a:noFill xmlns:a="http://schemas.openxmlformats.org/drawingml/2006/main"/>
-          <a:ln xmlns:a="http://schemas.openxmlformats.org/drawingml/2006/main" w="0">
-            <a:noFill/>
-          </a:ln>
-        </p:spPr>
-        <p:txBody>
-          <a:bodyPr xmlns:a="http://schemas.openxmlformats.org/drawingml/2006/main">
-            <a:noAutofit/>
-          </a:bodyPr>
-          <a:lstStyle xmlns:a="http://schemas.openxmlformats.org/drawingml/2006/main"/>
-          <a:p xmlns:a="http://schemas.openxmlformats.org/drawingml/2006/main">
-            <a:pPr>
-              <a:defRPr sz="1500" b="0">
-                <a:solidFill>
-                  <a:srgbClr val="4E6157"/>
-                </a:solidFill>
-                <a:latin typeface="Malgun Gothic"/>
-                <a:ea typeface="Malgun Gothic"/>
-                <a:cs typeface="Malgun Gothic"/>
-              </a:defRPr>
-            </a:pPr>
-            <a:r>
-              <a:rPr sz="1500" b="0">
-                <a:solidFill>
-                  <a:srgbClr val="4E6157"/>
-                </a:solidFill>
-                <a:latin typeface="Malgun Gothic"/>
-                <a:ea typeface="Malgun Gothic"/>
-                <a:cs typeface="Malgun Gothic"/>
-              </a:rPr>
-              <a:t>자료 품질 확인</a:t>
-            </a:r>
-          </a:p>
-          <a:p xmlns:a="http://schemas.openxmlformats.org/drawingml/2006/main">
-            <a:pPr>
-              <a:defRPr sz="1500" b="0">
-                <a:solidFill>
-                  <a:srgbClr val="4E6157"/>
-                </a:solidFill>
-                <a:latin typeface="Malgun Gothic"/>
-                <a:ea typeface="Malgun Gothic"/>
-                <a:cs typeface="Malgun Gothic"/>
-              </a:defRPr>
-            </a:pPr>
-            <a:r>
-              <a:rPr sz="1500" b="0">
-                <a:solidFill>
-                  <a:srgbClr val="4E6157"/>
-                </a:solidFill>
-                <a:latin typeface="Malgun Gothic"/>
-                <a:ea typeface="Malgun Gothic"/>
-                <a:cs typeface="Malgun Gothic"/>
-              </a:rPr>
-              <a:t>유사 조건 참고</a:t>
-            </a:r>
-          </a:p>
-        </p:txBody>
-      </p:sp>
-      <p:sp>
-        <p:nvSpPr>
-          <p:cNvPr id="14" name="">
-            <a:extLst xmlns:a="http://schemas.openxmlformats.org/drawingml/2006/main">
-              <a:ext uri="{FF2B5EF4-FFF2-40B4-BE49-F238E27FC236}">
-                <a16:creationId xmlns:a16="http://schemas.microsoft.com/office/drawing/2014/main" id="{E49E2A95-8DB4-4F84-9EB8-17A79FA8C885}"/>
-              </a:ext>
-            </a:extLst>
-          </p:cNvPr>
-          <p:cNvSpPr>
-            <a:spLocks xmlns:a="http://schemas.openxmlformats.org/drawingml/2006/main" noGrp="1"/>
-          </p:cNvSpPr>
-          <p:nvPr/>
-        </p:nvSpPr>
-        <p:spPr>
-          <a:xfrm xmlns:a="http://schemas.openxmlformats.org/drawingml/2006/main">
-            <a:off x="5238750" y="1581150"/>
-            <a:ext cx="2114550" cy="2895600"/>
-          </a:xfrm>
-          <a:prstGeom xmlns:a="http://schemas.openxmlformats.org/drawingml/2006/main" prst="rect">
-            <a:avLst/>
-          </a:prstGeom>
-          <a:solidFill xmlns:a="http://schemas.openxmlformats.org/drawingml/2006/main">
-            <a:srgbClr val="FFFFFF"/>
-          </a:solidFill>
-          <a:ln xmlns:a="http://schemas.openxmlformats.org/drawingml/2006/main" w="14288">
-            <a:solidFill>
-              <a:srgbClr val="CADBCE"/>
-            </a:solidFill>
-          </a:ln>
-        </p:spPr>
-      </p:sp>
-      <p:sp>
-        <p:nvSpPr>
-          <p:cNvPr id="15" name="">
-            <a:extLst xmlns:a="http://schemas.openxmlformats.org/drawingml/2006/main">
-              <a:ext uri="{FF2B5EF4-FFF2-40B4-BE49-F238E27FC236}">
-                <a16:creationId xmlns:a16="http://schemas.microsoft.com/office/drawing/2014/main" id="{FBED8DF0-500B-4AD7-AE73-92B6D73B1060}"/>
-              </a:ext>
-            </a:extLst>
-          </p:cNvPr>
-          <p:cNvSpPr>
-            <a:spLocks xmlns:a="http://schemas.openxmlformats.org/drawingml/2006/main" noGrp="1"/>
-          </p:cNvSpPr>
-          <p:nvPr/>
-        </p:nvSpPr>
-        <p:spPr>
-          <a:xfrm xmlns:a="http://schemas.openxmlformats.org/drawingml/2006/main">
-            <a:off x="5410200" y="1752600"/>
-            <a:ext cx="1771650" cy="304800"/>
-          </a:xfrm>
-          <a:prstGeom xmlns:a="http://schemas.openxmlformats.org/drawingml/2006/main" prst="rect">
-            <a:avLst/>
-          </a:prstGeom>
-          <a:noFill xmlns:a="http://schemas.openxmlformats.org/drawingml/2006/main"/>
-          <a:ln xmlns:a="http://schemas.openxmlformats.org/drawingml/2006/main" w="0">
-            <a:noFill/>
-          </a:ln>
-        </p:spPr>
-        <p:txBody>
-          <a:bodyPr xmlns:a="http://schemas.openxmlformats.org/drawingml/2006/main">
-            <a:noAutofit/>
-          </a:bodyPr>
-          <a:lstStyle xmlns:a="http://schemas.openxmlformats.org/drawingml/2006/main"/>
-          <a:p xmlns:a="http://schemas.openxmlformats.org/drawingml/2006/main">
-            <a:pPr>
-              <a:defRPr sz="1500" b="1">
-                <a:solidFill>
-                  <a:srgbClr val="127452"/>
-                </a:solidFill>
-                <a:latin typeface="Malgun Gothic"/>
-                <a:ea typeface="Malgun Gothic"/>
-                <a:cs typeface="Malgun Gothic"/>
-              </a:defRPr>
-            </a:pPr>
-            <a:r>
-              <a:rPr sz="1500" b="1">
-                <a:solidFill>
-                  <a:srgbClr val="127452"/>
-                </a:solidFill>
-                <a:latin typeface="Malgun Gothic"/>
-                <a:ea typeface="Malgun Gothic"/>
-                <a:cs typeface="Malgun Gothic"/>
-              </a:rPr>
-              <a:t>03</a:t>
-            </a:r>
-          </a:p>
-        </p:txBody>
-      </p:sp>
-      <p:sp>
-        <p:nvSpPr>
-          <p:cNvPr id="16" name="">
-            <a:extLst xmlns:a="http://schemas.openxmlformats.org/drawingml/2006/main">
-              <a:ext uri="{FF2B5EF4-FFF2-40B4-BE49-F238E27FC236}">
-                <a16:creationId xmlns:a16="http://schemas.microsoft.com/office/drawing/2014/main" id="{86C5C499-5E63-45FF-9EDB-758E42289044}"/>
-              </a:ext>
-            </a:extLst>
-          </p:cNvPr>
-          <p:cNvSpPr>
-            <a:spLocks xmlns:a="http://schemas.openxmlformats.org/drawingml/2006/main" noGrp="1"/>
-          </p:cNvSpPr>
-          <p:nvPr/>
-        </p:nvSpPr>
-        <p:spPr>
-          <a:xfrm xmlns:a="http://schemas.openxmlformats.org/drawingml/2006/main">
-            <a:off x="5410200" y="2162175"/>
-            <a:ext cx="1771650" cy="523875"/>
-          </a:xfrm>
-          <a:prstGeom xmlns:a="http://schemas.openxmlformats.org/drawingml/2006/main" prst="rect">
-            <a:avLst/>
-          </a:prstGeom>
-          <a:noFill xmlns:a="http://schemas.openxmlformats.org/drawingml/2006/main"/>
-          <a:ln xmlns:a="http://schemas.openxmlformats.org/drawingml/2006/main" w="0">
-            <a:noFill/>
-          </a:ln>
-        </p:spPr>
-        <p:txBody>
-          <a:bodyPr xmlns:a="http://schemas.openxmlformats.org/drawingml/2006/main">
-            <a:noAutofit/>
-          </a:bodyPr>
-          <a:lstStyle xmlns:a="http://schemas.openxmlformats.org/drawingml/2006/main"/>
-          <a:p xmlns:a="http://schemas.openxmlformats.org/drawingml/2006/main">
-            <a:pPr>
-              <a:defRPr sz="1950" b="1">
-                <a:solidFill>
-                  <a:srgbClr val="183329"/>
-                </a:solidFill>
-                <a:latin typeface="Malgun Gothic"/>
-                <a:ea typeface="Malgun Gothic"/>
-                <a:cs typeface="Malgun Gothic"/>
-              </a:defRPr>
-            </a:pPr>
-            <a:r>
-              <a:rPr sz="1950" b="1">
-                <a:solidFill>
-                  <a:srgbClr val="183329"/>
-                </a:solidFill>
-                <a:latin typeface="Malgun Gothic"/>
-                <a:ea typeface="Malgun Gothic"/>
-                <a:cs typeface="Malgun Gothic"/>
-              </a:rPr>
-              <a:t>불편 문진</a:t>
-            </a:r>
-          </a:p>
-        </p:txBody>
-      </p:sp>
-      <p:sp>
-        <p:nvSpPr>
-          <p:cNvPr id="17" name="">
-            <a:extLst xmlns:a="http://schemas.openxmlformats.org/drawingml/2006/main">
-              <a:ext uri="{FF2B5EF4-FFF2-40B4-BE49-F238E27FC236}">
-                <a16:creationId xmlns:a16="http://schemas.microsoft.com/office/drawing/2014/main" id="{A69D1D14-FA25-4749-BA36-EB161E5B8E62}"/>
-              </a:ext>
-            </a:extLst>
-          </p:cNvPr>
-          <p:cNvSpPr>
-            <a:spLocks xmlns:a="http://schemas.openxmlformats.org/drawingml/2006/main" noGrp="1"/>
-          </p:cNvSpPr>
-          <p:nvPr/>
-        </p:nvSpPr>
-        <p:spPr>
-          <a:xfrm xmlns:a="http://schemas.openxmlformats.org/drawingml/2006/main">
-            <a:off x="5410200" y="2762250"/>
-            <a:ext cx="1771650" cy="1552575"/>
-          </a:xfrm>
-          <a:prstGeom xmlns:a="http://schemas.openxmlformats.org/drawingml/2006/main" prst="rect">
-            <a:avLst/>
-          </a:prstGeom>
-          <a:noFill xmlns:a="http://schemas.openxmlformats.org/drawingml/2006/main"/>
-          <a:ln xmlns:a="http://schemas.openxmlformats.org/drawingml/2006/main" w="0">
-            <a:noFill/>
-          </a:ln>
-        </p:spPr>
-        <p:txBody>
-          <a:bodyPr xmlns:a="http://schemas.openxmlformats.org/drawingml/2006/main">
-            <a:noAutofit/>
-          </a:bodyPr>
-          <a:lstStyle xmlns:a="http://schemas.openxmlformats.org/drawingml/2006/main"/>
-          <a:p xmlns:a="http://schemas.openxmlformats.org/drawingml/2006/main">
-            <a:pPr>
-              <a:defRPr sz="1500" b="0">
-                <a:solidFill>
-                  <a:srgbClr val="4E6157"/>
-                </a:solidFill>
-                <a:latin typeface="Malgun Gothic"/>
-                <a:ea typeface="Malgun Gothic"/>
-                <a:cs typeface="Malgun Gothic"/>
-              </a:defRPr>
-            </a:pPr>
-            <a:r>
-              <a:rPr sz="1500" b="0">
-                <a:solidFill>
-                  <a:srgbClr val="4E6157"/>
-                </a:solidFill>
-                <a:latin typeface="Malgun Gothic"/>
-                <a:ea typeface="Malgun Gothic"/>
-                <a:cs typeface="Malgun Gothic"/>
-              </a:rPr>
-              <a:t>장소·시간·증상</a:t>
-            </a:r>
-          </a:p>
-          <a:p xmlns:a="http://schemas.openxmlformats.org/drawingml/2006/main">
-            <a:pPr>
-              <a:defRPr sz="1500" b="0">
-                <a:solidFill>
-                  <a:srgbClr val="4E6157"/>
-                </a:solidFill>
-                <a:latin typeface="Malgun Gothic"/>
-                <a:ea typeface="Malgun Gothic"/>
-                <a:cs typeface="Malgun Gothic"/>
-              </a:defRPr>
-            </a:pPr>
-            <a:r>
-              <a:rPr sz="1500" b="0">
-                <a:solidFill>
-                  <a:srgbClr val="4E6157"/>
-                </a:solidFill>
-                <a:latin typeface="Malgun Gothic"/>
-                <a:ea typeface="Malgun Gothic"/>
-                <a:cs typeface="Malgun Gothic"/>
-              </a:rPr>
-              <a:t>누락·모순 확인</a:t>
-            </a:r>
-          </a:p>
-        </p:txBody>
-      </p:sp>
-      <p:sp>
-        <p:nvSpPr>
-          <p:cNvPr id="18" name="">
-            <a:extLst xmlns:a="http://schemas.openxmlformats.org/drawingml/2006/main">
-              <a:ext uri="{FF2B5EF4-FFF2-40B4-BE49-F238E27FC236}">
-                <a16:creationId xmlns:a16="http://schemas.microsoft.com/office/drawing/2014/main" id="{6645B1EB-7584-42EE-9C09-8C723307EAFB}"/>
-              </a:ext>
-            </a:extLst>
-          </p:cNvPr>
-          <p:cNvSpPr>
-            <a:spLocks xmlns:a="http://schemas.openxmlformats.org/drawingml/2006/main" noGrp="1"/>
-          </p:cNvSpPr>
-          <p:nvPr/>
-        </p:nvSpPr>
-        <p:spPr>
-          <a:xfrm xmlns:a="http://schemas.openxmlformats.org/drawingml/2006/main">
-            <a:off x="7515225" y="1581150"/>
-            <a:ext cx="2114550" cy="2895600"/>
-          </a:xfrm>
-          <a:prstGeom xmlns:a="http://schemas.openxmlformats.org/drawingml/2006/main" prst="rect">
-            <a:avLst/>
-          </a:prstGeom>
-          <a:solidFill xmlns:a="http://schemas.openxmlformats.org/drawingml/2006/main">
-            <a:srgbClr val="FFFFFF"/>
-          </a:solidFill>
-          <a:ln xmlns:a="http://schemas.openxmlformats.org/drawingml/2006/main" w="14288">
-            <a:solidFill>
-              <a:srgbClr val="CADBCE"/>
-            </a:solidFill>
-          </a:ln>
-        </p:spPr>
-      </p:sp>
-      <p:sp>
-        <p:nvSpPr>
-          <p:cNvPr id="19" name="">
-            <a:extLst xmlns:a="http://schemas.openxmlformats.org/drawingml/2006/main">
-              <a:ext uri="{FF2B5EF4-FFF2-40B4-BE49-F238E27FC236}">
-                <a16:creationId xmlns:a16="http://schemas.microsoft.com/office/drawing/2014/main" id="{411A49E5-6ED2-4365-A6C7-E7ACB3FB9E0B}"/>
-              </a:ext>
-            </a:extLst>
-          </p:cNvPr>
-          <p:cNvSpPr>
-            <a:spLocks xmlns:a="http://schemas.openxmlformats.org/drawingml/2006/main" noGrp="1"/>
-          </p:cNvSpPr>
-          <p:nvPr/>
-        </p:nvSpPr>
-        <p:spPr>
-          <a:xfrm xmlns:a="http://schemas.openxmlformats.org/drawingml/2006/main">
-            <a:off x="7686675" y="1752600"/>
-            <a:ext cx="1771650" cy="304800"/>
-          </a:xfrm>
-          <a:prstGeom xmlns:a="http://schemas.openxmlformats.org/drawingml/2006/main" prst="rect">
-            <a:avLst/>
-          </a:prstGeom>
-          <a:noFill xmlns:a="http://schemas.openxmlformats.org/drawingml/2006/main"/>
-          <a:ln xmlns:a="http://schemas.openxmlformats.org/drawingml/2006/main" w="0">
-            <a:noFill/>
-          </a:ln>
-        </p:spPr>
-        <p:txBody>
-          <a:bodyPr xmlns:a="http://schemas.openxmlformats.org/drawingml/2006/main">
-            <a:noAutofit/>
-          </a:bodyPr>
-          <a:lstStyle xmlns:a="http://schemas.openxmlformats.org/drawingml/2006/main"/>
-          <a:p xmlns:a="http://schemas.openxmlformats.org/drawingml/2006/main">
-            <a:pPr>
-              <a:defRPr sz="1500" b="1">
-                <a:solidFill>
-                  <a:srgbClr val="127452"/>
-                </a:solidFill>
-                <a:latin typeface="Malgun Gothic"/>
-                <a:ea typeface="Malgun Gothic"/>
-                <a:cs typeface="Malgun Gothic"/>
-              </a:defRPr>
-            </a:pPr>
-            <a:r>
-              <a:rPr sz="1500" b="1">
-                <a:solidFill>
-                  <a:srgbClr val="127452"/>
-                </a:solidFill>
-                <a:latin typeface="Malgun Gothic"/>
-                <a:ea typeface="Malgun Gothic"/>
-                <a:cs typeface="Malgun Gothic"/>
-              </a:rPr>
-              <a:t>04</a:t>
-            </a:r>
-          </a:p>
-        </p:txBody>
-      </p:sp>
-      <p:sp>
-        <p:nvSpPr>
-          <p:cNvPr id="20" name="">
-            <a:extLst xmlns:a="http://schemas.openxmlformats.org/drawingml/2006/main">
-              <a:ext uri="{FF2B5EF4-FFF2-40B4-BE49-F238E27FC236}">
-                <a16:creationId xmlns:a16="http://schemas.microsoft.com/office/drawing/2014/main" id="{6ABA74DD-EE6D-4CFB-8CDF-F3DD4A3CF0C5}"/>
-              </a:ext>
-            </a:extLst>
-          </p:cNvPr>
-          <p:cNvSpPr>
-            <a:spLocks xmlns:a="http://schemas.openxmlformats.org/drawingml/2006/main" noGrp="1"/>
-          </p:cNvSpPr>
-          <p:nvPr/>
-        </p:nvSpPr>
-        <p:spPr>
-          <a:xfrm xmlns:a="http://schemas.openxmlformats.org/drawingml/2006/main">
-            <a:off x="7686675" y="2162175"/>
-            <a:ext cx="1771650" cy="523875"/>
-          </a:xfrm>
-          <a:prstGeom xmlns:a="http://schemas.openxmlformats.org/drawingml/2006/main" prst="rect">
-            <a:avLst/>
-          </a:prstGeom>
-          <a:noFill xmlns:a="http://schemas.openxmlformats.org/drawingml/2006/main"/>
-          <a:ln xmlns:a="http://schemas.openxmlformats.org/drawingml/2006/main" w="0">
-            <a:noFill/>
-          </a:ln>
-        </p:spPr>
-        <p:txBody>
-          <a:bodyPr xmlns:a="http://schemas.openxmlformats.org/drawingml/2006/main">
-            <a:noAutofit/>
-          </a:bodyPr>
-          <a:lstStyle xmlns:a="http://schemas.openxmlformats.org/drawingml/2006/main"/>
-          <a:p xmlns:a="http://schemas.openxmlformats.org/drawingml/2006/main">
-            <a:pPr>
-              <a:defRPr sz="1950" b="1">
-                <a:solidFill>
-                  <a:srgbClr val="183329"/>
-                </a:solidFill>
-                <a:latin typeface="Malgun Gothic"/>
-                <a:ea typeface="Malgun Gothic"/>
-                <a:cs typeface="Malgun Gothic"/>
-              </a:defRPr>
-            </a:pPr>
-            <a:r>
-              <a:rPr sz="1950" b="1">
-                <a:solidFill>
-                  <a:srgbClr val="183329"/>
-                </a:solidFill>
-                <a:latin typeface="Malgun Gothic"/>
-                <a:ea typeface="Malgun Gothic"/>
-                <a:cs typeface="Malgun Gothic"/>
-              </a:rPr>
-              <a:t>후보 검토</a:t>
-            </a:r>
-          </a:p>
-        </p:txBody>
-      </p:sp>
-      <p:sp>
-        <p:nvSpPr>
-          <p:cNvPr id="21" name="">
-            <a:extLst xmlns:a="http://schemas.openxmlformats.org/drawingml/2006/main">
-              <a:ext uri="{FF2B5EF4-FFF2-40B4-BE49-F238E27FC236}">
-                <a16:creationId xmlns:a16="http://schemas.microsoft.com/office/drawing/2014/main" id="{197C4924-C7EE-4541-8A44-D7E3D91BAE8A}"/>
-              </a:ext>
-            </a:extLst>
-          </p:cNvPr>
-          <p:cNvSpPr>
-            <a:spLocks xmlns:a="http://schemas.openxmlformats.org/drawingml/2006/main" noGrp="1"/>
-          </p:cNvSpPr>
-          <p:nvPr/>
-        </p:nvSpPr>
-        <p:spPr>
-          <a:xfrm xmlns:a="http://schemas.openxmlformats.org/drawingml/2006/main">
-            <a:off x="7686675" y="2762250"/>
-            <a:ext cx="1771650" cy="1552575"/>
-          </a:xfrm>
-          <a:prstGeom xmlns:a="http://schemas.openxmlformats.org/drawingml/2006/main" prst="rect">
-            <a:avLst/>
-          </a:prstGeom>
-          <a:noFill xmlns:a="http://schemas.openxmlformats.org/drawingml/2006/main"/>
-          <a:ln xmlns:a="http://schemas.openxmlformats.org/drawingml/2006/main" w="0">
-            <a:noFill/>
-          </a:ln>
-        </p:spPr>
-        <p:txBody>
-          <a:bodyPr xmlns:a="http://schemas.openxmlformats.org/drawingml/2006/main">
-            <a:noAutofit/>
-          </a:bodyPr>
-          <a:lstStyle xmlns:a="http://schemas.openxmlformats.org/drawingml/2006/main"/>
-          <a:p xmlns:a="http://schemas.openxmlformats.org/drawingml/2006/main">
-            <a:pPr>
-              <a:defRPr sz="1500" b="0">
-                <a:solidFill>
-                  <a:srgbClr val="4E6157"/>
-                </a:solidFill>
-                <a:latin typeface="Malgun Gothic"/>
-                <a:ea typeface="Malgun Gothic"/>
-                <a:cs typeface="Malgun Gothic"/>
-              </a:defRPr>
-            </a:pPr>
-            <a:r>
-              <a:rPr sz="1500" b="0">
-                <a:solidFill>
-                  <a:srgbClr val="4E6157"/>
-                </a:solidFill>
-                <a:latin typeface="Malgun Gothic"/>
-                <a:ea typeface="Malgun Gothic"/>
-                <a:cs typeface="Malgun Gothic"/>
-              </a:rPr>
-              <a:t>개선 후보별</a:t>
-            </a:r>
-          </a:p>
-          <a:p xmlns:a="http://schemas.openxmlformats.org/drawingml/2006/main">
-            <a:pPr>
-              <a:defRPr sz="1500" b="0">
-                <a:solidFill>
-                  <a:srgbClr val="4E6157"/>
-                </a:solidFill>
-                <a:latin typeface="Malgun Gothic"/>
-                <a:ea typeface="Malgun Gothic"/>
-                <a:cs typeface="Malgun Gothic"/>
-              </a:defRPr>
-            </a:pPr>
-            <a:r>
-              <a:rPr sz="1500" b="0">
-                <a:solidFill>
-                  <a:srgbClr val="4E6157"/>
-                </a:solidFill>
-                <a:latin typeface="Malgun Gothic"/>
-                <a:ea typeface="Malgun Gothic"/>
-                <a:cs typeface="Malgun Gothic"/>
-              </a:rPr>
-              <a:t>필요한 증거 정리</a:t>
-            </a:r>
-          </a:p>
-        </p:txBody>
-      </p:sp>
-      <p:sp>
-        <p:nvSpPr>
-          <p:cNvPr id="22" name="">
-            <a:extLst xmlns:a="http://schemas.openxmlformats.org/drawingml/2006/main">
-              <a:ext uri="{FF2B5EF4-FFF2-40B4-BE49-F238E27FC236}">
-                <a16:creationId xmlns:a16="http://schemas.microsoft.com/office/drawing/2014/main" id="{3CE517F1-3018-41D7-89E8-F8A33D386305}"/>
-              </a:ext>
-            </a:extLst>
-          </p:cNvPr>
-          <p:cNvSpPr>
-            <a:spLocks xmlns:a="http://schemas.openxmlformats.org/drawingml/2006/main" noGrp="1"/>
-          </p:cNvSpPr>
-          <p:nvPr/>
-        </p:nvSpPr>
-        <p:spPr>
-          <a:xfrm xmlns:a="http://schemas.openxmlformats.org/drawingml/2006/main">
-            <a:off x="9791700" y="1581150"/>
-            <a:ext cx="2114550" cy="2895600"/>
-          </a:xfrm>
-          <a:prstGeom xmlns:a="http://schemas.openxmlformats.org/drawingml/2006/main" prst="rect">
-            <a:avLst/>
-          </a:prstGeom>
-          <a:solidFill xmlns:a="http://schemas.openxmlformats.org/drawingml/2006/main">
-            <a:srgbClr val="FFFFFF"/>
-          </a:solidFill>
-          <a:ln xmlns:a="http://schemas.openxmlformats.org/drawingml/2006/main" w="14288">
-            <a:solidFill>
-              <a:srgbClr val="CADBCE"/>
-            </a:solidFill>
-          </a:ln>
-        </p:spPr>
-      </p:sp>
-      <p:sp>
-        <p:nvSpPr>
-          <p:cNvPr id="23" name="">
-            <a:extLst xmlns:a="http://schemas.openxmlformats.org/drawingml/2006/main">
-              <a:ext uri="{FF2B5EF4-FFF2-40B4-BE49-F238E27FC236}">
-                <a16:creationId xmlns:a16="http://schemas.microsoft.com/office/drawing/2014/main" id="{170DC9D4-C853-4DAF-8819-236653C6788C}"/>
-              </a:ext>
-            </a:extLst>
-          </p:cNvPr>
-          <p:cNvSpPr>
-            <a:spLocks xmlns:a="http://schemas.openxmlformats.org/drawingml/2006/main" noGrp="1"/>
-          </p:cNvSpPr>
-          <p:nvPr/>
-        </p:nvSpPr>
-        <p:spPr>
-          <a:xfrm xmlns:a="http://schemas.openxmlformats.org/drawingml/2006/main">
-            <a:off x="9963150" y="1752600"/>
-            <a:ext cx="1771650" cy="304800"/>
-          </a:xfrm>
-          <a:prstGeom xmlns:a="http://schemas.openxmlformats.org/drawingml/2006/main" prst="rect">
-            <a:avLst/>
-          </a:prstGeom>
-          <a:noFill xmlns:a="http://schemas.openxmlformats.org/drawingml/2006/main"/>
-          <a:ln xmlns:a="http://schemas.openxmlformats.org/drawingml/2006/main" w="0">
-            <a:noFill/>
-          </a:ln>
-        </p:spPr>
-        <p:txBody>
-          <a:bodyPr xmlns:a="http://schemas.openxmlformats.org/drawingml/2006/main">
-            <a:noAutofit/>
-          </a:bodyPr>
-          <a:lstStyle xmlns:a="http://schemas.openxmlformats.org/drawingml/2006/main"/>
-          <a:p xmlns:a="http://schemas.openxmlformats.org/drawingml/2006/main">
-            <a:pPr>
-              <a:defRPr sz="1500" b="1">
-                <a:solidFill>
-                  <a:srgbClr val="127452"/>
-                </a:solidFill>
-                <a:latin typeface="Malgun Gothic"/>
-                <a:ea typeface="Malgun Gothic"/>
-                <a:cs typeface="Malgun Gothic"/>
-              </a:defRPr>
-            </a:pPr>
-            <a:r>
-              <a:rPr sz="1500" b="1">
-                <a:solidFill>
-                  <a:srgbClr val="127452"/>
-                </a:solidFill>
-                <a:latin typeface="Malgun Gothic"/>
-                <a:ea typeface="Malgun Gothic"/>
-                <a:cs typeface="Malgun Gothic"/>
-              </a:rPr>
-              <a:t>05</a:t>
-            </a:r>
-          </a:p>
-        </p:txBody>
-      </p:sp>
-      <p:sp>
-        <p:nvSpPr>
-          <p:cNvPr id="24" name="">
-            <a:extLst xmlns:a="http://schemas.openxmlformats.org/drawingml/2006/main">
-              <a:ext uri="{FF2B5EF4-FFF2-40B4-BE49-F238E27FC236}">
-                <a16:creationId xmlns:a16="http://schemas.microsoft.com/office/drawing/2014/main" id="{01C9D9B1-138F-47D2-A9EA-3FC18A092675}"/>
-              </a:ext>
-            </a:extLst>
-          </p:cNvPr>
-          <p:cNvSpPr>
-            <a:spLocks xmlns:a="http://schemas.openxmlformats.org/drawingml/2006/main" noGrp="1"/>
-          </p:cNvSpPr>
-          <p:nvPr/>
-        </p:nvSpPr>
-        <p:spPr>
-          <a:xfrm xmlns:a="http://schemas.openxmlformats.org/drawingml/2006/main">
-            <a:off x="9963150" y="2162175"/>
-            <a:ext cx="1771650" cy="523875"/>
-          </a:xfrm>
-          <a:prstGeom xmlns:a="http://schemas.openxmlformats.org/drawingml/2006/main" prst="rect">
-            <a:avLst/>
-          </a:prstGeom>
-          <a:noFill xmlns:a="http://schemas.openxmlformats.org/drawingml/2006/main"/>
-          <a:ln xmlns:a="http://schemas.openxmlformats.org/drawingml/2006/main" w="0">
-            <a:noFill/>
-          </a:ln>
-        </p:spPr>
-        <p:txBody>
-          <a:bodyPr xmlns:a="http://schemas.openxmlformats.org/drawingml/2006/main">
-            <a:noAutofit/>
-          </a:bodyPr>
-          <a:lstStyle xmlns:a="http://schemas.openxmlformats.org/drawingml/2006/main"/>
-          <a:p xmlns:a="http://schemas.openxmlformats.org/drawingml/2006/main">
-            <a:pPr>
-              <a:defRPr sz="1950" b="1">
-                <a:solidFill>
-                  <a:srgbClr val="183329"/>
-                </a:solidFill>
-                <a:latin typeface="Malgun Gothic"/>
-                <a:ea typeface="Malgun Gothic"/>
-                <a:cs typeface="Malgun Gothic"/>
-              </a:defRPr>
-            </a:pPr>
-            <a:r>
-              <a:rPr sz="1950" b="1">
-                <a:solidFill>
-                  <a:srgbClr val="183329"/>
-                </a:solidFill>
-                <a:latin typeface="Malgun Gothic"/>
-                <a:ea typeface="Malgun Gothic"/>
-                <a:cs typeface="Malgun Gothic"/>
-              </a:rPr>
-              <a:t>조사 요청</a:t>
-            </a:r>
-          </a:p>
-        </p:txBody>
-      </p:sp>
-      <p:sp>
-        <p:nvSpPr>
-          <p:cNvPr id="25" name="">
-            <a:extLst xmlns:a="http://schemas.openxmlformats.org/drawingml/2006/main">
-              <a:ext uri="{FF2B5EF4-FFF2-40B4-BE49-F238E27FC236}">
-                <a16:creationId xmlns:a16="http://schemas.microsoft.com/office/drawing/2014/main" id="{766A1B68-D17A-4D24-91A4-E0C86A263664}"/>
-              </a:ext>
-            </a:extLst>
-          </p:cNvPr>
-          <p:cNvSpPr>
-            <a:spLocks xmlns:a="http://schemas.openxmlformats.org/drawingml/2006/main" noGrp="1"/>
-          </p:cNvSpPr>
-          <p:nvPr/>
-        </p:nvSpPr>
-        <p:spPr>
-          <a:xfrm xmlns:a="http://schemas.openxmlformats.org/drawingml/2006/main">
-            <a:off x="9963150" y="2762250"/>
-            <a:ext cx="1771650" cy="1552575"/>
-          </a:xfrm>
-          <a:prstGeom xmlns:a="http://schemas.openxmlformats.org/drawingml/2006/main" prst="rect">
-            <a:avLst/>
-          </a:prstGeom>
-          <a:noFill xmlns:a="http://schemas.openxmlformats.org/drawingml/2006/main"/>
-          <a:ln xmlns:a="http://schemas.openxmlformats.org/drawingml/2006/main" w="0">
-            <a:noFill/>
-          </a:ln>
-        </p:spPr>
-        <p:txBody>
-          <a:bodyPr xmlns:a="http://schemas.openxmlformats.org/drawingml/2006/main">
-            <a:noAutofit/>
-          </a:bodyPr>
-          <a:lstStyle xmlns:a="http://schemas.openxmlformats.org/drawingml/2006/main"/>
-          <a:p xmlns:a="http://schemas.openxmlformats.org/drawingml/2006/main">
-            <a:pPr>
-              <a:defRPr sz="1500" b="0">
-                <a:solidFill>
-                  <a:srgbClr val="4E6157"/>
-                </a:solidFill>
-                <a:latin typeface="Malgun Gothic"/>
-                <a:ea typeface="Malgun Gothic"/>
-                <a:cs typeface="Malgun Gothic"/>
-              </a:defRPr>
-            </a:pPr>
-            <a:r>
-              <a:rPr sz="1500" b="0">
-                <a:solidFill>
-                  <a:srgbClr val="4E6157"/>
-                </a:solidFill>
-                <a:latin typeface="Malgun Gothic"/>
-                <a:ea typeface="Malgun Gothic"/>
-                <a:cs typeface="Malgun Gothic"/>
-              </a:rPr>
-              <a:t>출처·보류 사유</a:t>
-            </a:r>
-          </a:p>
-          <a:p xmlns:a="http://schemas.openxmlformats.org/drawingml/2006/main">
-            <a:pPr>
-              <a:defRPr sz="1500" b="0">
-                <a:solidFill>
-                  <a:srgbClr val="4E6157"/>
-                </a:solidFill>
-                <a:latin typeface="Malgun Gothic"/>
-                <a:ea typeface="Malgun Gothic"/>
-                <a:cs typeface="Malgun Gothic"/>
-              </a:defRPr>
-            </a:pPr>
-            <a:r>
-              <a:rPr sz="1500" b="0">
-                <a:solidFill>
-                  <a:srgbClr val="4E6157"/>
-                </a:solidFill>
-                <a:latin typeface="Malgun Gothic"/>
-                <a:ea typeface="Malgun Gothic"/>
-                <a:cs typeface="Malgun Gothic"/>
-              </a:rPr>
-              <a:t>요청서 저장</a:t>
-            </a:r>
-          </a:p>
-        </p:txBody>
-      </p:sp>
-      <p:sp>
-        <p:nvSpPr>
-          <p:cNvPr id="26" name="">
-            <a:extLst xmlns:a="http://schemas.openxmlformats.org/drawingml/2006/main">
-              <a:ext uri="{FF2B5EF4-FFF2-40B4-BE49-F238E27FC236}">
-                <a16:creationId xmlns:a16="http://schemas.microsoft.com/office/drawing/2014/main" id="{E8910439-9355-4BD6-852B-41BD79832144}"/>
-              </a:ext>
-            </a:extLst>
-          </p:cNvPr>
-          <p:cNvSpPr>
-            <a:spLocks xmlns:a="http://schemas.openxmlformats.org/drawingml/2006/main" noGrp="1"/>
-          </p:cNvSpPr>
-          <p:nvPr/>
-        </p:nvSpPr>
-        <p:spPr>
-          <a:xfrm xmlns:a="http://schemas.openxmlformats.org/drawingml/2006/main">
-            <a:off x="742950" y="4962525"/>
-            <a:ext cx="10382250" cy="762000"/>
-          </a:xfrm>
-          <a:prstGeom xmlns:a="http://schemas.openxmlformats.org/drawingml/2006/main" prst="rect">
-            <a:avLst/>
-          </a:prstGeom>
-          <a:noFill xmlns:a="http://schemas.openxmlformats.org/drawingml/2006/main"/>
-          <a:ln xmlns:a="http://schemas.openxmlformats.org/drawingml/2006/main" w="0">
-            <a:noFill/>
-          </a:ln>
-        </p:spPr>
-        <p:txBody>
-          <a:bodyPr xmlns:a="http://schemas.openxmlformats.org/drawingml/2006/main">
-            <a:noAutofit/>
-          </a:bodyPr>
-          <a:lstStyle xmlns:a="http://schemas.openxmlformats.org/drawingml/2006/main"/>
-          <a:p xmlns:a="http://schemas.openxmlformats.org/drawingml/2006/main">
-            <a:pPr>
-              <a:defRPr sz="1950" b="1">
-                <a:solidFill>
-                  <a:srgbClr val="127452"/>
-                </a:solidFill>
-                <a:latin typeface="Malgun Gothic"/>
-                <a:ea typeface="Malgun Gothic"/>
-                <a:cs typeface="Malgun Gothic"/>
-              </a:defRPr>
-            </a:pPr>
-            <a:r>
-              <a:rPr sz="1950" b="1">
-                <a:solidFill>
-                  <a:srgbClr val="127452"/>
-                </a:solidFill>
-                <a:latin typeface="Malgun Gothic"/>
-                <a:ea typeface="Malgun Gothic"/>
-                <a:cs typeface="Malgun Gothic"/>
-              </a:rPr>
-              <a:t>담당자는 근거를 확인하고 요청서를 수정한다. 공사 선택은 현장 전문가가 결정한다.</a:t>
+              <a:t>앞 단계의 입력과 응답을 다음 단계로 전달해 반복 입력을 줄이는 흐름</a:t>
             </a:r>
           </a:p>
         </p:txBody>
@@ -8703,7 +7245,7 @@
     </p:spTree>
     <p:extLst>
       <p:ext uri="{BB962C8B-B14F-4D97-AF65-F5344CB8AC3E}">
-        <p14:creationId xmlns:p14="http://schemas.microsoft.com/office/powerpoint/2010/main" val="1293152846"/>
+        <p14:creationId xmlns:p14="http://schemas.microsoft.com/office/powerpoint/2010/main" val="938714796"/>
       </p:ext>
     </p:extLst>
   </p:cSld>
@@ -8731,10 +7273,10 @@
       </p:grpSpPr>
       <p:sp>
         <p:nvSpPr>
-          <p:cNvPr id="16" name="">
-            <a:extLst xmlns:a="http://schemas.openxmlformats.org/drawingml/2006/main">
-              <a:ext uri="{FF2B5EF4-FFF2-40B4-BE49-F238E27FC236}">
-                <a16:creationId xmlns:a16="http://schemas.microsoft.com/office/drawing/2014/main" id="{F341D90C-FE51-4C38-B356-D88C6503503B}"/>
+          <p:cNvPr id="14" name="">
+            <a:extLst xmlns:a="http://schemas.openxmlformats.org/drawingml/2006/main">
+              <a:ext uri="{FF2B5EF4-FFF2-40B4-BE49-F238E27FC236}">
+                <a16:creationId xmlns:a16="http://schemas.microsoft.com/office/drawing/2014/main" id="{44689877-3761-44AC-ACFD-4A4D7556DDC0}"/>
               </a:ext>
             </a:extLst>
           </p:cNvPr>
@@ -8764,7 +7306,7 @@
           <p:cNvPr id="2" name="">
             <a:extLst xmlns:a="http://schemas.openxmlformats.org/drawingml/2006/main">
               <a:ext uri="{FF2B5EF4-FFF2-40B4-BE49-F238E27FC236}">
-                <a16:creationId xmlns:a16="http://schemas.microsoft.com/office/drawing/2014/main" id="{5AA4E771-F5A0-43AD-841F-A456E1600FC6}"/>
+                <a16:creationId xmlns:a16="http://schemas.microsoft.com/office/drawing/2014/main" id="{438D821E-D1F7-4C92-B36A-2C5FE03DAA80}"/>
               </a:ext>
             </a:extLst>
           </p:cNvPr>
@@ -8811,7 +7353,7 @@
                 <a:ea typeface="Malgun Gothic"/>
                 <a:cs typeface="Malgun Gothic"/>
               </a:rPr>
-              <a:t>첫 시연은 실제 확보한 공개자료에서 시작한다</a:t>
+              <a:t>국토안전관리원의 공개 건물 데이터로 시작한다</a:t>
             </a:r>
           </a:p>
         </p:txBody>
@@ -8821,7 +7363,7 @@
           <p:cNvPr id="3" name="">
             <a:extLst xmlns:a="http://schemas.openxmlformats.org/drawingml/2006/main">
               <a:ext uri="{FF2B5EF4-FFF2-40B4-BE49-F238E27FC236}">
-                <a16:creationId xmlns:a16="http://schemas.microsoft.com/office/drawing/2014/main" id="{FDB9CF5A-0B99-458A-BA84-3019684F7538}"/>
+                <a16:creationId xmlns:a16="http://schemas.microsoft.com/office/drawing/2014/main" id="{A28B9E53-248D-4560-B8A6-57C2D9701846}"/>
               </a:ext>
             </a:extLst>
           </p:cNvPr>
@@ -8851,7 +7393,7 @@
           <p:cNvPr id="4" name="">
             <a:extLst xmlns:a="http://schemas.openxmlformats.org/drawingml/2006/main">
               <a:ext uri="{FF2B5EF4-FFF2-40B4-BE49-F238E27FC236}">
-                <a16:creationId xmlns:a16="http://schemas.microsoft.com/office/drawing/2014/main" id="{20973210-5B94-4297-9089-18BB4CAA15E6}"/>
+                <a16:creationId xmlns:a16="http://schemas.microsoft.com/office/drawing/2014/main" id="{6F434121-78BF-446E-A1B3-B5A5CE7C951D}"/>
               </a:ext>
             </a:extLst>
           </p:cNvPr>
@@ -8908,7 +7450,7 @@
           <p:cNvPr id="5" name="">
             <a:extLst xmlns:a="http://schemas.openxmlformats.org/drawingml/2006/main">
               <a:ext uri="{FF2B5EF4-FFF2-40B4-BE49-F238E27FC236}">
-                <a16:creationId xmlns:a16="http://schemas.microsoft.com/office/drawing/2014/main" id="{FFE43DB7-F65F-42F1-AEB9-9D1B683EC5B1}"/>
+                <a16:creationId xmlns:a16="http://schemas.microsoft.com/office/drawing/2014/main" id="{BE20C274-9652-43B9-8B4B-4CC31B2E8FCA}"/>
               </a:ext>
             </a:extLst>
           </p:cNvPr>
@@ -8965,7 +7507,7 @@
           <p:cNvPr id="6" name="">
             <a:extLst xmlns:a="http://schemas.openxmlformats.org/drawingml/2006/main">
               <a:ext uri="{FF2B5EF4-FFF2-40B4-BE49-F238E27FC236}">
-                <a16:creationId xmlns:a16="http://schemas.microsoft.com/office/drawing/2014/main" id="{21862D83-8ADF-48C1-88E8-64B2213215DB}"/>
+                <a16:creationId xmlns:a16="http://schemas.microsoft.com/office/drawing/2014/main" id="{7C31641B-1B41-4FAE-A968-B1FBF5CEA7F1}"/>
               </a:ext>
             </a:extLst>
           </p:cNvPr>
@@ -9012,7 +7554,7 @@
                 <a:ea typeface="Malgun Gothic"/>
                 <a:cs typeface="Malgun Gothic"/>
               </a:rPr>
-              <a:t>자료: 공공데이터포털 3069931 · 2026.9.30 다운로드 및 기본 품질검사</a:t>
+              <a:t>출처: 공공데이터포털 「국토안전관리원_공공건축물 에너지 소비량_20260331」</a:t>
             </a:r>
           </a:p>
         </p:txBody>
@@ -9022,36 +7564,36 @@
           <p:cNvPr id="7" name="">
             <a:extLst xmlns:a="http://schemas.openxmlformats.org/drawingml/2006/main">
               <a:ext uri="{FF2B5EF4-FFF2-40B4-BE49-F238E27FC236}">
-                <a16:creationId xmlns:a16="http://schemas.microsoft.com/office/drawing/2014/main" id="{840BD244-56DF-444A-A7BD-13760144CE6B}"/>
-              </a:ext>
-            </a:extLst>
-          </p:cNvPr>
-          <p:cNvSpPr>
-            <a:spLocks xmlns:a="http://schemas.openxmlformats.org/drawingml/2006/main" noGrp="1"/>
-          </p:cNvSpPr>
-          <p:nvPr/>
-        </p:nvSpPr>
-        <p:spPr>
-          <a:xfrm xmlns:a="http://schemas.openxmlformats.org/drawingml/2006/main">
-            <a:off x="742950" y="1409700"/>
-            <a:ext cx="4191000" cy="847725"/>
-          </a:xfrm>
-          <a:prstGeom xmlns:a="http://schemas.openxmlformats.org/drawingml/2006/main" prst="rect">
-            <a:avLst/>
-          </a:prstGeom>
-          <a:noFill xmlns:a="http://schemas.openxmlformats.org/drawingml/2006/main"/>
-          <a:ln xmlns:a="http://schemas.openxmlformats.org/drawingml/2006/main" w="0">
-            <a:noFill/>
-          </a:ln>
-        </p:spPr>
-        <p:txBody>
-          <a:bodyPr xmlns:a="http://schemas.openxmlformats.org/drawingml/2006/main">
-            <a:noAutofit/>
-          </a:bodyPr>
-          <a:lstStyle xmlns:a="http://schemas.openxmlformats.org/drawingml/2006/main"/>
-          <a:p xmlns:a="http://schemas.openxmlformats.org/drawingml/2006/main">
-            <a:pPr>
-              <a:defRPr sz="4800" b="1">
+                <a16:creationId xmlns:a16="http://schemas.microsoft.com/office/drawing/2014/main" id="{070066D2-36AA-4EBC-93A9-57D05EB31CB1}"/>
+              </a:ext>
+            </a:extLst>
+          </p:cNvPr>
+          <p:cNvSpPr>
+            <a:spLocks xmlns:a="http://schemas.openxmlformats.org/drawingml/2006/main" noGrp="1"/>
+          </p:cNvSpPr>
+          <p:nvPr/>
+        </p:nvSpPr>
+        <p:spPr>
+          <a:xfrm xmlns:a="http://schemas.openxmlformats.org/drawingml/2006/main">
+            <a:off x="742950" y="1381125"/>
+            <a:ext cx="10572750" cy="819150"/>
+          </a:xfrm>
+          <a:prstGeom xmlns:a="http://schemas.openxmlformats.org/drawingml/2006/main" prst="rect">
+            <a:avLst/>
+          </a:prstGeom>
+          <a:noFill xmlns:a="http://schemas.openxmlformats.org/drawingml/2006/main"/>
+          <a:ln xmlns:a="http://schemas.openxmlformats.org/drawingml/2006/main" w="0">
+            <a:noFill/>
+          </a:ln>
+        </p:spPr>
+        <p:txBody>
+          <a:bodyPr xmlns:a="http://schemas.openxmlformats.org/drawingml/2006/main">
+            <a:noAutofit/>
+          </a:bodyPr>
+          <a:lstStyle xmlns:a="http://schemas.openxmlformats.org/drawingml/2006/main"/>
+          <a:p xmlns:a="http://schemas.openxmlformats.org/drawingml/2006/main">
+            <a:pPr>
+              <a:defRPr sz="3975" b="1">
                 <a:solidFill>
                   <a:srgbClr val="127452"/>
                 </a:solidFill>
@@ -9061,7 +7603,7 @@
               </a:defRPr>
             </a:pPr>
             <a:r>
-              <a:rPr sz="4800" b="1">
+              <a:rPr sz="3975" b="1">
                 <a:solidFill>
                   <a:srgbClr val="127452"/>
                 </a:solidFill>
@@ -9069,7 +7611,7 @@
                 <a:ea typeface="Malgun Gothic"/>
                 <a:cs typeface="Malgun Gothic"/>
               </a:rPr>
-              <a:t>4,347행</a:t>
+              <a:t>공공건축물 4,347건</a:t>
             </a:r>
           </a:p>
         </p:txBody>
@@ -9079,54 +7621,54 @@
           <p:cNvPr id="8" name="">
             <a:extLst xmlns:a="http://schemas.openxmlformats.org/drawingml/2006/main">
               <a:ext uri="{FF2B5EF4-FFF2-40B4-BE49-F238E27FC236}">
-                <a16:creationId xmlns:a16="http://schemas.microsoft.com/office/drawing/2014/main" id="{51EA11C6-9333-4AF2-A8DB-6AAFED822298}"/>
-              </a:ext>
-            </a:extLst>
-          </p:cNvPr>
-          <p:cNvSpPr>
-            <a:spLocks xmlns:a="http://schemas.openxmlformats.org/drawingml/2006/main" noGrp="1"/>
-          </p:cNvSpPr>
-          <p:nvPr/>
-        </p:nvSpPr>
-        <p:spPr>
-          <a:xfrm xmlns:a="http://schemas.openxmlformats.org/drawingml/2006/main">
-            <a:off x="742950" y="2362200"/>
-            <a:ext cx="4619625" cy="523875"/>
-          </a:xfrm>
-          <a:prstGeom xmlns:a="http://schemas.openxmlformats.org/drawingml/2006/main" prst="rect">
-            <a:avLst/>
-          </a:prstGeom>
-          <a:noFill xmlns:a="http://schemas.openxmlformats.org/drawingml/2006/main"/>
-          <a:ln xmlns:a="http://schemas.openxmlformats.org/drawingml/2006/main" w="0">
-            <a:noFill/>
-          </a:ln>
-        </p:spPr>
-        <p:txBody>
-          <a:bodyPr xmlns:a="http://schemas.openxmlformats.org/drawingml/2006/main">
-            <a:noAutofit/>
-          </a:bodyPr>
-          <a:lstStyle xmlns:a="http://schemas.openxmlformats.org/drawingml/2006/main"/>
-          <a:p xmlns:a="http://schemas.openxmlformats.org/drawingml/2006/main">
-            <a:pPr>
-              <a:defRPr sz="1875" b="0">
-                <a:solidFill>
-                  <a:srgbClr val="183329"/>
-                </a:solidFill>
-                <a:latin typeface="Malgun Gothic"/>
-                <a:ea typeface="Malgun Gothic"/>
-                <a:cs typeface="Malgun Gothic"/>
-              </a:defRPr>
-            </a:pPr>
-            <a:r>
-              <a:rPr sz="1875" b="0">
-                <a:solidFill>
-                  <a:srgbClr val="183329"/>
-                </a:solidFill>
-                <a:latin typeface="Malgun Gothic"/>
-                <a:ea typeface="Malgun Gothic"/>
-                <a:cs typeface="Malgun Gothic"/>
-              </a:rPr>
-              <a:t>15개 열 · 원본 CSV 확보</a:t>
+                <a16:creationId xmlns:a16="http://schemas.microsoft.com/office/drawing/2014/main" id="{1A2E3076-D73B-4647-99D6-49903722B0DB}"/>
+              </a:ext>
+            </a:extLst>
+          </p:cNvPr>
+          <p:cNvSpPr>
+            <a:spLocks xmlns:a="http://schemas.openxmlformats.org/drawingml/2006/main" noGrp="1"/>
+          </p:cNvSpPr>
+          <p:nvPr/>
+        </p:nvSpPr>
+        <p:spPr>
+          <a:xfrm xmlns:a="http://schemas.openxmlformats.org/drawingml/2006/main">
+            <a:off x="742950" y="2257425"/>
+            <a:ext cx="10572750" cy="466725"/>
+          </a:xfrm>
+          <a:prstGeom xmlns:a="http://schemas.openxmlformats.org/drawingml/2006/main" prst="rect">
+            <a:avLst/>
+          </a:prstGeom>
+          <a:noFill xmlns:a="http://schemas.openxmlformats.org/drawingml/2006/main"/>
+          <a:ln xmlns:a="http://schemas.openxmlformats.org/drawingml/2006/main" w="0">
+            <a:noFill/>
+          </a:ln>
+        </p:spPr>
+        <p:txBody>
+          <a:bodyPr xmlns:a="http://schemas.openxmlformats.org/drawingml/2006/main">
+            <a:noAutofit/>
+          </a:bodyPr>
+          <a:lstStyle xmlns:a="http://schemas.openxmlformats.org/drawingml/2006/main"/>
+          <a:p xmlns:a="http://schemas.openxmlformats.org/drawingml/2006/main">
+            <a:pPr>
+              <a:defRPr sz="2025" b="0">
+                <a:solidFill>
+                  <a:srgbClr val="183329"/>
+                </a:solidFill>
+                <a:latin typeface="Malgun Gothic"/>
+                <a:ea typeface="Malgun Gothic"/>
+                <a:cs typeface="Malgun Gothic"/>
+              </a:defRPr>
+            </a:pPr>
+            <a:r>
+              <a:rPr sz="2025" b="0">
+                <a:solidFill>
+                  <a:srgbClr val="183329"/>
+                </a:solidFill>
+                <a:latin typeface="Malgun Gothic"/>
+                <a:ea typeface="Malgun Gothic"/>
+                <a:cs typeface="Malgun Gothic"/>
+              </a:rPr>
+              <a:t>공공데이터포털에서 공개한 CSV 자료를 확보</a:t>
             </a:r>
           </a:p>
         </p:txBody>
@@ -9136,36 +7678,36 @@
           <p:cNvPr id="9" name="">
             <a:extLst xmlns:a="http://schemas.openxmlformats.org/drawingml/2006/main">
               <a:ext uri="{FF2B5EF4-FFF2-40B4-BE49-F238E27FC236}">
-                <a16:creationId xmlns:a16="http://schemas.microsoft.com/office/drawing/2014/main" id="{D7CB8189-68B2-42C4-B760-883D2A35A994}"/>
-              </a:ext>
-            </a:extLst>
-          </p:cNvPr>
-          <p:cNvSpPr>
-            <a:spLocks xmlns:a="http://schemas.openxmlformats.org/drawingml/2006/main" noGrp="1"/>
-          </p:cNvSpPr>
-          <p:nvPr/>
-        </p:nvSpPr>
-        <p:spPr>
-          <a:xfrm xmlns:a="http://schemas.openxmlformats.org/drawingml/2006/main">
-            <a:off x="6257925" y="1409700"/>
-            <a:ext cx="4286250" cy="847725"/>
-          </a:xfrm>
-          <a:prstGeom xmlns:a="http://schemas.openxmlformats.org/drawingml/2006/main" prst="rect">
-            <a:avLst/>
-          </a:prstGeom>
-          <a:noFill xmlns:a="http://schemas.openxmlformats.org/drawingml/2006/main"/>
-          <a:ln xmlns:a="http://schemas.openxmlformats.org/drawingml/2006/main" w="0">
-            <a:noFill/>
-          </a:ln>
-        </p:spPr>
-        <p:txBody>
-          <a:bodyPr xmlns:a="http://schemas.openxmlformats.org/drawingml/2006/main">
-            <a:noAutofit/>
-          </a:bodyPr>
-          <a:lstStyle xmlns:a="http://schemas.openxmlformats.org/drawingml/2006/main"/>
-          <a:p xmlns:a="http://schemas.openxmlformats.org/drawingml/2006/main">
-            <a:pPr>
-              <a:defRPr sz="4800" b="1">
+                <a16:creationId xmlns:a16="http://schemas.microsoft.com/office/drawing/2014/main" id="{E10253C6-D243-4542-932D-A0BE6517BD67}"/>
+              </a:ext>
+            </a:extLst>
+          </p:cNvPr>
+          <p:cNvSpPr>
+            <a:spLocks xmlns:a="http://schemas.openxmlformats.org/drawingml/2006/main" noGrp="1"/>
+          </p:cNvSpPr>
+          <p:nvPr/>
+        </p:nvSpPr>
+        <p:spPr>
+          <a:xfrm xmlns:a="http://schemas.openxmlformats.org/drawingml/2006/main">
+            <a:off x="742950" y="3133725"/>
+            <a:ext cx="5095875" cy="361950"/>
+          </a:xfrm>
+          <a:prstGeom xmlns:a="http://schemas.openxmlformats.org/drawingml/2006/main" prst="rect">
+            <a:avLst/>
+          </a:prstGeom>
+          <a:noFill xmlns:a="http://schemas.openxmlformats.org/drawingml/2006/main"/>
+          <a:ln xmlns:a="http://schemas.openxmlformats.org/drawingml/2006/main" w="0">
+            <a:noFill/>
+          </a:ln>
+        </p:spPr>
+        <p:txBody>
+          <a:bodyPr xmlns:a="http://schemas.openxmlformats.org/drawingml/2006/main">
+            <a:noAutofit/>
+          </a:bodyPr>
+          <a:lstStyle xmlns:a="http://schemas.openxmlformats.org/drawingml/2006/main"/>
+          <a:p xmlns:a="http://schemas.openxmlformats.org/drawingml/2006/main">
+            <a:pPr>
+              <a:defRPr sz="1875" b="1">
                 <a:solidFill>
                   <a:srgbClr val="127452"/>
                 </a:solidFill>
@@ -9175,7 +7717,7 @@
               </a:defRPr>
             </a:pPr>
             <a:r>
-              <a:rPr sz="4800" b="1">
+              <a:rPr sz="1875" b="1">
                 <a:solidFill>
                   <a:srgbClr val="127452"/>
                 </a:solidFill>
@@ -9183,7 +7725,7 @@
                 <a:ea typeface="Malgun Gothic"/>
                 <a:cs typeface="Malgun Gothic"/>
               </a:rPr>
-              <a:t>3,681행</a:t>
+              <a:t>어떤 정보를 활용하나</a:t>
             </a:r>
           </a:p>
         </p:txBody>
@@ -9193,54 +7735,100 @@
           <p:cNvPr id="10" name="">
             <a:extLst xmlns:a="http://schemas.openxmlformats.org/drawingml/2006/main">
               <a:ext uri="{FF2B5EF4-FFF2-40B4-BE49-F238E27FC236}">
-                <a16:creationId xmlns:a16="http://schemas.microsoft.com/office/drawing/2014/main" id="{D701F5CE-810A-4809-90BC-66805F7B669C}"/>
-              </a:ext>
-            </a:extLst>
-          </p:cNvPr>
-          <p:cNvSpPr>
-            <a:spLocks xmlns:a="http://schemas.openxmlformats.org/drawingml/2006/main" noGrp="1"/>
-          </p:cNvSpPr>
-          <p:nvPr/>
-        </p:nvSpPr>
-        <p:spPr>
-          <a:xfrm xmlns:a="http://schemas.openxmlformats.org/drawingml/2006/main">
-            <a:off x="6257925" y="2362200"/>
-            <a:ext cx="5048250" cy="523875"/>
-          </a:xfrm>
-          <a:prstGeom xmlns:a="http://schemas.openxmlformats.org/drawingml/2006/main" prst="rect">
-            <a:avLst/>
-          </a:prstGeom>
-          <a:noFill xmlns:a="http://schemas.openxmlformats.org/drawingml/2006/main"/>
-          <a:ln xmlns:a="http://schemas.openxmlformats.org/drawingml/2006/main" w="0">
-            <a:noFill/>
-          </a:ln>
-        </p:spPr>
-        <p:txBody>
-          <a:bodyPr xmlns:a="http://schemas.openxmlformats.org/drawingml/2006/main">
-            <a:noAutofit/>
-          </a:bodyPr>
-          <a:lstStyle xmlns:a="http://schemas.openxmlformats.org/drawingml/2006/main"/>
-          <a:p xmlns:a="http://schemas.openxmlformats.org/drawingml/2006/main">
-            <a:pPr>
-              <a:defRPr sz="1800" b="0">
-                <a:solidFill>
-                  <a:srgbClr val="183329"/>
-                </a:solidFill>
-                <a:latin typeface="Malgun Gothic"/>
-                <a:ea typeface="Malgun Gothic"/>
-                <a:cs typeface="Malgun Gothic"/>
-              </a:defRPr>
-            </a:pPr>
-            <a:r>
-              <a:rPr sz="1800" b="0">
-                <a:solidFill>
-                  <a:srgbClr val="183329"/>
-                </a:solidFill>
-                <a:latin typeface="Malgun Gothic"/>
-                <a:ea typeface="Malgun Gothic"/>
-                <a:cs typeface="Malgun Gothic"/>
-              </a:rPr>
-              <a:t>기본 품질조건 통과 · 학습은 미실시</a:t>
+                <a16:creationId xmlns:a16="http://schemas.microsoft.com/office/drawing/2014/main" id="{3D413FC9-38E2-404E-B2CC-ED7FB5688991}"/>
+              </a:ext>
+            </a:extLst>
+          </p:cNvPr>
+          <p:cNvSpPr>
+            <a:spLocks xmlns:a="http://schemas.openxmlformats.org/drawingml/2006/main" noGrp="1"/>
+          </p:cNvSpPr>
+          <p:nvPr/>
+        </p:nvSpPr>
+        <p:spPr>
+          <a:xfrm xmlns:a="http://schemas.openxmlformats.org/drawingml/2006/main">
+            <a:off x="742950" y="3571875"/>
+            <a:ext cx="5095875" cy="1419225"/>
+          </a:xfrm>
+          <a:prstGeom xmlns:a="http://schemas.openxmlformats.org/drawingml/2006/main" prst="rect">
+            <a:avLst/>
+          </a:prstGeom>
+          <a:noFill xmlns:a="http://schemas.openxmlformats.org/drawingml/2006/main"/>
+          <a:ln xmlns:a="http://schemas.openxmlformats.org/drawingml/2006/main" w="0">
+            <a:noFill/>
+          </a:ln>
+        </p:spPr>
+        <p:txBody>
+          <a:bodyPr xmlns:a="http://schemas.openxmlformats.org/drawingml/2006/main">
+            <a:noAutofit/>
+          </a:bodyPr>
+          <a:lstStyle xmlns:a="http://schemas.openxmlformats.org/drawingml/2006/main"/>
+          <a:p xmlns:a="http://schemas.openxmlformats.org/drawingml/2006/main">
+            <a:pPr>
+              <a:defRPr sz="1575" b="0">
+                <a:solidFill>
+                  <a:srgbClr val="183329"/>
+                </a:solidFill>
+                <a:latin typeface="Malgun Gothic"/>
+                <a:ea typeface="Malgun Gothic"/>
+                <a:cs typeface="Malgun Gothic"/>
+              </a:defRPr>
+            </a:pPr>
+            <a:r>
+              <a:rPr sz="1575" b="0">
+                <a:solidFill>
+                  <a:srgbClr val="183329"/>
+                </a:solidFill>
+                <a:latin typeface="Malgun Gothic"/>
+                <a:ea typeface="Malgun Gothic"/>
+                <a:cs typeface="Malgun Gothic"/>
+              </a:rPr>
+              <a:t>지역 · 건물 용도 · 연면적</a:t>
+            </a:r>
+          </a:p>
+          <a:p xmlns:a="http://schemas.openxmlformats.org/drawingml/2006/main">
+            <a:pPr>
+              <a:defRPr sz="1575" b="0">
+                <a:solidFill>
+                  <a:srgbClr val="183329"/>
+                </a:solidFill>
+                <a:latin typeface="Malgun Gothic"/>
+                <a:ea typeface="Malgun Gothic"/>
+                <a:cs typeface="Malgun Gothic"/>
+              </a:defRPr>
+            </a:pPr>
+            <a:r>
+              <a:rPr sz="1575" b="0">
+                <a:solidFill>
+                  <a:srgbClr val="183329"/>
+                </a:solidFill>
+                <a:latin typeface="Malgun Gothic"/>
+                <a:ea typeface="Malgun Gothic"/>
+                <a:cs typeface="Malgun Gothic"/>
+              </a:rPr>
+              <a:t>사용승인연도 · 지상·지하 층수</a:t>
+            </a:r>
+          </a:p>
+          <a:p xmlns:a="http://schemas.openxmlformats.org/drawingml/2006/main">
+            <a:pPr>
+              <a:defRPr sz="1575" b="0">
+                <a:solidFill>
+                  <a:srgbClr val="183329"/>
+                </a:solidFill>
+                <a:latin typeface="Malgun Gothic"/>
+                <a:ea typeface="Malgun Gothic"/>
+                <a:cs typeface="Malgun Gothic"/>
+              </a:defRPr>
+            </a:pPr>
+            <a:r>
+              <a:rPr sz="1575" b="0">
+                <a:solidFill>
+                  <a:srgbClr val="183329"/>
+                </a:solidFill>
+                <a:latin typeface="Malgun Gothic"/>
+                <a:ea typeface="Malgun Gothic"/>
+                <a:cs typeface="Malgun Gothic"/>
+              </a:rPr>
+              <a:t>3개년 평균 1차 에너지 소비량</a:t>
             </a:r>
           </a:p>
         </p:txBody>
@@ -9250,84 +7838,157 @@
           <p:cNvPr id="11" name="">
             <a:extLst xmlns:a="http://schemas.openxmlformats.org/drawingml/2006/main">
               <a:ext uri="{FF2B5EF4-FFF2-40B4-BE49-F238E27FC236}">
-                <a16:creationId xmlns:a16="http://schemas.microsoft.com/office/drawing/2014/main" id="{164BB2F6-75DB-4634-AAD2-B53B351AA1BF}"/>
-              </a:ext>
-            </a:extLst>
-          </p:cNvPr>
-          <p:cNvSpPr>
-            <a:spLocks xmlns:a="http://schemas.openxmlformats.org/drawingml/2006/main" noGrp="1"/>
-          </p:cNvSpPr>
-          <p:nvPr/>
-        </p:nvSpPr>
-        <p:spPr>
-          <a:xfrm xmlns:a="http://schemas.openxmlformats.org/drawingml/2006/main">
-            <a:off x="742950" y="3219450"/>
-            <a:ext cx="10458450" cy="19050"/>
-          </a:xfrm>
-          <a:prstGeom xmlns:a="http://schemas.openxmlformats.org/drawingml/2006/main" prst="rect">
-            <a:avLst/>
-          </a:prstGeom>
-          <a:solidFill xmlns:a="http://schemas.openxmlformats.org/drawingml/2006/main">
-            <a:srgbClr val="C8D9CE"/>
-          </a:solidFill>
-          <a:ln xmlns:a="http://schemas.openxmlformats.org/drawingml/2006/main" w="0">
-            <a:noFill/>
-          </a:ln>
-        </p:spPr>
+                <a16:creationId xmlns:a16="http://schemas.microsoft.com/office/drawing/2014/main" id="{99CD4A67-6DC3-4C53-8452-2912E0EEFB62}"/>
+              </a:ext>
+            </a:extLst>
+          </p:cNvPr>
+          <p:cNvSpPr>
+            <a:spLocks xmlns:a="http://schemas.openxmlformats.org/drawingml/2006/main" noGrp="1"/>
+          </p:cNvSpPr>
+          <p:nvPr/>
+        </p:nvSpPr>
+        <p:spPr>
+          <a:xfrm xmlns:a="http://schemas.openxmlformats.org/drawingml/2006/main">
+            <a:off x="6238875" y="3133725"/>
+            <a:ext cx="5095875" cy="361950"/>
+          </a:xfrm>
+          <a:prstGeom xmlns:a="http://schemas.openxmlformats.org/drawingml/2006/main" prst="rect">
+            <a:avLst/>
+          </a:prstGeom>
+          <a:noFill xmlns:a="http://schemas.openxmlformats.org/drawingml/2006/main"/>
+          <a:ln xmlns:a="http://schemas.openxmlformats.org/drawingml/2006/main" w="0">
+            <a:noFill/>
+          </a:ln>
+        </p:spPr>
+        <p:txBody>
+          <a:bodyPr xmlns:a="http://schemas.openxmlformats.org/drawingml/2006/main">
+            <a:noAutofit/>
+          </a:bodyPr>
+          <a:lstStyle xmlns:a="http://schemas.openxmlformats.org/drawingml/2006/main"/>
+          <a:p xmlns:a="http://schemas.openxmlformats.org/drawingml/2006/main">
+            <a:pPr>
+              <a:defRPr sz="1875" b="1">
+                <a:solidFill>
+                  <a:srgbClr val="127452"/>
+                </a:solidFill>
+                <a:latin typeface="Malgun Gothic"/>
+                <a:ea typeface="Malgun Gothic"/>
+                <a:cs typeface="Malgun Gothic"/>
+              </a:defRPr>
+            </a:pPr>
+            <a:r>
+              <a:rPr sz="1875" b="1">
+                <a:solidFill>
+                  <a:srgbClr val="127452"/>
+                </a:solidFill>
+                <a:latin typeface="Malgun Gothic"/>
+                <a:ea typeface="Malgun Gothic"/>
+                <a:cs typeface="Malgun Gothic"/>
+              </a:rPr>
+              <a:t>어떻게 서비스에 연결하나</a:t>
+            </a:r>
+          </a:p>
+        </p:txBody>
       </p:sp>
       <p:sp>
         <p:nvSpPr>
           <p:cNvPr id="12" name="">
             <a:extLst xmlns:a="http://schemas.openxmlformats.org/drawingml/2006/main">
               <a:ext uri="{FF2B5EF4-FFF2-40B4-BE49-F238E27FC236}">
-                <a16:creationId xmlns:a16="http://schemas.microsoft.com/office/drawing/2014/main" id="{972692AD-2D52-4973-B16D-A138FD813943}"/>
-              </a:ext>
-            </a:extLst>
-          </p:cNvPr>
-          <p:cNvSpPr>
-            <a:spLocks xmlns:a="http://schemas.openxmlformats.org/drawingml/2006/main" noGrp="1"/>
-          </p:cNvSpPr>
-          <p:nvPr/>
-        </p:nvSpPr>
-        <p:spPr>
-          <a:xfrm xmlns:a="http://schemas.openxmlformats.org/drawingml/2006/main">
-            <a:off x="742950" y="3619500"/>
-            <a:ext cx="5048250" cy="361950"/>
-          </a:xfrm>
-          <a:prstGeom xmlns:a="http://schemas.openxmlformats.org/drawingml/2006/main" prst="rect">
-            <a:avLst/>
-          </a:prstGeom>
-          <a:noFill xmlns:a="http://schemas.openxmlformats.org/drawingml/2006/main"/>
-          <a:ln xmlns:a="http://schemas.openxmlformats.org/drawingml/2006/main" w="0">
-            <a:noFill/>
-          </a:ln>
-        </p:spPr>
-        <p:txBody>
-          <a:bodyPr xmlns:a="http://schemas.openxmlformats.org/drawingml/2006/main">
-            <a:noAutofit/>
-          </a:bodyPr>
-          <a:lstStyle xmlns:a="http://schemas.openxmlformats.org/drawingml/2006/main"/>
-          <a:p xmlns:a="http://schemas.openxmlformats.org/drawingml/2006/main">
-            <a:pPr>
-              <a:defRPr sz="1875" b="1">
-                <a:solidFill>
-                  <a:srgbClr val="127452"/>
-                </a:solidFill>
-                <a:latin typeface="Malgun Gothic"/>
-                <a:ea typeface="Malgun Gothic"/>
-                <a:cs typeface="Malgun Gothic"/>
-              </a:defRPr>
-            </a:pPr>
-            <a:r>
-              <a:rPr sz="1875" b="1">
-                <a:solidFill>
-                  <a:srgbClr val="127452"/>
-                </a:solidFill>
-                <a:latin typeface="Malgun Gothic"/>
-                <a:ea typeface="Malgun Gothic"/>
-                <a:cs typeface="Malgun Gothic"/>
-              </a:rPr>
-              <a:t>사용하는 필드</a:t>
+                <a16:creationId xmlns:a16="http://schemas.microsoft.com/office/drawing/2014/main" id="{399EFA14-823A-4518-986A-AB9F332A69F8}"/>
+              </a:ext>
+            </a:extLst>
+          </p:cNvPr>
+          <p:cNvSpPr>
+            <a:spLocks xmlns:a="http://schemas.openxmlformats.org/drawingml/2006/main" noGrp="1"/>
+          </p:cNvSpPr>
+          <p:nvPr/>
+        </p:nvSpPr>
+        <p:spPr>
+          <a:xfrm xmlns:a="http://schemas.openxmlformats.org/drawingml/2006/main">
+            <a:off x="6238875" y="3571875"/>
+            <a:ext cx="5095875" cy="1419225"/>
+          </a:xfrm>
+          <a:prstGeom xmlns:a="http://schemas.openxmlformats.org/drawingml/2006/main" prst="rect">
+            <a:avLst/>
+          </a:prstGeom>
+          <a:noFill xmlns:a="http://schemas.openxmlformats.org/drawingml/2006/main"/>
+          <a:ln xmlns:a="http://schemas.openxmlformats.org/drawingml/2006/main" w="0">
+            <a:noFill/>
+          </a:ln>
+        </p:spPr>
+        <p:txBody>
+          <a:bodyPr xmlns:a="http://schemas.openxmlformats.org/drawingml/2006/main">
+            <a:noAutofit/>
+          </a:bodyPr>
+          <a:lstStyle xmlns:a="http://schemas.openxmlformats.org/drawingml/2006/main"/>
+          <a:p xmlns:a="http://schemas.openxmlformats.org/drawingml/2006/main">
+            <a:pPr>
+              <a:defRPr sz="1575" b="0">
+                <a:solidFill>
+                  <a:srgbClr val="183329"/>
+                </a:solidFill>
+                <a:latin typeface="Malgun Gothic"/>
+                <a:ea typeface="Malgun Gothic"/>
+                <a:cs typeface="Malgun Gothic"/>
+              </a:defRPr>
+            </a:pPr>
+            <a:r>
+              <a:rPr sz="1575" b="0">
+                <a:solidFill>
+                  <a:srgbClr val="183329"/>
+                </a:solidFill>
+                <a:latin typeface="Malgun Gothic"/>
+                <a:ea typeface="Malgun Gothic"/>
+                <a:cs typeface="Malgun Gothic"/>
+              </a:rPr>
+              <a:t>건물 한 동의 기본정보 불러오기</a:t>
+            </a:r>
+          </a:p>
+          <a:p xmlns:a="http://schemas.openxmlformats.org/drawingml/2006/main">
+            <a:pPr>
+              <a:defRPr sz="1575" b="0">
+                <a:solidFill>
+                  <a:srgbClr val="183329"/>
+                </a:solidFill>
+                <a:latin typeface="Malgun Gothic"/>
+                <a:ea typeface="Malgun Gothic"/>
+                <a:cs typeface="Malgun Gothic"/>
+              </a:defRPr>
+            </a:pPr>
+            <a:r>
+              <a:rPr sz="1575" b="0">
+                <a:solidFill>
+                  <a:srgbClr val="183329"/>
+                </a:solidFill>
+                <a:latin typeface="Malgun Gothic"/>
+                <a:ea typeface="Malgun Gothic"/>
+                <a:cs typeface="Malgun Gothic"/>
+              </a:rPr>
+              <a:t>비슷한 조건을 반영한 에너지 비교</a:t>
+            </a:r>
+          </a:p>
+          <a:p xmlns:a="http://schemas.openxmlformats.org/drawingml/2006/main">
+            <a:pPr>
+              <a:defRPr sz="1575" b="0">
+                <a:solidFill>
+                  <a:srgbClr val="183329"/>
+                </a:solidFill>
+                <a:latin typeface="Malgun Gothic"/>
+                <a:ea typeface="Malgun Gothic"/>
+                <a:cs typeface="Malgun Gothic"/>
+              </a:defRPr>
+            </a:pPr>
+            <a:r>
+              <a:rPr sz="1575" b="0">
+                <a:solidFill>
+                  <a:srgbClr val="183329"/>
+                </a:solidFill>
+                <a:latin typeface="Malgun Gothic"/>
+                <a:ea typeface="Malgun Gothic"/>
+                <a:cs typeface="Malgun Gothic"/>
+              </a:rPr>
+              <a:t>보고 누락·단위·출처를 함께 표시</a:t>
             </a:r>
           </a:p>
         </p:txBody>
@@ -9337,260 +7998,54 @@
           <p:cNvPr id="13" name="">
             <a:extLst xmlns:a="http://schemas.openxmlformats.org/drawingml/2006/main">
               <a:ext uri="{FF2B5EF4-FFF2-40B4-BE49-F238E27FC236}">
-                <a16:creationId xmlns:a16="http://schemas.microsoft.com/office/drawing/2014/main" id="{7FA205CA-E71F-4CF6-B107-FFD3C6037DE6}"/>
-              </a:ext>
-            </a:extLst>
-          </p:cNvPr>
-          <p:cNvSpPr>
-            <a:spLocks xmlns:a="http://schemas.openxmlformats.org/drawingml/2006/main" noGrp="1"/>
-          </p:cNvSpPr>
-          <p:nvPr/>
-        </p:nvSpPr>
-        <p:spPr>
-          <a:xfrm xmlns:a="http://schemas.openxmlformats.org/drawingml/2006/main">
-            <a:off x="742950" y="4057650"/>
-            <a:ext cx="5048250" cy="1371600"/>
-          </a:xfrm>
-          <a:prstGeom xmlns:a="http://schemas.openxmlformats.org/drawingml/2006/main" prst="rect">
-            <a:avLst/>
-          </a:prstGeom>
-          <a:noFill xmlns:a="http://schemas.openxmlformats.org/drawingml/2006/main"/>
-          <a:ln xmlns:a="http://schemas.openxmlformats.org/drawingml/2006/main" w="0">
-            <a:noFill/>
-          </a:ln>
-        </p:spPr>
-        <p:txBody>
-          <a:bodyPr xmlns:a="http://schemas.openxmlformats.org/drawingml/2006/main">
-            <a:noAutofit/>
-          </a:bodyPr>
-          <a:lstStyle xmlns:a="http://schemas.openxmlformats.org/drawingml/2006/main"/>
-          <a:p xmlns:a="http://schemas.openxmlformats.org/drawingml/2006/main">
-            <a:pPr>
-              <a:defRPr sz="1575" b="0">
-                <a:solidFill>
-                  <a:srgbClr val="183329"/>
-                </a:solidFill>
-                <a:latin typeface="Malgun Gothic"/>
-                <a:ea typeface="Malgun Gothic"/>
-                <a:cs typeface="Malgun Gothic"/>
-              </a:defRPr>
-            </a:pPr>
-            <a:r>
-              <a:rPr sz="1575" b="0">
-                <a:solidFill>
-                  <a:srgbClr val="183329"/>
-                </a:solidFill>
-                <a:latin typeface="Malgun Gothic"/>
-                <a:ea typeface="Malgun Gothic"/>
-                <a:cs typeface="Malgun Gothic"/>
-              </a:rPr>
-              <a:t>지역·용도·연면적·사용승인연도·층수</a:t>
-            </a:r>
-          </a:p>
-          <a:p xmlns:a="http://schemas.openxmlformats.org/drawingml/2006/main">
-            <a:pPr>
-              <a:defRPr sz="1575" b="0">
-                <a:solidFill>
-                  <a:srgbClr val="183329"/>
-                </a:solidFill>
-                <a:latin typeface="Malgun Gothic"/>
-                <a:ea typeface="Malgun Gothic"/>
-                <a:cs typeface="Malgun Gothic"/>
-              </a:defRPr>
-            </a:pPr>
-            <a:r>
-              <a:rPr sz="1575" b="0">
-                <a:solidFill>
-                  <a:srgbClr val="183329"/>
-                </a:solidFill>
-                <a:latin typeface="Malgun Gothic"/>
-                <a:ea typeface="Malgun Gothic"/>
-                <a:cs typeface="Malgun Gothic"/>
-              </a:rPr>
-              <a:t>3개년 평균 1차 에너지 원단위</a:t>
-            </a:r>
-          </a:p>
-          <a:p xmlns:a="http://schemas.openxmlformats.org/drawingml/2006/main">
-            <a:pPr>
-              <a:defRPr sz="1575" b="0">
-                <a:solidFill>
-                  <a:srgbClr val="183329"/>
-                </a:solidFill>
-                <a:latin typeface="Malgun Gothic"/>
-                <a:ea typeface="Malgun Gothic"/>
-                <a:cs typeface="Malgun Gothic"/>
-              </a:defRPr>
-            </a:pPr>
-            <a:r>
-              <a:rPr sz="1575" b="0">
-                <a:solidFill>
-                  <a:srgbClr val="183329"/>
-                </a:solidFill>
-                <a:latin typeface="Malgun Gothic"/>
-                <a:ea typeface="Malgun Gothic"/>
-                <a:cs typeface="Malgun Gothic"/>
-              </a:rPr>
-              <a:t>(kWh/㎡·년) 및 미보고 분기 수</a:t>
-            </a:r>
-          </a:p>
-        </p:txBody>
-      </p:sp>
-      <p:sp>
-        <p:nvSpPr>
-          <p:cNvPr id="14" name="">
-            <a:extLst xmlns:a="http://schemas.openxmlformats.org/drawingml/2006/main">
-              <a:ext uri="{FF2B5EF4-FFF2-40B4-BE49-F238E27FC236}">
-                <a16:creationId xmlns:a16="http://schemas.microsoft.com/office/drawing/2014/main" id="{7F07FF5F-BFE8-4317-AF01-0135C6F8A636}"/>
-              </a:ext>
-            </a:extLst>
-          </p:cNvPr>
-          <p:cNvSpPr>
-            <a:spLocks xmlns:a="http://schemas.openxmlformats.org/drawingml/2006/main" noGrp="1"/>
-          </p:cNvSpPr>
-          <p:nvPr/>
-        </p:nvSpPr>
-        <p:spPr>
-          <a:xfrm xmlns:a="http://schemas.openxmlformats.org/drawingml/2006/main">
-            <a:off x="6276975" y="3619500"/>
-            <a:ext cx="5048250" cy="361950"/>
-          </a:xfrm>
-          <a:prstGeom xmlns:a="http://schemas.openxmlformats.org/drawingml/2006/main" prst="rect">
-            <a:avLst/>
-          </a:prstGeom>
-          <a:noFill xmlns:a="http://schemas.openxmlformats.org/drawingml/2006/main"/>
-          <a:ln xmlns:a="http://schemas.openxmlformats.org/drawingml/2006/main" w="0">
-            <a:noFill/>
-          </a:ln>
-        </p:spPr>
-        <p:txBody>
-          <a:bodyPr xmlns:a="http://schemas.openxmlformats.org/drawingml/2006/main">
-            <a:noAutofit/>
-          </a:bodyPr>
-          <a:lstStyle xmlns:a="http://schemas.openxmlformats.org/drawingml/2006/main"/>
-          <a:p xmlns:a="http://schemas.openxmlformats.org/drawingml/2006/main">
-            <a:pPr>
-              <a:defRPr sz="1875" b="1">
-                <a:solidFill>
-                  <a:srgbClr val="127452"/>
-                </a:solidFill>
-                <a:latin typeface="Malgun Gothic"/>
-                <a:ea typeface="Malgun Gothic"/>
-                <a:cs typeface="Malgun Gothic"/>
-              </a:defRPr>
-            </a:pPr>
-            <a:r>
-              <a:rPr sz="1875" b="1">
-                <a:solidFill>
-                  <a:srgbClr val="127452"/>
-                </a:solidFill>
-                <a:latin typeface="Malgun Gothic"/>
-                <a:ea typeface="Malgun Gothic"/>
-                <a:cs typeface="Malgun Gothic"/>
-              </a:rPr>
-              <a:t>데이터의 경계</a:t>
-            </a:r>
-          </a:p>
-        </p:txBody>
-      </p:sp>
-      <p:sp>
-        <p:nvSpPr>
-          <p:cNvPr id="15" name="">
-            <a:extLst xmlns:a="http://schemas.openxmlformats.org/drawingml/2006/main">
-              <a:ext uri="{FF2B5EF4-FFF2-40B4-BE49-F238E27FC236}">
-                <a16:creationId xmlns:a16="http://schemas.microsoft.com/office/drawing/2014/main" id="{ED3C5A0B-A375-4FAB-99A8-D4BD4B4410EC}"/>
-              </a:ext>
-            </a:extLst>
-          </p:cNvPr>
-          <p:cNvSpPr>
-            <a:spLocks xmlns:a="http://schemas.openxmlformats.org/drawingml/2006/main" noGrp="1"/>
-          </p:cNvSpPr>
-          <p:nvPr/>
-        </p:nvSpPr>
-        <p:spPr>
-          <a:xfrm xmlns:a="http://schemas.openxmlformats.org/drawingml/2006/main">
-            <a:off x="6276975" y="4057650"/>
-            <a:ext cx="5048250" cy="1371600"/>
-          </a:xfrm>
-          <a:prstGeom xmlns:a="http://schemas.openxmlformats.org/drawingml/2006/main" prst="rect">
-            <a:avLst/>
-          </a:prstGeom>
-          <a:noFill xmlns:a="http://schemas.openxmlformats.org/drawingml/2006/main"/>
-          <a:ln xmlns:a="http://schemas.openxmlformats.org/drawingml/2006/main" w="0">
-            <a:noFill/>
-          </a:ln>
-        </p:spPr>
-        <p:txBody>
-          <a:bodyPr xmlns:a="http://schemas.openxmlformats.org/drawingml/2006/main">
-            <a:noAutofit/>
-          </a:bodyPr>
-          <a:lstStyle xmlns:a="http://schemas.openxmlformats.org/drawingml/2006/main"/>
-          <a:p xmlns:a="http://schemas.openxmlformats.org/drawingml/2006/main">
-            <a:pPr>
-              <a:defRPr sz="1575" b="0">
-                <a:solidFill>
-                  <a:srgbClr val="183329"/>
-                </a:solidFill>
-                <a:latin typeface="Malgun Gothic"/>
-                <a:ea typeface="Malgun Gothic"/>
-                <a:cs typeface="Malgun Gothic"/>
-              </a:defRPr>
-            </a:pPr>
-            <a:r>
-              <a:rPr sz="1575" b="0">
-                <a:solidFill>
-                  <a:srgbClr val="183329"/>
-                </a:solidFill>
-                <a:latin typeface="Malgun Gothic"/>
-                <a:ea typeface="Malgun Gothic"/>
-                <a:cs typeface="Malgun Gothic"/>
-              </a:rPr>
-              <a:t>3,000㎡ 이상 공공건축물 중심.</a:t>
-            </a:r>
-          </a:p>
-          <a:p xmlns:a="http://schemas.openxmlformats.org/drawingml/2006/main">
-            <a:pPr>
-              <a:defRPr sz="1575" b="0">
-                <a:solidFill>
-                  <a:srgbClr val="183329"/>
-                </a:solidFill>
-                <a:latin typeface="Malgun Gothic"/>
-                <a:ea typeface="Malgun Gothic"/>
-                <a:cs typeface="Malgun Gothic"/>
-              </a:defRPr>
-            </a:pPr>
-            <a:r>
-              <a:rPr sz="1575" b="0">
-                <a:solidFill>
-                  <a:srgbClr val="183329"/>
-                </a:solidFill>
-                <a:latin typeface="Malgun Gothic"/>
-                <a:ea typeface="Malgun Gothic"/>
-                <a:cs typeface="Malgun Gothic"/>
-              </a:rPr>
-              <a:t>방별·월별 소비량, 단열재·창호 사양은</a:t>
-            </a:r>
-          </a:p>
-          <a:p xmlns:a="http://schemas.openxmlformats.org/drawingml/2006/main">
-            <a:pPr>
-              <a:defRPr sz="1575" b="0">
-                <a:solidFill>
-                  <a:srgbClr val="183329"/>
-                </a:solidFill>
-                <a:latin typeface="Malgun Gothic"/>
-                <a:ea typeface="Malgun Gothic"/>
-                <a:cs typeface="Malgun Gothic"/>
-              </a:defRPr>
-            </a:pPr>
-            <a:r>
-              <a:rPr sz="1575" b="0">
-                <a:solidFill>
-                  <a:srgbClr val="183329"/>
-                </a:solidFill>
-                <a:latin typeface="Malgun Gothic"/>
-                <a:ea typeface="Malgun Gothic"/>
-                <a:cs typeface="Malgun Gothic"/>
-              </a:rPr>
-              <a:t>이 파일에 없다. 추가 정보는 문진·현장 확인.</a:t>
+                <a16:creationId xmlns:a16="http://schemas.microsoft.com/office/drawing/2014/main" id="{B7E63987-690F-4E29-81EB-3024E63A18CA}"/>
+              </a:ext>
+            </a:extLst>
+          </p:cNvPr>
+          <p:cNvSpPr>
+            <a:spLocks xmlns:a="http://schemas.openxmlformats.org/drawingml/2006/main" noGrp="1"/>
+          </p:cNvSpPr>
+          <p:nvPr/>
+        </p:nvSpPr>
+        <p:spPr>
+          <a:xfrm xmlns:a="http://schemas.openxmlformats.org/drawingml/2006/main">
+            <a:off x="742950" y="5305425"/>
+            <a:ext cx="10572750" cy="438150"/>
+          </a:xfrm>
+          <a:prstGeom xmlns:a="http://schemas.openxmlformats.org/drawingml/2006/main" prst="rect">
+            <a:avLst/>
+          </a:prstGeom>
+          <a:noFill xmlns:a="http://schemas.openxmlformats.org/drawingml/2006/main"/>
+          <a:ln xmlns:a="http://schemas.openxmlformats.org/drawingml/2006/main" w="0">
+            <a:noFill/>
+          </a:ln>
+        </p:spPr>
+        <p:txBody>
+          <a:bodyPr xmlns:a="http://schemas.openxmlformats.org/drawingml/2006/main">
+            <a:noAutofit/>
+          </a:bodyPr>
+          <a:lstStyle xmlns:a="http://schemas.openxmlformats.org/drawingml/2006/main"/>
+          <a:p xmlns:a="http://schemas.openxmlformats.org/drawingml/2006/main">
+            <a:pPr>
+              <a:defRPr sz="1650" b="0">
+                <a:solidFill>
+                  <a:srgbClr val="4E6157"/>
+                </a:solidFill>
+                <a:latin typeface="Malgun Gothic"/>
+                <a:ea typeface="Malgun Gothic"/>
+                <a:cs typeface="Malgun Gothic"/>
+              </a:defRPr>
+            </a:pPr>
+            <a:r>
+              <a:rPr sz="1650" b="0">
+                <a:solidFill>
+                  <a:srgbClr val="4E6157"/>
+                </a:solidFill>
+                <a:latin typeface="Malgun Gothic"/>
+                <a:ea typeface="Malgun Gothic"/>
+                <a:cs typeface="Malgun Gothic"/>
+              </a:rPr>
+              <a:t>https://www.data.go.kr/data/3069931/fileData.do</a:t>
             </a:r>
           </a:p>
         </p:txBody>
@@ -9598,7 +8053,7 @@
     </p:spTree>
     <p:extLst>
       <p:ext uri="{BB962C8B-B14F-4D97-AF65-F5344CB8AC3E}">
-        <p14:creationId xmlns:p14="http://schemas.microsoft.com/office/powerpoint/2010/main" val="801159529"/>
+        <p14:creationId xmlns:p14="http://schemas.microsoft.com/office/powerpoint/2010/main" val="2128860597"/>
       </p:ext>
     </p:extLst>
   </p:cSld>
@@ -9629,7 +8084,7 @@
           <p:cNvPr id="17" name="">
             <a:extLst xmlns:a="http://schemas.openxmlformats.org/drawingml/2006/main">
               <a:ext uri="{FF2B5EF4-FFF2-40B4-BE49-F238E27FC236}">
-                <a16:creationId xmlns:a16="http://schemas.microsoft.com/office/drawing/2014/main" id="{0A1944C4-2EFA-4071-956C-9CF34466CFE3}"/>
+                <a16:creationId xmlns:a16="http://schemas.microsoft.com/office/drawing/2014/main" id="{FB95E004-9886-4A4F-82FC-B2273FCEB41F}"/>
               </a:ext>
             </a:extLst>
           </p:cNvPr>
@@ -9659,7 +8114,7 @@
           <p:cNvPr id="2" name="">
             <a:extLst xmlns:a="http://schemas.openxmlformats.org/drawingml/2006/main">
               <a:ext uri="{FF2B5EF4-FFF2-40B4-BE49-F238E27FC236}">
-                <a16:creationId xmlns:a16="http://schemas.microsoft.com/office/drawing/2014/main" id="{C80A3E49-6A1E-4953-BFE2-E770A637E873}"/>
+                <a16:creationId xmlns:a16="http://schemas.microsoft.com/office/drawing/2014/main" id="{8AC8F75C-45E0-431A-AFB9-C5D9CBCA7370}"/>
               </a:ext>
             </a:extLst>
           </p:cNvPr>
@@ -9706,7 +8161,7 @@
                 <a:ea typeface="Malgun Gothic"/>
                 <a:cs typeface="Malgun Gothic"/>
               </a:rPr>
-              <a:t>분석과 문진을 연결하는 근거 기록 구조</a:t>
+              <a:t>에너지 분석과 문진 AI를 한 건물 기록에 연결한다</a:t>
             </a:r>
           </a:p>
         </p:txBody>
@@ -9716,7 +8171,7 @@
           <p:cNvPr id="3" name="">
             <a:extLst xmlns:a="http://schemas.openxmlformats.org/drawingml/2006/main">
               <a:ext uri="{FF2B5EF4-FFF2-40B4-BE49-F238E27FC236}">
-                <a16:creationId xmlns:a16="http://schemas.microsoft.com/office/drawing/2014/main" id="{6A005DEA-7602-4E9B-8105-26C3346AA8CC}"/>
+                <a16:creationId xmlns:a16="http://schemas.microsoft.com/office/drawing/2014/main" id="{D3F0EDA4-DF52-40EB-8F14-5F3B948D690D}"/>
               </a:ext>
             </a:extLst>
           </p:cNvPr>
@@ -9746,7 +8201,7 @@
           <p:cNvPr id="4" name="">
             <a:extLst xmlns:a="http://schemas.openxmlformats.org/drawingml/2006/main">
               <a:ext uri="{FF2B5EF4-FFF2-40B4-BE49-F238E27FC236}">
-                <a16:creationId xmlns:a16="http://schemas.microsoft.com/office/drawing/2014/main" id="{6D872A25-C212-4F05-B9DE-38F78F1DE003}"/>
+                <a16:creationId xmlns:a16="http://schemas.microsoft.com/office/drawing/2014/main" id="{F7AE807B-CA06-4A57-98E5-36989988B5D7}"/>
               </a:ext>
             </a:extLst>
           </p:cNvPr>
@@ -9803,7 +8258,7 @@
           <p:cNvPr id="5" name="">
             <a:extLst xmlns:a="http://schemas.openxmlformats.org/drawingml/2006/main">
               <a:ext uri="{FF2B5EF4-FFF2-40B4-BE49-F238E27FC236}">
-                <a16:creationId xmlns:a16="http://schemas.microsoft.com/office/drawing/2014/main" id="{E409E9C1-F5CE-4970-9109-53837FD34EAE}"/>
+                <a16:creationId xmlns:a16="http://schemas.microsoft.com/office/drawing/2014/main" id="{39A0C9CF-4BDA-4ED6-A504-2C109191C598}"/>
               </a:ext>
             </a:extLst>
           </p:cNvPr>
@@ -9860,7 +8315,7 @@
           <p:cNvPr id="6" name="">
             <a:extLst xmlns:a="http://schemas.openxmlformats.org/drawingml/2006/main">
               <a:ext uri="{FF2B5EF4-FFF2-40B4-BE49-F238E27FC236}">
-                <a16:creationId xmlns:a16="http://schemas.microsoft.com/office/drawing/2014/main" id="{3B165411-B59C-4A83-AA46-621E759A0296}"/>
+                <a16:creationId xmlns:a16="http://schemas.microsoft.com/office/drawing/2014/main" id="{A4E0B66B-A0B5-44D1-856A-12E12017E023}"/>
               </a:ext>
             </a:extLst>
           </p:cNvPr>
@@ -9892,7 +8347,7 @@
           <p:cNvPr id="7" name="">
             <a:extLst xmlns:a="http://schemas.openxmlformats.org/drawingml/2006/main">
               <a:ext uri="{FF2B5EF4-FFF2-40B4-BE49-F238E27FC236}">
-                <a16:creationId xmlns:a16="http://schemas.microsoft.com/office/drawing/2014/main" id="{6AC00589-CDAC-4E34-9DCE-9B63ECB8D788}"/>
+                <a16:creationId xmlns:a16="http://schemas.microsoft.com/office/drawing/2014/main" id="{3FC23A82-AF89-4B93-BB04-4D699497407E}"/>
               </a:ext>
             </a:extLst>
           </p:cNvPr>
@@ -9939,7 +8394,7 @@
                 <a:ea typeface="Malgun Gothic"/>
                 <a:cs typeface="Malgun Gothic"/>
               </a:rPr>
-              <a:t>건물 데이터 → 분석 모델</a:t>
+              <a:t>에너지 분석 모듈</a:t>
             </a:r>
           </a:p>
         </p:txBody>
@@ -9949,7 +8404,7 @@
           <p:cNvPr id="8" name="">
             <a:extLst xmlns:a="http://schemas.openxmlformats.org/drawingml/2006/main">
               <a:ext uri="{FF2B5EF4-FFF2-40B4-BE49-F238E27FC236}">
-                <a16:creationId xmlns:a16="http://schemas.microsoft.com/office/drawing/2014/main" id="{8DCA94E9-D9FB-42D5-87A1-44878CC61347}"/>
+                <a16:creationId xmlns:a16="http://schemas.microsoft.com/office/drawing/2014/main" id="{20431B39-9F37-46F1-BDF3-D62E02E69EB6}"/>
               </a:ext>
             </a:extLst>
           </p:cNvPr>
@@ -9996,7 +8451,7 @@
                 <a:ea typeface="Malgun Gothic"/>
                 <a:cs typeface="Malgun Gothic"/>
               </a:rPr>
-              <a:t>품질검사 → 기준선·회귀 비교</a:t>
+              <a:t>건물 특성 → 조건별 회귀·비교군 집계</a:t>
             </a:r>
           </a:p>
           <a:p xmlns:a="http://schemas.openxmlformats.org/drawingml/2006/main">
@@ -10019,7 +8474,7 @@
                 <a:ea typeface="Malgun Gothic"/>
                 <a:cs typeface="Malgun Gothic"/>
               </a:rPr>
-              <a:t>관측값·참고 범위·불확실성</a:t>
+              <a:t>출력: 비교 결과·조건·자료 품질</a:t>
             </a:r>
           </a:p>
         </p:txBody>
@@ -10029,7 +8484,7 @@
           <p:cNvPr id="9" name="">
             <a:extLst xmlns:a="http://schemas.openxmlformats.org/drawingml/2006/main">
               <a:ext uri="{FF2B5EF4-FFF2-40B4-BE49-F238E27FC236}">
-                <a16:creationId xmlns:a16="http://schemas.microsoft.com/office/drawing/2014/main" id="{FA3F845D-359D-420A-AA1E-02B2CF41EFE7}"/>
+                <a16:creationId xmlns:a16="http://schemas.microsoft.com/office/drawing/2014/main" id="{9CD954FF-501C-4FD2-8630-E1F0DB1F86DC}"/>
               </a:ext>
             </a:extLst>
           </p:cNvPr>
@@ -10061,7 +8516,7 @@
           <p:cNvPr id="10" name="">
             <a:extLst xmlns:a="http://schemas.openxmlformats.org/drawingml/2006/main">
               <a:ext uri="{FF2B5EF4-FFF2-40B4-BE49-F238E27FC236}">
-                <a16:creationId xmlns:a16="http://schemas.microsoft.com/office/drawing/2014/main" id="{459F950C-42EB-4396-A8B0-16880431F1CC}"/>
+                <a16:creationId xmlns:a16="http://schemas.microsoft.com/office/drawing/2014/main" id="{0C25EBD5-0639-4C98-80C7-71E1FAA7B679}"/>
               </a:ext>
             </a:extLst>
           </p:cNvPr>
@@ -10108,7 +8563,7 @@
                 <a:ea typeface="Malgun Gothic"/>
                 <a:cs typeface="Malgun Gothic"/>
               </a:rPr>
-              <a:t>이용자 응답 → 문진 AI</a:t>
+              <a:t>LLM 문진 모듈</a:t>
             </a:r>
           </a:p>
         </p:txBody>
@@ -10118,7 +8573,7 @@
           <p:cNvPr id="11" name="">
             <a:extLst xmlns:a="http://schemas.openxmlformats.org/drawingml/2006/main">
               <a:ext uri="{FF2B5EF4-FFF2-40B4-BE49-F238E27FC236}">
-                <a16:creationId xmlns:a16="http://schemas.microsoft.com/office/drawing/2014/main" id="{BA587265-AB61-482A-9916-4DAA74212B4E}"/>
+                <a16:creationId xmlns:a16="http://schemas.microsoft.com/office/drawing/2014/main" id="{AD163B75-C479-4B7A-922B-B77DBBC68776}"/>
               </a:ext>
             </a:extLst>
           </p:cNvPr>
@@ -10165,7 +8620,7 @@
                 <a:ea typeface="Malgun Gothic"/>
                 <a:cs typeface="Malgun Gothic"/>
               </a:rPr>
-              <a:t>장소·시간·상황 구조화 → 확인 질문</a:t>
+              <a:t>불편 자유문 → 필드 추출·맥락 질문</a:t>
             </a:r>
           </a:p>
           <a:p xmlns:a="http://schemas.openxmlformats.org/drawingml/2006/main">
@@ -10188,7 +8643,7 @@
                 <a:ea typeface="Malgun Gothic"/>
                 <a:cs typeface="Malgun Gothic"/>
               </a:rPr>
-              <a:t>원문 인용·사용자 확인·보류</a:t>
+              <a:t>출력: 확인한 응답·원문·불편 위치</a:t>
             </a:r>
           </a:p>
         </p:txBody>
@@ -10198,7 +8653,7 @@
           <p:cNvPr id="12" name="">
             <a:extLst xmlns:a="http://schemas.openxmlformats.org/drawingml/2006/main">
               <a:ext uri="{FF2B5EF4-FFF2-40B4-BE49-F238E27FC236}">
-                <a16:creationId xmlns:a16="http://schemas.microsoft.com/office/drawing/2014/main" id="{1C31249E-FAC5-420C-9A5D-A3A70B80BD30}"/>
+                <a16:creationId xmlns:a16="http://schemas.microsoft.com/office/drawing/2014/main" id="{0CB73406-39D8-4F2F-8324-F68D6FB32564}"/>
               </a:ext>
             </a:extLst>
           </p:cNvPr>
@@ -10255,7 +8710,7 @@
           <p:cNvPr id="13" name="">
             <a:extLst xmlns:a="http://schemas.openxmlformats.org/drawingml/2006/main">
               <a:ext uri="{FF2B5EF4-FFF2-40B4-BE49-F238E27FC236}">
-                <a16:creationId xmlns:a16="http://schemas.microsoft.com/office/drawing/2014/main" id="{FCB56DFB-137B-4B2C-A28E-639F71865DF7}"/>
+                <a16:creationId xmlns:a16="http://schemas.microsoft.com/office/drawing/2014/main" id="{980FA245-662B-4405-8241-605E110CDE30}"/>
               </a:ext>
             </a:extLst>
           </p:cNvPr>
@@ -10285,7 +8740,7 @@
           <p:cNvPr id="14" name="">
             <a:extLst xmlns:a="http://schemas.openxmlformats.org/drawingml/2006/main">
               <a:ext uri="{FF2B5EF4-FFF2-40B4-BE49-F238E27FC236}">
-                <a16:creationId xmlns:a16="http://schemas.microsoft.com/office/drawing/2014/main" id="{0F632A90-C837-4DA9-92E3-013F987A0638}"/>
+                <a16:creationId xmlns:a16="http://schemas.microsoft.com/office/drawing/2014/main" id="{3560F29F-06D3-4E51-B01D-D37CCAD26D67}"/>
               </a:ext>
             </a:extLst>
           </p:cNvPr>
@@ -10332,7 +8787,7 @@
                 <a:ea typeface="Malgun Gothic"/>
                 <a:cs typeface="Malgun Gothic"/>
               </a:rPr>
-              <a:t>근거 기록 → 현장조사 요청서</a:t>
+              <a:t>건물별 기록 → 현장조사 요청서</a:t>
             </a:r>
           </a:p>
         </p:txBody>
@@ -10342,7 +8797,7 @@
           <p:cNvPr id="15" name="">
             <a:extLst xmlns:a="http://schemas.openxmlformats.org/drawingml/2006/main">
               <a:ext uri="{FF2B5EF4-FFF2-40B4-BE49-F238E27FC236}">
-                <a16:creationId xmlns:a16="http://schemas.microsoft.com/office/drawing/2014/main" id="{0E2E2E60-8E96-44F0-9532-4AA92957B35C}"/>
+                <a16:creationId xmlns:a16="http://schemas.microsoft.com/office/drawing/2014/main" id="{DCAA7717-0F20-4C89-B802-3A9433703E5B}"/>
               </a:ext>
             </a:extLst>
           </p:cNvPr>
@@ -10389,7 +8844,7 @@
                 <a:ea typeface="Malgun Gothic"/>
                 <a:cs typeface="Malgun Gothic"/>
               </a:rPr>
-              <a:t>확인 사실   공개자료와 검사 결과</a:t>
+              <a:t>건물 정보   특성·자료 출처·분석 조건</a:t>
             </a:r>
           </a:p>
           <a:p xmlns:a="http://schemas.openxmlformats.org/drawingml/2006/main">
@@ -10412,7 +8867,7 @@
                 <a:ea typeface="Malgun Gothic"/>
                 <a:cs typeface="Malgun Gothic"/>
               </a:rPr>
-              <a:t>이용자 진술   응답과 확인 상태</a:t>
+              <a:t>불편 기록   장소·시간·증상·이용 상황</a:t>
             </a:r>
           </a:p>
           <a:p xmlns:a="http://schemas.openxmlformats.org/drawingml/2006/main">
@@ -10435,7 +8890,7 @@
                 <a:ea typeface="Malgun Gothic"/>
                 <a:cs typeface="Malgun Gothic"/>
               </a:rPr>
-              <a:t>점검 가설   원인 후보와 필요한 증거</a:t>
+              <a:t>개선 후보   연결 이유와 점검 항목</a:t>
             </a:r>
           </a:p>
           <a:p xmlns:a="http://schemas.openxmlformats.org/drawingml/2006/main">
@@ -10458,7 +8913,7 @@
                 <a:ea typeface="Malgun Gothic"/>
                 <a:cs typeface="Malgun Gothic"/>
               </a:rPr>
-              <a:t>보류   누락·모순·데이터 범위 밖</a:t>
+              <a:t>조사 요청   담당자 확인·PDF 저장</a:t>
             </a:r>
           </a:p>
         </p:txBody>
@@ -10468,7 +8923,7 @@
           <p:cNvPr id="16" name="">
             <a:extLst xmlns:a="http://schemas.openxmlformats.org/drawingml/2006/main">
               <a:ext uri="{FF2B5EF4-FFF2-40B4-BE49-F238E27FC236}">
-                <a16:creationId xmlns:a16="http://schemas.microsoft.com/office/drawing/2014/main" id="{D522FC4F-B69C-43EF-855C-F39DB85C048C}"/>
+                <a16:creationId xmlns:a16="http://schemas.microsoft.com/office/drawing/2014/main" id="{A28B2FB2-D7B6-4300-8B31-3BF62E777B60}"/>
               </a:ext>
             </a:extLst>
           </p:cNvPr>
@@ -10515,7 +8970,7 @@
                 <a:ea typeface="Malgun Gothic"/>
                 <a:cs typeface="Malgun Gothic"/>
               </a:rPr>
-              <a:t>숫자·조건 검사와 필수 항목 확인은 규칙으로 처리한다. AI 결과는 사용자가 확인한다.</a:t>
+              <a:t>같은 건물 ID를 기준으로 데이터·응답·후보·요청서를 묶어 근거를 이어간다.</a:t>
             </a:r>
           </a:p>
         </p:txBody>
@@ -10523,7 +8978,7 @@
     </p:spTree>
     <p:extLst>
       <p:ext uri="{BB962C8B-B14F-4D97-AF65-F5344CB8AC3E}">
-        <p14:creationId xmlns:p14="http://schemas.microsoft.com/office/powerpoint/2010/main" val="1778515984"/>
+        <p14:creationId xmlns:p14="http://schemas.microsoft.com/office/powerpoint/2010/main" val="315726007"/>
       </p:ext>
     </p:extLst>
   </p:cSld>
@@ -10554,7 +9009,7 @@
           <p:cNvPr id="13" name="">
             <a:extLst xmlns:a="http://schemas.openxmlformats.org/drawingml/2006/main">
               <a:ext uri="{FF2B5EF4-FFF2-40B4-BE49-F238E27FC236}">
-                <a16:creationId xmlns:a16="http://schemas.microsoft.com/office/drawing/2014/main" id="{435945AB-0D91-434C-A963-7301E1B19303}"/>
+                <a16:creationId xmlns:a16="http://schemas.microsoft.com/office/drawing/2014/main" id="{B7912ED8-4BD9-4473-9C32-5141FF46D725}"/>
               </a:ext>
             </a:extLst>
           </p:cNvPr>
@@ -10584,7 +9039,7 @@
           <p:cNvPr id="2" name="">
             <a:extLst xmlns:a="http://schemas.openxmlformats.org/drawingml/2006/main">
               <a:ext uri="{FF2B5EF4-FFF2-40B4-BE49-F238E27FC236}">
-                <a16:creationId xmlns:a16="http://schemas.microsoft.com/office/drawing/2014/main" id="{3FFE75BE-85AD-45D1-814E-8C92E12B3728}"/>
+                <a16:creationId xmlns:a16="http://schemas.microsoft.com/office/drawing/2014/main" id="{0F3E291F-3324-4472-A7F8-FE90E0190F5A}"/>
               </a:ext>
             </a:extLst>
           </p:cNvPr>
@@ -10631,7 +9086,7 @@
                 <a:ea typeface="Malgun Gothic"/>
                 <a:cs typeface="Malgun Gothic"/>
               </a:rPr>
-              <a:t>AI는 조건 관계 학습과 불편 표현의 구조화를 맡는다</a:t>
+              <a:t>회귀 모델과 LLM이 서로 다른 문제를 맡는다</a:t>
             </a:r>
           </a:p>
         </p:txBody>
@@ -10641,7 +9096,7 @@
           <p:cNvPr id="3" name="">
             <a:extLst xmlns:a="http://schemas.openxmlformats.org/drawingml/2006/main">
               <a:ext uri="{FF2B5EF4-FFF2-40B4-BE49-F238E27FC236}">
-                <a16:creationId xmlns:a16="http://schemas.microsoft.com/office/drawing/2014/main" id="{41FF84CA-28B4-40EE-8AE7-5BA54170A190}"/>
+                <a16:creationId xmlns:a16="http://schemas.microsoft.com/office/drawing/2014/main" id="{2142C0D4-CFBD-4A7E-94C8-730B5F63EA53}"/>
               </a:ext>
             </a:extLst>
           </p:cNvPr>
@@ -10671,7 +9126,7 @@
           <p:cNvPr id="4" name="">
             <a:extLst xmlns:a="http://schemas.openxmlformats.org/drawingml/2006/main">
               <a:ext uri="{FF2B5EF4-FFF2-40B4-BE49-F238E27FC236}">
-                <a16:creationId xmlns:a16="http://schemas.microsoft.com/office/drawing/2014/main" id="{8609A7D6-7438-4C89-A611-548B4342FC40}"/>
+                <a16:creationId xmlns:a16="http://schemas.microsoft.com/office/drawing/2014/main" id="{3A2372E5-9BA3-4A17-A453-EA7B1A3ACF5A}"/>
               </a:ext>
             </a:extLst>
           </p:cNvPr>
@@ -10728,7 +9183,7 @@
           <p:cNvPr id="5" name="">
             <a:extLst xmlns:a="http://schemas.openxmlformats.org/drawingml/2006/main">
               <a:ext uri="{FF2B5EF4-FFF2-40B4-BE49-F238E27FC236}">
-                <a16:creationId xmlns:a16="http://schemas.microsoft.com/office/drawing/2014/main" id="{F952EE44-920B-4FF5-8180-DBD25E1CEB3A}"/>
+                <a16:creationId xmlns:a16="http://schemas.microsoft.com/office/drawing/2014/main" id="{9FB339F2-49C8-4BE9-B283-5F2BA4BF4504}"/>
               </a:ext>
             </a:extLst>
           </p:cNvPr>
@@ -10785,7 +9240,7 @@
           <p:cNvPr id="6" name="">
             <a:extLst xmlns:a="http://schemas.openxmlformats.org/drawingml/2006/main">
               <a:ext uri="{FF2B5EF4-FFF2-40B4-BE49-F238E27FC236}">
-                <a16:creationId xmlns:a16="http://schemas.microsoft.com/office/drawing/2014/main" id="{82EE8B39-A92B-4AEC-8AB4-BA85EBB6D32C}"/>
+                <a16:creationId xmlns:a16="http://schemas.microsoft.com/office/drawing/2014/main" id="{DC455145-A525-4D03-9867-61FACF91967C}"/>
               </a:ext>
             </a:extLst>
           </p:cNvPr>
@@ -10832,7 +9287,7 @@
                 <a:ea typeface="Malgun Gothic"/>
                 <a:cs typeface="Malgun Gothic"/>
               </a:rPr>
-              <a:t>표형 회귀 모델 · 핵심</a:t>
+              <a:t>에너지 비교 · 표형 회귀</a:t>
             </a:r>
           </a:p>
         </p:txBody>
@@ -10842,7 +9297,7 @@
           <p:cNvPr id="7" name="">
             <a:extLst xmlns:a="http://schemas.openxmlformats.org/drawingml/2006/main">
               <a:ext uri="{FF2B5EF4-FFF2-40B4-BE49-F238E27FC236}">
-                <a16:creationId xmlns:a16="http://schemas.microsoft.com/office/drawing/2014/main" id="{6709B905-26CF-49CF-A286-3D9D3F90974E}"/>
+                <a16:creationId xmlns:a16="http://schemas.microsoft.com/office/drawing/2014/main" id="{BBE4FBD2-C6F9-495F-ACC0-20FA02C4AA2F}"/>
               </a:ext>
             </a:extLst>
           </p:cNvPr>
@@ -10889,7 +9344,7 @@
                 <a:ea typeface="Malgun Gothic"/>
                 <a:cs typeface="Malgun Gothic"/>
               </a:rPr>
-              <a:t>입력: 용도·지역·면적·연도·층수</a:t>
+              <a:t>입력: 지역·용도·면적·연도·층수</a:t>
             </a:r>
           </a:p>
           <a:p xmlns:a="http://schemas.openxmlformats.org/drawingml/2006/main">
@@ -10912,7 +9367,7 @@
                 <a:ea typeface="Malgun Gothic"/>
                 <a:cs typeface="Malgun Gothic"/>
               </a:rPr>
-              <a:t>방법: 비선형 회귀와 집계 중앙값 비교</a:t>
+              <a:t>처리: 조건 관계 학습·비교군 집계</a:t>
             </a:r>
           </a:p>
           <a:p xmlns:a="http://schemas.openxmlformats.org/drawingml/2006/main">
@@ -10935,7 +9390,7 @@
                 <a:ea typeface="Malgun Gothic"/>
                 <a:cs typeface="Malgun Gothic"/>
               </a:rPr>
-              <a:t>출력: 조건별 참고 범위·비교 신호</a:t>
+              <a:t>출력: 건물 특성을 반영한 사용 수준</a:t>
             </a:r>
           </a:p>
           <a:p xmlns:a="http://schemas.openxmlformats.org/drawingml/2006/main">
@@ -10958,7 +9413,7 @@
                 <a:ea typeface="Malgun Gothic"/>
                 <a:cs typeface="Malgun Gothic"/>
               </a:rPr>
-              <a:t>검증: 건물 그룹 분리 MAE·구간 커버리지</a:t>
+              <a:t>품질 관리: 보고 누락·단위·비교 조건</a:t>
             </a:r>
           </a:p>
         </p:txBody>
@@ -10968,7 +9423,7 @@
           <p:cNvPr id="8" name="">
             <a:extLst xmlns:a="http://schemas.openxmlformats.org/drawingml/2006/main">
               <a:ext uri="{FF2B5EF4-FFF2-40B4-BE49-F238E27FC236}">
-                <a16:creationId xmlns:a16="http://schemas.microsoft.com/office/drawing/2014/main" id="{C921510A-3610-4DB9-9774-D9936857048A}"/>
+                <a16:creationId xmlns:a16="http://schemas.microsoft.com/office/drawing/2014/main" id="{04FBA644-A918-4F4B-9509-6913B95383F9}"/>
               </a:ext>
             </a:extLst>
           </p:cNvPr>
@@ -11015,7 +9470,7 @@
                 <a:ea typeface="Malgun Gothic"/>
                 <a:cs typeface="Malgun Gothic"/>
               </a:rPr>
-              <a:t>사전학습 LLM · 확장</a:t>
+              <a:t>불편 문진 · 사전학습 LLM</a:t>
             </a:r>
           </a:p>
         </p:txBody>
@@ -11025,7 +9480,7 @@
           <p:cNvPr id="9" name="">
             <a:extLst xmlns:a="http://schemas.openxmlformats.org/drawingml/2006/main">
               <a:ext uri="{FF2B5EF4-FFF2-40B4-BE49-F238E27FC236}">
-                <a16:creationId xmlns:a16="http://schemas.microsoft.com/office/drawing/2014/main" id="{67FD3690-2160-487B-93BF-FE180D31891F}"/>
+                <a16:creationId xmlns:a16="http://schemas.microsoft.com/office/drawing/2014/main" id="{4779C65B-D90E-4CD5-8ABD-AA8EA1719997}"/>
               </a:ext>
             </a:extLst>
           </p:cNvPr>
@@ -11072,7 +9527,7 @@
                 <a:ea typeface="Malgun Gothic"/>
                 <a:cs typeface="Malgun Gothic"/>
               </a:rPr>
-              <a:t>입력: 동의받은 불편 자유문·확인 응답</a:t>
+              <a:t>입력: 불편 자유문·후속 응답</a:t>
             </a:r>
           </a:p>
           <a:p xmlns:a="http://schemas.openxmlformats.org/drawingml/2006/main">
@@ -11095,7 +9550,7 @@
                 <a:ea typeface="Malgun Gothic"/>
                 <a:cs typeface="Malgun Gothic"/>
               </a:rPr>
-              <a:t>방법: 정해진 필드 추출·추가 질문·근거 요약</a:t>
+              <a:t>처리: 구조화 추출·맥락 질문·근거 요약</a:t>
             </a:r>
           </a:p>
           <a:p xmlns:a="http://schemas.openxmlformats.org/drawingml/2006/main">
@@ -11118,7 +9573,7 @@
                 <a:ea typeface="Malgun Gothic"/>
                 <a:cs typeface="Malgun Gothic"/>
               </a:rPr>
-              <a:t>출력: 인용이 있는 기록·조사 요청서 초안</a:t>
+              <a:t>출력: 불편 기록·추가 질문·요청서 초안</a:t>
             </a:r>
           </a:p>
           <a:p xmlns:a="http://schemas.openxmlformats.org/drawingml/2006/main">
@@ -11141,7 +9596,7 @@
                 <a:ea typeface="Malgun Gothic"/>
                 <a:cs typeface="Malgun Gothic"/>
               </a:rPr>
-              <a:t>검증: 추출 일치·모순 처리·근거 없는 문장</a:t>
+              <a:t>품질 관리: 원문 연결·응답 확인·필수 항목</a:t>
             </a:r>
           </a:p>
         </p:txBody>
@@ -11151,7 +9606,7 @@
           <p:cNvPr id="10" name="">
             <a:extLst xmlns:a="http://schemas.openxmlformats.org/drawingml/2006/main">
               <a:ext uri="{FF2B5EF4-FFF2-40B4-BE49-F238E27FC236}">
-                <a16:creationId xmlns:a16="http://schemas.microsoft.com/office/drawing/2014/main" id="{39BA6DA5-90A0-4857-B0B8-BAF9312975F0}"/>
+                <a16:creationId xmlns:a16="http://schemas.microsoft.com/office/drawing/2014/main" id="{E6FCE461-BDE1-4EC3-899D-B2652455A870}"/>
               </a:ext>
             </a:extLst>
           </p:cNvPr>
@@ -11181,7 +9636,7 @@
           <p:cNvPr id="11" name="">
             <a:extLst xmlns:a="http://schemas.openxmlformats.org/drawingml/2006/main">
               <a:ext uri="{FF2B5EF4-FFF2-40B4-BE49-F238E27FC236}">
-                <a16:creationId xmlns:a16="http://schemas.microsoft.com/office/drawing/2014/main" id="{200EC5D6-AB50-47D5-AEA1-5D2485D83B15}"/>
+                <a16:creationId xmlns:a16="http://schemas.microsoft.com/office/drawing/2014/main" id="{4D6A172A-ECE2-437B-AAF8-4D83E253AF53}"/>
               </a:ext>
             </a:extLst>
           </p:cNvPr>
@@ -11210,7 +9665,7 @@
           <a:lstStyle xmlns:a="http://schemas.openxmlformats.org/drawingml/2006/main"/>
           <a:p xmlns:a="http://schemas.openxmlformats.org/drawingml/2006/main">
             <a:pPr>
-              <a:defRPr sz="1875" b="1">
+              <a:defRPr sz="2100" b="1">
                 <a:solidFill>
                   <a:srgbClr val="127452"/>
                 </a:solidFill>
@@ -11220,7 +9675,7 @@
               </a:defRPr>
             </a:pPr>
             <a:r>
-              <a:rPr sz="1875" b="1">
+              <a:rPr sz="2100" b="1">
                 <a:solidFill>
                   <a:srgbClr val="127452"/>
                 </a:solidFill>
@@ -11228,7 +9683,7 @@
                 <a:ea typeface="Malgun Gothic"/>
                 <a:cs typeface="Malgun Gothic"/>
               </a:rPr>
-              <a:t>AI가 계산하거나 확정하지 않는 것</a:t>
+              <a:t>수치 분석은 모델로, 생활 속 표현은 LLM으로</a:t>
             </a:r>
           </a:p>
         </p:txBody>
@@ -11238,7 +9693,7 @@
           <p:cNvPr id="12" name="">
             <a:extLst xmlns:a="http://schemas.openxmlformats.org/drawingml/2006/main">
               <a:ext uri="{FF2B5EF4-FFF2-40B4-BE49-F238E27FC236}">
-                <a16:creationId xmlns:a16="http://schemas.microsoft.com/office/drawing/2014/main" id="{32E3C459-9884-4AC3-B52C-026454C1D36C}"/>
+                <a16:creationId xmlns:a16="http://schemas.microsoft.com/office/drawing/2014/main" id="{DAF8A367-0939-48D1-92E9-E8D9E8F61872}"/>
               </a:ext>
             </a:extLst>
           </p:cNvPr>
@@ -11267,25 +9722,25 @@
           <a:lstStyle xmlns:a="http://schemas.openxmlformats.org/drawingml/2006/main"/>
           <a:p xmlns:a="http://schemas.openxmlformats.org/drawingml/2006/main">
             <a:pPr>
-              <a:defRPr sz="1725" b="0">
-                <a:solidFill>
-                  <a:srgbClr val="183329"/>
-                </a:solidFill>
-                <a:latin typeface="Malgun Gothic"/>
-                <a:ea typeface="Malgun Gothic"/>
-                <a:cs typeface="Malgun Gothic"/>
-              </a:defRPr>
-            </a:pPr>
-            <a:r>
-              <a:rPr sz="1725" b="0">
-                <a:solidFill>
-                  <a:srgbClr val="183329"/>
-                </a:solidFill>
-                <a:latin typeface="Malgun Gothic"/>
-                <a:ea typeface="Malgun Gothic"/>
-                <a:cs typeface="Malgun Gothic"/>
-              </a:rPr>
-              <a:t>공사 원인 · 공간별 소비량 · 검증되지 않은 절감률. LLM 실패 시 구조화 문진으로 이어간다.</a:t>
+              <a:defRPr sz="1800" b="0">
+                <a:solidFill>
+                  <a:srgbClr val="183329"/>
+                </a:solidFill>
+                <a:latin typeface="Malgun Gothic"/>
+                <a:ea typeface="Malgun Gothic"/>
+                <a:cs typeface="Malgun Gothic"/>
+              </a:defRPr>
+            </a:pPr>
+            <a:r>
+              <a:rPr sz="1800" b="0">
+                <a:solidFill>
+                  <a:srgbClr val="183329"/>
+                </a:solidFill>
+                <a:latin typeface="Malgun Gothic"/>
+                <a:ea typeface="Malgun Gothic"/>
+                <a:cs typeface="Malgun Gothic"/>
+              </a:rPr>
+              <a:t>정해진 필드와 점검 규칙을 연결해 담당자가 활용할 수 있는 건물별 기록을 구성한다.</a:t>
             </a:r>
           </a:p>
         </p:txBody>
@@ -11293,7 +9748,7 @@
     </p:spTree>
     <p:extLst>
       <p:ext uri="{BB962C8B-B14F-4D97-AF65-F5344CB8AC3E}">
-        <p14:creationId xmlns:p14="http://schemas.microsoft.com/office/powerpoint/2010/main" val="1509918519"/>
+        <p14:creationId xmlns:p14="http://schemas.microsoft.com/office/powerpoint/2010/main" val="2065554733"/>
       </p:ext>
     </p:extLst>
   </p:cSld>
@@ -11321,10 +9776,10 @@
       </p:grpSpPr>
       <p:sp>
         <p:nvSpPr>
-          <p:cNvPr id="17" name="">
-            <a:extLst xmlns:a="http://schemas.openxmlformats.org/drawingml/2006/main">
-              <a:ext uri="{FF2B5EF4-FFF2-40B4-BE49-F238E27FC236}">
-                <a16:creationId xmlns:a16="http://schemas.microsoft.com/office/drawing/2014/main" id="{DB32CA0F-5C6A-4EFE-9193-9042327FABEE}"/>
+          <p:cNvPr id="12" name="">
+            <a:extLst xmlns:a="http://schemas.openxmlformats.org/drawingml/2006/main">
+              <a:ext uri="{FF2B5EF4-FFF2-40B4-BE49-F238E27FC236}">
+                <a16:creationId xmlns:a16="http://schemas.microsoft.com/office/drawing/2014/main" id="{D6581240-C057-4BB5-A80D-F8FD0C1E5932}"/>
               </a:ext>
             </a:extLst>
           </p:cNvPr>
@@ -11354,7 +9809,7 @@
           <p:cNvPr id="2" name="">
             <a:extLst xmlns:a="http://schemas.openxmlformats.org/drawingml/2006/main">
               <a:ext uri="{FF2B5EF4-FFF2-40B4-BE49-F238E27FC236}">
-                <a16:creationId xmlns:a16="http://schemas.microsoft.com/office/drawing/2014/main" id="{9EEBC388-5A7B-4279-8875-5552356AABE9}"/>
+                <a16:creationId xmlns:a16="http://schemas.microsoft.com/office/drawing/2014/main" id="{06C4DD40-EEA4-41AA-86B5-AB843CB5ACEF}"/>
               </a:ext>
             </a:extLst>
           </p:cNvPr>
@@ -11401,7 +9856,7 @@
                 <a:ea typeface="Malgun Gothic"/>
                 <a:cs typeface="Malgun Gothic"/>
               </a:rPr>
-              <a:t>화면 시안 · 불편을 조사 가능한 기록으로 바꾸기</a:t>
+              <a:t>화면 구성안 · 불편에서 개선 후보로 이어지는 경험</a:t>
             </a:r>
           </a:p>
         </p:txBody>
@@ -11411,7 +9866,7 @@
           <p:cNvPr id="3" name="">
             <a:extLst xmlns:a="http://schemas.openxmlformats.org/drawingml/2006/main">
               <a:ext uri="{FF2B5EF4-FFF2-40B4-BE49-F238E27FC236}">
-                <a16:creationId xmlns:a16="http://schemas.microsoft.com/office/drawing/2014/main" id="{BE9AD99B-2F94-4220-915D-9CBCFD5081EE}"/>
+                <a16:creationId xmlns:a16="http://schemas.microsoft.com/office/drawing/2014/main" id="{032E53E5-5E98-4591-A958-D7117323EC24}"/>
               </a:ext>
             </a:extLst>
           </p:cNvPr>
@@ -11441,7 +9896,7 @@
           <p:cNvPr id="4" name="">
             <a:extLst xmlns:a="http://schemas.openxmlformats.org/drawingml/2006/main">
               <a:ext uri="{FF2B5EF4-FFF2-40B4-BE49-F238E27FC236}">
-                <a16:creationId xmlns:a16="http://schemas.microsoft.com/office/drawing/2014/main" id="{4D555691-63EC-4CA2-A018-01FB0F16702F}"/>
+                <a16:creationId xmlns:a16="http://schemas.microsoft.com/office/drawing/2014/main" id="{A51E62B0-0DF6-41E2-9249-39860132342D}"/>
               </a:ext>
             </a:extLst>
           </p:cNvPr>
@@ -11498,7 +9953,7 @@
           <p:cNvPr id="5" name="">
             <a:extLst xmlns:a="http://schemas.openxmlformats.org/drawingml/2006/main">
               <a:ext uri="{FF2B5EF4-FFF2-40B4-BE49-F238E27FC236}">
-                <a16:creationId xmlns:a16="http://schemas.microsoft.com/office/drawing/2014/main" id="{ACBA3910-A32F-4F57-B791-9B7C95A16DB2}"/>
+                <a16:creationId xmlns:a16="http://schemas.microsoft.com/office/drawing/2014/main" id="{39A5CE7D-EBB0-4505-BF3D-1CD86A78DCB0}"/>
               </a:ext>
             </a:extLst>
           </p:cNvPr>
@@ -11555,7 +10010,7 @@
           <p:cNvPr id="6" name="">
             <a:extLst xmlns:a="http://schemas.openxmlformats.org/drawingml/2006/main">
               <a:ext uri="{FF2B5EF4-FFF2-40B4-BE49-F238E27FC236}">
-                <a16:creationId xmlns:a16="http://schemas.microsoft.com/office/drawing/2014/main" id="{D1C40C08-C697-43EE-B823-50D3C5FC5A07}"/>
+                <a16:creationId xmlns:a16="http://schemas.microsoft.com/office/drawing/2014/main" id="{9F44EA20-5AB3-4DC8-BDD5-D7E9F7AC31D1}"/>
               </a:ext>
             </a:extLst>
           </p:cNvPr>
@@ -11602,126 +10057,166 @@
                 <a:ea typeface="Malgun Gothic"/>
                 <a:cs typeface="Malgun Gothic"/>
               </a:rPr>
-              <a:t>화면 구성 예시: 가상 도서관 응답. 실제 현장 조사·모델 결과가 아님.</a:t>
-            </a:r>
-          </a:p>
-        </p:txBody>
-      </p:sp>
-      <p:sp>
-        <p:nvSpPr>
-          <p:cNvPr id="7" name="">
-            <a:extLst xmlns:a="http://schemas.openxmlformats.org/drawingml/2006/main">
-              <a:ext uri="{FF2B5EF4-FFF2-40B4-BE49-F238E27FC236}">
-                <a16:creationId xmlns:a16="http://schemas.microsoft.com/office/drawing/2014/main" id="{83843FA2-C6EA-490B-95F1-A25CEC7FEEFA}"/>
-              </a:ext>
-            </a:extLst>
-          </p:cNvPr>
-          <p:cNvSpPr>
-            <a:spLocks xmlns:a="http://schemas.openxmlformats.org/drawingml/2006/main" noGrp="1"/>
-          </p:cNvSpPr>
-          <p:nvPr/>
-        </p:nvSpPr>
-        <p:spPr>
-          <a:xfrm xmlns:a="http://schemas.openxmlformats.org/drawingml/2006/main">
-            <a:off x="733425" y="1362075"/>
-            <a:ext cx="10534650" cy="4191000"/>
-          </a:xfrm>
-          <a:prstGeom xmlns:a="http://schemas.openxmlformats.org/drawingml/2006/main" prst="rect">
-            <a:avLst/>
-          </a:prstGeom>
-          <a:solidFill xmlns:a="http://schemas.openxmlformats.org/drawingml/2006/main">
-            <a:srgbClr val="FFFFFF"/>
-          </a:solidFill>
-          <a:ln xmlns:a="http://schemas.openxmlformats.org/drawingml/2006/main" w="14288">
-            <a:solidFill>
-              <a:srgbClr val="CADBCE"/>
-            </a:solidFill>
-          </a:ln>
-        </p:spPr>
-      </p:sp>
+              <a:t>서비스 화면 구성안 | 공공도서관의 오후 창가 더위 사례</a:t>
+            </a:r>
+          </a:p>
+        </p:txBody>
+      </p:sp>
+      <p:pic>
+        <p:nvPicPr>
+          <p:cNvPr id="18" name=""/>
+          <p:cNvPicPr>
+            <a:picLocks xmlns:a="http://schemas.openxmlformats.org/drawingml/2006/main" noChangeAspect="1"/>
+          </p:cNvPicPr>
+          <p:nvPr/>
+        </p:nvPicPr>
+        <p:blipFill>
+          <a:blip xmlns:r="http://schemas.openxmlformats.org/officeDocument/2006/relationships" xmlns:a="http://schemas.openxmlformats.org/drawingml/2006/main" r:embed="R2a8f40583586483f"/>
+          <a:stretch xmlns:a="http://schemas.openxmlformats.org/drawingml/2006/main"/>
+        </p:blipFill>
+        <p:spPr>
+          <a:xfrm xmlns:a="http://schemas.openxmlformats.org/drawingml/2006/main">
+            <a:off x="742950" y="1352849"/>
+            <a:ext cx="7953375" cy="4476152"/>
+          </a:xfrm>
+          <a:prstGeom xmlns:a="http://schemas.openxmlformats.org/drawingml/2006/main" prst="rect">
+            <a:avLst/>
+          </a:prstGeom>
+        </p:spPr>
+      </p:pic>
       <p:sp>
         <p:nvSpPr>
           <p:cNvPr id="8" name="">
             <a:extLst xmlns:a="http://schemas.openxmlformats.org/drawingml/2006/main">
               <a:ext uri="{FF2B5EF4-FFF2-40B4-BE49-F238E27FC236}">
-                <a16:creationId xmlns:a16="http://schemas.microsoft.com/office/drawing/2014/main" id="{5B93BEDD-DE2D-4C9A-8996-F240D4C08DAE}"/>
-              </a:ext>
-            </a:extLst>
-          </p:cNvPr>
-          <p:cNvSpPr>
-            <a:spLocks xmlns:a="http://schemas.openxmlformats.org/drawingml/2006/main" noGrp="1"/>
-          </p:cNvSpPr>
-          <p:nvPr/>
-        </p:nvSpPr>
-        <p:spPr>
-          <a:xfrm xmlns:a="http://schemas.openxmlformats.org/drawingml/2006/main">
-            <a:off x="733425" y="1362075"/>
-            <a:ext cx="2571750" cy="4191000"/>
-          </a:xfrm>
-          <a:prstGeom xmlns:a="http://schemas.openxmlformats.org/drawingml/2006/main" prst="rect">
-            <a:avLst/>
-          </a:prstGeom>
-          <a:solidFill xmlns:a="http://schemas.openxmlformats.org/drawingml/2006/main">
-            <a:srgbClr val="183329"/>
-          </a:solidFill>
-          <a:ln xmlns:a="http://schemas.openxmlformats.org/drawingml/2006/main" w="0">
-            <a:noFill/>
-          </a:ln>
-        </p:spPr>
+                <a16:creationId xmlns:a16="http://schemas.microsoft.com/office/drawing/2014/main" id="{D46D6D48-FF1B-43B6-9DC0-83B13ED82A9C}"/>
+              </a:ext>
+            </a:extLst>
+          </p:cNvPr>
+          <p:cNvSpPr>
+            <a:spLocks xmlns:a="http://schemas.openxmlformats.org/drawingml/2006/main" noGrp="1"/>
+          </p:cNvSpPr>
+          <p:nvPr/>
+        </p:nvSpPr>
+        <p:spPr>
+          <a:xfrm xmlns:a="http://schemas.openxmlformats.org/drawingml/2006/main">
+            <a:off x="9077325" y="1562100"/>
+            <a:ext cx="2286000" cy="361950"/>
+          </a:xfrm>
+          <a:prstGeom xmlns:a="http://schemas.openxmlformats.org/drawingml/2006/main" prst="rect">
+            <a:avLst/>
+          </a:prstGeom>
+          <a:noFill xmlns:a="http://schemas.openxmlformats.org/drawingml/2006/main"/>
+          <a:ln xmlns:a="http://schemas.openxmlformats.org/drawingml/2006/main" w="0">
+            <a:noFill/>
+          </a:ln>
+        </p:spPr>
+        <p:txBody>
+          <a:bodyPr xmlns:a="http://schemas.openxmlformats.org/drawingml/2006/main">
+            <a:noAutofit/>
+          </a:bodyPr>
+          <a:lstStyle xmlns:a="http://schemas.openxmlformats.org/drawingml/2006/main"/>
+          <a:p xmlns:a="http://schemas.openxmlformats.org/drawingml/2006/main">
+            <a:pPr>
+              <a:defRPr sz="1875" b="1">
+                <a:solidFill>
+                  <a:srgbClr val="127452"/>
+                </a:solidFill>
+                <a:latin typeface="Malgun Gothic"/>
+                <a:ea typeface="Malgun Gothic"/>
+                <a:cs typeface="Malgun Gothic"/>
+              </a:defRPr>
+            </a:pPr>
+            <a:r>
+              <a:rPr sz="1875" b="1">
+                <a:solidFill>
+                  <a:srgbClr val="127452"/>
+                </a:solidFill>
+                <a:latin typeface="Malgun Gothic"/>
+                <a:ea typeface="Malgun Gothic"/>
+                <a:cs typeface="Malgun Gothic"/>
+              </a:rPr>
+              <a:t>이용자 표현</a:t>
+            </a:r>
+          </a:p>
+        </p:txBody>
       </p:sp>
       <p:sp>
         <p:nvSpPr>
           <p:cNvPr id="9" name="">
             <a:extLst xmlns:a="http://schemas.openxmlformats.org/drawingml/2006/main">
               <a:ext uri="{FF2B5EF4-FFF2-40B4-BE49-F238E27FC236}">
-                <a16:creationId xmlns:a16="http://schemas.microsoft.com/office/drawing/2014/main" id="{05867670-C14E-414B-8A8E-174D34B3E071}"/>
-              </a:ext>
-            </a:extLst>
-          </p:cNvPr>
-          <p:cNvSpPr>
-            <a:spLocks xmlns:a="http://schemas.openxmlformats.org/drawingml/2006/main" noGrp="1"/>
-          </p:cNvSpPr>
-          <p:nvPr/>
-        </p:nvSpPr>
-        <p:spPr>
-          <a:xfrm xmlns:a="http://schemas.openxmlformats.org/drawingml/2006/main">
-            <a:off x="923925" y="1562100"/>
-            <a:ext cx="2228850" cy="419100"/>
-          </a:xfrm>
-          <a:prstGeom xmlns:a="http://schemas.openxmlformats.org/drawingml/2006/main" prst="rect">
-            <a:avLst/>
-          </a:prstGeom>
-          <a:noFill xmlns:a="http://schemas.openxmlformats.org/drawingml/2006/main"/>
-          <a:ln xmlns:a="http://schemas.openxmlformats.org/drawingml/2006/main" w="0">
-            <a:noFill/>
-          </a:ln>
-        </p:spPr>
-        <p:txBody>
-          <a:bodyPr xmlns:a="http://schemas.openxmlformats.org/drawingml/2006/main">
-            <a:noAutofit/>
-          </a:bodyPr>
-          <a:lstStyle xmlns:a="http://schemas.openxmlformats.org/drawingml/2006/main"/>
-          <a:p xmlns:a="http://schemas.openxmlformats.org/drawingml/2006/main">
-            <a:pPr>
-              <a:defRPr sz="2175" b="1">
-                <a:solidFill>
-                  <a:srgbClr val="FFFFFF"/>
-                </a:solidFill>
-                <a:latin typeface="Malgun Gothic"/>
-                <a:ea typeface="Malgun Gothic"/>
-                <a:cs typeface="Malgun Gothic"/>
-              </a:defRPr>
-            </a:pPr>
-            <a:r>
-              <a:rPr sz="2175" b="1">
-                <a:solidFill>
-                  <a:srgbClr val="FFFFFF"/>
-                </a:solidFill>
-                <a:latin typeface="Malgun Gothic"/>
-                <a:ea typeface="Malgun Gothic"/>
-                <a:cs typeface="Malgun Gothic"/>
-              </a:rPr>
-              <a:t>GreenLoop</a:t>
+                <a16:creationId xmlns:a16="http://schemas.microsoft.com/office/drawing/2014/main" id="{EAECD9E7-C186-44B8-9DFF-3C9E039A8938}"/>
+              </a:ext>
+            </a:extLst>
+          </p:cNvPr>
+          <p:cNvSpPr>
+            <a:spLocks xmlns:a="http://schemas.openxmlformats.org/drawingml/2006/main" noGrp="1"/>
+          </p:cNvSpPr>
+          <p:nvPr/>
+        </p:nvSpPr>
+        <p:spPr>
+          <a:xfrm xmlns:a="http://schemas.openxmlformats.org/drawingml/2006/main">
+            <a:off x="9077325" y="2000250"/>
+            <a:ext cx="2286000" cy="971550"/>
+          </a:xfrm>
+          <a:prstGeom xmlns:a="http://schemas.openxmlformats.org/drawingml/2006/main" prst="rect">
+            <a:avLst/>
+          </a:prstGeom>
+          <a:noFill xmlns:a="http://schemas.openxmlformats.org/drawingml/2006/main"/>
+          <a:ln xmlns:a="http://schemas.openxmlformats.org/drawingml/2006/main" w="0">
+            <a:noFill/>
+          </a:ln>
+        </p:spPr>
+        <p:txBody>
+          <a:bodyPr xmlns:a="http://schemas.openxmlformats.org/drawingml/2006/main">
+            <a:noAutofit/>
+          </a:bodyPr>
+          <a:lstStyle xmlns:a="http://schemas.openxmlformats.org/drawingml/2006/main"/>
+          <a:p xmlns:a="http://schemas.openxmlformats.org/drawingml/2006/main">
+            <a:pPr>
+              <a:defRPr sz="1575" b="0">
+                <a:solidFill>
+                  <a:srgbClr val="183329"/>
+                </a:solidFill>
+                <a:latin typeface="Malgun Gothic"/>
+                <a:ea typeface="Malgun Gothic"/>
+                <a:cs typeface="Malgun Gothic"/>
+              </a:defRPr>
+            </a:pPr>
+            <a:r>
+              <a:rPr sz="1575" b="0">
+                <a:solidFill>
+                  <a:srgbClr val="183329"/>
+                </a:solidFill>
+                <a:latin typeface="Malgun Gothic"/>
+                <a:ea typeface="Malgun Gothic"/>
+                <a:cs typeface="Malgun Gothic"/>
+              </a:rPr>
+              <a:t>“오후에 창가 자리가</a:t>
+            </a:r>
+          </a:p>
+          <a:p xmlns:a="http://schemas.openxmlformats.org/drawingml/2006/main">
+            <a:pPr>
+              <a:defRPr sz="1575" b="0">
+                <a:solidFill>
+                  <a:srgbClr val="183329"/>
+                </a:solidFill>
+                <a:latin typeface="Malgun Gothic"/>
+                <a:ea typeface="Malgun Gothic"/>
+                <a:cs typeface="Malgun Gothic"/>
+              </a:defRPr>
+            </a:pPr>
+            <a:r>
+              <a:rPr sz="1575" b="0">
+                <a:solidFill>
+                  <a:srgbClr val="183329"/>
+                </a:solidFill>
+                <a:latin typeface="Malgun Gothic"/>
+                <a:ea typeface="Malgun Gothic"/>
+                <a:cs typeface="Malgun Gothic"/>
+              </a:rPr>
+              <a:t>너무 더워요.”</a:t>
             </a:r>
           </a:p>
         </p:txBody>
@@ -11731,174 +10226,54 @@
           <p:cNvPr id="10" name="">
             <a:extLst xmlns:a="http://schemas.openxmlformats.org/drawingml/2006/main">
               <a:ext uri="{FF2B5EF4-FFF2-40B4-BE49-F238E27FC236}">
-                <a16:creationId xmlns:a16="http://schemas.microsoft.com/office/drawing/2014/main" id="{9928C41A-0CD4-4236-A843-F6E5B2C18B7F}"/>
-              </a:ext>
-            </a:extLst>
-          </p:cNvPr>
-          <p:cNvSpPr>
-            <a:spLocks xmlns:a="http://schemas.openxmlformats.org/drawingml/2006/main" noGrp="1"/>
-          </p:cNvSpPr>
-          <p:nvPr/>
-        </p:nvSpPr>
-        <p:spPr>
-          <a:xfrm xmlns:a="http://schemas.openxmlformats.org/drawingml/2006/main">
-            <a:off x="923925" y="2209800"/>
-            <a:ext cx="2143125" cy="2524125"/>
-          </a:xfrm>
-          <a:prstGeom xmlns:a="http://schemas.openxmlformats.org/drawingml/2006/main" prst="rect">
-            <a:avLst/>
-          </a:prstGeom>
-          <a:noFill xmlns:a="http://schemas.openxmlformats.org/drawingml/2006/main"/>
-          <a:ln xmlns:a="http://schemas.openxmlformats.org/drawingml/2006/main" w="0">
-            <a:noFill/>
-          </a:ln>
-        </p:spPr>
-        <p:txBody>
-          <a:bodyPr xmlns:a="http://schemas.openxmlformats.org/drawingml/2006/main">
-            <a:noAutofit/>
-          </a:bodyPr>
-          <a:lstStyle xmlns:a="http://schemas.openxmlformats.org/drawingml/2006/main"/>
-          <a:p xmlns:a="http://schemas.openxmlformats.org/drawingml/2006/main">
-            <a:pPr>
-              <a:defRPr sz="1650" b="0">
-                <a:solidFill>
-                  <a:srgbClr val="E7F4EC"/>
-                </a:solidFill>
-                <a:latin typeface="Malgun Gothic"/>
-                <a:ea typeface="Malgun Gothic"/>
-                <a:cs typeface="Malgun Gothic"/>
-              </a:defRPr>
-            </a:pPr>
-            <a:r>
-              <a:rPr sz="1650" b="0">
-                <a:solidFill>
-                  <a:srgbClr val="E7F4EC"/>
-                </a:solidFill>
-                <a:latin typeface="Malgun Gothic"/>
-                <a:ea typeface="Malgun Gothic"/>
-                <a:cs typeface="Malgun Gothic"/>
-              </a:rPr>
-              <a:t>공공도서관 예시</a:t>
-            </a:r>
-          </a:p>
-          <a:p xmlns:a="http://schemas.openxmlformats.org/drawingml/2006/main">
-            <a:r>
-              <a:t/>
-            </a:r>
-          </a:p>
-          <a:p xmlns:a="http://schemas.openxmlformats.org/drawingml/2006/main">
-            <a:pPr>
-              <a:defRPr sz="1650" b="0">
-                <a:solidFill>
-                  <a:srgbClr val="E7F4EC"/>
-                </a:solidFill>
-                <a:latin typeface="Malgun Gothic"/>
-                <a:ea typeface="Malgun Gothic"/>
-                <a:cs typeface="Malgun Gothic"/>
-              </a:defRPr>
-            </a:pPr>
-            <a:r>
-              <a:rPr sz="1650" b="0">
-                <a:solidFill>
-                  <a:srgbClr val="E7F4EC"/>
-                </a:solidFill>
-                <a:latin typeface="Malgun Gothic"/>
-                <a:ea typeface="Malgun Gothic"/>
-                <a:cs typeface="Malgun Gothic"/>
-              </a:rPr>
-              <a:t>1  자료 확인</a:t>
-            </a:r>
-          </a:p>
-          <a:p xmlns:a="http://schemas.openxmlformats.org/drawingml/2006/main">
-            <a:pPr>
-              <a:defRPr sz="1650" b="0">
-                <a:solidFill>
-                  <a:srgbClr val="E7F4EC"/>
-                </a:solidFill>
-                <a:latin typeface="Malgun Gothic"/>
-                <a:ea typeface="Malgun Gothic"/>
-                <a:cs typeface="Malgun Gothic"/>
-              </a:defRPr>
-            </a:pPr>
-            <a:r>
-              <a:rPr sz="1650" b="0">
-                <a:solidFill>
-                  <a:srgbClr val="E7F4EC"/>
-                </a:solidFill>
-                <a:latin typeface="Malgun Gothic"/>
-                <a:ea typeface="Malgun Gothic"/>
-                <a:cs typeface="Malgun Gothic"/>
-              </a:rPr>
-              <a:t>2  에너지 비교</a:t>
-            </a:r>
-          </a:p>
-          <a:p xmlns:a="http://schemas.openxmlformats.org/drawingml/2006/main">
-            <a:pPr>
-              <a:defRPr sz="1650" b="0">
-                <a:solidFill>
-                  <a:srgbClr val="E7F4EC"/>
-                </a:solidFill>
-                <a:latin typeface="Malgun Gothic"/>
-                <a:ea typeface="Malgun Gothic"/>
-                <a:cs typeface="Malgun Gothic"/>
-              </a:defRPr>
-            </a:pPr>
-            <a:r>
-              <a:rPr sz="1650" b="0">
-                <a:solidFill>
-                  <a:srgbClr val="E7F4EC"/>
-                </a:solidFill>
-                <a:latin typeface="Malgun Gothic"/>
-                <a:ea typeface="Malgun Gothic"/>
-                <a:cs typeface="Malgun Gothic"/>
-              </a:rPr>
-              <a:t>3  불편 문진</a:t>
-            </a:r>
-          </a:p>
-          <a:p xmlns:a="http://schemas.openxmlformats.org/drawingml/2006/main">
-            <a:pPr>
-              <a:defRPr sz="1650" b="0">
-                <a:solidFill>
-                  <a:srgbClr val="E7F4EC"/>
-                </a:solidFill>
-                <a:latin typeface="Malgun Gothic"/>
-                <a:ea typeface="Malgun Gothic"/>
-                <a:cs typeface="Malgun Gothic"/>
-              </a:defRPr>
-            </a:pPr>
-            <a:r>
-              <a:rPr sz="1650" b="0">
-                <a:solidFill>
-                  <a:srgbClr val="E7F4EC"/>
-                </a:solidFill>
-                <a:latin typeface="Malgun Gothic"/>
-                <a:ea typeface="Malgun Gothic"/>
-                <a:cs typeface="Malgun Gothic"/>
-              </a:rPr>
-              <a:t>4  후보 검토</a:t>
-            </a:r>
-          </a:p>
-          <a:p xmlns:a="http://schemas.openxmlformats.org/drawingml/2006/main">
-            <a:pPr>
-              <a:defRPr sz="1650" b="0">
-                <a:solidFill>
-                  <a:srgbClr val="E7F4EC"/>
-                </a:solidFill>
-                <a:latin typeface="Malgun Gothic"/>
-                <a:ea typeface="Malgun Gothic"/>
-                <a:cs typeface="Malgun Gothic"/>
-              </a:defRPr>
-            </a:pPr>
-            <a:r>
-              <a:rPr sz="1650" b="0">
-                <a:solidFill>
-                  <a:srgbClr val="E7F4EC"/>
-                </a:solidFill>
-                <a:latin typeface="Malgun Gothic"/>
-                <a:ea typeface="Malgun Gothic"/>
-                <a:cs typeface="Malgun Gothic"/>
-              </a:rPr>
-              <a:t>5  조사 요청</a:t>
+                <a16:creationId xmlns:a16="http://schemas.microsoft.com/office/drawing/2014/main" id="{CF9B3647-027D-4F9F-86A8-B766981B567D}"/>
+              </a:ext>
+            </a:extLst>
+          </p:cNvPr>
+          <p:cNvSpPr>
+            <a:spLocks xmlns:a="http://schemas.openxmlformats.org/drawingml/2006/main" noGrp="1"/>
+          </p:cNvSpPr>
+          <p:nvPr/>
+        </p:nvSpPr>
+        <p:spPr>
+          <a:xfrm xmlns:a="http://schemas.openxmlformats.org/drawingml/2006/main">
+            <a:off x="9077325" y="3219450"/>
+            <a:ext cx="2286000" cy="361950"/>
+          </a:xfrm>
+          <a:prstGeom xmlns:a="http://schemas.openxmlformats.org/drawingml/2006/main" prst="rect">
+            <a:avLst/>
+          </a:prstGeom>
+          <a:noFill xmlns:a="http://schemas.openxmlformats.org/drawingml/2006/main"/>
+          <a:ln xmlns:a="http://schemas.openxmlformats.org/drawingml/2006/main" w="0">
+            <a:noFill/>
+          </a:ln>
+        </p:spPr>
+        <p:txBody>
+          <a:bodyPr xmlns:a="http://schemas.openxmlformats.org/drawingml/2006/main">
+            <a:noAutofit/>
+          </a:bodyPr>
+          <a:lstStyle xmlns:a="http://schemas.openxmlformats.org/drawingml/2006/main"/>
+          <a:p xmlns:a="http://schemas.openxmlformats.org/drawingml/2006/main">
+            <a:pPr>
+              <a:defRPr sz="1875" b="1">
+                <a:solidFill>
+                  <a:srgbClr val="127452"/>
+                </a:solidFill>
+                <a:latin typeface="Malgun Gothic"/>
+                <a:ea typeface="Malgun Gothic"/>
+                <a:cs typeface="Malgun Gothic"/>
+              </a:defRPr>
+            </a:pPr>
+            <a:r>
+              <a:rPr sz="1875" b="1">
+                <a:solidFill>
+                  <a:srgbClr val="127452"/>
+                </a:solidFill>
+                <a:latin typeface="Malgun Gothic"/>
+                <a:ea typeface="Malgun Gothic"/>
+                <a:cs typeface="Malgun Gothic"/>
+              </a:rPr>
+              <a:t>조사 항목으로 연결</a:t>
             </a:r>
           </a:p>
         </p:txBody>
@@ -11908,76 +10283,19 @@
           <p:cNvPr id="11" name="">
             <a:extLst xmlns:a="http://schemas.openxmlformats.org/drawingml/2006/main">
               <a:ext uri="{FF2B5EF4-FFF2-40B4-BE49-F238E27FC236}">
-                <a16:creationId xmlns:a16="http://schemas.microsoft.com/office/drawing/2014/main" id="{1D2AA6B9-938A-4A4B-A29F-61D0562BE043}"/>
-              </a:ext>
-            </a:extLst>
-          </p:cNvPr>
-          <p:cNvSpPr>
-            <a:spLocks xmlns:a="http://schemas.openxmlformats.org/drawingml/2006/main" noGrp="1"/>
-          </p:cNvSpPr>
-          <p:nvPr/>
-        </p:nvSpPr>
-        <p:spPr>
-          <a:xfrm xmlns:a="http://schemas.openxmlformats.org/drawingml/2006/main">
-            <a:off x="3581400" y="1590675"/>
-            <a:ext cx="7410450" cy="552450"/>
-          </a:xfrm>
-          <a:prstGeom xmlns:a="http://schemas.openxmlformats.org/drawingml/2006/main" prst="rect">
-            <a:avLst/>
-          </a:prstGeom>
-          <a:noFill xmlns:a="http://schemas.openxmlformats.org/drawingml/2006/main"/>
-          <a:ln xmlns:a="http://schemas.openxmlformats.org/drawingml/2006/main" w="0">
-            <a:noFill/>
-          </a:ln>
-        </p:spPr>
-        <p:txBody>
-          <a:bodyPr xmlns:a="http://schemas.openxmlformats.org/drawingml/2006/main">
-            <a:noAutofit/>
-          </a:bodyPr>
-          <a:lstStyle xmlns:a="http://schemas.openxmlformats.org/drawingml/2006/main"/>
-          <a:p xmlns:a="http://schemas.openxmlformats.org/drawingml/2006/main">
-            <a:pPr>
-              <a:defRPr sz="2100" b="1">
-                <a:solidFill>
-                  <a:srgbClr val="183329"/>
-                </a:solidFill>
-                <a:latin typeface="Malgun Gothic"/>
-                <a:ea typeface="Malgun Gothic"/>
-                <a:cs typeface="Malgun Gothic"/>
-              </a:defRPr>
-            </a:pPr>
-            <a:r>
-              <a:rPr sz="2100" b="1">
-                <a:solidFill>
-                  <a:srgbClr val="183329"/>
-                </a:solidFill>
-                <a:latin typeface="Malgun Gothic"/>
-                <a:ea typeface="Malgun Gothic"/>
-                <a:cs typeface="Malgun Gothic"/>
-              </a:rPr>
-              <a:t>“오후에 창가 자리가 너무 더워요.”</a:t>
-            </a:r>
-          </a:p>
-        </p:txBody>
-      </p:sp>
-      <p:sp>
-        <p:nvSpPr>
-          <p:cNvPr id="12" name="">
-            <a:extLst xmlns:a="http://schemas.openxmlformats.org/drawingml/2006/main">
-              <a:ext uri="{FF2B5EF4-FFF2-40B4-BE49-F238E27FC236}">
-                <a16:creationId xmlns:a16="http://schemas.microsoft.com/office/drawing/2014/main" id="{599DAB0A-04A0-47D5-A85C-A80970F3295C}"/>
-              </a:ext>
-            </a:extLst>
-          </p:cNvPr>
-          <p:cNvSpPr>
-            <a:spLocks xmlns:a="http://schemas.openxmlformats.org/drawingml/2006/main" noGrp="1"/>
-          </p:cNvSpPr>
-          <p:nvPr/>
-        </p:nvSpPr>
-        <p:spPr>
-          <a:xfrm xmlns:a="http://schemas.openxmlformats.org/drawingml/2006/main">
-            <a:off x="3581400" y="2276475"/>
-            <a:ext cx="7239000" cy="352425"/>
+                <a16:creationId xmlns:a16="http://schemas.microsoft.com/office/drawing/2014/main" id="{56C0181B-B354-4B71-9015-A6B735C5E756}"/>
+              </a:ext>
+            </a:extLst>
+          </p:cNvPr>
+          <p:cNvSpPr>
+            <a:spLocks xmlns:a="http://schemas.openxmlformats.org/drawingml/2006/main" noGrp="1"/>
+          </p:cNvSpPr>
+          <p:nvPr/>
+        </p:nvSpPr>
+        <p:spPr>
+          <a:xfrm xmlns:a="http://schemas.openxmlformats.org/drawingml/2006/main">
+            <a:off x="9077325" y="3657600"/>
+            <a:ext cx="2286000" cy="1419225"/>
           </a:xfrm>
           <a:prstGeom xmlns:a="http://schemas.openxmlformats.org/drawingml/2006/main" prst="rect">
             <a:avLst/>
@@ -11996,7 +10314,7 @@
             <a:pPr>
               <a:defRPr sz="1575" b="0">
                 <a:solidFill>
-                  <a:srgbClr val="4E6157"/>
+                  <a:srgbClr val="183329"/>
                 </a:solidFill>
                 <a:latin typeface="Malgun Gothic"/>
                 <a:ea typeface="Malgun Gothic"/>
@@ -12006,214 +10324,59 @@
             <a:r>
               <a:rPr sz="1575" b="0">
                 <a:solidFill>
-                  <a:srgbClr val="4E6157"/>
-                </a:solidFill>
-                <a:latin typeface="Malgun Gothic"/>
-                <a:ea typeface="Malgun Gothic"/>
-                <a:cs typeface="Malgun Gothic"/>
-              </a:rPr>
-              <a:t>추출한 내용 · 이용자 확인 필요</a:t>
-            </a:r>
-          </a:p>
-        </p:txBody>
-      </p:sp>
-      <p:sp>
-        <p:nvSpPr>
-          <p:cNvPr id="13" name="">
-            <a:extLst xmlns:a="http://schemas.openxmlformats.org/drawingml/2006/main">
-              <a:ext uri="{FF2B5EF4-FFF2-40B4-BE49-F238E27FC236}">
-                <a16:creationId xmlns:a16="http://schemas.microsoft.com/office/drawing/2014/main" id="{BA1CD047-4B4B-4314-A42F-402507E6D3BE}"/>
-              </a:ext>
-            </a:extLst>
-          </p:cNvPr>
-          <p:cNvSpPr>
-            <a:spLocks xmlns:a="http://schemas.openxmlformats.org/drawingml/2006/main" noGrp="1"/>
-          </p:cNvSpPr>
-          <p:nvPr/>
-        </p:nvSpPr>
-        <p:spPr>
-          <a:xfrm xmlns:a="http://schemas.openxmlformats.org/drawingml/2006/main">
-            <a:off x="3590925" y="2743200"/>
-            <a:ext cx="7096125" cy="885825"/>
-          </a:xfrm>
-          <a:prstGeom xmlns:a="http://schemas.openxmlformats.org/drawingml/2006/main" prst="rect">
-            <a:avLst/>
-          </a:prstGeom>
-          <a:solidFill xmlns:a="http://schemas.openxmlformats.org/drawingml/2006/main">
-            <a:srgbClr val="DFF1E7"/>
-          </a:solidFill>
-          <a:ln xmlns:a="http://schemas.openxmlformats.org/drawingml/2006/main" w="0">
-            <a:noFill/>
-          </a:ln>
-        </p:spPr>
-      </p:sp>
-      <p:sp>
-        <p:nvSpPr>
-          <p:cNvPr id="14" name="">
-            <a:extLst xmlns:a="http://schemas.openxmlformats.org/drawingml/2006/main">
-              <a:ext uri="{FF2B5EF4-FFF2-40B4-BE49-F238E27FC236}">
-                <a16:creationId xmlns:a16="http://schemas.microsoft.com/office/drawing/2014/main" id="{A3ADACE3-6063-4E4D-A475-52115419090C}"/>
-              </a:ext>
-            </a:extLst>
-          </p:cNvPr>
-          <p:cNvSpPr>
-            <a:spLocks xmlns:a="http://schemas.openxmlformats.org/drawingml/2006/main" noGrp="1"/>
-          </p:cNvSpPr>
-          <p:nvPr/>
-        </p:nvSpPr>
-        <p:spPr>
-          <a:xfrm xmlns:a="http://schemas.openxmlformats.org/drawingml/2006/main">
-            <a:off x="3771900" y="2943225"/>
-            <a:ext cx="6800850" cy="447675"/>
-          </a:xfrm>
-          <a:prstGeom xmlns:a="http://schemas.openxmlformats.org/drawingml/2006/main" prst="rect">
-            <a:avLst/>
-          </a:prstGeom>
-          <a:noFill xmlns:a="http://schemas.openxmlformats.org/drawingml/2006/main"/>
-          <a:ln xmlns:a="http://schemas.openxmlformats.org/drawingml/2006/main" w="0">
-            <a:noFill/>
-          </a:ln>
-        </p:spPr>
-        <p:txBody>
-          <a:bodyPr xmlns:a="http://schemas.openxmlformats.org/drawingml/2006/main">
-            <a:noAutofit/>
-          </a:bodyPr>
-          <a:lstStyle xmlns:a="http://schemas.openxmlformats.org/drawingml/2006/main"/>
-          <a:p xmlns:a="http://schemas.openxmlformats.org/drawingml/2006/main">
-            <a:pPr>
-              <a:defRPr sz="1800" b="1">
-                <a:solidFill>
-                  <a:srgbClr val="127452"/>
-                </a:solidFill>
-                <a:latin typeface="Malgun Gothic"/>
-                <a:ea typeface="Malgun Gothic"/>
-                <a:cs typeface="Malgun Gothic"/>
-              </a:defRPr>
-            </a:pPr>
-            <a:r>
-              <a:rPr sz="1800" b="1">
-                <a:solidFill>
-                  <a:srgbClr val="127452"/>
-                </a:solidFill>
-                <a:latin typeface="Malgun Gothic"/>
-                <a:ea typeface="Malgun Gothic"/>
-                <a:cs typeface="Malgun Gothic"/>
-              </a:rPr>
-              <a:t>장소  창가 자리   |   시간  오후   |   불편  더위</a:t>
-            </a:r>
-          </a:p>
-        </p:txBody>
-      </p:sp>
-      <p:sp>
-        <p:nvSpPr>
-          <p:cNvPr id="15" name="">
-            <a:extLst xmlns:a="http://schemas.openxmlformats.org/drawingml/2006/main">
-              <a:ext uri="{FF2B5EF4-FFF2-40B4-BE49-F238E27FC236}">
-                <a16:creationId xmlns:a16="http://schemas.microsoft.com/office/drawing/2014/main" id="{C2FBA131-733D-47F8-8E7A-FC30204C91E9}"/>
-              </a:ext>
-            </a:extLst>
-          </p:cNvPr>
-          <p:cNvSpPr>
-            <a:spLocks xmlns:a="http://schemas.openxmlformats.org/drawingml/2006/main" noGrp="1"/>
-          </p:cNvSpPr>
-          <p:nvPr/>
-        </p:nvSpPr>
-        <p:spPr>
-          <a:xfrm xmlns:a="http://schemas.openxmlformats.org/drawingml/2006/main">
-            <a:off x="3590925" y="3905250"/>
-            <a:ext cx="7200900" cy="590550"/>
-          </a:xfrm>
-          <a:prstGeom xmlns:a="http://schemas.openxmlformats.org/drawingml/2006/main" prst="rect">
-            <a:avLst/>
-          </a:prstGeom>
-          <a:noFill xmlns:a="http://schemas.openxmlformats.org/drawingml/2006/main"/>
-          <a:ln xmlns:a="http://schemas.openxmlformats.org/drawingml/2006/main" w="0">
-            <a:noFill/>
-          </a:ln>
-        </p:spPr>
-        <p:txBody>
-          <a:bodyPr xmlns:a="http://schemas.openxmlformats.org/drawingml/2006/main">
-            <a:noAutofit/>
-          </a:bodyPr>
-          <a:lstStyle xmlns:a="http://schemas.openxmlformats.org/drawingml/2006/main"/>
-          <a:p xmlns:a="http://schemas.openxmlformats.org/drawingml/2006/main">
-            <a:pPr>
-              <a:defRPr sz="1875" b="0">
-                <a:solidFill>
-                  <a:srgbClr val="183329"/>
-                </a:solidFill>
-                <a:latin typeface="Malgun Gothic"/>
-                <a:ea typeface="Malgun Gothic"/>
-                <a:cs typeface="Malgun Gothic"/>
-              </a:defRPr>
-            </a:pPr>
-            <a:r>
-              <a:rPr sz="1875" b="0">
-                <a:solidFill>
-                  <a:srgbClr val="183329"/>
-                </a:solidFill>
-                <a:latin typeface="Malgun Gothic"/>
-                <a:ea typeface="Malgun Gothic"/>
-                <a:cs typeface="Malgun Gothic"/>
-              </a:rPr>
-              <a:t>추가 질문: 어느 층인가요? 햇빛이 들 때 더운가요?</a:t>
-            </a:r>
-          </a:p>
-        </p:txBody>
-      </p:sp>
-      <p:sp>
-        <p:nvSpPr>
-          <p:cNvPr id="16" name="">
-            <a:extLst xmlns:a="http://schemas.openxmlformats.org/drawingml/2006/main">
-              <a:ext uri="{FF2B5EF4-FFF2-40B4-BE49-F238E27FC236}">
-                <a16:creationId xmlns:a16="http://schemas.microsoft.com/office/drawing/2014/main" id="{FFCE5781-69F7-48EA-B908-15DCD5BB96A4}"/>
-              </a:ext>
-            </a:extLst>
-          </p:cNvPr>
-          <p:cNvSpPr>
-            <a:spLocks xmlns:a="http://schemas.openxmlformats.org/drawingml/2006/main" noGrp="1"/>
-          </p:cNvSpPr>
-          <p:nvPr/>
-        </p:nvSpPr>
-        <p:spPr>
-          <a:xfrm xmlns:a="http://schemas.openxmlformats.org/drawingml/2006/main">
-            <a:off x="3590925" y="4876800"/>
-            <a:ext cx="7200900" cy="457200"/>
-          </a:xfrm>
-          <a:prstGeom xmlns:a="http://schemas.openxmlformats.org/drawingml/2006/main" prst="rect">
-            <a:avLst/>
-          </a:prstGeom>
-          <a:noFill xmlns:a="http://schemas.openxmlformats.org/drawingml/2006/main"/>
-          <a:ln xmlns:a="http://schemas.openxmlformats.org/drawingml/2006/main" w="0">
-            <a:noFill/>
-          </a:ln>
-        </p:spPr>
-        <p:txBody>
-          <a:bodyPr xmlns:a="http://schemas.openxmlformats.org/drawingml/2006/main">
-            <a:noAutofit/>
-          </a:bodyPr>
-          <a:lstStyle xmlns:a="http://schemas.openxmlformats.org/drawingml/2006/main"/>
-          <a:p xmlns:a="http://schemas.openxmlformats.org/drawingml/2006/main">
-            <a:pPr>
-              <a:defRPr sz="1725" b="1">
-                <a:solidFill>
-                  <a:srgbClr val="127452"/>
-                </a:solidFill>
-                <a:latin typeface="Malgun Gothic"/>
-                <a:ea typeface="Malgun Gothic"/>
-                <a:cs typeface="Malgun Gothic"/>
-              </a:defRPr>
-            </a:pPr>
-            <a:r>
-              <a:rPr sz="1725" b="1">
-                <a:solidFill>
-                  <a:srgbClr val="127452"/>
-                </a:solidFill>
-                <a:latin typeface="Malgun Gothic"/>
-                <a:ea typeface="Malgun Gothic"/>
-                <a:cs typeface="Malgun Gothic"/>
-              </a:rPr>
-              <a:t>☐ 응답 확인    ☐ 정보 수정     → 점검 후보 보기</a:t>
+                  <a:srgbClr val="183329"/>
+                </a:solidFill>
+                <a:latin typeface="Malgun Gothic"/>
+                <a:ea typeface="Malgun Gothic"/>
+                <a:cs typeface="Malgun Gothic"/>
+              </a:rPr>
+              <a:t>차양·일사</a:t>
+            </a:r>
+          </a:p>
+          <a:p xmlns:a="http://schemas.openxmlformats.org/drawingml/2006/main">
+            <a:pPr>
+              <a:defRPr sz="1575" b="0">
+                <a:solidFill>
+                  <a:srgbClr val="183329"/>
+                </a:solidFill>
+                <a:latin typeface="Malgun Gothic"/>
+                <a:ea typeface="Malgun Gothic"/>
+                <a:cs typeface="Malgun Gothic"/>
+              </a:defRPr>
+            </a:pPr>
+            <a:r>
+              <a:rPr sz="1575" b="0">
+                <a:solidFill>
+                  <a:srgbClr val="183329"/>
+                </a:solidFill>
+                <a:latin typeface="Malgun Gothic"/>
+                <a:ea typeface="Malgun Gothic"/>
+                <a:cs typeface="Malgun Gothic"/>
+              </a:rPr>
+              <a:t>창호·외피</a:t>
+            </a:r>
+          </a:p>
+          <a:p xmlns:a="http://schemas.openxmlformats.org/drawingml/2006/main">
+            <a:pPr>
+              <a:defRPr sz="1575" b="0">
+                <a:solidFill>
+                  <a:srgbClr val="183329"/>
+                </a:solidFill>
+                <a:latin typeface="Malgun Gothic"/>
+                <a:ea typeface="Malgun Gothic"/>
+                <a:cs typeface="Malgun Gothic"/>
+              </a:defRPr>
+            </a:pPr>
+            <a:r>
+              <a:rPr sz="1575" b="0">
+                <a:solidFill>
+                  <a:srgbClr val="183329"/>
+                </a:solidFill>
+                <a:latin typeface="Malgun Gothic"/>
+                <a:ea typeface="Malgun Gothic"/>
+                <a:cs typeface="Malgun Gothic"/>
+              </a:rPr>
+              <a:t>환기·냉방</a:t>
             </a:r>
           </a:p>
         </p:txBody>
@@ -12221,7 +10384,7 @@
     </p:spTree>
     <p:extLst>
       <p:ext uri="{BB962C8B-B14F-4D97-AF65-F5344CB8AC3E}">
-        <p14:creationId xmlns:p14="http://schemas.microsoft.com/office/powerpoint/2010/main" val="2057205905"/>
+        <p14:creationId xmlns:p14="http://schemas.microsoft.com/office/powerpoint/2010/main" val="728054660"/>
       </p:ext>
     </p:extLst>
   </p:cSld>
@@ -12252,7 +10415,7 @@
           <p:cNvPr id="32" name="">
             <a:extLst xmlns:a="http://schemas.openxmlformats.org/drawingml/2006/main">
               <a:ext uri="{FF2B5EF4-FFF2-40B4-BE49-F238E27FC236}">
-                <a16:creationId xmlns:a16="http://schemas.microsoft.com/office/drawing/2014/main" id="{A5562AE2-6D54-45C9-9391-FFA270D69895}"/>
+                <a16:creationId xmlns:a16="http://schemas.microsoft.com/office/drawing/2014/main" id="{9CD0DFAD-CD74-407F-90B2-29F17587CEC8}"/>
               </a:ext>
             </a:extLst>
           </p:cNvPr>
@@ -12282,7 +10445,7 @@
           <p:cNvPr id="2" name="">
             <a:extLst xmlns:a="http://schemas.openxmlformats.org/drawingml/2006/main">
               <a:ext uri="{FF2B5EF4-FFF2-40B4-BE49-F238E27FC236}">
-                <a16:creationId xmlns:a16="http://schemas.microsoft.com/office/drawing/2014/main" id="{38C1732B-9E52-4ECD-98BC-E3A3CC25A7BC}"/>
+                <a16:creationId xmlns:a16="http://schemas.microsoft.com/office/drawing/2014/main" id="{072749BD-EEB3-47AE-9310-4D9ADBBDE4E7}"/>
               </a:ext>
             </a:extLst>
           </p:cNvPr>
@@ -12329,7 +10492,7 @@
                 <a:ea typeface="Malgun Gothic"/>
                 <a:cs typeface="Malgun Gothic"/>
               </a:rPr>
-              <a:t>개선 후보를 고르기 전에 필요한 증거를 정리한다</a:t>
+              <a:t>개선 후보에는 연결 이유와 조사 항목이 함께 붙는다</a:t>
             </a:r>
           </a:p>
         </p:txBody>
@@ -12339,7 +10502,7 @@
           <p:cNvPr id="3" name="">
             <a:extLst xmlns:a="http://schemas.openxmlformats.org/drawingml/2006/main">
               <a:ext uri="{FF2B5EF4-FFF2-40B4-BE49-F238E27FC236}">
-                <a16:creationId xmlns:a16="http://schemas.microsoft.com/office/drawing/2014/main" id="{51375CEE-A821-43A9-8894-0F78FB7CBF03}"/>
+                <a16:creationId xmlns:a16="http://schemas.microsoft.com/office/drawing/2014/main" id="{D8AA4A52-19C9-4735-A9C4-0834B050A1C6}"/>
               </a:ext>
             </a:extLst>
           </p:cNvPr>
@@ -12369,7 +10532,7 @@
           <p:cNvPr id="4" name="">
             <a:extLst xmlns:a="http://schemas.openxmlformats.org/drawingml/2006/main">
               <a:ext uri="{FF2B5EF4-FFF2-40B4-BE49-F238E27FC236}">
-                <a16:creationId xmlns:a16="http://schemas.microsoft.com/office/drawing/2014/main" id="{AB5FD0D7-7FC6-493F-A1EA-E777C4F3636F}"/>
+                <a16:creationId xmlns:a16="http://schemas.microsoft.com/office/drawing/2014/main" id="{37AA4B36-A741-4531-A2AA-A8148CC471E4}"/>
               </a:ext>
             </a:extLst>
           </p:cNvPr>
@@ -12426,7 +10589,7 @@
           <p:cNvPr id="5" name="">
             <a:extLst xmlns:a="http://schemas.openxmlformats.org/drawingml/2006/main">
               <a:ext uri="{FF2B5EF4-FFF2-40B4-BE49-F238E27FC236}">
-                <a16:creationId xmlns:a16="http://schemas.microsoft.com/office/drawing/2014/main" id="{87EC3A89-28B8-4E90-A7C4-13678D67590F}"/>
+                <a16:creationId xmlns:a16="http://schemas.microsoft.com/office/drawing/2014/main" id="{A96794A4-9B62-409A-ABD2-9AA58800B68D}"/>
               </a:ext>
             </a:extLst>
           </p:cNvPr>
@@ -12483,7 +10646,7 @@
           <p:cNvPr id="6" name="">
             <a:extLst xmlns:a="http://schemas.openxmlformats.org/drawingml/2006/main">
               <a:ext uri="{FF2B5EF4-FFF2-40B4-BE49-F238E27FC236}">
-                <a16:creationId xmlns:a16="http://schemas.microsoft.com/office/drawing/2014/main" id="{E932F8D2-66B2-459A-8B40-F431E86BDB6B}"/>
+                <a16:creationId xmlns:a16="http://schemas.microsoft.com/office/drawing/2014/main" id="{4A1C12F2-88CD-42E6-91E4-B63E0AA8F6DD}"/>
               </a:ext>
             </a:extLst>
           </p:cNvPr>
@@ -12530,7 +10693,7 @@
                 <a:ea typeface="Malgun Gothic"/>
                 <a:cs typeface="Malgun Gothic"/>
               </a:rPr>
-              <a:t>예시 상황: 오후 창가 더위. 원인을 확정한 결과가 아닌 조사 가설이다.</a:t>
+              <a:t>문진 사례: “오후 창가 자리가 덥다” → 후보별로 살펴볼 내용을 비교</a:t>
             </a:r>
           </a:p>
         </p:txBody>
@@ -12540,7 +10703,7 @@
           <p:cNvPr id="7" name="">
             <a:extLst xmlns:a="http://schemas.openxmlformats.org/drawingml/2006/main">
               <a:ext uri="{FF2B5EF4-FFF2-40B4-BE49-F238E27FC236}">
-                <a16:creationId xmlns:a16="http://schemas.microsoft.com/office/drawing/2014/main" id="{5B67D0A1-FE8C-48A5-9FCB-CA9799BD6A77}"/>
+                <a16:creationId xmlns:a16="http://schemas.microsoft.com/office/drawing/2014/main" id="{D886A4B9-570E-48DE-A294-92522D864674}"/>
               </a:ext>
             </a:extLst>
           </p:cNvPr>
@@ -12570,7 +10733,7 @@
           <p:cNvPr id="8" name="">
             <a:extLst xmlns:a="http://schemas.openxmlformats.org/drawingml/2006/main">
               <a:ext uri="{FF2B5EF4-FFF2-40B4-BE49-F238E27FC236}">
-                <a16:creationId xmlns:a16="http://schemas.microsoft.com/office/drawing/2014/main" id="{DC7381A5-F1A9-4ECF-9769-37C5A0AEA1D0}"/>
+                <a16:creationId xmlns:a16="http://schemas.microsoft.com/office/drawing/2014/main" id="{234E6F40-6041-42DF-974E-C9BE07145C28}"/>
               </a:ext>
             </a:extLst>
           </p:cNvPr>
@@ -12627,7 +10790,7 @@
           <p:cNvPr id="9" name="">
             <a:extLst xmlns:a="http://schemas.openxmlformats.org/drawingml/2006/main">
               <a:ext uri="{FF2B5EF4-FFF2-40B4-BE49-F238E27FC236}">
-                <a16:creationId xmlns:a16="http://schemas.microsoft.com/office/drawing/2014/main" id="{D69AB345-108F-43FA-850A-D89C31E62834}"/>
+                <a16:creationId xmlns:a16="http://schemas.microsoft.com/office/drawing/2014/main" id="{300BE03B-56B5-45C3-B99C-0FAF8A0FDCF8}"/>
               </a:ext>
             </a:extLst>
           </p:cNvPr>
@@ -12657,7 +10820,7 @@
           <p:cNvPr id="10" name="">
             <a:extLst xmlns:a="http://schemas.openxmlformats.org/drawingml/2006/main">
               <a:ext uri="{FF2B5EF4-FFF2-40B4-BE49-F238E27FC236}">
-                <a16:creationId xmlns:a16="http://schemas.microsoft.com/office/drawing/2014/main" id="{245E75FC-6475-4F00-98D8-8914C4235587}"/>
+                <a16:creationId xmlns:a16="http://schemas.microsoft.com/office/drawing/2014/main" id="{944FE86D-05BE-4A13-81B1-1C652D7029A3}"/>
               </a:ext>
             </a:extLst>
           </p:cNvPr>
@@ -12704,7 +10867,7 @@
                 <a:ea typeface="Malgun Gothic"/>
                 <a:cs typeface="Malgun Gothic"/>
               </a:rPr>
-              <a:t>연결된 진술·신호</a:t>
+              <a:t>연결하는 맥락</a:t>
             </a:r>
           </a:p>
         </p:txBody>
@@ -12714,7 +10877,7 @@
           <p:cNvPr id="11" name="">
             <a:extLst xmlns:a="http://schemas.openxmlformats.org/drawingml/2006/main">
               <a:ext uri="{FF2B5EF4-FFF2-40B4-BE49-F238E27FC236}">
-                <a16:creationId xmlns:a16="http://schemas.microsoft.com/office/drawing/2014/main" id="{60548C2B-8DFF-4322-8B87-EDA846330A66}"/>
+                <a16:creationId xmlns:a16="http://schemas.microsoft.com/office/drawing/2014/main" id="{4A85D06B-5792-4309-93BE-E8D61C1B3E46}"/>
               </a:ext>
             </a:extLst>
           </p:cNvPr>
@@ -12744,7 +10907,7 @@
           <p:cNvPr id="12" name="">
             <a:extLst xmlns:a="http://schemas.openxmlformats.org/drawingml/2006/main">
               <a:ext uri="{FF2B5EF4-FFF2-40B4-BE49-F238E27FC236}">
-                <a16:creationId xmlns:a16="http://schemas.microsoft.com/office/drawing/2014/main" id="{BDEFD8A1-EE6A-46A5-915C-BF133E4D2831}"/>
+                <a16:creationId xmlns:a16="http://schemas.microsoft.com/office/drawing/2014/main" id="{5A976D6F-FC8A-4D79-87EF-009D168A04D2}"/>
               </a:ext>
             </a:extLst>
           </p:cNvPr>
@@ -12791,7 +10954,7 @@
                 <a:ea typeface="Malgun Gothic"/>
                 <a:cs typeface="Malgun Gothic"/>
               </a:rPr>
-              <a:t>현장 확인 항목</a:t>
+              <a:t>현장조사 항목</a:t>
             </a:r>
           </a:p>
         </p:txBody>
@@ -12801,7 +10964,7 @@
           <p:cNvPr id="13" name="">
             <a:extLst xmlns:a="http://schemas.openxmlformats.org/drawingml/2006/main">
               <a:ext uri="{FF2B5EF4-FFF2-40B4-BE49-F238E27FC236}">
-                <a16:creationId xmlns:a16="http://schemas.microsoft.com/office/drawing/2014/main" id="{59DA0988-CE4A-425D-8E73-8857A5CEB7B7}"/>
+                <a16:creationId xmlns:a16="http://schemas.microsoft.com/office/drawing/2014/main" id="{641E81AA-3B56-441D-9BFD-7CD646446B96}"/>
               </a:ext>
             </a:extLst>
           </p:cNvPr>
@@ -12833,7 +10996,7 @@
           <p:cNvPr id="14" name="">
             <a:extLst xmlns:a="http://schemas.openxmlformats.org/drawingml/2006/main">
               <a:ext uri="{FF2B5EF4-FFF2-40B4-BE49-F238E27FC236}">
-                <a16:creationId xmlns:a16="http://schemas.microsoft.com/office/drawing/2014/main" id="{E1D89625-CD18-4F58-A0AB-B58090993EC2}"/>
+                <a16:creationId xmlns:a16="http://schemas.microsoft.com/office/drawing/2014/main" id="{C859D8D4-B8C3-4366-A60D-D23C909351D8}"/>
               </a:ext>
             </a:extLst>
           </p:cNvPr>
@@ -12890,7 +11053,7 @@
           <p:cNvPr id="15" name="">
             <a:extLst xmlns:a="http://schemas.openxmlformats.org/drawingml/2006/main">
               <a:ext uri="{FF2B5EF4-FFF2-40B4-BE49-F238E27FC236}">
-                <a16:creationId xmlns:a16="http://schemas.microsoft.com/office/drawing/2014/main" id="{ED73D833-474A-4185-8568-ABF40754ACAF}"/>
+                <a16:creationId xmlns:a16="http://schemas.microsoft.com/office/drawing/2014/main" id="{8CEBB4C2-B942-4D6E-8FC1-C17BDD0932CC}"/>
               </a:ext>
             </a:extLst>
           </p:cNvPr>
@@ -12922,7 +11085,7 @@
           <p:cNvPr id="16" name="">
             <a:extLst xmlns:a="http://schemas.openxmlformats.org/drawingml/2006/main">
               <a:ext uri="{FF2B5EF4-FFF2-40B4-BE49-F238E27FC236}">
-                <a16:creationId xmlns:a16="http://schemas.microsoft.com/office/drawing/2014/main" id="{15497177-E2FE-4B61-AE0C-1C9EF7337004}"/>
+                <a16:creationId xmlns:a16="http://schemas.microsoft.com/office/drawing/2014/main" id="{2DC48034-7D70-4288-8728-6DF60F5F0919}"/>
               </a:ext>
             </a:extLst>
           </p:cNvPr>
@@ -12969,7 +11132,7 @@
                 <a:ea typeface="Malgun Gothic"/>
                 <a:cs typeface="Malgun Gothic"/>
               </a:rPr>
-              <a:t>오후 · 창가 · 더위</a:t>
+              <a:t>오후 · 창가 · 햇빛</a:t>
             </a:r>
           </a:p>
         </p:txBody>
@@ -12979,7 +11142,7 @@
           <p:cNvPr id="17" name="">
             <a:extLst xmlns:a="http://schemas.openxmlformats.org/drawingml/2006/main">
               <a:ext uri="{FF2B5EF4-FFF2-40B4-BE49-F238E27FC236}">
-                <a16:creationId xmlns:a16="http://schemas.microsoft.com/office/drawing/2014/main" id="{056016A3-4C3D-46EE-8AE7-F03E76077D35}"/>
+                <a16:creationId xmlns:a16="http://schemas.microsoft.com/office/drawing/2014/main" id="{858C358A-82C0-48B6-8593-315892D893E3}"/>
               </a:ext>
             </a:extLst>
           </p:cNvPr>
@@ -13011,7 +11174,7 @@
           <p:cNvPr id="18" name="">
             <a:extLst xmlns:a="http://schemas.openxmlformats.org/drawingml/2006/main">
               <a:ext uri="{FF2B5EF4-FFF2-40B4-BE49-F238E27FC236}">
-                <a16:creationId xmlns:a16="http://schemas.microsoft.com/office/drawing/2014/main" id="{D483AC9C-1039-41B7-97FB-DF5DE2DB09CF}"/>
+                <a16:creationId xmlns:a16="http://schemas.microsoft.com/office/drawing/2014/main" id="{576BA757-B6FA-4513-8672-B351983FB0CF}"/>
               </a:ext>
             </a:extLst>
           </p:cNvPr>
@@ -13058,7 +11221,7 @@
                 <a:ea typeface="Malgun Gothic"/>
                 <a:cs typeface="Malgun Gothic"/>
               </a:rPr>
-              <a:t>방향·일사·차양 유무·시간별 온도</a:t>
+              <a:t>창 방향·차양 유무·일사 유입</a:t>
             </a:r>
           </a:p>
         </p:txBody>
@@ -13068,7 +11231,7 @@
           <p:cNvPr id="19" name="">
             <a:extLst xmlns:a="http://schemas.openxmlformats.org/drawingml/2006/main">
               <a:ext uri="{FF2B5EF4-FFF2-40B4-BE49-F238E27FC236}">
-                <a16:creationId xmlns:a16="http://schemas.microsoft.com/office/drawing/2014/main" id="{02EE5239-790D-4351-BFA0-20C16CBD96C2}"/>
+                <a16:creationId xmlns:a16="http://schemas.microsoft.com/office/drawing/2014/main" id="{A49B5AFD-008B-4B92-A785-44F4A0E08B6C}"/>
               </a:ext>
             </a:extLst>
           </p:cNvPr>
@@ -13100,7 +11263,7 @@
           <p:cNvPr id="20" name="">
             <a:extLst xmlns:a="http://schemas.openxmlformats.org/drawingml/2006/main">
               <a:ext uri="{FF2B5EF4-FFF2-40B4-BE49-F238E27FC236}">
-                <a16:creationId xmlns:a16="http://schemas.microsoft.com/office/drawing/2014/main" id="{8C8E7DDF-10F7-4D85-A81C-1642D8F8BE0A}"/>
+                <a16:creationId xmlns:a16="http://schemas.microsoft.com/office/drawing/2014/main" id="{432E2E2A-192F-43CD-9F69-C483DCB2D92A}"/>
               </a:ext>
             </a:extLst>
           </p:cNvPr>
@@ -13157,7 +11320,7 @@
           <p:cNvPr id="21" name="">
             <a:extLst xmlns:a="http://schemas.openxmlformats.org/drawingml/2006/main">
               <a:ext uri="{FF2B5EF4-FFF2-40B4-BE49-F238E27FC236}">
-                <a16:creationId xmlns:a16="http://schemas.microsoft.com/office/drawing/2014/main" id="{EB5CF2F0-32F6-4115-A43E-4EC84418EA8A}"/>
+                <a16:creationId xmlns:a16="http://schemas.microsoft.com/office/drawing/2014/main" id="{16F61B21-48F7-4FE5-8144-04A4C1969E6D}"/>
               </a:ext>
             </a:extLst>
           </p:cNvPr>
@@ -13189,7 +11352,7 @@
           <p:cNvPr id="22" name="">
             <a:extLst xmlns:a="http://schemas.openxmlformats.org/drawingml/2006/main">
               <a:ext uri="{FF2B5EF4-FFF2-40B4-BE49-F238E27FC236}">
-                <a16:creationId xmlns:a16="http://schemas.microsoft.com/office/drawing/2014/main" id="{85247FDF-C4C7-4365-B416-702B32851FF4}"/>
+                <a16:creationId xmlns:a16="http://schemas.microsoft.com/office/drawing/2014/main" id="{F26DEE6A-8D35-45B9-95E4-7BF047B7AC33}"/>
               </a:ext>
             </a:extLst>
           </p:cNvPr>
@@ -13236,7 +11399,7 @@
                 <a:ea typeface="Malgun Gothic"/>
                 <a:cs typeface="Malgun Gothic"/>
               </a:rPr>
-              <a:t>창 주변 열감·바람 여부 확인</a:t>
+              <a:t>창 주변 열감 · 바람</a:t>
             </a:r>
           </a:p>
         </p:txBody>
@@ -13246,7 +11409,7 @@
           <p:cNvPr id="23" name="">
             <a:extLst xmlns:a="http://schemas.openxmlformats.org/drawingml/2006/main">
               <a:ext uri="{FF2B5EF4-FFF2-40B4-BE49-F238E27FC236}">
-                <a16:creationId xmlns:a16="http://schemas.microsoft.com/office/drawing/2014/main" id="{A9E05EE1-4822-4E60-9C4B-480FC542C657}"/>
+                <a16:creationId xmlns:a16="http://schemas.microsoft.com/office/drawing/2014/main" id="{2A3DD90C-C530-49CF-8F92-0BE6E8CBB2D1}"/>
               </a:ext>
             </a:extLst>
           </p:cNvPr>
@@ -13278,7 +11441,7 @@
           <p:cNvPr id="24" name="">
             <a:extLst xmlns:a="http://schemas.openxmlformats.org/drawingml/2006/main">
               <a:ext uri="{FF2B5EF4-FFF2-40B4-BE49-F238E27FC236}">
-                <a16:creationId xmlns:a16="http://schemas.microsoft.com/office/drawing/2014/main" id="{8AA1A38F-6DCD-446C-8078-427CE676F833}"/>
+                <a16:creationId xmlns:a16="http://schemas.microsoft.com/office/drawing/2014/main" id="{580AE0E6-2D04-425A-995F-8D4F5E2B085E}"/>
               </a:ext>
             </a:extLst>
           </p:cNvPr>
@@ -13335,7 +11498,7 @@
           <p:cNvPr id="25" name="">
             <a:extLst xmlns:a="http://schemas.openxmlformats.org/drawingml/2006/main">
               <a:ext uri="{FF2B5EF4-FFF2-40B4-BE49-F238E27FC236}">
-                <a16:creationId xmlns:a16="http://schemas.microsoft.com/office/drawing/2014/main" id="{1D9E723F-135C-4C60-9A81-F5B413697909}"/>
+                <a16:creationId xmlns:a16="http://schemas.microsoft.com/office/drawing/2014/main" id="{E7009F4E-3A86-48C9-BAC3-491D96CBF39E}"/>
               </a:ext>
             </a:extLst>
           </p:cNvPr>
@@ -13367,7 +11530,7 @@
           <p:cNvPr id="26" name="">
             <a:extLst xmlns:a="http://schemas.openxmlformats.org/drawingml/2006/main">
               <a:ext uri="{FF2B5EF4-FFF2-40B4-BE49-F238E27FC236}">
-                <a16:creationId xmlns:a16="http://schemas.microsoft.com/office/drawing/2014/main" id="{378A466E-3FE1-472D-B470-9542B22228D7}"/>
+                <a16:creationId xmlns:a16="http://schemas.microsoft.com/office/drawing/2014/main" id="{CC10F770-E40C-4B7D-B169-65E2979AB3AB}"/>
               </a:ext>
             </a:extLst>
           </p:cNvPr>
@@ -13424,7 +11587,7 @@
           <p:cNvPr id="27" name="">
             <a:extLst xmlns:a="http://schemas.openxmlformats.org/drawingml/2006/main">
               <a:ext uri="{FF2B5EF4-FFF2-40B4-BE49-F238E27FC236}">
-                <a16:creationId xmlns:a16="http://schemas.microsoft.com/office/drawing/2014/main" id="{3D392A15-95AB-4076-BB78-D2A6FB1D3E41}"/>
+                <a16:creationId xmlns:a16="http://schemas.microsoft.com/office/drawing/2014/main" id="{98FC3D32-2BB3-4E3D-8836-DD6C541783C7}"/>
               </a:ext>
             </a:extLst>
           </p:cNvPr>
@@ -13456,7 +11619,7 @@
           <p:cNvPr id="28" name="">
             <a:extLst xmlns:a="http://schemas.openxmlformats.org/drawingml/2006/main">
               <a:ext uri="{FF2B5EF4-FFF2-40B4-BE49-F238E27FC236}">
-                <a16:creationId xmlns:a16="http://schemas.microsoft.com/office/drawing/2014/main" id="{C753DC45-02B1-4952-953F-5BE7F6D9FDD9}"/>
+                <a16:creationId xmlns:a16="http://schemas.microsoft.com/office/drawing/2014/main" id="{21C3D3DC-7D51-4BE4-84AC-6215E3F4D237}"/>
               </a:ext>
             </a:extLst>
           </p:cNvPr>
@@ -13503,7 +11666,7 @@
                 <a:ea typeface="Malgun Gothic"/>
                 <a:cs typeface="Malgun Gothic"/>
               </a:rPr>
-              <a:t>이용시간·인원·운전 상태 확인</a:t>
+              <a:t>이용시간 · 인원 · 운전</a:t>
             </a:r>
           </a:p>
         </p:txBody>
@@ -13513,7 +11676,7 @@
           <p:cNvPr id="29" name="">
             <a:extLst xmlns:a="http://schemas.openxmlformats.org/drawingml/2006/main">
               <a:ext uri="{FF2B5EF4-FFF2-40B4-BE49-F238E27FC236}">
-                <a16:creationId xmlns:a16="http://schemas.microsoft.com/office/drawing/2014/main" id="{C32017E9-E55C-468A-B79D-E398F1678AD6}"/>
+                <a16:creationId xmlns:a16="http://schemas.microsoft.com/office/drawing/2014/main" id="{831B7204-A0B3-4DA1-99D6-6B900679F480}"/>
               </a:ext>
             </a:extLst>
           </p:cNvPr>
@@ -13545,7 +11708,7 @@
           <p:cNvPr id="30" name="">
             <a:extLst xmlns:a="http://schemas.openxmlformats.org/drawingml/2006/main">
               <a:ext uri="{FF2B5EF4-FFF2-40B4-BE49-F238E27FC236}">
-                <a16:creationId xmlns:a16="http://schemas.microsoft.com/office/drawing/2014/main" id="{E230F34E-5DD7-44F6-9500-36681F96DE67}"/>
+                <a16:creationId xmlns:a16="http://schemas.microsoft.com/office/drawing/2014/main" id="{E4FEF13F-7E52-4171-BA05-EF1FD75F0E8D}"/>
               </a:ext>
             </a:extLst>
           </p:cNvPr>
@@ -13592,7 +11755,7 @@
                 <a:ea typeface="Malgun Gothic"/>
                 <a:cs typeface="Malgun Gothic"/>
               </a:rPr>
-              <a:t>운영기록·환기·냉방 조건·계량 범위</a:t>
+              <a:t>설비 운전시간·환기·냉방 조건</a:t>
             </a:r>
           </a:p>
         </p:txBody>
@@ -13602,7 +11765,7 @@
           <p:cNvPr id="31" name="">
             <a:extLst xmlns:a="http://schemas.openxmlformats.org/drawingml/2006/main">
               <a:ext uri="{FF2B5EF4-FFF2-40B4-BE49-F238E27FC236}">
-                <a16:creationId xmlns:a16="http://schemas.microsoft.com/office/drawing/2014/main" id="{C400E72B-081F-4DA9-AE59-45A4FECB17B9}"/>
+                <a16:creationId xmlns:a16="http://schemas.microsoft.com/office/drawing/2014/main" id="{4BF19DB4-42EC-4D4A-8E1C-668323F1E65B}"/>
               </a:ext>
             </a:extLst>
           </p:cNvPr>
@@ -13631,7 +11794,7 @@
           <a:lstStyle xmlns:a="http://schemas.openxmlformats.org/drawingml/2006/main"/>
           <a:p xmlns:a="http://schemas.openxmlformats.org/drawingml/2006/main">
             <a:pPr>
-              <a:defRPr sz="1725" b="1">
+              <a:defRPr sz="1800" b="1">
                 <a:solidFill>
                   <a:srgbClr val="127452"/>
                 </a:solidFill>
@@ -13641,7 +11804,7 @@
               </a:defRPr>
             </a:pPr>
             <a:r>
-              <a:rPr sz="1725" b="1">
+              <a:rPr sz="1800" b="1">
                 <a:solidFill>
                   <a:srgbClr val="127452"/>
                 </a:solidFill>
@@ -13649,7 +11812,7 @@
                 <a:ea typeface="Malgun Gothic"/>
                 <a:cs typeface="Malgun Gothic"/>
               </a:rPr>
-              <a:t>비교 결과는 “확인할 내용”이다. 절감 효과는 추가 현장정보와 별도 성능분석이 있어야 판단한다.</a:t>
+              <a:t>후보를 고르는 이유와 필요한 자료를 함께 전달해 전문가 상담의 출발점을 구체화한다.</a:t>
             </a:r>
           </a:p>
         </p:txBody>
@@ -13657,7 +11820,7 @@
     </p:spTree>
     <p:extLst>
       <p:ext uri="{BB962C8B-B14F-4D97-AF65-F5344CB8AC3E}">
-        <p14:creationId xmlns:p14="http://schemas.microsoft.com/office/powerpoint/2010/main" val="1100692165"/>
+        <p14:creationId xmlns:p14="http://schemas.microsoft.com/office/powerpoint/2010/main" val="2077950550"/>
       </p:ext>
     </p:extLst>
   </p:cSld>
@@ -13685,10 +11848,10 @@
       </p:grpSpPr>
       <p:sp>
         <p:nvSpPr>
-          <p:cNvPr id="14" name="">
-            <a:extLst xmlns:a="http://schemas.openxmlformats.org/drawingml/2006/main">
-              <a:ext uri="{FF2B5EF4-FFF2-40B4-BE49-F238E27FC236}">
-                <a16:creationId xmlns:a16="http://schemas.microsoft.com/office/drawing/2014/main" id="{EAB51425-0169-4586-A6F8-C64FE951B09E}"/>
+          <p:cNvPr id="13" name="">
+            <a:extLst xmlns:a="http://schemas.openxmlformats.org/drawingml/2006/main">
+              <a:ext uri="{FF2B5EF4-FFF2-40B4-BE49-F238E27FC236}">
+                <a16:creationId xmlns:a16="http://schemas.microsoft.com/office/drawing/2014/main" id="{4AA68B65-1ECA-4625-A42B-536BEEFD5B88}"/>
               </a:ext>
             </a:extLst>
           </p:cNvPr>
@@ -13718,7 +11881,7 @@
           <p:cNvPr id="2" name="">
             <a:extLst xmlns:a="http://schemas.openxmlformats.org/drawingml/2006/main">
               <a:ext uri="{FF2B5EF4-FFF2-40B4-BE49-F238E27FC236}">
-                <a16:creationId xmlns:a16="http://schemas.microsoft.com/office/drawing/2014/main" id="{98CE6D26-9990-4761-8D4B-7B1EF1455A3B}"/>
+                <a16:creationId xmlns:a16="http://schemas.microsoft.com/office/drawing/2014/main" id="{1196CD8C-EEE6-4865-A25B-D3F6CE81AB2C}"/>
               </a:ext>
             </a:extLst>
           </p:cNvPr>
@@ -13765,7 +11928,7 @@
                 <a:ea typeface="Malgun Gothic"/>
                 <a:cs typeface="Malgun Gothic"/>
               </a:rPr>
-              <a:t>ChatGPT에 파일을 올리는 것과 무엇이 다른가</a:t>
+              <a:t>범용 LLM과의 차이는 건물별 조사 업무를 연결하는 방식</a:t>
             </a:r>
           </a:p>
         </p:txBody>
@@ -13775,7 +11938,7 @@
           <p:cNvPr id="3" name="">
             <a:extLst xmlns:a="http://schemas.openxmlformats.org/drawingml/2006/main">
               <a:ext uri="{FF2B5EF4-FFF2-40B4-BE49-F238E27FC236}">
-                <a16:creationId xmlns:a16="http://schemas.microsoft.com/office/drawing/2014/main" id="{1A6B203B-454F-4DEB-B13B-D23A317CC04B}"/>
+                <a16:creationId xmlns:a16="http://schemas.microsoft.com/office/drawing/2014/main" id="{F8B4DF3F-6B09-4475-9268-9C4844C99802}"/>
               </a:ext>
             </a:extLst>
           </p:cNvPr>
@@ -13805,7 +11968,7 @@
           <p:cNvPr id="4" name="">
             <a:extLst xmlns:a="http://schemas.openxmlformats.org/drawingml/2006/main">
               <a:ext uri="{FF2B5EF4-FFF2-40B4-BE49-F238E27FC236}">
-                <a16:creationId xmlns:a16="http://schemas.microsoft.com/office/drawing/2014/main" id="{740401F5-A6A4-4CA9-A82C-3B0508994BF1}"/>
+                <a16:creationId xmlns:a16="http://schemas.microsoft.com/office/drawing/2014/main" id="{57E8134D-6A15-4856-8657-8E1F33A7592D}"/>
               </a:ext>
             </a:extLst>
           </p:cNvPr>
@@ -13862,7 +12025,7 @@
           <p:cNvPr id="5" name="">
             <a:extLst xmlns:a="http://schemas.openxmlformats.org/drawingml/2006/main">
               <a:ext uri="{FF2B5EF4-FFF2-40B4-BE49-F238E27FC236}">
-                <a16:creationId xmlns:a16="http://schemas.microsoft.com/office/drawing/2014/main" id="{00965AF8-8A93-445A-B29A-44D6FC8ED321}"/>
+                <a16:creationId xmlns:a16="http://schemas.microsoft.com/office/drawing/2014/main" id="{4EAB21E4-0A94-4B0E-8B39-E3DDBD0B288E}"/>
               </a:ext>
             </a:extLst>
           </p:cNvPr>
@@ -13919,64 +12082,7 @@
           <p:cNvPr id="6" name="">
             <a:extLst xmlns:a="http://schemas.openxmlformats.org/drawingml/2006/main">
               <a:ext uri="{FF2B5EF4-FFF2-40B4-BE49-F238E27FC236}">
-                <a16:creationId xmlns:a16="http://schemas.microsoft.com/office/drawing/2014/main" id="{E4EEFBB0-B072-47E9-AF9E-F62F315289E9}"/>
-              </a:ext>
-            </a:extLst>
-          </p:cNvPr>
-          <p:cNvSpPr>
-            <a:spLocks xmlns:a="http://schemas.openxmlformats.org/drawingml/2006/main" noGrp="1"/>
-          </p:cNvSpPr>
-          <p:nvPr/>
-        </p:nvSpPr>
-        <p:spPr>
-          <a:xfrm xmlns:a="http://schemas.openxmlformats.org/drawingml/2006/main">
-            <a:off x="723900" y="5857875"/>
-            <a:ext cx="10668000" cy="342900"/>
-          </a:xfrm>
-          <a:prstGeom xmlns:a="http://schemas.openxmlformats.org/drawingml/2006/main" prst="rect">
-            <a:avLst/>
-          </a:prstGeom>
-          <a:noFill xmlns:a="http://schemas.openxmlformats.org/drawingml/2006/main"/>
-          <a:ln xmlns:a="http://schemas.openxmlformats.org/drawingml/2006/main" w="0">
-            <a:noFill/>
-          </a:ln>
-        </p:spPr>
-        <p:txBody>
-          <a:bodyPr xmlns:a="http://schemas.openxmlformats.org/drawingml/2006/main">
-            <a:noAutofit/>
-          </a:bodyPr>
-          <a:lstStyle xmlns:a="http://schemas.openxmlformats.org/drawingml/2006/main"/>
-          <a:p xmlns:a="http://schemas.openxmlformats.org/drawingml/2006/main">
-            <a:pPr>
-              <a:defRPr sz="1125" b="0">
-                <a:solidFill>
-                  <a:srgbClr val="4E6157"/>
-                </a:solidFill>
-                <a:latin typeface="Malgun Gothic"/>
-                <a:ea typeface="Malgun Gothic"/>
-                <a:cs typeface="Malgun Gothic"/>
-              </a:defRPr>
-            </a:pPr>
-            <a:r>
-              <a:rPr sz="1125" b="0">
-                <a:solidFill>
-                  <a:srgbClr val="4E6157"/>
-                </a:solidFill>
-                <a:latin typeface="Malgun Gothic"/>
-                <a:ea typeface="Malgun Gothic"/>
-                <a:cs typeface="Malgun Gothic"/>
-              </a:rPr>
-              <a:t>범용 LLM과의 우월성은 아직 미검증. 아래 동작을 동일 입력으로 비교할 계획이다.</a:t>
-            </a:r>
-          </a:p>
-        </p:txBody>
-      </p:sp>
-      <p:sp>
-        <p:nvSpPr>
-          <p:cNvPr id="7" name="">
-            <a:extLst xmlns:a="http://schemas.openxmlformats.org/drawingml/2006/main">
-              <a:ext uri="{FF2B5EF4-FFF2-40B4-BE49-F238E27FC236}">
-                <a16:creationId xmlns:a16="http://schemas.microsoft.com/office/drawing/2014/main" id="{200A5D1B-2BAA-4E9E-92AE-0E8431AA7DA7}"/>
+                <a16:creationId xmlns:a16="http://schemas.microsoft.com/office/drawing/2014/main" id="{9F5036D9-67C2-466A-B868-EEF1EB93BF78}"/>
               </a:ext>
             </a:extLst>
           </p:cNvPr>
@@ -14023,7 +12129,133 @@
                 <a:ea typeface="Malgun Gothic"/>
                 <a:cs typeface="Malgun Gothic"/>
               </a:rPr>
-              <a:t>대화에서 업무 기록으로</a:t>
+              <a:t>건물 데이터가 이어진다</a:t>
+            </a:r>
+          </a:p>
+        </p:txBody>
+      </p:sp>
+      <p:sp>
+        <p:nvSpPr>
+          <p:cNvPr id="7" name="">
+            <a:extLst xmlns:a="http://schemas.openxmlformats.org/drawingml/2006/main">
+              <a:ext uri="{FF2B5EF4-FFF2-40B4-BE49-F238E27FC236}">
+                <a16:creationId xmlns:a16="http://schemas.microsoft.com/office/drawing/2014/main" id="{4EA6FAB3-FD1B-42D8-80FF-727D8165ABD7}"/>
+              </a:ext>
+            </a:extLst>
+          </p:cNvPr>
+          <p:cNvSpPr>
+            <a:spLocks xmlns:a="http://schemas.openxmlformats.org/drawingml/2006/main" noGrp="1"/>
+          </p:cNvSpPr>
+          <p:nvPr/>
+        </p:nvSpPr>
+        <p:spPr>
+          <a:xfrm xmlns:a="http://schemas.openxmlformats.org/drawingml/2006/main">
+            <a:off x="742950" y="1895475"/>
+            <a:ext cx="5067300" cy="2038350"/>
+          </a:xfrm>
+          <a:prstGeom xmlns:a="http://schemas.openxmlformats.org/drawingml/2006/main" prst="rect">
+            <a:avLst/>
+          </a:prstGeom>
+          <a:noFill xmlns:a="http://schemas.openxmlformats.org/drawingml/2006/main"/>
+          <a:ln xmlns:a="http://schemas.openxmlformats.org/drawingml/2006/main" w="0">
+            <a:noFill/>
+          </a:ln>
+        </p:spPr>
+        <p:txBody>
+          <a:bodyPr xmlns:a="http://schemas.openxmlformats.org/drawingml/2006/main">
+            <a:noAutofit/>
+          </a:bodyPr>
+          <a:lstStyle xmlns:a="http://schemas.openxmlformats.org/drawingml/2006/main"/>
+          <a:p xmlns:a="http://schemas.openxmlformats.org/drawingml/2006/main">
+            <a:pPr>
+              <a:defRPr sz="1575" b="0">
+                <a:solidFill>
+                  <a:srgbClr val="183329"/>
+                </a:solidFill>
+                <a:latin typeface="Malgun Gothic"/>
+                <a:ea typeface="Malgun Gothic"/>
+                <a:cs typeface="Malgun Gothic"/>
+              </a:defRPr>
+            </a:pPr>
+            <a:r>
+              <a:rPr sz="1575" b="0">
+                <a:solidFill>
+                  <a:srgbClr val="183329"/>
+                </a:solidFill>
+                <a:latin typeface="Malgun Gothic"/>
+                <a:ea typeface="Malgun Gothic"/>
+                <a:cs typeface="Malgun Gothic"/>
+              </a:rPr>
+              <a:t>건물 ID·자료 기간·단위를 유지하고</a:t>
+            </a:r>
+          </a:p>
+          <a:p xmlns:a="http://schemas.openxmlformats.org/drawingml/2006/main">
+            <a:pPr>
+              <a:defRPr sz="1575" b="0">
+                <a:solidFill>
+                  <a:srgbClr val="183329"/>
+                </a:solidFill>
+                <a:latin typeface="Malgun Gothic"/>
+                <a:ea typeface="Malgun Gothic"/>
+                <a:cs typeface="Malgun Gothic"/>
+              </a:defRPr>
+            </a:pPr>
+            <a:r>
+              <a:rPr sz="1575" b="0">
+                <a:solidFill>
+                  <a:srgbClr val="183329"/>
+                </a:solidFill>
+                <a:latin typeface="Malgun Gothic"/>
+                <a:ea typeface="Malgun Gothic"/>
+                <a:cs typeface="Malgun Gothic"/>
+              </a:rPr>
+              <a:t>에너지 비교와 문진 응답을 같은 기록에 저장.</a:t>
+            </a:r>
+          </a:p>
+          <a:p xmlns:a="http://schemas.openxmlformats.org/drawingml/2006/main">
+            <a:pPr>
+              <a:defRPr sz="1575" b="0">
+                <a:solidFill>
+                  <a:srgbClr val="183329"/>
+                </a:solidFill>
+                <a:latin typeface="Malgun Gothic"/>
+                <a:ea typeface="Malgun Gothic"/>
+                <a:cs typeface="Malgun Gothic"/>
+              </a:defRPr>
+            </a:pPr>
+            <a:r>
+              <a:rPr sz="1575" b="0">
+                <a:solidFill>
+                  <a:srgbClr val="183329"/>
+                </a:solidFill>
+                <a:latin typeface="Malgun Gothic"/>
+                <a:ea typeface="Malgun Gothic"/>
+                <a:cs typeface="Malgun Gothic"/>
+              </a:rPr>
+              <a:t>파일을 매번 올리거나 맥락을 다시 설명하는</a:t>
+            </a:r>
+          </a:p>
+          <a:p xmlns:a="http://schemas.openxmlformats.org/drawingml/2006/main">
+            <a:pPr>
+              <a:defRPr sz="1575" b="0">
+                <a:solidFill>
+                  <a:srgbClr val="183329"/>
+                </a:solidFill>
+                <a:latin typeface="Malgun Gothic"/>
+                <a:ea typeface="Malgun Gothic"/>
+                <a:cs typeface="Malgun Gothic"/>
+              </a:defRPr>
+            </a:pPr>
+            <a:r>
+              <a:rPr sz="1575" b="0">
+                <a:solidFill>
+                  <a:srgbClr val="183329"/>
+                </a:solidFill>
+                <a:latin typeface="Malgun Gothic"/>
+                <a:ea typeface="Malgun Gothic"/>
+                <a:cs typeface="Malgun Gothic"/>
+              </a:rPr>
+              <a:t>부담을 줄이는 서비스 구조다.</a:t>
             </a:r>
           </a:p>
         </p:txBody>
@@ -14033,110 +12265,7 @@
           <p:cNvPr id="8" name="">
             <a:extLst xmlns:a="http://schemas.openxmlformats.org/drawingml/2006/main">
               <a:ext uri="{FF2B5EF4-FFF2-40B4-BE49-F238E27FC236}">
-                <a16:creationId xmlns:a16="http://schemas.microsoft.com/office/drawing/2014/main" id="{5E8D527C-20C6-44F9-B75C-9ED5FF3E52E2}"/>
-              </a:ext>
-            </a:extLst>
-          </p:cNvPr>
-          <p:cNvSpPr>
-            <a:spLocks xmlns:a="http://schemas.openxmlformats.org/drawingml/2006/main" noGrp="1"/>
-          </p:cNvSpPr>
-          <p:nvPr/>
-        </p:nvSpPr>
-        <p:spPr>
-          <a:xfrm xmlns:a="http://schemas.openxmlformats.org/drawingml/2006/main">
-            <a:off x="742950" y="1895475"/>
-            <a:ext cx="5067300" cy="1666875"/>
-          </a:xfrm>
-          <a:prstGeom xmlns:a="http://schemas.openxmlformats.org/drawingml/2006/main" prst="rect">
-            <a:avLst/>
-          </a:prstGeom>
-          <a:noFill xmlns:a="http://schemas.openxmlformats.org/drawingml/2006/main"/>
-          <a:ln xmlns:a="http://schemas.openxmlformats.org/drawingml/2006/main" w="0">
-            <a:noFill/>
-          </a:ln>
-        </p:spPr>
-        <p:txBody>
-          <a:bodyPr xmlns:a="http://schemas.openxmlformats.org/drawingml/2006/main">
-            <a:noAutofit/>
-          </a:bodyPr>
-          <a:lstStyle xmlns:a="http://schemas.openxmlformats.org/drawingml/2006/main"/>
-          <a:p xmlns:a="http://schemas.openxmlformats.org/drawingml/2006/main">
-            <a:pPr>
-              <a:defRPr sz="1575" b="0">
-                <a:solidFill>
-                  <a:srgbClr val="183329"/>
-                </a:solidFill>
-                <a:latin typeface="Malgun Gothic"/>
-                <a:ea typeface="Malgun Gothic"/>
-                <a:cs typeface="Malgun Gothic"/>
-              </a:defRPr>
-            </a:pPr>
-            <a:r>
-              <a:rPr sz="1575" b="0">
-                <a:solidFill>
-                  <a:srgbClr val="183329"/>
-                </a:solidFill>
-                <a:latin typeface="Malgun Gothic"/>
-                <a:ea typeface="Malgun Gothic"/>
-                <a:cs typeface="Malgun Gothic"/>
-              </a:rPr>
-              <a:t>건물 ID·기간·단위를 고정하고</a:t>
-            </a:r>
-          </a:p>
-          <a:p xmlns:a="http://schemas.openxmlformats.org/drawingml/2006/main">
-            <a:pPr>
-              <a:defRPr sz="1575" b="0">
-                <a:solidFill>
-                  <a:srgbClr val="183329"/>
-                </a:solidFill>
-                <a:latin typeface="Malgun Gothic"/>
-                <a:ea typeface="Malgun Gothic"/>
-                <a:cs typeface="Malgun Gothic"/>
-              </a:defRPr>
-            </a:pPr>
-            <a:r>
-              <a:rPr sz="1575" b="0">
-                <a:solidFill>
-                  <a:srgbClr val="183329"/>
-                </a:solidFill>
-                <a:latin typeface="Malgun Gothic"/>
-                <a:ea typeface="Malgun Gothic"/>
-                <a:cs typeface="Malgun Gothic"/>
-              </a:rPr>
-              <a:t>문진 결과와 원문 인용을 같은 기록에 저장.</a:t>
-            </a:r>
-          </a:p>
-          <a:p xmlns:a="http://schemas.openxmlformats.org/drawingml/2006/main">
-            <a:pPr>
-              <a:defRPr sz="1575" b="0">
-                <a:solidFill>
-                  <a:srgbClr val="183329"/>
-                </a:solidFill>
-                <a:latin typeface="Malgun Gothic"/>
-                <a:ea typeface="Malgun Gothic"/>
-                <a:cs typeface="Malgun Gothic"/>
-              </a:defRPr>
-            </a:pPr>
-            <a:r>
-              <a:rPr sz="1575" b="0">
-                <a:solidFill>
-                  <a:srgbClr val="183329"/>
-                </a:solidFill>
-                <a:latin typeface="Malgun Gothic"/>
-                <a:ea typeface="Malgun Gothic"/>
-                <a:cs typeface="Malgun Gothic"/>
-              </a:rPr>
-              <a:t>사실·진술·점검 가설을 구분한다.</a:t>
-            </a:r>
-          </a:p>
-        </p:txBody>
-      </p:sp>
-      <p:sp>
-        <p:nvSpPr>
-          <p:cNvPr id="9" name="">
-            <a:extLst xmlns:a="http://schemas.openxmlformats.org/drawingml/2006/main">
-              <a:ext uri="{FF2B5EF4-FFF2-40B4-BE49-F238E27FC236}">
-                <a16:creationId xmlns:a16="http://schemas.microsoft.com/office/drawing/2014/main" id="{E42BF87E-B469-4F1D-870A-A5A1BC3A04A9}"/>
+                <a16:creationId xmlns:a16="http://schemas.microsoft.com/office/drawing/2014/main" id="{B2CA37A1-D32D-48D2-B668-AE0B6819D6E3}"/>
               </a:ext>
             </a:extLst>
           </p:cNvPr>
@@ -14183,7 +12312,133 @@
                 <a:ea typeface="Malgun Gothic"/>
                 <a:cs typeface="Malgun Gothic"/>
               </a:rPr>
-              <a:t>답변에서 확인 절차로</a:t>
+              <a:t>답변 이후의 행동이 이어진다</a:t>
+            </a:r>
+          </a:p>
+        </p:txBody>
+      </p:sp>
+      <p:sp>
+        <p:nvSpPr>
+          <p:cNvPr id="9" name="">
+            <a:extLst xmlns:a="http://schemas.openxmlformats.org/drawingml/2006/main">
+              <a:ext uri="{FF2B5EF4-FFF2-40B4-BE49-F238E27FC236}">
+                <a16:creationId xmlns:a16="http://schemas.microsoft.com/office/drawing/2014/main" id="{88AB11A1-347F-4717-876A-EB0FB2A30C69}"/>
+              </a:ext>
+            </a:extLst>
+          </p:cNvPr>
+          <p:cNvSpPr>
+            <a:spLocks xmlns:a="http://schemas.openxmlformats.org/drawingml/2006/main" noGrp="1"/>
+          </p:cNvSpPr>
+          <p:nvPr/>
+        </p:nvSpPr>
+        <p:spPr>
+          <a:xfrm xmlns:a="http://schemas.openxmlformats.org/drawingml/2006/main">
+            <a:off x="6267450" y="1895475"/>
+            <a:ext cx="5067300" cy="2038350"/>
+          </a:xfrm>
+          <a:prstGeom xmlns:a="http://schemas.openxmlformats.org/drawingml/2006/main" prst="rect">
+            <a:avLst/>
+          </a:prstGeom>
+          <a:noFill xmlns:a="http://schemas.openxmlformats.org/drawingml/2006/main"/>
+          <a:ln xmlns:a="http://schemas.openxmlformats.org/drawingml/2006/main" w="0">
+            <a:noFill/>
+          </a:ln>
+        </p:spPr>
+        <p:txBody>
+          <a:bodyPr xmlns:a="http://schemas.openxmlformats.org/drawingml/2006/main">
+            <a:noAutofit/>
+          </a:bodyPr>
+          <a:lstStyle xmlns:a="http://schemas.openxmlformats.org/drawingml/2006/main"/>
+          <a:p xmlns:a="http://schemas.openxmlformats.org/drawingml/2006/main">
+            <a:pPr>
+              <a:defRPr sz="1575" b="0">
+                <a:solidFill>
+                  <a:srgbClr val="183329"/>
+                </a:solidFill>
+                <a:latin typeface="Malgun Gothic"/>
+                <a:ea typeface="Malgun Gothic"/>
+                <a:cs typeface="Malgun Gothic"/>
+              </a:defRPr>
+            </a:pPr>
+            <a:r>
+              <a:rPr sz="1575" b="0">
+                <a:solidFill>
+                  <a:srgbClr val="183329"/>
+                </a:solidFill>
+                <a:latin typeface="Malgun Gothic"/>
+                <a:ea typeface="Malgun Gothic"/>
+                <a:cs typeface="Malgun Gothic"/>
+              </a:rPr>
+              <a:t>자유문을 장소·시간·증상으로 정리하고</a:t>
+            </a:r>
+          </a:p>
+          <a:p xmlns:a="http://schemas.openxmlformats.org/drawingml/2006/main">
+            <a:pPr>
+              <a:defRPr sz="1575" b="0">
+                <a:solidFill>
+                  <a:srgbClr val="183329"/>
+                </a:solidFill>
+                <a:latin typeface="Malgun Gothic"/>
+                <a:ea typeface="Malgun Gothic"/>
+                <a:cs typeface="Malgun Gothic"/>
+              </a:defRPr>
+            </a:pPr>
+            <a:r>
+              <a:rPr sz="1575" b="0">
+                <a:solidFill>
+                  <a:srgbClr val="183329"/>
+                </a:solidFill>
+                <a:latin typeface="Malgun Gothic"/>
+                <a:ea typeface="Malgun Gothic"/>
+                <a:cs typeface="Malgun Gothic"/>
+              </a:rPr>
+              <a:t>필요한 질문 → 후보 비교 → 점검 항목으로 연결.</a:t>
+            </a:r>
+          </a:p>
+          <a:p xmlns:a="http://schemas.openxmlformats.org/drawingml/2006/main">
+            <a:pPr>
+              <a:defRPr sz="1575" b="0">
+                <a:solidFill>
+                  <a:srgbClr val="183329"/>
+                </a:solidFill>
+                <a:latin typeface="Malgun Gothic"/>
+                <a:ea typeface="Malgun Gothic"/>
+                <a:cs typeface="Malgun Gothic"/>
+              </a:defRPr>
+            </a:pPr>
+            <a:r>
+              <a:rPr sz="1575" b="0">
+                <a:solidFill>
+                  <a:srgbClr val="183329"/>
+                </a:solidFill>
+                <a:latin typeface="Malgun Gothic"/>
+                <a:ea typeface="Malgun Gothic"/>
+                <a:cs typeface="Malgun Gothic"/>
+              </a:rPr>
+              <a:t>담당자가 확인한 요청서를 전문가에게 전달할</a:t>
+            </a:r>
+          </a:p>
+          <a:p xmlns:a="http://schemas.openxmlformats.org/drawingml/2006/main">
+            <a:pPr>
+              <a:defRPr sz="1575" b="0">
+                <a:solidFill>
+                  <a:srgbClr val="183329"/>
+                </a:solidFill>
+                <a:latin typeface="Malgun Gothic"/>
+                <a:ea typeface="Malgun Gothic"/>
+                <a:cs typeface="Malgun Gothic"/>
+              </a:defRPr>
+            </a:pPr>
+            <a:r>
+              <a:rPr sz="1575" b="0">
+                <a:solidFill>
+                  <a:srgbClr val="183329"/>
+                </a:solidFill>
+                <a:latin typeface="Malgun Gothic"/>
+                <a:ea typeface="Malgun Gothic"/>
+                <a:cs typeface="Malgun Gothic"/>
+              </a:rPr>
+              <a:t>수 있도록 PDF로 저장한다.</a:t>
             </a:r>
           </a:p>
         </p:txBody>
@@ -14193,122 +12448,19 @@
           <p:cNvPr id="10" name="">
             <a:extLst xmlns:a="http://schemas.openxmlformats.org/drawingml/2006/main">
               <a:ext uri="{FF2B5EF4-FFF2-40B4-BE49-F238E27FC236}">
-                <a16:creationId xmlns:a16="http://schemas.microsoft.com/office/drawing/2014/main" id="{ADAD303B-1EFA-4569-901A-955EECC20EC9}"/>
-              </a:ext>
-            </a:extLst>
-          </p:cNvPr>
-          <p:cNvSpPr>
-            <a:spLocks xmlns:a="http://schemas.openxmlformats.org/drawingml/2006/main" noGrp="1"/>
-          </p:cNvSpPr>
-          <p:nvPr/>
-        </p:nvSpPr>
-        <p:spPr>
-          <a:xfrm xmlns:a="http://schemas.openxmlformats.org/drawingml/2006/main">
-            <a:off x="6267450" y="1895475"/>
-            <a:ext cx="5067300" cy="1666875"/>
-          </a:xfrm>
-          <a:prstGeom xmlns:a="http://schemas.openxmlformats.org/drawingml/2006/main" prst="rect">
-            <a:avLst/>
-          </a:prstGeom>
-          <a:noFill xmlns:a="http://schemas.openxmlformats.org/drawingml/2006/main"/>
-          <a:ln xmlns:a="http://schemas.openxmlformats.org/drawingml/2006/main" w="0">
-            <a:noFill/>
-          </a:ln>
-        </p:spPr>
-        <p:txBody>
-          <a:bodyPr xmlns:a="http://schemas.openxmlformats.org/drawingml/2006/main">
-            <a:noAutofit/>
-          </a:bodyPr>
-          <a:lstStyle xmlns:a="http://schemas.openxmlformats.org/drawingml/2006/main"/>
-          <a:p xmlns:a="http://schemas.openxmlformats.org/drawingml/2006/main">
-            <a:pPr>
-              <a:defRPr sz="1575" b="0">
-                <a:solidFill>
-                  <a:srgbClr val="183329"/>
-                </a:solidFill>
-                <a:latin typeface="Malgun Gothic"/>
-                <a:ea typeface="Malgun Gothic"/>
-                <a:cs typeface="Malgun Gothic"/>
-              </a:defRPr>
-            </a:pPr>
-            <a:r>
-              <a:rPr sz="1575" b="0">
-                <a:solidFill>
-                  <a:srgbClr val="183329"/>
-                </a:solidFill>
-                <a:latin typeface="Malgun Gothic"/>
-                <a:ea typeface="Malgun Gothic"/>
-                <a:cs typeface="Malgun Gothic"/>
-              </a:rPr>
-              <a:t>보고 누락·비교군 부족·모순 응답에</a:t>
-            </a:r>
-          </a:p>
-          <a:p xmlns:a="http://schemas.openxmlformats.org/drawingml/2006/main">
-            <a:pPr>
-              <a:defRPr sz="1575" b="0">
-                <a:solidFill>
-                  <a:srgbClr val="183329"/>
-                </a:solidFill>
-                <a:latin typeface="Malgun Gothic"/>
-                <a:ea typeface="Malgun Gothic"/>
-                <a:cs typeface="Malgun Gothic"/>
-              </a:defRPr>
-            </a:pPr>
-            <a:r>
-              <a:rPr sz="1575" b="0">
-                <a:solidFill>
-                  <a:srgbClr val="183329"/>
-                </a:solidFill>
-                <a:latin typeface="Malgun Gothic"/>
-                <a:ea typeface="Malgun Gothic"/>
-                <a:cs typeface="Malgun Gothic"/>
-              </a:rPr>
-              <a:t>판단을 보류하고 필요한 질문을 남긴다.</a:t>
-            </a:r>
-          </a:p>
-          <a:p xmlns:a="http://schemas.openxmlformats.org/drawingml/2006/main">
-            <a:pPr>
-              <a:defRPr sz="1575" b="0">
-                <a:solidFill>
-                  <a:srgbClr val="183329"/>
-                </a:solidFill>
-                <a:latin typeface="Malgun Gothic"/>
-                <a:ea typeface="Malgun Gothic"/>
-                <a:cs typeface="Malgun Gothic"/>
-              </a:defRPr>
-            </a:pPr>
-            <a:r>
-              <a:rPr sz="1575" b="0">
-                <a:solidFill>
-                  <a:srgbClr val="183329"/>
-                </a:solidFill>
-                <a:latin typeface="Malgun Gothic"/>
-                <a:ea typeface="Malgun Gothic"/>
-                <a:cs typeface="Malgun Gothic"/>
-              </a:rPr>
-              <a:t>담당자가 확인한 요청서를 저장한다.</a:t>
-            </a:r>
-          </a:p>
-        </p:txBody>
-      </p:sp>
-      <p:sp>
-        <p:nvSpPr>
-          <p:cNvPr id="11" name="">
-            <a:extLst xmlns:a="http://schemas.openxmlformats.org/drawingml/2006/main">
-              <a:ext uri="{FF2B5EF4-FFF2-40B4-BE49-F238E27FC236}">
-                <a16:creationId xmlns:a16="http://schemas.microsoft.com/office/drawing/2014/main" id="{9D1025D4-D4DC-4A6E-B388-22A992D3D1D6}"/>
-              </a:ext>
-            </a:extLst>
-          </p:cNvPr>
-          <p:cNvSpPr>
-            <a:spLocks xmlns:a="http://schemas.openxmlformats.org/drawingml/2006/main" noGrp="1"/>
-          </p:cNvSpPr>
-          <p:nvPr/>
-        </p:nvSpPr>
-        <p:spPr>
-          <a:xfrm xmlns:a="http://schemas.openxmlformats.org/drawingml/2006/main">
-            <a:off x="742950" y="3981450"/>
-            <a:ext cx="10534650" cy="1533525"/>
+                <a16:creationId xmlns:a16="http://schemas.microsoft.com/office/drawing/2014/main" id="{0A343F57-AC3A-4E1F-B61A-DE7BF983F9EA}"/>
+              </a:ext>
+            </a:extLst>
+          </p:cNvPr>
+          <p:cNvSpPr>
+            <a:spLocks xmlns:a="http://schemas.openxmlformats.org/drawingml/2006/main" noGrp="1"/>
+          </p:cNvSpPr>
+          <p:nvPr/>
+        </p:nvSpPr>
+        <p:spPr>
+          <a:xfrm xmlns:a="http://schemas.openxmlformats.org/drawingml/2006/main">
+            <a:off x="742950" y="4267200"/>
+            <a:ext cx="10534650" cy="1238250"/>
           </a:xfrm>
           <a:prstGeom xmlns:a="http://schemas.openxmlformats.org/drawingml/2006/main" prst="rect">
             <a:avLst/>
@@ -14323,79 +12475,79 @@
       </p:sp>
       <p:sp>
         <p:nvSpPr>
+          <p:cNvPr id="11" name="">
+            <a:extLst xmlns:a="http://schemas.openxmlformats.org/drawingml/2006/main">
+              <a:ext uri="{FF2B5EF4-FFF2-40B4-BE49-F238E27FC236}">
+                <a16:creationId xmlns:a16="http://schemas.microsoft.com/office/drawing/2014/main" id="{E8EA74CC-AD1A-4DD4-ACDA-2913FA87784F}"/>
+              </a:ext>
+            </a:extLst>
+          </p:cNvPr>
+          <p:cNvSpPr>
+            <a:spLocks xmlns:a="http://schemas.openxmlformats.org/drawingml/2006/main" noGrp="1"/>
+          </p:cNvSpPr>
+          <p:nvPr/>
+        </p:nvSpPr>
+        <p:spPr>
+          <a:xfrm xmlns:a="http://schemas.openxmlformats.org/drawingml/2006/main">
+            <a:off x="952500" y="4438650"/>
+            <a:ext cx="10096500" cy="409575"/>
+          </a:xfrm>
+          <a:prstGeom xmlns:a="http://schemas.openxmlformats.org/drawingml/2006/main" prst="rect">
+            <a:avLst/>
+          </a:prstGeom>
+          <a:noFill xmlns:a="http://schemas.openxmlformats.org/drawingml/2006/main"/>
+          <a:ln xmlns:a="http://schemas.openxmlformats.org/drawingml/2006/main" w="0">
+            <a:noFill/>
+          </a:ln>
+        </p:spPr>
+        <p:txBody>
+          <a:bodyPr xmlns:a="http://schemas.openxmlformats.org/drawingml/2006/main">
+            <a:noAutofit/>
+          </a:bodyPr>
+          <a:lstStyle xmlns:a="http://schemas.openxmlformats.org/drawingml/2006/main"/>
+          <a:p xmlns:a="http://schemas.openxmlformats.org/drawingml/2006/main">
+            <a:pPr>
+              <a:defRPr sz="2025" b="1">
+                <a:solidFill>
+                  <a:srgbClr val="127452"/>
+                </a:solidFill>
+                <a:latin typeface="Malgun Gothic"/>
+                <a:ea typeface="Malgun Gothic"/>
+                <a:cs typeface="Malgun Gothic"/>
+              </a:defRPr>
+            </a:pPr>
+            <a:r>
+              <a:rPr sz="2025" b="1">
+                <a:solidFill>
+                  <a:srgbClr val="127452"/>
+                </a:solidFill>
+                <a:latin typeface="Malgun Gothic"/>
+                <a:ea typeface="Malgun Gothic"/>
+                <a:cs typeface="Malgun Gothic"/>
+              </a:rPr>
+              <a:t>“대화를 잘하는 AI”에서 “조사 준비를 이어주는 서비스”로</a:t>
+            </a:r>
+          </a:p>
+        </p:txBody>
+      </p:sp>
+      <p:sp>
+        <p:nvSpPr>
           <p:cNvPr id="12" name="">
             <a:extLst xmlns:a="http://schemas.openxmlformats.org/drawingml/2006/main">
               <a:ext uri="{FF2B5EF4-FFF2-40B4-BE49-F238E27FC236}">
-                <a16:creationId xmlns:a16="http://schemas.microsoft.com/office/drawing/2014/main" id="{6D316D52-6FB3-45C2-914C-B4FF0702EA85}"/>
-              </a:ext>
-            </a:extLst>
-          </p:cNvPr>
-          <p:cNvSpPr>
-            <a:spLocks xmlns:a="http://schemas.openxmlformats.org/drawingml/2006/main" noGrp="1"/>
-          </p:cNvSpPr>
-          <p:nvPr/>
-        </p:nvSpPr>
-        <p:spPr>
-          <a:xfrm xmlns:a="http://schemas.openxmlformats.org/drawingml/2006/main">
-            <a:off x="952500" y="4171950"/>
-            <a:ext cx="10096500" cy="457200"/>
-          </a:xfrm>
-          <a:prstGeom xmlns:a="http://schemas.openxmlformats.org/drawingml/2006/main" prst="rect">
-            <a:avLst/>
-          </a:prstGeom>
-          <a:noFill xmlns:a="http://schemas.openxmlformats.org/drawingml/2006/main"/>
-          <a:ln xmlns:a="http://schemas.openxmlformats.org/drawingml/2006/main" w="0">
-            <a:noFill/>
-          </a:ln>
-        </p:spPr>
-        <p:txBody>
-          <a:bodyPr xmlns:a="http://schemas.openxmlformats.org/drawingml/2006/main">
-            <a:noAutofit/>
-          </a:bodyPr>
-          <a:lstStyle xmlns:a="http://schemas.openxmlformats.org/drawingml/2006/main"/>
-          <a:p xmlns:a="http://schemas.openxmlformats.org/drawingml/2006/main">
-            <a:pPr>
-              <a:defRPr sz="2100" b="1">
-                <a:solidFill>
-                  <a:srgbClr val="127452"/>
-                </a:solidFill>
-                <a:latin typeface="Malgun Gothic"/>
-                <a:ea typeface="Malgun Gothic"/>
-                <a:cs typeface="Malgun Gothic"/>
-              </a:defRPr>
-            </a:pPr>
-            <a:r>
-              <a:rPr sz="2100" b="1">
-                <a:solidFill>
-                  <a:srgbClr val="127452"/>
-                </a:solidFill>
-                <a:latin typeface="Malgun Gothic"/>
-                <a:ea typeface="Malgun Gothic"/>
-                <a:cs typeface="Malgun Gothic"/>
-              </a:rPr>
-              <a:t>범용 LLM도 가능하다. 그래서 실제 비교가 필요하다.</a:t>
-            </a:r>
-          </a:p>
-        </p:txBody>
-      </p:sp>
-      <p:sp>
-        <p:nvSpPr>
-          <p:cNvPr id="13" name="">
-            <a:extLst xmlns:a="http://schemas.openxmlformats.org/drawingml/2006/main">
-              <a:ext uri="{FF2B5EF4-FFF2-40B4-BE49-F238E27FC236}">
-                <a16:creationId xmlns:a16="http://schemas.microsoft.com/office/drawing/2014/main" id="{C6F55B92-8E9D-4169-9B13-2E53CA044EBD}"/>
-              </a:ext>
-            </a:extLst>
-          </p:cNvPr>
-          <p:cNvSpPr>
-            <a:spLocks xmlns:a="http://schemas.openxmlformats.org/drawingml/2006/main" noGrp="1"/>
-          </p:cNvSpPr>
-          <p:nvPr/>
-        </p:nvSpPr>
-        <p:spPr>
-          <a:xfrm xmlns:a="http://schemas.openxmlformats.org/drawingml/2006/main">
-            <a:off x="952500" y="4762500"/>
-            <a:ext cx="10010775" cy="647700"/>
+                <a16:creationId xmlns:a16="http://schemas.microsoft.com/office/drawing/2014/main" id="{3DD2EAFA-4C66-462C-AF1D-1F0ECBD65A6F}"/>
+              </a:ext>
+            </a:extLst>
+          </p:cNvPr>
+          <p:cNvSpPr>
+            <a:spLocks xmlns:a="http://schemas.openxmlformats.org/drawingml/2006/main" noGrp="1"/>
+          </p:cNvSpPr>
+          <p:nvPr/>
+        </p:nvSpPr>
+        <p:spPr>
+          <a:xfrm xmlns:a="http://schemas.openxmlformats.org/drawingml/2006/main">
+            <a:off x="952500" y="5000625"/>
+            <a:ext cx="10010775" cy="419100"/>
           </a:xfrm>
           <a:prstGeom xmlns:a="http://schemas.openxmlformats.org/drawingml/2006/main" prst="rect">
             <a:avLst/>
@@ -14430,30 +12582,7 @@
                 <a:ea typeface="Malgun Gothic"/>
                 <a:cs typeface="Malgun Gothic"/>
               </a:rPr>
-              <a:t>비교 대상: 같은 CSV·같은 불편 응답의 일반 LLM, 고정 설문, GreenLoop.</a:t>
-            </a:r>
-          </a:p>
-          <a:p xmlns:a="http://schemas.openxmlformats.org/drawingml/2006/main">
-            <a:pPr>
-              <a:defRPr sz="1725" b="0">
-                <a:solidFill>
-                  <a:srgbClr val="183329"/>
-                </a:solidFill>
-                <a:latin typeface="Malgun Gothic"/>
-                <a:ea typeface="Malgun Gothic"/>
-                <a:cs typeface="Malgun Gothic"/>
-              </a:defRPr>
-            </a:pPr>
-            <a:r>
-              <a:rPr sz="1725" b="0">
-                <a:solidFill>
-                  <a:srgbClr val="183329"/>
-                </a:solidFill>
-                <a:latin typeface="Malgun Gothic"/>
-                <a:ea typeface="Malgun Gothic"/>
-                <a:cs typeface="Malgun Gothic"/>
-              </a:rPr>
-              <a:t>비교 항목: 기록 누락·근거 없는 결론·반복성·요청서 작성 시간.</a:t>
+              <a:t>차별점: 데이터 연결 · 응답 확인 · 근거 추적 · 표준 점검 항목 · 결과물 저장</a:t>
             </a:r>
           </a:p>
         </p:txBody>
@@ -14461,7 +12590,7 @@
     </p:spTree>
     <p:extLst>
       <p:ext uri="{BB962C8B-B14F-4D97-AF65-F5344CB8AC3E}">
-        <p14:creationId xmlns:p14="http://schemas.microsoft.com/office/powerpoint/2010/main" val="60111729"/>
+        <p14:creationId xmlns:p14="http://schemas.microsoft.com/office/powerpoint/2010/main" val="1444786956"/>
       </p:ext>
     </p:extLst>
   </p:cSld>
